--- a/web/og-b0d2f7a3-files/Sigma-Digital-Twins-Team-Duqm-EN.pptx
+++ b/web/og-b0d2f7a3-files/Sigma-Digital-Twins-Team-Duqm-EN.pptx
@@ -15,6 +15,7 @@
     <p:sldId id="263" r:id="rId14"/>
     <p:sldId id="264" r:id="rId15"/>
     <p:sldId id="265" r:id="rId16"/>
+    <p:sldId id="266" r:id="rId17"/>
   </p:sldIdLst>
   <p:sldSz cx="12191695" cy="6858000" type="screen4x3"/>
   <p:notesSz cx="6858000" cy="9144000"/>
@@ -3097,104 +3098,40 @@
         <p:nvPr/>
       </p:nvGrpSpPr>
       <p:grpSpPr/>
-      <p:sp>
-        <p:nvSpPr>
-          <p:cNvPr id="2" name="Rectangle 1"/>
-          <p:cNvSpPr/>
-          <p:nvPr/>
-        </p:nvSpPr>
-        <p:spPr>
-          <a:xfrm>
-            <a:off x="0" y="0"/>
-            <a:ext cx="12191695" cy="6858000"/>
+      <p:pic>
+        <p:nvPicPr>
+          <p:cNvPr id="2" name="Picture 1" descr="logo.png"/>
+          <p:cNvPicPr>
+            <a:picLocks noChangeAspect="1"/>
+          </p:cNvPicPr>
+          <p:nvPr/>
+        </p:nvPicPr>
+        <p:blipFill>
+          <a:blip r:embed="rId2"/>
+          <a:stretch>
+            <a:fillRect/>
+          </a:stretch>
+        </p:blipFill>
+        <p:spPr>
+          <a:xfrm>
+            <a:off x="10789920" y="246888"/>
+            <a:ext cx="1161288" cy="1161288"/>
           </a:xfrm>
           <a:prstGeom prst="rect">
             <a:avLst/>
           </a:prstGeom>
-          <a:solidFill>
-            <a:srgbClr val="0B3D91"/>
-          </a:solidFill>
-          <a:ln>
-            <a:noFill/>
-          </a:ln>
-          <a:effectLst/>
-        </p:spPr>
-        <p:style>
-          <a:lnRef idx="1">
-            <a:schemeClr val="accent1"/>
-          </a:lnRef>
-          <a:fillRef idx="3">
-            <a:schemeClr val="accent1"/>
-          </a:fillRef>
-          <a:effectRef idx="2">
-            <a:schemeClr val="accent1"/>
-          </a:effectRef>
-          <a:fontRef idx="minor">
-            <a:schemeClr val="lt1"/>
-          </a:fontRef>
-        </p:style>
-        <p:txBody>
-          <a:bodyPr rtlCol="0" anchor="ctr"/>
-          <a:lstStyle/>
-          <a:p>
-            <a:pPr algn="ctr"/>
-          </a:p>
-        </p:txBody>
-      </p:sp>
-      <p:sp>
-        <p:nvSpPr>
-          <p:cNvPr id="3" name="Rectangle 2"/>
-          <p:cNvSpPr/>
-          <p:nvPr/>
-        </p:nvSpPr>
-        <p:spPr>
-          <a:xfrm>
-            <a:off x="0" y="4480560"/>
-            <a:ext cx="12191695" cy="38100"/>
-          </a:xfrm>
-          <a:prstGeom prst="rect">
-            <a:avLst/>
-          </a:prstGeom>
-          <a:solidFill>
-            <a:srgbClr val="1F6FEB"/>
-          </a:solidFill>
-          <a:ln>
-            <a:noFill/>
-          </a:ln>
-          <a:effectLst/>
-        </p:spPr>
-        <p:style>
-          <a:lnRef idx="1">
-            <a:schemeClr val="accent1"/>
-          </a:lnRef>
-          <a:fillRef idx="3">
-            <a:schemeClr val="accent1"/>
-          </a:fillRef>
-          <a:effectRef idx="2">
-            <a:schemeClr val="accent1"/>
-          </a:effectRef>
-          <a:fontRef idx="minor">
-            <a:schemeClr val="lt1"/>
-          </a:fontRef>
-        </p:style>
-        <p:txBody>
-          <a:bodyPr rtlCol="0" anchor="ctr"/>
-          <a:lstStyle/>
-          <a:p>
-            <a:pPr algn="ctr"/>
-          </a:p>
-        </p:txBody>
-      </p:sp>
-      <p:sp>
-        <p:nvSpPr>
-          <p:cNvPr id="4" name="TextBox 3"/>
+        </p:spPr>
+      </p:pic>
+      <p:sp>
+        <p:nvSpPr>
+          <p:cNvPr id="3" name="TextBox 2"/>
           <p:cNvSpPr txBox="1"/>
           <p:nvPr/>
         </p:nvSpPr>
         <p:spPr>
           <a:xfrm>
-            <a:off x="822960" y="2011680"/>
-            <a:ext cx="10515600" cy="2377440"/>
+            <a:off x="301752" y="502920"/>
+            <a:ext cx="10241280" cy="365760"/>
           </a:xfrm>
           <a:prstGeom prst="rect">
             <a:avLst/>
@@ -3209,79 +3146,31 @@
           <a:p>
             <a:pPr>
               <a:spcAft>
-                <a:spcPts val="1000"/>
-              </a:spcAft>
-            </a:pPr>
-            <a:r>
-              <a:rPr sz="2000" b="1">
-                <a:solidFill>
-                  <a:srgbClr val="9FC1FF"/>
+                <a:spcPts val="200"/>
+              </a:spcAft>
+            </a:pPr>
+            <a:r>
+              <a:rPr sz="1400" b="1">
+                <a:solidFill>
+                  <a:srgbClr val="1F6FEB"/>
                 </a:solidFill>
                 <a:latin typeface="Calibri"/>
               </a:rPr>
               <a:t>SIGMA DIGITAL TWINS</a:t>
             </a:r>
           </a:p>
-          <a:p>
-            <a:pPr>
-              <a:spcAft>
-                <a:spcPts val="800"/>
-              </a:spcAft>
-            </a:pPr>
-            <a:r>
-              <a:rPr sz="4400" b="1">
-                <a:solidFill>
-                  <a:srgbClr val="FFFFFF"/>
-                </a:solidFill>
-                <a:latin typeface="Calibri"/>
-              </a:rPr>
-              <a:t>Proposed Team</a:t>
-            </a:r>
-          </a:p>
-          <a:p>
-            <a:pPr>
-              <a:spcAft>
-                <a:spcPts val="400"/>
-              </a:spcAft>
-            </a:pPr>
-            <a:r>
-              <a:rPr sz="2200" b="0">
-                <a:solidFill>
-                  <a:srgbClr val="FFFFFF"/>
-                </a:solidFill>
-                <a:latin typeface="Calibri"/>
-              </a:rPr>
-              <a:t>Mineral Recovery Project — Duqm, Oman</a:t>
-            </a:r>
-          </a:p>
-          <a:p>
-            <a:pPr>
-              <a:spcAft>
-                <a:spcPts val="200"/>
-              </a:spcAft>
-            </a:pPr>
-            <a:r>
-              <a:rPr sz="1400" b="0">
-                <a:solidFill>
-                  <a:srgbClr val="C8D8F5"/>
-                </a:solidFill>
-                <a:latin typeface="Calibri"/>
-              </a:rPr>
-              <a:t>Conceptual + Basic Engineering Study · July 2026</a:t>
-            </a:r>
-          </a:p>
-        </p:txBody>
-      </p:sp>
-      <p:sp>
-        <p:nvSpPr>
-          <p:cNvPr id="5" name="TextBox 4"/>
+        </p:txBody>
+      </p:sp>
+      <p:sp>
+        <p:nvSpPr>
+          <p:cNvPr id="4" name="TextBox 3"/>
           <p:cNvSpPr txBox="1"/>
           <p:nvPr/>
         </p:nvSpPr>
         <p:spPr>
           <a:xfrm>
-            <a:off x="822960" y="6035040"/>
-            <a:ext cx="10515600" cy="457200"/>
+            <a:off x="274320" y="1051560"/>
+            <a:ext cx="10332720" cy="960120"/>
           </a:xfrm>
           <a:prstGeom prst="rect">
             <a:avLst/>
@@ -3300,9 +3189,111 @@
               </a:spcAft>
             </a:pPr>
             <a:r>
+              <a:rPr sz="3200" b="1">
+                <a:solidFill>
+                  <a:srgbClr val="141B26"/>
+                </a:solidFill>
+                <a:latin typeface="Calibri"/>
+              </a:rPr>
+              <a:t>Proposed Team — Duqm, Oman</a:t>
+            </a:r>
+          </a:p>
+        </p:txBody>
+      </p:sp>
+      <p:sp>
+        <p:nvSpPr>
+          <p:cNvPr id="5" name="TextBox 4"/>
+          <p:cNvSpPr txBox="1"/>
+          <p:nvPr/>
+        </p:nvSpPr>
+        <p:spPr>
+          <a:xfrm>
+            <a:off x="301752" y="2057400"/>
+            <a:ext cx="10241280" cy="457200"/>
+          </a:xfrm>
+          <a:prstGeom prst="rect">
+            <a:avLst/>
+          </a:prstGeom>
+          <a:noFill/>
+        </p:spPr>
+        <p:txBody>
+          <a:bodyPr wrap="square">
+            <a:spAutoFit/>
+          </a:bodyPr>
+          <a:lstStyle/>
+          <a:p>
+            <a:pPr>
+              <a:spcAft>
+                <a:spcPts val="200"/>
+              </a:spcAft>
+            </a:pPr>
+            <a:r>
+              <a:rPr sz="1500" b="0">
+                <a:solidFill>
+                  <a:srgbClr val="5B6676"/>
+                </a:solidFill>
+                <a:latin typeface="Calibri"/>
+              </a:rPr>
+              <a:t>Mineral Recovery Project · Conceptual + Basic Engineering Study · July 2026</a:t>
+            </a:r>
+          </a:p>
+        </p:txBody>
+      </p:sp>
+      <p:pic>
+        <p:nvPicPr>
+          <p:cNvPr id="6" name="Picture 5" descr="cover_bg.jpg"/>
+          <p:cNvPicPr>
+            <a:picLocks noChangeAspect="1"/>
+          </p:cNvPicPr>
+          <p:nvPr/>
+        </p:nvPicPr>
+        <p:blipFill>
+          <a:blip r:embed="rId3"/>
+          <a:stretch>
+            <a:fillRect/>
+          </a:stretch>
+        </p:blipFill>
+        <p:spPr>
+          <a:xfrm>
+            <a:off x="301752" y="2834640"/>
+            <a:ext cx="11585448" cy="3291840"/>
+          </a:xfrm>
+          <a:prstGeom prst="rect">
+            <a:avLst/>
+          </a:prstGeom>
+        </p:spPr>
+      </p:pic>
+      <p:sp>
+        <p:nvSpPr>
+          <p:cNvPr id="7" name="TextBox 6"/>
+          <p:cNvSpPr txBox="1"/>
+          <p:nvPr/>
+        </p:nvSpPr>
+        <p:spPr>
+          <a:xfrm>
+            <a:off x="301752" y="6309360"/>
+            <a:ext cx="10515600" cy="365760"/>
+          </a:xfrm>
+          <a:prstGeom prst="rect">
+            <a:avLst/>
+          </a:prstGeom>
+          <a:noFill/>
+        </p:spPr>
+        <p:txBody>
+          <a:bodyPr wrap="square">
+            <a:spAutoFit/>
+          </a:bodyPr>
+          <a:lstStyle/>
+          <a:p>
+            <a:pPr>
+              <a:spcAft>
+                <a:spcPts val="200"/>
+              </a:spcAft>
+            </a:pPr>
+            <a:r>
               <a:rPr sz="1100" b="0">
                 <a:solidFill>
-                  <a:srgbClr val="C8D8F5"/>
+                  <a:srgbClr val="5B6676"/>
                 </a:solidFill>
                 <a:latin typeface="Calibri"/>
               </a:rPr>
@@ -3381,8 +3372,8 @@
         </p:nvSpPr>
         <p:spPr>
           <a:xfrm>
-            <a:off x="822960" y="2286000"/>
-            <a:ext cx="10515600" cy="2286000"/>
+            <a:off x="822960" y="2194560"/>
+            <a:ext cx="10515600" cy="2377440"/>
           </a:xfrm>
           <a:prstGeom prst="rect">
             <a:avLst/>
@@ -3417,7 +3408,7 @@
               </a:spcAft>
             </a:pPr>
             <a:r>
-              <a:rPr sz="3000" b="1">
+              <a:rPr sz="3200" b="1">
                 <a:solidFill>
                   <a:srgbClr val="FFFFFF"/>
                 </a:solidFill>
@@ -3434,7 +3425,7 @@
               <a:buChar char="•"/>
             </a:pPr>
             <a:r>
-              <a:rPr sz="1600" b="0">
+              <a:rPr sz="1700" b="0">
                 <a:solidFill>
                   <a:srgbClr val="E8F0FF"/>
                 </a:solidFill>
@@ -3451,7 +3442,7 @@
               <a:buChar char="•"/>
             </a:pPr>
             <a:r>
-              <a:rPr sz="1600" b="0">
+              <a:rPr sz="1700" b="0">
                 <a:solidFill>
                   <a:srgbClr val="E8F0FF"/>
                 </a:solidFill>
@@ -3468,13 +3459,133 @@
               <a:buChar char="•"/>
             </a:pPr>
             <a:r>
-              <a:rPr sz="1600" b="0">
+              <a:rPr sz="1700" b="0">
                 <a:solidFill>
                   <a:srgbClr val="E8F0FF"/>
                 </a:solidFill>
                 <a:latin typeface="Calibri"/>
               </a:rPr>
               <a:t>Contact: Jorge Juri — Project Manager · WhatsApp +1 778 835 3720</a:t>
+            </a:r>
+          </a:p>
+        </p:txBody>
+      </p:sp>
+    </p:spTree>
+  </p:cSld>
+  <p:clrMapOvr>
+    <a:masterClrMapping/>
+  </p:clrMapOvr>
+</p:sld>
+</file>
+
+<file path=ppt/slides/slide11.xml><?xml version="1.0" encoding="utf-8"?>
+<p:sld xmlns:a="http://schemas.openxmlformats.org/drawingml/2006/main" xmlns:p="http://schemas.openxmlformats.org/presentationml/2006/main" xmlns:r="http://schemas.openxmlformats.org/officeDocument/2006/relationships">
+  <p:cSld>
+    <p:spTree>
+      <p:nvGrpSpPr>
+        <p:cNvPr id="1" name=""/>
+        <p:cNvGrpSpPr/>
+        <p:nvPr/>
+      </p:nvGrpSpPr>
+      <p:grpSpPr/>
+      <p:sp>
+        <p:nvSpPr>
+          <p:cNvPr id="2" name="TextBox 1"/>
+          <p:cNvSpPr txBox="1"/>
+          <p:nvPr/>
+        </p:nvSpPr>
+        <p:spPr>
+          <a:xfrm>
+            <a:off x="155448" y="201168"/>
+            <a:ext cx="11795760" cy="676656"/>
+          </a:xfrm>
+          <a:prstGeom prst="rect">
+            <a:avLst/>
+          </a:prstGeom>
+          <a:noFill/>
+        </p:spPr>
+        <p:txBody>
+          <a:bodyPr wrap="square">
+            <a:spAutoFit/>
+          </a:bodyPr>
+          <a:lstStyle/>
+          <a:p>
+            <a:pPr>
+              <a:spcAft>
+                <a:spcPts val="200"/>
+              </a:spcAft>
+            </a:pPr>
+            <a:r>
+              <a:rPr sz="2400" b="1">
+                <a:solidFill>
+                  <a:srgbClr val="141B26"/>
+                </a:solidFill>
+                <a:latin typeface="Calibri"/>
+              </a:rPr>
+              <a:t>Join us on this journey of innovation and digital transformation for your business</a:t>
+            </a:r>
+          </a:p>
+        </p:txBody>
+      </p:sp>
+      <p:pic>
+        <p:nvPicPr>
+          <p:cNvPr id="3" name="Picture 2" descr="journey.jpg"/>
+          <p:cNvPicPr>
+            <a:picLocks noChangeAspect="1"/>
+          </p:cNvPicPr>
+          <p:nvPr/>
+        </p:nvPicPr>
+        <p:blipFill>
+          <a:blip r:embed="rId2"/>
+          <a:stretch>
+            <a:fillRect/>
+          </a:stretch>
+        </p:blipFill>
+        <p:spPr>
+          <a:xfrm>
+            <a:off x="0" y="822960"/>
+            <a:ext cx="12191695" cy="5148072"/>
+          </a:xfrm>
+          <a:prstGeom prst="rect">
+            <a:avLst/>
+          </a:prstGeom>
+        </p:spPr>
+      </p:pic>
+      <p:sp>
+        <p:nvSpPr>
+          <p:cNvPr id="4" name="TextBox 3"/>
+          <p:cNvSpPr txBox="1"/>
+          <p:nvPr/>
+        </p:nvSpPr>
+        <p:spPr>
+          <a:xfrm>
+            <a:off x="301752" y="6144768"/>
+            <a:ext cx="10972800" cy="457200"/>
+          </a:xfrm>
+          <a:prstGeom prst="rect">
+            <a:avLst/>
+          </a:prstGeom>
+          <a:noFill/>
+        </p:spPr>
+        <p:txBody>
+          <a:bodyPr wrap="square">
+            <a:spAutoFit/>
+          </a:bodyPr>
+          <a:lstStyle/>
+          <a:p>
+            <a:pPr>
+              <a:spcAft>
+                <a:spcPts val="200"/>
+              </a:spcAft>
+            </a:pPr>
+            <a:r>
+              <a:rPr sz="1200" b="0">
+                <a:solidFill>
+                  <a:srgbClr val="5B6676"/>
+                </a:solidFill>
+                <a:latin typeface="Calibri"/>
+              </a:rPr>
+              <a:t>Contact: Jorge Juri — Project Manager · WhatsApp +1 778 835 3720 · Sigma Digital Twins</a:t>
             </a:r>
           </a:p>
         </p:txBody>
@@ -3505,7 +3616,7 @@
         </p:nvSpPr>
         <p:spPr>
           <a:xfrm>
-            <a:off x="457200" y="228600"/>
+            <a:off x="457200" y="182880"/>
             <a:ext cx="11247120" cy="548640"/>
           </a:xfrm>
           <a:prstGeom prst="rect">
@@ -3544,8 +3655,8 @@
         </p:nvSpPr>
         <p:spPr>
           <a:xfrm>
-            <a:off x="4632807" y="868680"/>
-            <a:ext cx="2926080" cy="566928"/>
+            <a:off x="4267047" y="777240"/>
+            <a:ext cx="3657600" cy="566928"/>
           </a:xfrm>
           <a:prstGeom prst="roundRect">
             <a:avLst>
@@ -3577,7 +3688,7 @@
           </a:fontRef>
         </p:style>
         <p:txBody>
-          <a:bodyPr rtlCol="0" anchor="ctr" wrap="square" tIns="20000" bIns="20000" lIns="40000" rIns="40000"/>
+          <a:bodyPr rtlCol="0" anchor="ctr" wrap="square" tIns="20000" bIns="20000" lIns="60000" rIns="60000"/>
           <a:lstStyle/>
           <a:p>
             <a:pPr algn="ctr">
@@ -3586,7 +3697,7 @@
               </a:spcAft>
             </a:pPr>
             <a:r>
-              <a:rPr sz="900" b="1">
+              <a:rPr sz="1100" b="1">
                 <a:solidFill>
                   <a:srgbClr val="141B26"/>
                 </a:solidFill>
@@ -3602,7 +3713,7 @@
               </a:spcAft>
             </a:pPr>
             <a:r>
-              <a:rPr sz="850" b="0">
+              <a:rPr sz="1000" b="0">
                 <a:solidFill>
                   <a:srgbClr val="5B6676"/>
                 </a:solidFill>
@@ -3621,8 +3732,8 @@
         </p:nvCxnSpPr>
         <p:spPr>
           <a:xfrm>
-            <a:off x="6095847.5" y="1435608"/>
-            <a:ext cx="0.0" cy="164592"/>
+            <a:off x="6095847.5" y="1344168"/>
+            <a:ext cx="0.0" cy="137160"/>
           </a:xfrm>
           <a:prstGeom prst="line">
             <a:avLst/>
@@ -3656,8 +3767,260 @@
         </p:nvSpPr>
         <p:spPr>
           <a:xfrm>
-            <a:off x="4632807" y="1600200"/>
-            <a:ext cx="2926080" cy="566928"/>
+            <a:off x="4267047" y="1481328"/>
+            <a:ext cx="3657600" cy="685800"/>
+          </a:xfrm>
+          <a:prstGeom prst="roundRect">
+            <a:avLst>
+              <a:gd name="adj" fmla="val 8000"/>
+            </a:avLst>
+          </a:prstGeom>
+          <a:solidFill>
+            <a:srgbClr val="0B3D91"/>
+          </a:solidFill>
+          <a:ln w="15875">
+            <a:solidFill>
+              <a:srgbClr val="0B3D91"/>
+            </a:solidFill>
+          </a:ln>
+          <a:effectLst/>
+        </p:spPr>
+        <p:style>
+          <a:lnRef idx="1">
+            <a:schemeClr val="accent1"/>
+          </a:lnRef>
+          <a:fillRef idx="3">
+            <a:schemeClr val="accent1"/>
+          </a:fillRef>
+          <a:effectRef idx="2">
+            <a:schemeClr val="accent1"/>
+          </a:effectRef>
+          <a:fontRef idx="minor">
+            <a:schemeClr val="lt1"/>
+          </a:fontRef>
+        </p:style>
+        <p:txBody>
+          <a:bodyPr rtlCol="0" anchor="ctr" wrap="square" tIns="20000" bIns="20000" lIns="60000" rIns="60000"/>
+          <a:lstStyle/>
+          <a:p>
+            <a:pPr algn="ctr">
+              <a:spcAft>
+                <a:spcPts val="100"/>
+              </a:spcAft>
+            </a:pPr>
+            <a:r>
+              <a:rPr sz="1300" b="1">
+                <a:solidFill>
+                  <a:srgbClr val="FFFFFF"/>
+                </a:solidFill>
+                <a:latin typeface="Calibri"/>
+              </a:rPr>
+              <a:t>DIRECTOR</a:t>
+            </a:r>
+          </a:p>
+          <a:p>
+            <a:pPr algn="ctr">
+              <a:spcAft>
+                <a:spcPts val="200"/>
+              </a:spcAft>
+            </a:pPr>
+            <a:r>
+              <a:rPr sz="1150" b="0">
+                <a:solidFill>
+                  <a:srgbClr val="FFFFFF"/>
+                </a:solidFill>
+                <a:latin typeface="Calibri"/>
+              </a:rPr>
+              <a:t>Mauricio Contreras</a:t>
+            </a:r>
+          </a:p>
+        </p:txBody>
+      </p:sp>
+      <p:cxnSp>
+        <p:nvCxnSpPr>
+          <p:cNvPr id="6" name="Connector 5"/>
+          <p:cNvCxnSpPr/>
+          <p:nvPr/>
+        </p:nvCxnSpPr>
+        <p:spPr>
+          <a:xfrm>
+            <a:off x="6095847.5" y="2167128"/>
+            <a:ext cx="0.0" cy="228600"/>
+          </a:xfrm>
+          <a:prstGeom prst="line">
+            <a:avLst/>
+          </a:prstGeom>
+          <a:ln w="19050">
+            <a:solidFill>
+              <a:srgbClr val="C9D4E2"/>
+            </a:solidFill>
+          </a:ln>
+        </p:spPr>
+        <p:style>
+          <a:lnRef idx="2">
+            <a:schemeClr val="accent1"/>
+          </a:lnRef>
+          <a:fillRef idx="0">
+            <a:schemeClr val="accent1"/>
+          </a:fillRef>
+          <a:effectRef idx="1">
+            <a:schemeClr val="accent1"/>
+          </a:effectRef>
+          <a:fontRef idx="minor">
+            <a:schemeClr val="tx1"/>
+          </a:fontRef>
+        </p:style>
+      </p:cxnSp>
+      <p:cxnSp>
+        <p:nvCxnSpPr>
+          <p:cNvPr id="7" name="Connector 6"/>
+          <p:cNvCxnSpPr/>
+          <p:nvPr/>
+        </p:nvCxnSpPr>
+        <p:spPr>
+          <a:xfrm>
+            <a:off x="2163927.5" y="2395728"/>
+            <a:ext cx="7863840.0" cy="0"/>
+          </a:xfrm>
+          <a:prstGeom prst="line">
+            <a:avLst/>
+          </a:prstGeom>
+          <a:ln w="19050">
+            <a:solidFill>
+              <a:srgbClr val="C9D4E2"/>
+            </a:solidFill>
+          </a:ln>
+        </p:spPr>
+        <p:style>
+          <a:lnRef idx="2">
+            <a:schemeClr val="accent1"/>
+          </a:lnRef>
+          <a:fillRef idx="0">
+            <a:schemeClr val="accent1"/>
+          </a:fillRef>
+          <a:effectRef idx="1">
+            <a:schemeClr val="accent1"/>
+          </a:effectRef>
+          <a:fontRef idx="minor">
+            <a:schemeClr val="tx1"/>
+          </a:fontRef>
+        </p:style>
+      </p:cxnSp>
+      <p:cxnSp>
+        <p:nvCxnSpPr>
+          <p:cNvPr id="8" name="Connector 7"/>
+          <p:cNvCxnSpPr/>
+          <p:nvPr/>
+        </p:nvCxnSpPr>
+        <p:spPr>
+          <a:xfrm>
+            <a:off x="2163927.5" y="2395728"/>
+            <a:ext cx="0.0" cy="182880"/>
+          </a:xfrm>
+          <a:prstGeom prst="line">
+            <a:avLst/>
+          </a:prstGeom>
+          <a:ln w="19050">
+            <a:solidFill>
+              <a:srgbClr val="C9D4E2"/>
+            </a:solidFill>
+          </a:ln>
+        </p:spPr>
+        <p:style>
+          <a:lnRef idx="2">
+            <a:schemeClr val="accent1"/>
+          </a:lnRef>
+          <a:fillRef idx="0">
+            <a:schemeClr val="accent1"/>
+          </a:fillRef>
+          <a:effectRef idx="1">
+            <a:schemeClr val="accent1"/>
+          </a:effectRef>
+          <a:fontRef idx="minor">
+            <a:schemeClr val="tx1"/>
+          </a:fontRef>
+        </p:style>
+      </p:cxnSp>
+      <p:cxnSp>
+        <p:nvCxnSpPr>
+          <p:cNvPr id="9" name="Connector 8"/>
+          <p:cNvCxnSpPr/>
+          <p:nvPr/>
+        </p:nvCxnSpPr>
+        <p:spPr>
+          <a:xfrm>
+            <a:off x="6095847.5" y="2395728"/>
+            <a:ext cx="0.0" cy="182880"/>
+          </a:xfrm>
+          <a:prstGeom prst="line">
+            <a:avLst/>
+          </a:prstGeom>
+          <a:ln w="19050">
+            <a:solidFill>
+              <a:srgbClr val="C9D4E2"/>
+            </a:solidFill>
+          </a:ln>
+        </p:spPr>
+        <p:style>
+          <a:lnRef idx="2">
+            <a:schemeClr val="accent1"/>
+          </a:lnRef>
+          <a:fillRef idx="0">
+            <a:schemeClr val="accent1"/>
+          </a:fillRef>
+          <a:effectRef idx="1">
+            <a:schemeClr val="accent1"/>
+          </a:effectRef>
+          <a:fontRef idx="minor">
+            <a:schemeClr val="tx1"/>
+          </a:fontRef>
+        </p:style>
+      </p:cxnSp>
+      <p:cxnSp>
+        <p:nvCxnSpPr>
+          <p:cNvPr id="10" name="Connector 9"/>
+          <p:cNvCxnSpPr/>
+          <p:nvPr/>
+        </p:nvCxnSpPr>
+        <p:spPr>
+          <a:xfrm>
+            <a:off x="10027767.5" y="2395728"/>
+            <a:ext cx="0.0" cy="182880"/>
+          </a:xfrm>
+          <a:prstGeom prst="line">
+            <a:avLst/>
+          </a:prstGeom>
+          <a:ln w="19050">
+            <a:solidFill>
+              <a:srgbClr val="C9D4E2"/>
+            </a:solidFill>
+          </a:ln>
+        </p:spPr>
+        <p:style>
+          <a:lnRef idx="2">
+            <a:schemeClr val="accent1"/>
+          </a:lnRef>
+          <a:fillRef idx="0">
+            <a:schemeClr val="accent1"/>
+          </a:fillRef>
+          <a:effectRef idx="1">
+            <a:schemeClr val="accent1"/>
+          </a:effectRef>
+          <a:fontRef idx="minor">
+            <a:schemeClr val="tx1"/>
+          </a:fontRef>
+        </p:style>
+      </p:cxnSp>
+      <p:sp>
+        <p:nvSpPr>
+          <p:cNvPr id="11" name="Rounded Rectangle 10"/>
+          <p:cNvSpPr/>
+          <p:nvPr/>
+        </p:nvSpPr>
+        <p:spPr>
+          <a:xfrm>
+            <a:off x="357987" y="2578608"/>
+            <a:ext cx="3611880" cy="868680"/>
           </a:xfrm>
           <a:prstGeom prst="roundRect">
             <a:avLst>
@@ -3689,7 +4052,7 @@
           </a:fontRef>
         </p:style>
         <p:txBody>
-          <a:bodyPr rtlCol="0" anchor="ctr" wrap="square" tIns="20000" bIns="20000" lIns="40000" rIns="40000"/>
+          <a:bodyPr rtlCol="0" anchor="ctr" wrap="square" tIns="20000" bIns="20000" lIns="200000" rIns="60000"/>
           <a:lstStyle/>
           <a:p>
             <a:pPr algn="ctr">
@@ -3698,13 +4061,13 @@
               </a:spcAft>
             </a:pPr>
             <a:r>
-              <a:rPr sz="900" b="1">
-                <a:solidFill>
-                  <a:srgbClr val="141B26"/>
-                </a:solidFill>
-                <a:latin typeface="Calibri"/>
-              </a:rPr>
-              <a:t>Project Director</a:t>
+              <a:rPr sz="1150" b="1">
+                <a:solidFill>
+                  <a:srgbClr val="141B26"/>
+                </a:solidFill>
+                <a:latin typeface="Calibri"/>
+              </a:rPr>
+              <a:t>Project Lead — Metallurgy</a:t>
             </a:r>
           </a:p>
           <a:p>
@@ -3714,62 +4077,27 @@
               </a:spcAft>
             </a:pPr>
             <a:r>
-              <a:rPr sz="850" b="0">
+              <a:rPr sz="1050" b="0">
                 <a:solidFill>
                   <a:srgbClr val="5B6676"/>
                 </a:solidFill>
                 <a:latin typeface="Calibri"/>
               </a:rPr>
-              <a:t>Mauricio Contreras</a:t>
-            </a:r>
-          </a:p>
-        </p:txBody>
-      </p:sp>
-      <p:cxnSp>
-        <p:nvCxnSpPr>
-          <p:cNvPr id="6" name="Connector 5"/>
-          <p:cNvCxnSpPr/>
-          <p:nvPr/>
-        </p:nvCxnSpPr>
-        <p:spPr>
-          <a:xfrm>
-            <a:off x="6095847.5" y="2167128"/>
-            <a:ext cx="0.0" cy="164592"/>
-          </a:xfrm>
-          <a:prstGeom prst="line">
-            <a:avLst/>
-          </a:prstGeom>
-          <a:ln w="19050">
-            <a:solidFill>
-              <a:srgbClr val="C9D4E2"/>
-            </a:solidFill>
-          </a:ln>
-        </p:spPr>
-        <p:style>
-          <a:lnRef idx="2">
-            <a:schemeClr val="accent1"/>
-          </a:lnRef>
-          <a:fillRef idx="0">
-            <a:schemeClr val="accent1"/>
-          </a:fillRef>
-          <a:effectRef idx="1">
-            <a:schemeClr val="accent1"/>
-          </a:effectRef>
-          <a:fontRef idx="minor">
-            <a:schemeClr val="tx1"/>
-          </a:fontRef>
-        </p:style>
-      </p:cxnSp>
-      <p:sp>
-        <p:nvSpPr>
-          <p:cNvPr id="7" name="Rounded Rectangle 6"/>
+              <a:t>Luis García Medina</a:t>
+            </a:r>
+          </a:p>
+        </p:txBody>
+      </p:sp>
+      <p:sp>
+        <p:nvSpPr>
+          <p:cNvPr id="12" name="Rounded Rectangle 11"/>
           <p:cNvSpPr/>
           <p:nvPr/>
         </p:nvSpPr>
         <p:spPr>
           <a:xfrm>
-            <a:off x="4632807" y="2331720"/>
-            <a:ext cx="2926080" cy="566928"/>
+            <a:off x="437987" y="2718608"/>
+            <a:ext cx="70000" cy="588680"/>
           </a:xfrm>
           <a:prstGeom prst="roundRect">
             <a:avLst>
@@ -3777,12 +4105,10 @@
             </a:avLst>
           </a:prstGeom>
           <a:solidFill>
-            <a:srgbClr val="FFFFFF"/>
+            <a:srgbClr val="1F6FEB"/>
           </a:solidFill>
-          <a:ln w="15875">
-            <a:solidFill>
-              <a:srgbClr val="0E7C5A"/>
-            </a:solidFill>
+          <a:ln>
+            <a:noFill/>
           </a:ln>
           <a:effectLst/>
         </p:spPr>
@@ -3801,87 +4127,23 @@
           </a:fontRef>
         </p:style>
         <p:txBody>
-          <a:bodyPr rtlCol="0" anchor="ctr" wrap="square" tIns="20000" bIns="20000" lIns="40000" rIns="40000"/>
-          <a:lstStyle/>
-          <a:p>
-            <a:pPr algn="ctr">
-              <a:spcAft>
-                <a:spcPts val="100"/>
-              </a:spcAft>
-            </a:pPr>
-            <a:r>
-              <a:rPr sz="900" b="1">
-                <a:solidFill>
-                  <a:srgbClr val="141B26"/>
-                </a:solidFill>
-                <a:latin typeface="Calibri"/>
-              </a:rPr>
-              <a:t>Project Manager (+ AI)</a:t>
-            </a:r>
-          </a:p>
-          <a:p>
-            <a:pPr algn="ctr">
-              <a:spcAft>
-                <a:spcPts val="200"/>
-              </a:spcAft>
-            </a:pPr>
-            <a:r>
-              <a:rPr sz="850" b="0">
-                <a:solidFill>
-                  <a:srgbClr val="5B6676"/>
-                </a:solidFill>
-                <a:latin typeface="Calibri"/>
-              </a:rPr>
-              <a:t>Jorge Juri</a:t>
-            </a:r>
-          </a:p>
-        </p:txBody>
-      </p:sp>
-      <p:cxnSp>
-        <p:nvCxnSpPr>
-          <p:cNvPr id="8" name="Connector 7"/>
-          <p:cNvCxnSpPr/>
-          <p:nvPr/>
-        </p:nvCxnSpPr>
-        <p:spPr>
-          <a:xfrm>
-            <a:off x="6095847.5" y="2898648"/>
-            <a:ext cx="0.0" cy="274320"/>
-          </a:xfrm>
-          <a:prstGeom prst="line">
-            <a:avLst/>
-          </a:prstGeom>
-          <a:ln w="19050">
-            <a:solidFill>
-              <a:srgbClr val="C9D4E2"/>
-            </a:solidFill>
-          </a:ln>
-        </p:spPr>
-        <p:style>
-          <a:lnRef idx="2">
-            <a:schemeClr val="accent1"/>
-          </a:lnRef>
-          <a:fillRef idx="0">
-            <a:schemeClr val="accent1"/>
-          </a:fillRef>
-          <a:effectRef idx="1">
-            <a:schemeClr val="accent1"/>
-          </a:effectRef>
-          <a:fontRef idx="minor">
-            <a:schemeClr val="tx1"/>
-          </a:fontRef>
-        </p:style>
-      </p:cxnSp>
-      <p:sp>
-        <p:nvSpPr>
-          <p:cNvPr id="9" name="Rounded Rectangle 8"/>
+          <a:bodyPr rtlCol="0" anchor="ctr"/>
+          <a:lstStyle/>
+          <a:p>
+            <a:pPr algn="ctr"/>
+          </a:p>
+        </p:txBody>
+      </p:sp>
+      <p:sp>
+        <p:nvSpPr>
+          <p:cNvPr id="13" name="Rounded Rectangle 12"/>
           <p:cNvSpPr/>
           <p:nvPr/>
         </p:nvSpPr>
         <p:spPr>
           <a:xfrm>
-            <a:off x="536295" y="3172968"/>
-            <a:ext cx="2697480" cy="713232"/>
+            <a:off x="4289907" y="2578608"/>
+            <a:ext cx="3611880" cy="868680"/>
           </a:xfrm>
           <a:prstGeom prst="roundRect">
             <a:avLst>
@@ -3913,7 +4175,7 @@
           </a:fontRef>
         </p:style>
         <p:txBody>
-          <a:bodyPr rtlCol="0" anchor="ctr" wrap="square" tIns="20000" bIns="20000" lIns="40000" rIns="40000"/>
+          <a:bodyPr rtlCol="0" anchor="ctr" wrap="square" tIns="20000" bIns="20000" lIns="200000" rIns="60000"/>
           <a:lstStyle/>
           <a:p>
             <a:pPr algn="ctr">
@@ -3922,13 +4184,13 @@
               </a:spcAft>
             </a:pPr>
             <a:r>
-              <a:rPr sz="850" b="1">
-                <a:solidFill>
-                  <a:srgbClr val="141B26"/>
-                </a:solidFill>
-                <a:latin typeface="Calibri"/>
-              </a:rPr>
-              <a:t>Process / Metallurgy</a:t>
+              <a:rPr sz="1150" b="1">
+                <a:solidFill>
+                  <a:srgbClr val="141B26"/>
+                </a:solidFill>
+                <a:latin typeface="Calibri"/>
+              </a:rPr>
+              <a:t>Head of Maintenance &amp; Reliability</a:t>
             </a:r>
           </a:p>
           <a:p>
@@ -3938,27 +4200,73 @@
               </a:spcAft>
             </a:pPr>
             <a:r>
-              <a:rPr sz="850" b="0">
+              <a:rPr sz="1050" b="0">
                 <a:solidFill>
                   <a:srgbClr val="5B6676"/>
                 </a:solidFill>
                 <a:latin typeface="Calibri"/>
               </a:rPr>
-              <a:t>Luis E. García Medina</a:t>
-            </a:r>
-          </a:p>
-        </p:txBody>
-      </p:sp>
-      <p:sp>
-        <p:nvSpPr>
-          <p:cNvPr id="10" name="Rounded Rectangle 9"/>
+              <a:t>Juan Carlos Ramírez (JC)</a:t>
+            </a:r>
+          </a:p>
+        </p:txBody>
+      </p:sp>
+      <p:sp>
+        <p:nvSpPr>
+          <p:cNvPr id="14" name="Rounded Rectangle 13"/>
           <p:cNvSpPr/>
           <p:nvPr/>
         </p:nvSpPr>
         <p:spPr>
           <a:xfrm>
-            <a:off x="3343503" y="3172968"/>
-            <a:ext cx="2697480" cy="713232"/>
+            <a:off x="4369907" y="2718608"/>
+            <a:ext cx="70000" cy="588680"/>
+          </a:xfrm>
+          <a:prstGeom prst="roundRect">
+            <a:avLst>
+              <a:gd name="adj" fmla="val 8000"/>
+            </a:avLst>
+          </a:prstGeom>
+          <a:solidFill>
+            <a:srgbClr val="16A34A"/>
+          </a:solidFill>
+          <a:ln>
+            <a:noFill/>
+          </a:ln>
+          <a:effectLst/>
+        </p:spPr>
+        <p:style>
+          <a:lnRef idx="1">
+            <a:schemeClr val="accent1"/>
+          </a:lnRef>
+          <a:fillRef idx="3">
+            <a:schemeClr val="accent1"/>
+          </a:fillRef>
+          <a:effectRef idx="2">
+            <a:schemeClr val="accent1"/>
+          </a:effectRef>
+          <a:fontRef idx="minor">
+            <a:schemeClr val="lt1"/>
+          </a:fontRef>
+        </p:style>
+        <p:txBody>
+          <a:bodyPr rtlCol="0" anchor="ctr"/>
+          <a:lstStyle/>
+          <a:p>
+            <a:pPr algn="ctr"/>
+          </a:p>
+        </p:txBody>
+      </p:sp>
+      <p:sp>
+        <p:nvSpPr>
+          <p:cNvPr id="15" name="Rounded Rectangle 14"/>
+          <p:cNvSpPr/>
+          <p:nvPr/>
+        </p:nvSpPr>
+        <p:spPr>
+          <a:xfrm>
+            <a:off x="8221827" y="2578608"/>
+            <a:ext cx="3611880" cy="868680"/>
           </a:xfrm>
           <a:prstGeom prst="roundRect">
             <a:avLst>
@@ -3990,7 +4298,7 @@
           </a:fontRef>
         </p:style>
         <p:txBody>
-          <a:bodyPr rtlCol="0" anchor="ctr" wrap="square" tIns="20000" bIns="20000" lIns="40000" rIns="40000"/>
+          <a:bodyPr rtlCol="0" anchor="ctr" wrap="square" tIns="20000" bIns="20000" lIns="200000" rIns="60000"/>
           <a:lstStyle/>
           <a:p>
             <a:pPr algn="ctr">
@@ -3999,13 +4307,13 @@
               </a:spcAft>
             </a:pPr>
             <a:r>
-              <a:rPr sz="850" b="1">
-                <a:solidFill>
-                  <a:srgbClr val="141B26"/>
-                </a:solidFill>
-                <a:latin typeface="Calibri"/>
-              </a:rPr>
-              <a:t>Maint. / Equipment / Electrical + Instrum.</a:t>
+              <a:rPr sz="1150" b="1">
+                <a:solidFill>
+                  <a:srgbClr val="141B26"/>
+                </a:solidFill>
+                <a:latin typeface="Calibri"/>
+              </a:rPr>
+              <a:t>AI-Powered PMO</a:t>
             </a:r>
           </a:p>
           <a:p>
@@ -4015,27 +4323,423 @@
               </a:spcAft>
             </a:pPr>
             <a:r>
-              <a:rPr sz="850" b="0">
+              <a:rPr sz="1050" b="0">
                 <a:solidFill>
                   <a:srgbClr val="5B6676"/>
                 </a:solidFill>
                 <a:latin typeface="Calibri"/>
               </a:rPr>
-              <a:t>Juan Carlos Ramírez</a:t>
-            </a:r>
-          </a:p>
-        </p:txBody>
-      </p:sp>
-      <p:sp>
-        <p:nvSpPr>
-          <p:cNvPr id="11" name="Rounded Rectangle 10"/>
+              <a:t>Autopilot · Jorge Juri</a:t>
+            </a:r>
+          </a:p>
+        </p:txBody>
+      </p:sp>
+      <p:sp>
+        <p:nvSpPr>
+          <p:cNvPr id="16" name="Rounded Rectangle 15"/>
           <p:cNvSpPr/>
           <p:nvPr/>
         </p:nvSpPr>
         <p:spPr>
           <a:xfrm>
-            <a:off x="6150711" y="3172968"/>
-            <a:ext cx="2697480" cy="713232"/>
+            <a:off x="8301827" y="2718608"/>
+            <a:ext cx="70000" cy="588680"/>
+          </a:xfrm>
+          <a:prstGeom prst="roundRect">
+            <a:avLst>
+              <a:gd name="adj" fmla="val 8000"/>
+            </a:avLst>
+          </a:prstGeom>
+          <a:solidFill>
+            <a:srgbClr val="7C3AED"/>
+          </a:solidFill>
+          <a:ln>
+            <a:noFill/>
+          </a:ln>
+          <a:effectLst/>
+        </p:spPr>
+        <p:style>
+          <a:lnRef idx="1">
+            <a:schemeClr val="accent1"/>
+          </a:lnRef>
+          <a:fillRef idx="3">
+            <a:schemeClr val="accent1"/>
+          </a:fillRef>
+          <a:effectRef idx="2">
+            <a:schemeClr val="accent1"/>
+          </a:effectRef>
+          <a:fontRef idx="minor">
+            <a:schemeClr val="lt1"/>
+          </a:fontRef>
+        </p:style>
+        <p:txBody>
+          <a:bodyPr rtlCol="0" anchor="ctr"/>
+          <a:lstStyle/>
+          <a:p>
+            <a:pPr algn="ctr"/>
+          </a:p>
+        </p:txBody>
+      </p:sp>
+      <p:cxnSp>
+        <p:nvCxnSpPr>
+          <p:cNvPr id="17" name="Connector 16"/>
+          <p:cNvCxnSpPr/>
+          <p:nvPr/>
+        </p:nvCxnSpPr>
+        <p:spPr>
+          <a:xfrm>
+            <a:off x="2163927.5" y="3447288"/>
+            <a:ext cx="0.0" cy="466344"/>
+          </a:xfrm>
+          <a:prstGeom prst="line">
+            <a:avLst/>
+          </a:prstGeom>
+          <a:ln w="19050">
+            <a:solidFill>
+              <a:srgbClr val="C9D4E2"/>
+            </a:solidFill>
+          </a:ln>
+        </p:spPr>
+        <p:style>
+          <a:lnRef idx="2">
+            <a:schemeClr val="accent1"/>
+          </a:lnRef>
+          <a:fillRef idx="0">
+            <a:schemeClr val="accent1"/>
+          </a:fillRef>
+          <a:effectRef idx="1">
+            <a:schemeClr val="accent1"/>
+          </a:effectRef>
+          <a:fontRef idx="minor">
+            <a:schemeClr val="tx1"/>
+          </a:fontRef>
+        </p:style>
+      </p:cxnSp>
+      <p:cxnSp>
+        <p:nvCxnSpPr>
+          <p:cNvPr id="18" name="Connector 17"/>
+          <p:cNvCxnSpPr/>
+          <p:nvPr/>
+        </p:nvCxnSpPr>
+        <p:spPr>
+          <a:xfrm>
+            <a:off x="1596999.5" y="3913632"/>
+            <a:ext cx="566928.0" cy="0"/>
+          </a:xfrm>
+          <a:prstGeom prst="line">
+            <a:avLst/>
+          </a:prstGeom>
+          <a:ln w="19050">
+            <a:solidFill>
+              <a:srgbClr val="C9D4E2"/>
+            </a:solidFill>
+          </a:ln>
+        </p:spPr>
+        <p:style>
+          <a:lnRef idx="2">
+            <a:schemeClr val="accent1"/>
+          </a:lnRef>
+          <a:fillRef idx="0">
+            <a:schemeClr val="accent1"/>
+          </a:fillRef>
+          <a:effectRef idx="1">
+            <a:schemeClr val="accent1"/>
+          </a:effectRef>
+          <a:fontRef idx="minor">
+            <a:schemeClr val="tx1"/>
+          </a:fontRef>
+        </p:style>
+      </p:cxnSp>
+      <p:cxnSp>
+        <p:nvCxnSpPr>
+          <p:cNvPr id="19" name="Connector 18"/>
+          <p:cNvCxnSpPr/>
+          <p:nvPr/>
+        </p:nvCxnSpPr>
+        <p:spPr>
+          <a:xfrm>
+            <a:off x="1596999.5" y="3913632"/>
+            <a:ext cx="0.0" cy="246888"/>
+          </a:xfrm>
+          <a:prstGeom prst="line">
+            <a:avLst/>
+          </a:prstGeom>
+          <a:ln w="19050">
+            <a:solidFill>
+              <a:srgbClr val="C9D4E2"/>
+            </a:solidFill>
+          </a:ln>
+        </p:spPr>
+        <p:style>
+          <a:lnRef idx="2">
+            <a:schemeClr val="accent1"/>
+          </a:lnRef>
+          <a:fillRef idx="0">
+            <a:schemeClr val="accent1"/>
+          </a:fillRef>
+          <a:effectRef idx="1">
+            <a:schemeClr val="accent1"/>
+          </a:effectRef>
+          <a:fontRef idx="minor">
+            <a:schemeClr val="tx1"/>
+          </a:fontRef>
+        </p:style>
+      </p:cxnSp>
+      <p:cxnSp>
+        <p:nvCxnSpPr>
+          <p:cNvPr id="20" name="Connector 19"/>
+          <p:cNvCxnSpPr/>
+          <p:nvPr/>
+        </p:nvCxnSpPr>
+        <p:spPr>
+          <a:xfrm>
+            <a:off x="6095847.5" y="3447288"/>
+            <a:ext cx="0.0" cy="466344"/>
+          </a:xfrm>
+          <a:prstGeom prst="line">
+            <a:avLst/>
+          </a:prstGeom>
+          <a:ln w="19050">
+            <a:solidFill>
+              <a:srgbClr val="C9D4E2"/>
+            </a:solidFill>
+          </a:ln>
+        </p:spPr>
+        <p:style>
+          <a:lnRef idx="2">
+            <a:schemeClr val="accent1"/>
+          </a:lnRef>
+          <a:fillRef idx="0">
+            <a:schemeClr val="accent1"/>
+          </a:fillRef>
+          <a:effectRef idx="1">
+            <a:schemeClr val="accent1"/>
+          </a:effectRef>
+          <a:fontRef idx="minor">
+            <a:schemeClr val="tx1"/>
+          </a:fontRef>
+        </p:style>
+      </p:cxnSp>
+      <p:cxnSp>
+        <p:nvCxnSpPr>
+          <p:cNvPr id="21" name="Connector 20"/>
+          <p:cNvCxnSpPr/>
+          <p:nvPr/>
+        </p:nvCxnSpPr>
+        <p:spPr>
+          <a:xfrm>
+            <a:off x="4596231.5" y="3913632"/>
+            <a:ext cx="2999232.0" cy="0"/>
+          </a:xfrm>
+          <a:prstGeom prst="line">
+            <a:avLst/>
+          </a:prstGeom>
+          <a:ln w="19050">
+            <a:solidFill>
+              <a:srgbClr val="C9D4E2"/>
+            </a:solidFill>
+          </a:ln>
+        </p:spPr>
+        <p:style>
+          <a:lnRef idx="2">
+            <a:schemeClr val="accent1"/>
+          </a:lnRef>
+          <a:fillRef idx="0">
+            <a:schemeClr val="accent1"/>
+          </a:fillRef>
+          <a:effectRef idx="1">
+            <a:schemeClr val="accent1"/>
+          </a:effectRef>
+          <a:fontRef idx="minor">
+            <a:schemeClr val="tx1"/>
+          </a:fontRef>
+        </p:style>
+      </p:cxnSp>
+      <p:cxnSp>
+        <p:nvCxnSpPr>
+          <p:cNvPr id="22" name="Connector 21"/>
+          <p:cNvCxnSpPr/>
+          <p:nvPr/>
+        </p:nvCxnSpPr>
+        <p:spPr>
+          <a:xfrm>
+            <a:off x="4596231.5" y="3913632"/>
+            <a:ext cx="0.0" cy="246888"/>
+          </a:xfrm>
+          <a:prstGeom prst="line">
+            <a:avLst/>
+          </a:prstGeom>
+          <a:ln w="19050">
+            <a:solidFill>
+              <a:srgbClr val="C9D4E2"/>
+            </a:solidFill>
+          </a:ln>
+        </p:spPr>
+        <p:style>
+          <a:lnRef idx="2">
+            <a:schemeClr val="accent1"/>
+          </a:lnRef>
+          <a:fillRef idx="0">
+            <a:schemeClr val="accent1"/>
+          </a:fillRef>
+          <a:effectRef idx="1">
+            <a:schemeClr val="accent1"/>
+          </a:effectRef>
+          <a:fontRef idx="minor">
+            <a:schemeClr val="tx1"/>
+          </a:fontRef>
+        </p:style>
+      </p:cxnSp>
+      <p:cxnSp>
+        <p:nvCxnSpPr>
+          <p:cNvPr id="23" name="Connector 22"/>
+          <p:cNvCxnSpPr/>
+          <p:nvPr/>
+        </p:nvCxnSpPr>
+        <p:spPr>
+          <a:xfrm>
+            <a:off x="7595463.5" y="3913632"/>
+            <a:ext cx="0.0" cy="246888"/>
+          </a:xfrm>
+          <a:prstGeom prst="line">
+            <a:avLst/>
+          </a:prstGeom>
+          <a:ln w="19050">
+            <a:solidFill>
+              <a:srgbClr val="C9D4E2"/>
+            </a:solidFill>
+          </a:ln>
+        </p:spPr>
+        <p:style>
+          <a:lnRef idx="2">
+            <a:schemeClr val="accent1"/>
+          </a:lnRef>
+          <a:fillRef idx="0">
+            <a:schemeClr val="accent1"/>
+          </a:fillRef>
+          <a:effectRef idx="1">
+            <a:schemeClr val="accent1"/>
+          </a:effectRef>
+          <a:fontRef idx="minor">
+            <a:schemeClr val="tx1"/>
+          </a:fontRef>
+        </p:style>
+      </p:cxnSp>
+      <p:cxnSp>
+        <p:nvCxnSpPr>
+          <p:cNvPr id="24" name="Connector 23"/>
+          <p:cNvCxnSpPr/>
+          <p:nvPr/>
+        </p:nvCxnSpPr>
+        <p:spPr>
+          <a:xfrm>
+            <a:off x="10027767.5" y="3447288"/>
+            <a:ext cx="0.0" cy="466344"/>
+          </a:xfrm>
+          <a:prstGeom prst="line">
+            <a:avLst/>
+          </a:prstGeom>
+          <a:ln w="19050">
+            <a:solidFill>
+              <a:srgbClr val="C9D4E2"/>
+            </a:solidFill>
+          </a:ln>
+        </p:spPr>
+        <p:style>
+          <a:lnRef idx="2">
+            <a:schemeClr val="accent1"/>
+          </a:lnRef>
+          <a:fillRef idx="0">
+            <a:schemeClr val="accent1"/>
+          </a:fillRef>
+          <a:effectRef idx="1">
+            <a:schemeClr val="accent1"/>
+          </a:effectRef>
+          <a:fontRef idx="minor">
+            <a:schemeClr val="tx1"/>
+          </a:fontRef>
+        </p:style>
+      </p:cxnSp>
+      <p:cxnSp>
+        <p:nvCxnSpPr>
+          <p:cNvPr id="25" name="Connector 24"/>
+          <p:cNvCxnSpPr/>
+          <p:nvPr/>
+        </p:nvCxnSpPr>
+        <p:spPr>
+          <a:xfrm>
+            <a:off x="10027767.5" y="3913632"/>
+            <a:ext cx="566928.0" cy="0"/>
+          </a:xfrm>
+          <a:prstGeom prst="line">
+            <a:avLst/>
+          </a:prstGeom>
+          <a:ln w="19050">
+            <a:solidFill>
+              <a:srgbClr val="C9D4E2"/>
+            </a:solidFill>
+          </a:ln>
+        </p:spPr>
+        <p:style>
+          <a:lnRef idx="2">
+            <a:schemeClr val="accent1"/>
+          </a:lnRef>
+          <a:fillRef idx="0">
+            <a:schemeClr val="accent1"/>
+          </a:fillRef>
+          <a:effectRef idx="1">
+            <a:schemeClr val="accent1"/>
+          </a:effectRef>
+          <a:fontRef idx="minor">
+            <a:schemeClr val="tx1"/>
+          </a:fontRef>
+        </p:style>
+      </p:cxnSp>
+      <p:cxnSp>
+        <p:nvCxnSpPr>
+          <p:cNvPr id="26" name="Connector 25"/>
+          <p:cNvCxnSpPr/>
+          <p:nvPr/>
+        </p:nvCxnSpPr>
+        <p:spPr>
+          <a:xfrm>
+            <a:off x="10594695.5" y="3913632"/>
+            <a:ext cx="0.0" cy="246888"/>
+          </a:xfrm>
+          <a:prstGeom prst="line">
+            <a:avLst/>
+          </a:prstGeom>
+          <a:ln w="19050">
+            <a:solidFill>
+              <a:srgbClr val="C9D4E2"/>
+            </a:solidFill>
+          </a:ln>
+        </p:spPr>
+        <p:style>
+          <a:lnRef idx="2">
+            <a:schemeClr val="accent1"/>
+          </a:lnRef>
+          <a:fillRef idx="0">
+            <a:schemeClr val="accent1"/>
+          </a:fillRef>
+          <a:effectRef idx="1">
+            <a:schemeClr val="accent1"/>
+          </a:effectRef>
+          <a:fontRef idx="minor">
+            <a:schemeClr val="tx1"/>
+          </a:fontRef>
+        </p:style>
+      </p:cxnSp>
+      <p:sp>
+        <p:nvSpPr>
+          <p:cNvPr id="27" name="Rounded Rectangle 26"/>
+          <p:cNvSpPr/>
+          <p:nvPr/>
+        </p:nvSpPr>
+        <p:spPr>
+          <a:xfrm>
+            <a:off x="225399" y="4160520"/>
+            <a:ext cx="2743200" cy="1051560"/>
           </a:xfrm>
           <a:prstGeom prst="roundRect">
             <a:avLst>
@@ -4067,7 +4771,7 @@
           </a:fontRef>
         </p:style>
         <p:txBody>
-          <a:bodyPr rtlCol="0" anchor="ctr" wrap="square" tIns="20000" bIns="20000" lIns="40000" rIns="40000"/>
+          <a:bodyPr rtlCol="0" anchor="ctr" wrap="square" tIns="20000" bIns="20000" lIns="200000" rIns="60000"/>
           <a:lstStyle/>
           <a:p>
             <a:pPr algn="ctr">
@@ -4076,13 +4780,13 @@
               </a:spcAft>
             </a:pPr>
             <a:r>
-              <a:rPr sz="850" b="1">
-                <a:solidFill>
-                  <a:srgbClr val="141B26"/>
-                </a:solidFill>
-                <a:latin typeface="Calibri"/>
-              </a:rPr>
-              <a:t>Maintenance Planning</a:t>
+              <a:rPr sz="1000" b="1">
+                <a:solidFill>
+                  <a:srgbClr val="141B26"/>
+                </a:solidFill>
+                <a:latin typeface="Calibri"/>
+              </a:rPr>
+              <a:t>Metallurgy · Recycling Expert · Environmental / HSEC Advisor — Oman</a:t>
             </a:r>
           </a:p>
           <a:p>
@@ -4092,27 +4796,73 @@
               </a:spcAft>
             </a:pPr>
             <a:r>
-              <a:rPr sz="850" b="0">
+              <a:rPr sz="950" b="0">
                 <a:solidFill>
                   <a:srgbClr val="5B6676"/>
                 </a:solidFill>
                 <a:latin typeface="Calibri"/>
               </a:rPr>
-              <a:t>Ángelo Urrutia Tapia</a:t>
-            </a:r>
-          </a:p>
-        </p:txBody>
-      </p:sp>
-      <p:sp>
-        <p:nvSpPr>
-          <p:cNvPr id="12" name="Rounded Rectangle 11"/>
+              <a:t>Kent Christie (Utah, USA)</a:t>
+            </a:r>
+          </a:p>
+        </p:txBody>
+      </p:sp>
+      <p:sp>
+        <p:nvSpPr>
+          <p:cNvPr id="28" name="Rounded Rectangle 27"/>
           <p:cNvSpPr/>
           <p:nvPr/>
         </p:nvSpPr>
         <p:spPr>
           <a:xfrm>
-            <a:off x="8957919" y="3172968"/>
-            <a:ext cx="2697480" cy="713232"/>
+            <a:off x="305399" y="4300520"/>
+            <a:ext cx="70000" cy="771560"/>
+          </a:xfrm>
+          <a:prstGeom prst="roundRect">
+            <a:avLst>
+              <a:gd name="adj" fmla="val 8000"/>
+            </a:avLst>
+          </a:prstGeom>
+          <a:solidFill>
+            <a:srgbClr val="1F6FEB"/>
+          </a:solidFill>
+          <a:ln>
+            <a:noFill/>
+          </a:ln>
+          <a:effectLst/>
+        </p:spPr>
+        <p:style>
+          <a:lnRef idx="1">
+            <a:schemeClr val="accent1"/>
+          </a:lnRef>
+          <a:fillRef idx="3">
+            <a:schemeClr val="accent1"/>
+          </a:fillRef>
+          <a:effectRef idx="2">
+            <a:schemeClr val="accent1"/>
+          </a:effectRef>
+          <a:fontRef idx="minor">
+            <a:schemeClr val="lt1"/>
+          </a:fontRef>
+        </p:style>
+        <p:txBody>
+          <a:bodyPr rtlCol="0" anchor="ctr"/>
+          <a:lstStyle/>
+          <a:p>
+            <a:pPr algn="ctr"/>
+          </a:p>
+        </p:txBody>
+      </p:sp>
+      <p:sp>
+        <p:nvSpPr>
+          <p:cNvPr id="29" name="Rounded Rectangle 28"/>
+          <p:cNvSpPr/>
+          <p:nvPr/>
+        </p:nvSpPr>
+        <p:spPr>
+          <a:xfrm>
+            <a:off x="3224631" y="4160520"/>
+            <a:ext cx="2743200" cy="1051560"/>
           </a:xfrm>
           <a:prstGeom prst="roundRect">
             <a:avLst>
@@ -4144,7 +4894,7 @@
           </a:fontRef>
         </p:style>
         <p:txBody>
-          <a:bodyPr rtlCol="0" anchor="ctr" wrap="square" tIns="20000" bIns="20000" lIns="40000" rIns="40000"/>
+          <a:bodyPr rtlCol="0" anchor="ctr" wrap="square" tIns="20000" bIns="20000" lIns="200000" rIns="60000"/>
           <a:lstStyle/>
           <a:p>
             <a:pPr algn="ctr">
@@ -4153,13 +4903,13 @@
               </a:spcAft>
             </a:pPr>
             <a:r>
-              <a:rPr sz="850" b="1">
-                <a:solidFill>
-                  <a:srgbClr val="141B26"/>
-                </a:solidFill>
-                <a:latin typeface="Calibri"/>
-              </a:rPr>
-              <a:t>Designer / BIM Manager — Piping</a:t>
+              <a:rPr sz="1000" b="1">
+                <a:solidFill>
+                  <a:srgbClr val="141B26"/>
+                </a:solidFill>
+                <a:latin typeface="Calibri"/>
+              </a:rPr>
+              <a:t>3D Industrial Designer</a:t>
             </a:r>
           </a:p>
           <a:p>
@@ -4169,7 +4919,7 @@
               </a:spcAft>
             </a:pPr>
             <a:r>
-              <a:rPr sz="850" b="0">
+              <a:rPr sz="950" b="0">
                 <a:solidFill>
                   <a:srgbClr val="5B6676"/>
                 </a:solidFill>
@@ -4182,14 +4932,60 @@
       </p:sp>
       <p:sp>
         <p:nvSpPr>
-          <p:cNvPr id="13" name="Rounded Rectangle 12"/>
+          <p:cNvPr id="30" name="Rounded Rectangle 29"/>
           <p:cNvSpPr/>
           <p:nvPr/>
         </p:nvSpPr>
         <p:spPr>
           <a:xfrm>
-            <a:off x="536295" y="4014216"/>
-            <a:ext cx="2697480" cy="713232"/>
+            <a:off x="3304631" y="4300520"/>
+            <a:ext cx="70000" cy="771560"/>
+          </a:xfrm>
+          <a:prstGeom prst="roundRect">
+            <a:avLst>
+              <a:gd name="adj" fmla="val 8000"/>
+            </a:avLst>
+          </a:prstGeom>
+          <a:solidFill>
+            <a:srgbClr val="16A34A"/>
+          </a:solidFill>
+          <a:ln>
+            <a:noFill/>
+          </a:ln>
+          <a:effectLst/>
+        </p:spPr>
+        <p:style>
+          <a:lnRef idx="1">
+            <a:schemeClr val="accent1"/>
+          </a:lnRef>
+          <a:fillRef idx="3">
+            <a:schemeClr val="accent1"/>
+          </a:fillRef>
+          <a:effectRef idx="2">
+            <a:schemeClr val="accent1"/>
+          </a:effectRef>
+          <a:fontRef idx="minor">
+            <a:schemeClr val="lt1"/>
+          </a:fontRef>
+        </p:style>
+        <p:txBody>
+          <a:bodyPr rtlCol="0" anchor="ctr"/>
+          <a:lstStyle/>
+          <a:p>
+            <a:pPr algn="ctr"/>
+          </a:p>
+        </p:txBody>
+      </p:sp>
+      <p:sp>
+        <p:nvSpPr>
+          <p:cNvPr id="31" name="Rounded Rectangle 30"/>
+          <p:cNvSpPr/>
+          <p:nvPr/>
+        </p:nvSpPr>
+        <p:spPr>
+          <a:xfrm>
+            <a:off x="6223863" y="4160520"/>
+            <a:ext cx="2743200" cy="1051560"/>
           </a:xfrm>
           <a:prstGeom prst="roundRect">
             <a:avLst>
@@ -4221,7 +5017,7 @@
           </a:fontRef>
         </p:style>
         <p:txBody>
-          <a:bodyPr rtlCol="0" anchor="ctr" wrap="square" tIns="20000" bIns="20000" lIns="40000" rIns="40000"/>
+          <a:bodyPr rtlCol="0" anchor="ctr" wrap="square" tIns="20000" bIns="20000" lIns="200000" rIns="60000"/>
           <a:lstStyle/>
           <a:p>
             <a:pPr algn="ctr">
@@ -4230,13 +5026,13 @@
               </a:spcAft>
             </a:pPr>
             <a:r>
-              <a:rPr sz="850" b="1">
-                <a:solidFill>
-                  <a:srgbClr val="141B26"/>
-                </a:solidFill>
-                <a:latin typeface="Calibri"/>
-              </a:rPr>
-              <a:t>HSE / Environmental Advisor</a:t>
+              <a:rPr sz="1000" b="1">
+                <a:solidFill>
+                  <a:srgbClr val="141B26"/>
+                </a:solidFill>
+                <a:latin typeface="Calibri"/>
+              </a:rPr>
+              <a:t>Mechanical Maintenance</a:t>
             </a:r>
           </a:p>
           <a:p>
@@ -4246,27 +5042,73 @@
               </a:spcAft>
             </a:pPr>
             <a:r>
-              <a:rPr sz="850" b="0">
+              <a:rPr sz="950" b="0">
                 <a:solidFill>
                   <a:srgbClr val="5B6676"/>
                 </a:solidFill>
                 <a:latin typeface="Calibri"/>
               </a:rPr>
-              <a:t>Kent Christie</a:t>
-            </a:r>
-          </a:p>
-        </p:txBody>
-      </p:sp>
-      <p:sp>
-        <p:nvSpPr>
-          <p:cNvPr id="14" name="Rounded Rectangle 13"/>
+              <a:t>Ángelo Urrutia Tapia</a:t>
+            </a:r>
+          </a:p>
+        </p:txBody>
+      </p:sp>
+      <p:sp>
+        <p:nvSpPr>
+          <p:cNvPr id="32" name="Rounded Rectangle 31"/>
           <p:cNvSpPr/>
           <p:nvPr/>
         </p:nvSpPr>
         <p:spPr>
           <a:xfrm>
-            <a:off x="3343503" y="4014216"/>
-            <a:ext cx="2697480" cy="713232"/>
+            <a:off x="6303863" y="4300520"/>
+            <a:ext cx="70000" cy="771560"/>
+          </a:xfrm>
+          <a:prstGeom prst="roundRect">
+            <a:avLst>
+              <a:gd name="adj" fmla="val 8000"/>
+            </a:avLst>
+          </a:prstGeom>
+          <a:solidFill>
+            <a:srgbClr val="F59E0B"/>
+          </a:solidFill>
+          <a:ln>
+            <a:noFill/>
+          </a:ln>
+          <a:effectLst/>
+        </p:spPr>
+        <p:style>
+          <a:lnRef idx="1">
+            <a:schemeClr val="accent1"/>
+          </a:lnRef>
+          <a:fillRef idx="3">
+            <a:schemeClr val="accent1"/>
+          </a:fillRef>
+          <a:effectRef idx="2">
+            <a:schemeClr val="accent1"/>
+          </a:effectRef>
+          <a:fontRef idx="minor">
+            <a:schemeClr val="lt1"/>
+          </a:fontRef>
+        </p:style>
+        <p:txBody>
+          <a:bodyPr rtlCol="0" anchor="ctr"/>
+          <a:lstStyle/>
+          <a:p>
+            <a:pPr algn="ctr"/>
+          </a:p>
+        </p:txBody>
+      </p:sp>
+      <p:sp>
+        <p:nvSpPr>
+          <p:cNvPr id="33" name="Rounded Rectangle 32"/>
+          <p:cNvSpPr/>
+          <p:nvPr/>
+        </p:nvSpPr>
+        <p:spPr>
+          <a:xfrm>
+            <a:off x="9223095" y="4160520"/>
+            <a:ext cx="2743200" cy="1051560"/>
           </a:xfrm>
           <a:prstGeom prst="roundRect">
             <a:avLst>
@@ -4298,7 +5140,7 @@
           </a:fontRef>
         </p:style>
         <p:txBody>
-          <a:bodyPr rtlCol="0" anchor="ctr" wrap="square" tIns="20000" bIns="20000" lIns="40000" rIns="40000"/>
+          <a:bodyPr rtlCol="0" anchor="ctr" wrap="square" tIns="20000" bIns="20000" lIns="200000" rIns="60000"/>
           <a:lstStyle/>
           <a:p>
             <a:pPr algn="ctr">
@@ -4307,13 +5149,13 @@
               </a:spcAft>
             </a:pPr>
             <a:r>
-              <a:rPr sz="850" b="1">
-                <a:solidFill>
-                  <a:srgbClr val="141B26"/>
-                </a:solidFill>
-                <a:latin typeface="Calibri"/>
-              </a:rPr>
-              <a:t>Quality Assurance (QA)</a:t>
+              <a:rPr sz="1000" b="1">
+                <a:solidFill>
+                  <a:srgbClr val="141B26"/>
+                </a:solidFill>
+                <a:latin typeface="Calibri"/>
+              </a:rPr>
+              <a:t>Quality Analyst</a:t>
             </a:r>
           </a:p>
           <a:p>
@@ -4323,7 +5165,7 @@
               </a:spcAft>
             </a:pPr>
             <a:r>
-              <a:rPr sz="850" b="0">
+              <a:rPr sz="950" b="0">
                 <a:solidFill>
                   <a:srgbClr val="5B6676"/>
                 </a:solidFill>
@@ -4336,14 +5178,14 @@
       </p:sp>
       <p:sp>
         <p:nvSpPr>
-          <p:cNvPr id="15" name="Rounded Rectangle 14"/>
+          <p:cNvPr id="34" name="Rounded Rectangle 33"/>
           <p:cNvSpPr/>
           <p:nvPr/>
         </p:nvSpPr>
         <p:spPr>
           <a:xfrm>
-            <a:off x="6150711" y="4014216"/>
-            <a:ext cx="2697480" cy="713232"/>
+            <a:off x="9303095" y="4300520"/>
+            <a:ext cx="70000" cy="771560"/>
           </a:xfrm>
           <a:prstGeom prst="roundRect">
             <a:avLst>
@@ -4351,12 +5193,10 @@
             </a:avLst>
           </a:prstGeom>
           <a:solidFill>
-            <a:srgbClr val="FFFFFF"/>
+            <a:srgbClr val="7C3AED"/>
           </a:solidFill>
-          <a:ln w="15875">
-            <a:solidFill>
-              <a:srgbClr val="C9D4E2"/>
-            </a:solidFill>
+          <a:ln>
+            <a:noFill/>
           </a:ln>
           <a:effectLst/>
         </p:spPr>
@@ -4375,129 +5215,23 @@
           </a:fontRef>
         </p:style>
         <p:txBody>
-          <a:bodyPr rtlCol="0" anchor="ctr" wrap="square" tIns="20000" bIns="20000" lIns="40000" rIns="40000"/>
-          <a:lstStyle/>
-          <a:p>
-            <a:pPr algn="ctr">
-              <a:spcAft>
-                <a:spcPts val="100"/>
-              </a:spcAft>
-            </a:pPr>
-            <a:r>
-              <a:rPr sz="850" b="1">
-                <a:solidFill>
-                  <a:srgbClr val="141B26"/>
-                </a:solidFill>
-                <a:latin typeface="Calibri"/>
-              </a:rPr>
-              <a:t>Process Builder</a:t>
-            </a:r>
-          </a:p>
-          <a:p>
-            <a:pPr algn="ctr">
-              <a:spcAft>
-                <a:spcPts val="200"/>
-              </a:spcAft>
-            </a:pPr>
-            <a:r>
-              <a:rPr sz="850" b="0">
-                <a:solidFill>
-                  <a:srgbClr val="5B6676"/>
-                </a:solidFill>
-                <a:latin typeface="Calibri"/>
-              </a:rPr>
-              <a:t>Luis F. Hidalgo Cortés</a:t>
-            </a:r>
-          </a:p>
-        </p:txBody>
-      </p:sp>
-      <p:sp>
-        <p:nvSpPr>
-          <p:cNvPr id="16" name="Rounded Rectangle 15"/>
+          <a:bodyPr rtlCol="0" anchor="ctr"/>
+          <a:lstStyle/>
+          <a:p>
+            <a:pPr algn="ctr"/>
+          </a:p>
+        </p:txBody>
+      </p:sp>
+      <p:sp>
+        <p:nvSpPr>
+          <p:cNvPr id="35" name="Rounded Rectangle 34"/>
           <p:cNvSpPr/>
           <p:nvPr/>
         </p:nvSpPr>
         <p:spPr>
           <a:xfrm>
-            <a:off x="8957919" y="4014216"/>
-            <a:ext cx="2697480" cy="713232"/>
-          </a:xfrm>
-          <a:prstGeom prst="roundRect">
-            <a:avLst>
-              <a:gd name="adj" fmla="val 8000"/>
-            </a:avLst>
-          </a:prstGeom>
-          <a:solidFill>
-            <a:srgbClr val="FFFFFF"/>
-          </a:solidFill>
-          <a:ln w="15875">
-            <a:solidFill>
-              <a:srgbClr val="C9D4E2"/>
-            </a:solidFill>
-          </a:ln>
-          <a:effectLst/>
-        </p:spPr>
-        <p:style>
-          <a:lnRef idx="1">
-            <a:schemeClr val="accent1"/>
-          </a:lnRef>
-          <a:fillRef idx="3">
-            <a:schemeClr val="accent1"/>
-          </a:fillRef>
-          <a:effectRef idx="2">
-            <a:schemeClr val="accent1"/>
-          </a:effectRef>
-          <a:fontRef idx="minor">
-            <a:schemeClr val="lt1"/>
-          </a:fontRef>
-        </p:style>
-        <p:txBody>
-          <a:bodyPr rtlCol="0" anchor="ctr" wrap="square" tIns="20000" bIns="20000" lIns="40000" rIns="40000"/>
-          <a:lstStyle/>
-          <a:p>
-            <a:pPr algn="ctr">
-              <a:spcAft>
-                <a:spcPts val="100"/>
-              </a:spcAft>
-            </a:pPr>
-            <a:r>
-              <a:rPr sz="850" b="1">
-                <a:solidFill>
-                  <a:srgbClr val="141B26"/>
-                </a:solidFill>
-                <a:latin typeface="Calibri"/>
-              </a:rPr>
-              <a:t>Recycling Expert</a:t>
-            </a:r>
-          </a:p>
-          <a:p>
-            <a:pPr algn="ctr">
-              <a:spcAft>
-                <a:spcPts val="200"/>
-              </a:spcAft>
-            </a:pPr>
-            <a:r>
-              <a:rPr sz="850" b="0">
-                <a:solidFill>
-                  <a:srgbClr val="5B6676"/>
-                </a:solidFill>
-                <a:latin typeface="Calibri"/>
-              </a:rPr>
-              <a:t>senior · USA</a:t>
-            </a:r>
-          </a:p>
-        </p:txBody>
-      </p:sp>
-      <p:sp>
-        <p:nvSpPr>
-          <p:cNvPr id="17" name="Rounded Rectangle 16"/>
-          <p:cNvSpPr/>
-          <p:nvPr/>
-        </p:nvSpPr>
-        <p:spPr>
-          <a:xfrm>
-            <a:off x="536295" y="4919472"/>
-            <a:ext cx="11119104" cy="457200"/>
+            <a:off x="225399" y="5623560"/>
+            <a:ext cx="11740896" cy="502920"/>
           </a:xfrm>
           <a:prstGeom prst="roundRect">
             <a:avLst>
@@ -4538,7 +5272,7 @@
               </a:spcAft>
             </a:pPr>
             <a:r>
-              <a:rPr sz="900" b="0">
+              <a:rPr sz="1000" b="0">
                 <a:solidFill>
                   <a:srgbClr val="5B6676"/>
                 </a:solidFill>
@@ -4619,7 +5353,7 @@
         </p:nvSpPr>
         <p:spPr>
           <a:xfrm>
-            <a:off x="411480" y="73152"/>
+            <a:off x="411480" y="64008"/>
             <a:ext cx="8778240" cy="868680"/>
           </a:xfrm>
           <a:prstGeom prst="rect">
@@ -4639,7 +5373,7 @@
               </a:spcAft>
             </a:pPr>
             <a:r>
-              <a:rPr sz="2600" b="1">
+              <a:rPr sz="2700" b="1">
                 <a:solidFill>
                   <a:srgbClr val="FFFFFF"/>
                 </a:solidFill>
@@ -4661,7 +5395,7 @@
                 </a:solidFill>
                 <a:latin typeface="Calibri"/>
               </a:rPr>
-              <a:t>Project Director</a:t>
+              <a:t>Director</a:t>
             </a:r>
           </a:p>
         </p:txBody>
@@ -4710,7 +5444,7 @@
               </a:spcAft>
             </a:pPr>
             <a:r>
-              <a:rPr sz="900" b="0">
+              <a:rPr sz="950" b="0">
                 <a:solidFill>
                   <a:srgbClr val="C8D8F5"/>
                 </a:solidFill>
@@ -4726,7 +5460,7 @@
               </a:spcAft>
             </a:pPr>
             <a:r>
-              <a:rPr sz="900" b="0">
+              <a:rPr sz="950" b="0">
                 <a:solidFill>
                   <a:srgbClr val="C8D8F5"/>
                 </a:solidFill>
@@ -4746,7 +5480,7 @@
         <p:spPr>
           <a:xfrm>
             <a:off x="228600" y="1143000"/>
-            <a:ext cx="3246120" cy="5486400"/>
+            <a:ext cx="3246120" cy="5532120"/>
           </a:xfrm>
           <a:prstGeom prst="roundRect">
             <a:avLst>
@@ -4793,7 +5527,7 @@
         </p:nvSpPr>
         <p:spPr>
           <a:xfrm>
-            <a:off x="384048" y="1280160"/>
+            <a:off x="384048" y="1261872"/>
             <a:ext cx="2971800" cy="457200"/>
           </a:xfrm>
           <a:prstGeom prst="rect">
@@ -4813,7 +5547,7 @@
               </a:spcAft>
             </a:pPr>
             <a:r>
-              <a:rPr sz="1050" b="1">
+              <a:rPr sz="1100" b="1">
                 <a:solidFill>
                   <a:srgbClr val="1F6FEB"/>
                 </a:solidFill>
@@ -4849,8 +5583,8 @@
         </p:nvSpPr>
         <p:spPr>
           <a:xfrm>
-            <a:off x="384048" y="1965960"/>
-            <a:ext cx="2971800" cy="2011680"/>
+            <a:off x="384048" y="1920240"/>
+            <a:ext cx="2971800" cy="2103120"/>
           </a:xfrm>
           <a:prstGeom prst="rect">
             <a:avLst/>
@@ -4869,7 +5603,7 @@
               </a:spcAft>
             </a:pPr>
             <a:r>
-              <a:rPr sz="1050" b="1">
+              <a:rPr sz="1100" b="1">
                 <a:solidFill>
                   <a:srgbClr val="1F6FEB"/>
                 </a:solidFill>
@@ -4886,7 +5620,7 @@
               <a:buChar char="•"/>
             </a:pPr>
             <a:r>
-              <a:rPr sz="900" b="0">
+              <a:rPr sz="950" b="0">
                 <a:solidFill>
                   <a:srgbClr val="141B26"/>
                 </a:solidFill>
@@ -4903,7 +5637,7 @@
               <a:buChar char="•"/>
             </a:pPr>
             <a:r>
-              <a:rPr sz="900" b="0">
+              <a:rPr sz="950" b="0">
                 <a:solidFill>
                   <a:srgbClr val="141B26"/>
                 </a:solidFill>
@@ -4920,7 +5654,7 @@
               <a:buChar char="•"/>
             </a:pPr>
             <a:r>
-              <a:rPr sz="900" b="0">
+              <a:rPr sz="950" b="0">
                 <a:solidFill>
                   <a:srgbClr val="141B26"/>
                 </a:solidFill>
@@ -4937,7 +5671,7 @@
               <a:buChar char="•"/>
             </a:pPr>
             <a:r>
-              <a:rPr sz="900" b="0">
+              <a:rPr sz="950" b="0">
                 <a:solidFill>
                   <a:srgbClr val="141B26"/>
                 </a:solidFill>
@@ -4956,8 +5690,8 @@
         </p:nvSpPr>
         <p:spPr>
           <a:xfrm>
-            <a:off x="384048" y="4069080"/>
-            <a:ext cx="2971800" cy="2377440"/>
+            <a:off x="384048" y="4114800"/>
+            <a:ext cx="2971800" cy="2468880"/>
           </a:xfrm>
           <a:prstGeom prst="rect">
             <a:avLst/>
@@ -4976,7 +5710,7 @@
               </a:spcAft>
             </a:pPr>
             <a:r>
-              <a:rPr sz="1050" b="1">
+              <a:rPr sz="1100" b="1">
                 <a:solidFill>
                   <a:srgbClr val="1F6FEB"/>
                 </a:solidFill>
@@ -4993,7 +5727,7 @@
               <a:buChar char="•"/>
             </a:pPr>
             <a:r>
-              <a:rPr sz="900" b="0">
+              <a:rPr sz="950" b="0">
                 <a:solidFill>
                   <a:srgbClr val="141B26"/>
                 </a:solidFill>
@@ -5010,7 +5744,7 @@
               <a:buChar char="•"/>
             </a:pPr>
             <a:r>
-              <a:rPr sz="900" b="0">
+              <a:rPr sz="950" b="0">
                 <a:solidFill>
                   <a:srgbClr val="141B26"/>
                 </a:solidFill>
@@ -5027,7 +5761,7 @@
               <a:buChar char="•"/>
             </a:pPr>
             <a:r>
-              <a:rPr sz="900" b="0">
+              <a:rPr sz="950" b="0">
                 <a:solidFill>
                   <a:srgbClr val="141B26"/>
                 </a:solidFill>
@@ -5044,7 +5778,7 @@
               <a:buChar char="•"/>
             </a:pPr>
             <a:r>
-              <a:rPr sz="900" b="0">
+              <a:rPr sz="950" b="0">
                 <a:solidFill>
                   <a:srgbClr val="141B26"/>
                 </a:solidFill>
@@ -5061,7 +5795,7 @@
               <a:buChar char="•"/>
             </a:pPr>
             <a:r>
-              <a:rPr sz="900" b="0">
+              <a:rPr sz="950" b="0">
                 <a:solidFill>
                   <a:srgbClr val="141B26"/>
                 </a:solidFill>
@@ -5080,8 +5814,8 @@
         </p:nvSpPr>
         <p:spPr>
           <a:xfrm>
-            <a:off x="3703320" y="1234440"/>
-            <a:ext cx="4114800" cy="2834640"/>
+            <a:off x="3703320" y="1207008"/>
+            <a:ext cx="4114800" cy="3108960"/>
           </a:xfrm>
           <a:prstGeom prst="rect">
             <a:avLst/>
@@ -5100,7 +5834,7 @@
               </a:spcAft>
             </a:pPr>
             <a:r>
-              <a:rPr sz="1050" b="1">
+              <a:rPr sz="1100" b="1">
                 <a:solidFill>
                   <a:srgbClr val="1F6FEB"/>
                 </a:solidFill>
@@ -5117,7 +5851,7 @@
               <a:buChar char="•"/>
             </a:pPr>
             <a:r>
-              <a:rPr sz="900" b="0">
+              <a:rPr sz="950" b="0">
                 <a:solidFill>
                   <a:srgbClr val="141B26"/>
                 </a:solidFill>
@@ -5134,7 +5868,7 @@
               <a:buChar char="•"/>
             </a:pPr>
             <a:r>
-              <a:rPr sz="900" b="0">
+              <a:rPr sz="950" b="0">
                 <a:solidFill>
                   <a:srgbClr val="141B26"/>
                 </a:solidFill>
@@ -5151,7 +5885,7 @@
               <a:buChar char="•"/>
             </a:pPr>
             <a:r>
-              <a:rPr sz="900" b="0">
+              <a:rPr sz="950" b="0">
                 <a:solidFill>
                   <a:srgbClr val="141B26"/>
                 </a:solidFill>
@@ -5168,7 +5902,7 @@
               <a:buChar char="•"/>
             </a:pPr>
             <a:r>
-              <a:rPr sz="900" b="0">
+              <a:rPr sz="950" b="0">
                 <a:solidFill>
                   <a:srgbClr val="141B26"/>
                 </a:solidFill>
@@ -5185,7 +5919,7 @@
               <a:buChar char="•"/>
             </a:pPr>
             <a:r>
-              <a:rPr sz="900" b="0">
+              <a:rPr sz="950" b="0">
                 <a:solidFill>
                   <a:srgbClr val="141B26"/>
                 </a:solidFill>
@@ -5202,7 +5936,7 @@
               <a:buChar char="•"/>
             </a:pPr>
             <a:r>
-              <a:rPr sz="900" b="0">
+              <a:rPr sz="950" b="0">
                 <a:solidFill>
                   <a:srgbClr val="141B26"/>
                 </a:solidFill>
@@ -5219,7 +5953,7 @@
               <a:buChar char="•"/>
             </a:pPr>
             <a:r>
-              <a:rPr sz="900" b="0">
+              <a:rPr sz="950" b="0">
                 <a:solidFill>
                   <a:srgbClr val="141B26"/>
                 </a:solidFill>
@@ -5238,8 +5972,8 @@
         </p:nvSpPr>
         <p:spPr>
           <a:xfrm>
-            <a:off x="3703320" y="4206240"/>
-            <a:ext cx="4114800" cy="2468880"/>
+            <a:off x="3703320" y="4434840"/>
+            <a:ext cx="4114800" cy="2240280"/>
           </a:xfrm>
           <a:prstGeom prst="rect">
             <a:avLst/>
@@ -5258,7 +5992,7 @@
               </a:spcAft>
             </a:pPr>
             <a:r>
-              <a:rPr sz="1050" b="1">
+              <a:rPr sz="1100" b="1">
                 <a:solidFill>
                   <a:srgbClr val="1F6FEB"/>
                 </a:solidFill>
@@ -5275,7 +6009,7 @@
               <a:buChar char="•"/>
             </a:pPr>
             <a:r>
-              <a:rPr sz="900" b="0">
+              <a:rPr sz="950" b="0">
                 <a:solidFill>
                   <a:srgbClr val="141B26"/>
                 </a:solidFill>
@@ -5292,7 +6026,7 @@
               <a:buChar char="•"/>
             </a:pPr>
             <a:r>
-              <a:rPr sz="900" b="0">
+              <a:rPr sz="950" b="0">
                 <a:solidFill>
                   <a:srgbClr val="141B26"/>
                 </a:solidFill>
@@ -5309,7 +6043,7 @@
               <a:buChar char="•"/>
             </a:pPr>
             <a:r>
-              <a:rPr sz="900" b="0">
+              <a:rPr sz="950" b="0">
                 <a:solidFill>
                   <a:srgbClr val="141B26"/>
                 </a:solidFill>
@@ -5326,7 +6060,7 @@
               <a:buChar char="•"/>
             </a:pPr>
             <a:r>
-              <a:rPr sz="900" b="0">
+              <a:rPr sz="950" b="0">
                 <a:solidFill>
                   <a:srgbClr val="141B26"/>
                 </a:solidFill>
@@ -5343,24 +6077,7 @@
               <a:buChar char="•"/>
             </a:pPr>
             <a:r>
-              <a:rPr sz="900" b="0">
-                <a:solidFill>
-                  <a:srgbClr val="141B26"/>
-                </a:solidFill>
-                <a:latin typeface="Calibri"/>
-              </a:rPr>
-              <a:t>Predictive and corrective maintenance</a:t>
-            </a:r>
-          </a:p>
-          <a:p>
-            <a:pPr>
-              <a:spcAft>
-                <a:spcPts val="200"/>
-              </a:spcAft>
-              <a:buChar char="•"/>
-            </a:pPr>
-            <a:r>
-              <a:rPr sz="900" b="0">
+              <a:rPr sz="950" b="0">
                 <a:solidFill>
                   <a:srgbClr val="141B26"/>
                 </a:solidFill>
@@ -5377,7 +6094,7 @@
               <a:buChar char="•"/>
             </a:pPr>
             <a:r>
-              <a:rPr sz="900" b="0">
+              <a:rPr sz="950" b="0">
                 <a:solidFill>
                   <a:srgbClr val="141B26"/>
                 </a:solidFill>
@@ -5390,14 +6107,62 @@
       </p:sp>
       <p:sp>
         <p:nvSpPr>
-          <p:cNvPr id="11" name="TextBox 10"/>
+          <p:cNvPr id="11" name="Rounded Rectangle 10"/>
+          <p:cNvSpPr/>
+          <p:nvPr/>
+        </p:nvSpPr>
+        <p:spPr>
+          <a:xfrm>
+            <a:off x="8001000" y="1143000"/>
+            <a:ext cx="3977639" cy="2331720"/>
+          </a:xfrm>
+          <a:prstGeom prst="roundRect">
+            <a:avLst>
+              <a:gd name="adj" fmla="val 8000"/>
+            </a:avLst>
+          </a:prstGeom>
+          <a:solidFill>
+            <a:srgbClr val="F0F4FA"/>
+          </a:solidFill>
+          <a:ln w="15875">
+            <a:solidFill>
+              <a:srgbClr val="0E7C5A"/>
+            </a:solidFill>
+          </a:ln>
+          <a:effectLst/>
+        </p:spPr>
+        <p:style>
+          <a:lnRef idx="1">
+            <a:schemeClr val="accent1"/>
+          </a:lnRef>
+          <a:fillRef idx="3">
+            <a:schemeClr val="accent1"/>
+          </a:fillRef>
+          <a:effectRef idx="2">
+            <a:schemeClr val="accent1"/>
+          </a:effectRef>
+          <a:fontRef idx="minor">
+            <a:schemeClr val="lt1"/>
+          </a:fontRef>
+        </p:style>
+        <p:txBody>
+          <a:bodyPr rtlCol="0" anchor="ctr"/>
+          <a:lstStyle/>
+          <a:p>
+            <a:pPr algn="ctr"/>
+          </a:p>
+        </p:txBody>
+      </p:sp>
+      <p:sp>
+        <p:nvSpPr>
+          <p:cNvPr id="12" name="TextBox 11"/>
           <p:cNvSpPr txBox="1"/>
           <p:nvPr/>
         </p:nvSpPr>
         <p:spPr>
           <a:xfrm>
-            <a:off x="8046720" y="1234440"/>
-            <a:ext cx="3886200" cy="5394960"/>
+            <a:off x="8138160" y="1252728"/>
+            <a:ext cx="3703320" cy="2148840"/>
           </a:xfrm>
           <a:prstGeom prst="rect">
             <a:avLst/>
@@ -5418,6 +6183,96 @@
             <a:r>
               <a:rPr sz="1050" b="1">
                 <a:solidFill>
+                  <a:srgbClr val="0E7C5A"/>
+                </a:solidFill>
+                <a:latin typeface="Calibri"/>
+              </a:rPr>
+              <a:t>🎯 VALUE TO THIS PROJECT — DUQM</a:t>
+            </a:r>
+          </a:p>
+          <a:p>
+            <a:pPr>
+              <a:spcAft>
+                <a:spcPts val="200"/>
+              </a:spcAft>
+              <a:buChar char="•"/>
+            </a:pPr>
+            <a:r>
+              <a:rPr sz="950" b="0">
+                <a:solidFill>
+                  <a:srgbClr val="141B26"/>
+                </a:solidFill>
+                <a:latin typeface="Calibri"/>
+              </a:rPr>
+              <a:t>Leads the study end to end: metallurgical process engineer with 20+ years operating and maintaining large-scale mining plants.</a:t>
+            </a:r>
+          </a:p>
+          <a:p>
+            <a:pPr>
+              <a:spcAft>
+                <a:spcPts val="200"/>
+              </a:spcAft>
+              <a:buChar char="•"/>
+            </a:pPr>
+            <a:r>
+              <a:rPr sz="950" b="0">
+                <a:solidFill>
+                  <a:srgbClr val="141B26"/>
+                </a:solidFill>
+                <a:latin typeface="Calibri"/>
+              </a:rPr>
+              <a:t>Commissioning and start-up of real plants (filtration, thickening, tailings): the study is designed with operations in mind.</a:t>
+            </a:r>
+          </a:p>
+          <a:p>
+            <a:pPr>
+              <a:spcAft>
+                <a:spcPts val="200"/>
+              </a:spcAft>
+              <a:buChar char="•"/>
+            </a:pPr>
+            <a:r>
+              <a:rPr sz="950" b="0">
+                <a:solidFill>
+                  <a:srgbClr val="141B26"/>
+                </a:solidFill>
+                <a:latin typeface="Calibri"/>
+              </a:rPr>
+              <a:t>Single technical counterpart for the client and partners (HLC / Tonino).</a:t>
+            </a:r>
+          </a:p>
+        </p:txBody>
+      </p:sp>
+      <p:sp>
+        <p:nvSpPr>
+          <p:cNvPr id="13" name="TextBox 12"/>
+          <p:cNvSpPr txBox="1"/>
+          <p:nvPr/>
+        </p:nvSpPr>
+        <p:spPr>
+          <a:xfrm>
+            <a:off x="8046720" y="3657600"/>
+            <a:ext cx="3931920" cy="3017520"/>
+          </a:xfrm>
+          <a:prstGeom prst="rect">
+            <a:avLst/>
+          </a:prstGeom>
+          <a:noFill/>
+        </p:spPr>
+        <p:txBody>
+          <a:bodyPr wrap="square">
+            <a:spAutoFit/>
+          </a:bodyPr>
+          <a:lstStyle/>
+          <a:p>
+            <a:pPr>
+              <a:spcAft>
+                <a:spcPts val="400"/>
+              </a:spcAft>
+            </a:pPr>
+            <a:r>
+              <a:rPr sz="1100" b="1">
+                <a:solidFill>
                   <a:srgbClr val="1F6FEB"/>
                 </a:solidFill>
                 <a:latin typeface="Calibri"/>
@@ -5433,7 +6288,7 @@
               <a:buChar char="•"/>
             </a:pPr>
             <a:r>
-              <a:rPr sz="950" b="0">
+              <a:rPr sz="1000" b="0">
                 <a:solidFill>
                   <a:srgbClr val="141B26"/>
                 </a:solidFill>
@@ -5450,7 +6305,7 @@
               <a:buChar char="•"/>
             </a:pPr>
             <a:r>
-              <a:rPr sz="950" b="0">
+              <a:rPr sz="1000" b="0">
                 <a:solidFill>
                   <a:srgbClr val="141B26"/>
                 </a:solidFill>
@@ -5467,64 +6322,30 @@
               <a:buChar char="•"/>
             </a:pPr>
             <a:r>
-              <a:rPr sz="950" b="0">
+              <a:rPr sz="1000" b="0">
+                <a:solidFill>
+                  <a:srgbClr val="141B26"/>
+                </a:solidFill>
+                <a:latin typeface="Calibri"/>
+              </a:rPr>
+              <a:t>Commissioning and start-up of filtration, thickening and tailings plants.</a:t>
+            </a:r>
+          </a:p>
+          <a:p>
+            <a:pPr>
+              <a:spcAft>
+                <a:spcPts val="200"/>
+              </a:spcAft>
+              <a:buChar char="•"/>
+            </a:pPr>
+            <a:r>
+              <a:rPr sz="1000" b="0">
                 <a:solidFill>
                   <a:srgbClr val="141B26"/>
                 </a:solidFill>
                 <a:latin typeface="Calibri"/>
               </a:rPr>
               <a:t>International mining project management: underground and open-pit operations in Chile, Colombia and Australia.</a:t>
-            </a:r>
-          </a:p>
-          <a:p>
-            <a:pPr>
-              <a:spcAft>
-                <a:spcPts val="200"/>
-              </a:spcAft>
-              <a:buChar char="•"/>
-            </a:pPr>
-            <a:r>
-              <a:rPr sz="950" b="0">
-                <a:solidFill>
-                  <a:srgbClr val="141B26"/>
-                </a:solidFill>
-                <a:latin typeface="Calibri"/>
-              </a:rPr>
-              <a:t>Advanced simulation models to evaluate operating scenarios and de-risk mining production.</a:t>
-            </a:r>
-          </a:p>
-          <a:p>
-            <a:pPr>
-              <a:spcAft>
-                <a:spcPts val="200"/>
-              </a:spcAft>
-              <a:buChar char="•"/>
-            </a:pPr>
-            <a:r>
-              <a:rPr sz="950" b="0">
-                <a:solidFill>
-                  <a:srgbClr val="141B26"/>
-                </a:solidFill>
-                <a:latin typeface="Calibri"/>
-              </a:rPr>
-              <a:t>Commissioning and start-up of filtration, thickening and tailings plants.</a:t>
-            </a:r>
-          </a:p>
-          <a:p>
-            <a:pPr>
-              <a:spcAft>
-                <a:spcPts val="200"/>
-              </a:spcAft>
-              <a:buChar char="•"/>
-            </a:pPr>
-            <a:r>
-              <a:rPr sz="950" b="0">
-                <a:solidFill>
-                  <a:srgbClr val="141B26"/>
-                </a:solidFill>
-                <a:latin typeface="Calibri"/>
-              </a:rPr>
-              <a:t>SCADA integration and advanced control for processing-plant reliability.</a:t>
             </a:r>
           </a:p>
         </p:txBody>
@@ -5599,7 +6420,7 @@
         </p:nvSpPr>
         <p:spPr>
           <a:xfrm>
-            <a:off x="411480" y="73152"/>
+            <a:off x="411480" y="64008"/>
             <a:ext cx="8778240" cy="868680"/>
           </a:xfrm>
           <a:prstGeom prst="rect">
@@ -5619,7 +6440,7 @@
               </a:spcAft>
             </a:pPr>
             <a:r>
-              <a:rPr sz="2600" b="1">
+              <a:rPr sz="2700" b="1">
                 <a:solidFill>
                   <a:srgbClr val="FFFFFF"/>
                 </a:solidFill>
@@ -5641,7 +6462,7 @@
                 </a:solidFill>
                 <a:latin typeface="Calibri"/>
               </a:rPr>
-              <a:t>Project Manager (+ AI · Digital Twin)</a:t>
+              <a:t>AI-Powered PMO — Autopilot (PM · Digital Twin)</a:t>
             </a:r>
           </a:p>
         </p:txBody>
@@ -5690,7 +6511,7 @@
               </a:spcAft>
             </a:pPr>
             <a:r>
-              <a:rPr sz="900" b="0">
+              <a:rPr sz="950" b="0">
                 <a:solidFill>
                   <a:srgbClr val="C8D8F5"/>
                 </a:solidFill>
@@ -5706,7 +6527,7 @@
               </a:spcAft>
             </a:pPr>
             <a:r>
-              <a:rPr sz="900" b="0">
+              <a:rPr sz="950" b="0">
                 <a:solidFill>
                   <a:srgbClr val="C8D8F5"/>
                 </a:solidFill>
@@ -5726,7 +6547,7 @@
         <p:spPr>
           <a:xfrm>
             <a:off x="228600" y="1143000"/>
-            <a:ext cx="3246120" cy="5486400"/>
+            <a:ext cx="3246120" cy="5532120"/>
           </a:xfrm>
           <a:prstGeom prst="roundRect">
             <a:avLst>
@@ -5773,7 +6594,7 @@
         </p:nvSpPr>
         <p:spPr>
           <a:xfrm>
-            <a:off x="384048" y="1280160"/>
+            <a:off x="384048" y="1261872"/>
             <a:ext cx="2971800" cy="457200"/>
           </a:xfrm>
           <a:prstGeom prst="rect">
@@ -5793,7 +6614,7 @@
               </a:spcAft>
             </a:pPr>
             <a:r>
-              <a:rPr sz="1050" b="1">
+              <a:rPr sz="1100" b="1">
                 <a:solidFill>
                   <a:srgbClr val="1F6FEB"/>
                 </a:solidFill>
@@ -5829,8 +6650,8 @@
         </p:nvSpPr>
         <p:spPr>
           <a:xfrm>
-            <a:off x="384048" y="1965960"/>
-            <a:ext cx="2971800" cy="2011680"/>
+            <a:off x="384048" y="1920240"/>
+            <a:ext cx="2971800" cy="2103120"/>
           </a:xfrm>
           <a:prstGeom prst="rect">
             <a:avLst/>
@@ -5849,7 +6670,7 @@
               </a:spcAft>
             </a:pPr>
             <a:r>
-              <a:rPr sz="1050" b="1">
+              <a:rPr sz="1100" b="1">
                 <a:solidFill>
                   <a:srgbClr val="1F6FEB"/>
                 </a:solidFill>
@@ -5866,7 +6687,7 @@
               <a:buChar char="•"/>
             </a:pPr>
             <a:r>
-              <a:rPr sz="900" b="0">
+              <a:rPr sz="950" b="0">
                 <a:solidFill>
                   <a:srgbClr val="141B26"/>
                 </a:solidFill>
@@ -5883,7 +6704,7 @@
               <a:buChar char="•"/>
             </a:pPr>
             <a:r>
-              <a:rPr sz="900" b="0">
+              <a:rPr sz="950" b="0">
                 <a:solidFill>
                   <a:srgbClr val="141B26"/>
                 </a:solidFill>
@@ -5900,7 +6721,7 @@
               <a:buChar char="•"/>
             </a:pPr>
             <a:r>
-              <a:rPr sz="900" b="0">
+              <a:rPr sz="950" b="0">
                 <a:solidFill>
                   <a:srgbClr val="141B26"/>
                 </a:solidFill>
@@ -5917,7 +6738,7 @@
               <a:buChar char="•"/>
             </a:pPr>
             <a:r>
-              <a:rPr sz="900" b="0">
+              <a:rPr sz="950" b="0">
                 <a:solidFill>
                   <a:srgbClr val="141B26"/>
                 </a:solidFill>
@@ -5936,8 +6757,8 @@
         </p:nvSpPr>
         <p:spPr>
           <a:xfrm>
-            <a:off x="384048" y="4069080"/>
-            <a:ext cx="2971800" cy="2377440"/>
+            <a:off x="384048" y="4114800"/>
+            <a:ext cx="2971800" cy="2468880"/>
           </a:xfrm>
           <a:prstGeom prst="rect">
             <a:avLst/>
@@ -5956,7 +6777,7 @@
               </a:spcAft>
             </a:pPr>
             <a:r>
-              <a:rPr sz="1050" b="1">
+              <a:rPr sz="1100" b="1">
                 <a:solidFill>
                   <a:srgbClr val="1F6FEB"/>
                 </a:solidFill>
@@ -5973,7 +6794,7 @@
               <a:buChar char="•"/>
             </a:pPr>
             <a:r>
-              <a:rPr sz="900" b="0">
+              <a:rPr sz="950" b="0">
                 <a:solidFill>
                   <a:srgbClr val="141B26"/>
                 </a:solidFill>
@@ -5990,7 +6811,7 @@
               <a:buChar char="•"/>
             </a:pPr>
             <a:r>
-              <a:rPr sz="900" b="0">
+              <a:rPr sz="950" b="0">
                 <a:solidFill>
                   <a:srgbClr val="141B26"/>
                 </a:solidFill>
@@ -6007,7 +6828,7 @@
               <a:buChar char="•"/>
             </a:pPr>
             <a:r>
-              <a:rPr sz="900" b="0">
+              <a:rPr sz="950" b="0">
                 <a:solidFill>
                   <a:srgbClr val="141B26"/>
                 </a:solidFill>
@@ -6024,7 +6845,7 @@
               <a:buChar char="•"/>
             </a:pPr>
             <a:r>
-              <a:rPr sz="900" b="0">
+              <a:rPr sz="950" b="0">
                 <a:solidFill>
                   <a:srgbClr val="141B26"/>
                 </a:solidFill>
@@ -6041,7 +6862,7 @@
               <a:buChar char="•"/>
             </a:pPr>
             <a:r>
-              <a:rPr sz="900" b="0">
+              <a:rPr sz="950" b="0">
                 <a:solidFill>
                   <a:srgbClr val="141B26"/>
                 </a:solidFill>
@@ -6060,8 +6881,8 @@
         </p:nvSpPr>
         <p:spPr>
           <a:xfrm>
-            <a:off x="3703320" y="1234440"/>
-            <a:ext cx="4114800" cy="2834640"/>
+            <a:off x="3703320" y="1207008"/>
+            <a:ext cx="4114800" cy="3108960"/>
           </a:xfrm>
           <a:prstGeom prst="rect">
             <a:avLst/>
@@ -6080,7 +6901,7 @@
               </a:spcAft>
             </a:pPr>
             <a:r>
-              <a:rPr sz="1050" b="1">
+              <a:rPr sz="1100" b="1">
                 <a:solidFill>
                   <a:srgbClr val="1F6FEB"/>
                 </a:solidFill>
@@ -6097,7 +6918,7 @@
               <a:buChar char="•"/>
             </a:pPr>
             <a:r>
-              <a:rPr sz="900" b="0">
+              <a:rPr sz="950" b="0">
                 <a:solidFill>
                   <a:srgbClr val="141B26"/>
                 </a:solidFill>
@@ -6114,7 +6935,7 @@
               <a:buChar char="•"/>
             </a:pPr>
             <a:r>
-              <a:rPr sz="900" b="0">
+              <a:rPr sz="950" b="0">
                 <a:solidFill>
                   <a:srgbClr val="141B26"/>
                 </a:solidFill>
@@ -6131,7 +6952,7 @@
               <a:buChar char="•"/>
             </a:pPr>
             <a:r>
-              <a:rPr sz="900" b="0">
+              <a:rPr sz="950" b="0">
                 <a:solidFill>
                   <a:srgbClr val="141B26"/>
                 </a:solidFill>
@@ -6148,7 +6969,7 @@
               <a:buChar char="•"/>
             </a:pPr>
             <a:r>
-              <a:rPr sz="900" b="0">
+              <a:rPr sz="950" b="0">
                 <a:solidFill>
                   <a:srgbClr val="141B26"/>
                 </a:solidFill>
@@ -6167,8 +6988,8 @@
         </p:nvSpPr>
         <p:spPr>
           <a:xfrm>
-            <a:off x="3703320" y="4206240"/>
-            <a:ext cx="4114800" cy="2468880"/>
+            <a:off x="3703320" y="4434840"/>
+            <a:ext cx="4114800" cy="2240280"/>
           </a:xfrm>
           <a:prstGeom prst="rect">
             <a:avLst/>
@@ -6187,7 +7008,7 @@
               </a:spcAft>
             </a:pPr>
             <a:r>
-              <a:rPr sz="1050" b="1">
+              <a:rPr sz="1100" b="1">
                 <a:solidFill>
                   <a:srgbClr val="1F6FEB"/>
                 </a:solidFill>
@@ -6204,7 +7025,7 @@
               <a:buChar char="•"/>
             </a:pPr>
             <a:r>
-              <a:rPr sz="900" b="0">
+              <a:rPr sz="950" b="0">
                 <a:solidFill>
                   <a:srgbClr val="141B26"/>
                 </a:solidFill>
@@ -6221,7 +7042,7 @@
               <a:buChar char="•"/>
             </a:pPr>
             <a:r>
-              <a:rPr sz="900" b="0">
+              <a:rPr sz="950" b="0">
                 <a:solidFill>
                   <a:srgbClr val="141B26"/>
                 </a:solidFill>
@@ -6238,7 +7059,7 @@
               <a:buChar char="•"/>
             </a:pPr>
             <a:r>
-              <a:rPr sz="900" b="0">
+              <a:rPr sz="950" b="0">
                 <a:solidFill>
                   <a:srgbClr val="141B26"/>
                 </a:solidFill>
@@ -6255,7 +7076,7 @@
               <a:buChar char="•"/>
             </a:pPr>
             <a:r>
-              <a:rPr sz="900" b="0">
+              <a:rPr sz="950" b="0">
                 <a:solidFill>
                   <a:srgbClr val="141B26"/>
                 </a:solidFill>
@@ -6272,7 +7093,7 @@
               <a:buChar char="•"/>
             </a:pPr>
             <a:r>
-              <a:rPr sz="900" b="0">
+              <a:rPr sz="950" b="0">
                 <a:solidFill>
                   <a:srgbClr val="141B26"/>
                 </a:solidFill>
@@ -6285,14 +7106,62 @@
       </p:sp>
       <p:sp>
         <p:nvSpPr>
-          <p:cNvPr id="11" name="TextBox 10"/>
+          <p:cNvPr id="11" name="Rounded Rectangle 10"/>
+          <p:cNvSpPr/>
+          <p:nvPr/>
+        </p:nvSpPr>
+        <p:spPr>
+          <a:xfrm>
+            <a:off x="8001000" y="1143000"/>
+            <a:ext cx="3977639" cy="2331720"/>
+          </a:xfrm>
+          <a:prstGeom prst="roundRect">
+            <a:avLst>
+              <a:gd name="adj" fmla="val 8000"/>
+            </a:avLst>
+          </a:prstGeom>
+          <a:solidFill>
+            <a:srgbClr val="F0F4FA"/>
+          </a:solidFill>
+          <a:ln w="15875">
+            <a:solidFill>
+              <a:srgbClr val="0E7C5A"/>
+            </a:solidFill>
+          </a:ln>
+          <a:effectLst/>
+        </p:spPr>
+        <p:style>
+          <a:lnRef idx="1">
+            <a:schemeClr val="accent1"/>
+          </a:lnRef>
+          <a:fillRef idx="3">
+            <a:schemeClr val="accent1"/>
+          </a:fillRef>
+          <a:effectRef idx="2">
+            <a:schemeClr val="accent1"/>
+          </a:effectRef>
+          <a:fontRef idx="minor">
+            <a:schemeClr val="lt1"/>
+          </a:fontRef>
+        </p:style>
+        <p:txBody>
+          <a:bodyPr rtlCol="0" anchor="ctr"/>
+          <a:lstStyle/>
+          <a:p>
+            <a:pPr algn="ctr"/>
+          </a:p>
+        </p:txBody>
+      </p:sp>
+      <p:sp>
+        <p:nvSpPr>
+          <p:cNvPr id="12" name="TextBox 11"/>
           <p:cNvSpPr txBox="1"/>
           <p:nvPr/>
         </p:nvSpPr>
         <p:spPr>
           <a:xfrm>
-            <a:off x="8046720" y="1234440"/>
-            <a:ext cx="3886200" cy="5394960"/>
+            <a:off x="8138160" y="1252728"/>
+            <a:ext cx="3703320" cy="2148840"/>
           </a:xfrm>
           <a:prstGeom prst="rect">
             <a:avLst/>
@@ -6313,6 +7182,96 @@
             <a:r>
               <a:rPr sz="1050" b="1">
                 <a:solidFill>
+                  <a:srgbClr val="0E7C5A"/>
+                </a:solidFill>
+                <a:latin typeface="Calibri"/>
+              </a:rPr>
+              <a:t>🎯 VALUE TO THIS PROJECT — DUQM</a:t>
+            </a:r>
+          </a:p>
+          <a:p>
+            <a:pPr>
+              <a:spcAft>
+                <a:spcPts val="200"/>
+              </a:spcAft>
+              <a:buChar char="•"/>
+            </a:pPr>
+            <a:r>
+              <a:rPr sz="950" b="0">
+                <a:solidFill>
+                  <a:srgbClr val="141B26"/>
+                </a:solidFill>
+                <a:latin typeface="Calibri"/>
+              </a:rPr>
+              <a:t>AI-instrumented PMO (Autopilot): minutes, commitments and follow-up captured in real time — proven while assembling this very team.</a:t>
+            </a:r>
+          </a:p>
+          <a:p>
+            <a:pPr>
+              <a:spcAft>
+                <a:spcPts val="200"/>
+              </a:spcAft>
+              <a:buChar char="•"/>
+            </a:pPr>
+            <a:r>
+              <a:rPr sz="950" b="0">
+                <a:solidFill>
+                  <a:srgbClr val="141B26"/>
+                </a:solidFill>
+                <a:latin typeface="Calibri"/>
+              </a:rPr>
+              <a:t>Digital twin + IoT: the digital backbone of the study and the future plant.</a:t>
+            </a:r>
+          </a:p>
+          <a:p>
+            <a:pPr>
+              <a:spcAft>
+                <a:spcPts val="200"/>
+              </a:spcAft>
+              <a:buChar char="•"/>
+            </a:pPr>
+            <a:r>
+              <a:rPr sz="950" b="0">
+                <a:solidFill>
+                  <a:srgbClr val="141B26"/>
+                </a:solidFill>
+                <a:latin typeface="Calibri"/>
+              </a:rPr>
+              <a:t>Document control and traceability of the client package, with a drastic reduction in friction (−90% unnecessary emails).</a:t>
+            </a:r>
+          </a:p>
+        </p:txBody>
+      </p:sp>
+      <p:sp>
+        <p:nvSpPr>
+          <p:cNvPr id="13" name="TextBox 12"/>
+          <p:cNvSpPr txBox="1"/>
+          <p:nvPr/>
+        </p:nvSpPr>
+        <p:spPr>
+          <a:xfrm>
+            <a:off x="8046720" y="3657600"/>
+            <a:ext cx="3931920" cy="3017520"/>
+          </a:xfrm>
+          <a:prstGeom prst="rect">
+            <a:avLst/>
+          </a:prstGeom>
+          <a:noFill/>
+        </p:spPr>
+        <p:txBody>
+          <a:bodyPr wrap="square">
+            <a:spAutoFit/>
+          </a:bodyPr>
+          <a:lstStyle/>
+          <a:p>
+            <a:pPr>
+              <a:spcAft>
+                <a:spcPts val="400"/>
+              </a:spcAft>
+            </a:pPr>
+            <a:r>
+              <a:rPr sz="1100" b="1">
+                <a:solidFill>
                   <a:srgbClr val="1F6FEB"/>
                 </a:solidFill>
                 <a:latin typeface="Calibri"/>
@@ -6328,7 +7287,7 @@
               <a:buChar char="•"/>
             </a:pPr>
             <a:r>
-              <a:rPr sz="950" b="0">
+              <a:rPr sz="1000" b="0">
                 <a:solidFill>
                   <a:srgbClr val="141B26"/>
                 </a:solidFill>
@@ -6345,7 +7304,7 @@
               <a:buChar char="•"/>
             </a:pPr>
             <a:r>
-              <a:rPr sz="950" b="0">
+              <a:rPr sz="1000" b="0">
                 <a:solidFill>
                   <a:srgbClr val="141B26"/>
                 </a:solidFill>
@@ -6362,24 +7321,7 @@
               <a:buChar char="•"/>
             </a:pPr>
             <a:r>
-              <a:rPr sz="950" b="0">
-                <a:solidFill>
-                  <a:srgbClr val="141B26"/>
-                </a:solidFill>
-                <a:latin typeface="Calibri"/>
-              </a:rPr>
-              <a:t>Startup innovation: cutting-edge mobile applications with AI and machine learning.</a:t>
-            </a:r>
-          </a:p>
-          <a:p>
-            <a:pPr>
-              <a:spcAft>
-                <a:spcPts val="200"/>
-              </a:spcAft>
-              <a:buChar char="•"/>
-            </a:pPr>
-            <a:r>
-              <a:rPr sz="950" b="0">
+              <a:rPr sz="1000" b="0">
                 <a:solidFill>
                   <a:srgbClr val="141B26"/>
                 </a:solidFill>
@@ -6396,30 +7338,13 @@
               <a:buChar char="•"/>
             </a:pPr>
             <a:r>
-              <a:rPr sz="950" b="0">
+              <a:rPr sz="1000" b="0">
                 <a:solidFill>
                   <a:srgbClr val="141B26"/>
                 </a:solidFill>
                 <a:latin typeface="Calibri"/>
               </a:rPr>
               <a:t>Mobile &amp; IoT solutions: end-to-end production control on iOS, Apple Watch, Android and IoT devices.</a:t>
-            </a:r>
-          </a:p>
-          <a:p>
-            <a:pPr>
-              <a:spcAft>
-                <a:spcPts val="200"/>
-              </a:spcAft>
-              <a:buChar char="•"/>
-            </a:pPr>
-            <a:r>
-              <a:rPr sz="950" b="0">
-                <a:solidFill>
-                  <a:srgbClr val="141B26"/>
-                </a:solidFill>
-                <a:latin typeface="Calibri"/>
-              </a:rPr>
-              <a:t>Government-sector leadership: management roles in Canadian and Chilean agencies.</a:t>
             </a:r>
           </a:p>
         </p:txBody>
@@ -6494,7 +7419,7 @@
         </p:nvSpPr>
         <p:spPr>
           <a:xfrm>
-            <a:off x="411480" y="73152"/>
+            <a:off x="411480" y="64008"/>
             <a:ext cx="8778240" cy="868680"/>
           </a:xfrm>
           <a:prstGeom prst="rect">
@@ -6514,7 +7439,7 @@
               </a:spcAft>
             </a:pPr>
             <a:r>
-              <a:rPr sz="2600" b="1">
+              <a:rPr sz="2700" b="1">
                 <a:solidFill>
                   <a:srgbClr val="FFFFFF"/>
                 </a:solidFill>
@@ -6536,7 +7461,7 @@
                 </a:solidFill>
                 <a:latin typeface="Calibri"/>
               </a:rPr>
-              <a:t>Senior Process / Metallurgy</a:t>
+              <a:t>Project Lead — Metallurgy</a:t>
             </a:r>
           </a:p>
         </p:txBody>
@@ -6585,7 +7510,7 @@
               </a:spcAft>
             </a:pPr>
             <a:r>
-              <a:rPr sz="900" b="0">
+              <a:rPr sz="950" b="0">
                 <a:solidFill>
                   <a:srgbClr val="C8D8F5"/>
                 </a:solidFill>
@@ -6601,7 +7526,7 @@
               </a:spcAft>
             </a:pPr>
             <a:r>
-              <a:rPr sz="900" b="0">
+              <a:rPr sz="950" b="0">
                 <a:solidFill>
                   <a:srgbClr val="C8D8F5"/>
                 </a:solidFill>
@@ -6621,7 +7546,7 @@
         <p:spPr>
           <a:xfrm>
             <a:off x="228600" y="1143000"/>
-            <a:ext cx="3246120" cy="5486400"/>
+            <a:ext cx="3246120" cy="5532120"/>
           </a:xfrm>
           <a:prstGeom prst="roundRect">
             <a:avLst>
@@ -6668,7 +7593,7 @@
         </p:nvSpPr>
         <p:spPr>
           <a:xfrm>
-            <a:off x="384048" y="1280160"/>
+            <a:off x="384048" y="1261872"/>
             <a:ext cx="2971800" cy="457200"/>
           </a:xfrm>
           <a:prstGeom prst="rect">
@@ -6688,7 +7613,7 @@
               </a:spcAft>
             </a:pPr>
             <a:r>
-              <a:rPr sz="1050" b="1">
+              <a:rPr sz="1100" b="1">
                 <a:solidFill>
                   <a:srgbClr val="1F6FEB"/>
                 </a:solidFill>
@@ -6724,8 +7649,8 @@
         </p:nvSpPr>
         <p:spPr>
           <a:xfrm>
-            <a:off x="384048" y="1965960"/>
-            <a:ext cx="2971800" cy="2011680"/>
+            <a:off x="384048" y="1920240"/>
+            <a:ext cx="2971800" cy="2103120"/>
           </a:xfrm>
           <a:prstGeom prst="rect">
             <a:avLst/>
@@ -6744,7 +7669,7 @@
               </a:spcAft>
             </a:pPr>
             <a:r>
-              <a:rPr sz="1050" b="1">
+              <a:rPr sz="1100" b="1">
                 <a:solidFill>
                   <a:srgbClr val="1F6FEB"/>
                 </a:solidFill>
@@ -6761,7 +7686,7 @@
               <a:buChar char="•"/>
             </a:pPr>
             <a:r>
-              <a:rPr sz="900" b="0">
+              <a:rPr sz="950" b="0">
                 <a:solidFill>
                   <a:srgbClr val="141B26"/>
                 </a:solidFill>
@@ -6778,7 +7703,7 @@
               <a:buChar char="•"/>
             </a:pPr>
             <a:r>
-              <a:rPr sz="900" b="0">
+              <a:rPr sz="950" b="0">
                 <a:solidFill>
                   <a:srgbClr val="141B26"/>
                 </a:solidFill>
@@ -6795,7 +7720,7 @@
               <a:buChar char="•"/>
             </a:pPr>
             <a:r>
-              <a:rPr sz="900" b="0">
+              <a:rPr sz="950" b="0">
                 <a:solidFill>
                   <a:srgbClr val="141B26"/>
                 </a:solidFill>
@@ -6814,8 +7739,8 @@
         </p:nvSpPr>
         <p:spPr>
           <a:xfrm>
-            <a:off x="384048" y="4069080"/>
-            <a:ext cx="2971800" cy="2377440"/>
+            <a:off x="384048" y="4114800"/>
+            <a:ext cx="2971800" cy="2468880"/>
           </a:xfrm>
           <a:prstGeom prst="rect">
             <a:avLst/>
@@ -6834,7 +7759,7 @@
               </a:spcAft>
             </a:pPr>
             <a:r>
-              <a:rPr sz="1050" b="1">
+              <a:rPr sz="1100" b="1">
                 <a:solidFill>
                   <a:srgbClr val="1F6FEB"/>
                 </a:solidFill>
@@ -6851,7 +7776,7 @@
               <a:buChar char="•"/>
             </a:pPr>
             <a:r>
-              <a:rPr sz="900" b="0">
+              <a:rPr sz="950" b="0">
                 <a:solidFill>
                   <a:srgbClr val="141B26"/>
                 </a:solidFill>
@@ -6868,7 +7793,7 @@
               <a:buChar char="•"/>
             </a:pPr>
             <a:r>
-              <a:rPr sz="900" b="0">
+              <a:rPr sz="950" b="0">
                 <a:solidFill>
                   <a:srgbClr val="141B26"/>
                 </a:solidFill>
@@ -6885,7 +7810,24 @@
               <a:buChar char="•"/>
             </a:pPr>
             <a:r>
-              <a:rPr sz="900" b="0">
+              <a:rPr sz="950" b="0">
+                <a:solidFill>
+                  <a:srgbClr val="141B26"/>
+                </a:solidFill>
+                <a:latin typeface="Calibri"/>
+              </a:rPr>
+              <a:t>7 years in cement plant operations: fly ash from both sides (produced it from coal → clinker, and purchased it from thermal power plants)</a:t>
+            </a:r>
+          </a:p>
+          <a:p>
+            <a:pPr>
+              <a:spcAft>
+                <a:spcPts val="200"/>
+              </a:spcAft>
+              <a:buChar char="•"/>
+            </a:pPr>
+            <a:r>
+              <a:rPr sz="950" b="0">
                 <a:solidFill>
                   <a:srgbClr val="141B26"/>
                 </a:solidFill>
@@ -6902,30 +7844,13 @@
               <a:buChar char="•"/>
             </a:pPr>
             <a:r>
-              <a:rPr sz="900" b="0">
+              <a:rPr sz="950" b="0">
                 <a:solidFill>
                   <a:srgbClr val="141B26"/>
                 </a:solidFill>
                 <a:latin typeface="Calibri"/>
               </a:rPr>
               <a:t>Recovery from residues and refractory ores</a:t>
-            </a:r>
-          </a:p>
-          <a:p>
-            <a:pPr>
-              <a:spcAft>
-                <a:spcPts val="200"/>
-              </a:spcAft>
-              <a:buChar char="•"/>
-            </a:pPr>
-            <a:r>
-              <a:rPr sz="900" b="0">
-                <a:solidFill>
-                  <a:srgbClr val="141B26"/>
-                </a:solidFill>
-                <a:latin typeface="Calibri"/>
-              </a:rPr>
-              <a:t>Teaching: professor at Tec de Monterrey (materials &amp; manufacturing)</a:t>
             </a:r>
           </a:p>
         </p:txBody>
@@ -6938,8 +7863,8 @@
         </p:nvSpPr>
         <p:spPr>
           <a:xfrm>
-            <a:off x="3703320" y="1234440"/>
-            <a:ext cx="4114800" cy="2834640"/>
+            <a:off x="3703320" y="1207008"/>
+            <a:ext cx="4114800" cy="3108960"/>
           </a:xfrm>
           <a:prstGeom prst="rect">
             <a:avLst/>
@@ -6958,7 +7883,7 @@
               </a:spcAft>
             </a:pPr>
             <a:r>
-              <a:rPr sz="1050" b="1">
+              <a:rPr sz="1100" b="1">
                 <a:solidFill>
                   <a:srgbClr val="1F6FEB"/>
                 </a:solidFill>
@@ -6975,7 +7900,7 @@
               <a:buChar char="•"/>
             </a:pPr>
             <a:r>
-              <a:rPr sz="900" b="0">
+              <a:rPr sz="950" b="0">
                 <a:solidFill>
                   <a:srgbClr val="141B26"/>
                 </a:solidFill>
@@ -6992,7 +7917,7 @@
               <a:buChar char="•"/>
             </a:pPr>
             <a:r>
-              <a:rPr sz="900" b="0">
+              <a:rPr sz="950" b="0">
                 <a:solidFill>
                   <a:srgbClr val="141B26"/>
                 </a:solidFill>
@@ -7009,7 +7934,7 @@
               <a:buChar char="•"/>
             </a:pPr>
             <a:r>
-              <a:rPr sz="900" b="0">
+              <a:rPr sz="950" b="0">
                 <a:solidFill>
                   <a:srgbClr val="141B26"/>
                 </a:solidFill>
@@ -7026,7 +7951,7 @@
               <a:buChar char="•"/>
             </a:pPr>
             <a:r>
-              <a:rPr sz="900" b="0">
+              <a:rPr sz="950" b="0">
                 <a:solidFill>
                   <a:srgbClr val="141B26"/>
                 </a:solidFill>
@@ -7043,7 +7968,7 @@
               <a:buChar char="•"/>
             </a:pPr>
             <a:r>
-              <a:rPr sz="900" b="0">
+              <a:rPr sz="950" b="0">
                 <a:solidFill>
                   <a:srgbClr val="141B26"/>
                 </a:solidFill>
@@ -7060,7 +7985,7 @@
               <a:buChar char="•"/>
             </a:pPr>
             <a:r>
-              <a:rPr sz="900" b="0">
+              <a:rPr sz="950" b="0">
                 <a:solidFill>
                   <a:srgbClr val="141B26"/>
                 </a:solidFill>
@@ -7079,8 +8004,8 @@
         </p:nvSpPr>
         <p:spPr>
           <a:xfrm>
-            <a:off x="3703320" y="4206240"/>
-            <a:ext cx="4114800" cy="2468880"/>
+            <a:off x="3703320" y="4434840"/>
+            <a:ext cx="4114800" cy="2240280"/>
           </a:xfrm>
           <a:prstGeom prst="rect">
             <a:avLst/>
@@ -7099,7 +8024,7 @@
               </a:spcAft>
             </a:pPr>
             <a:r>
-              <a:rPr sz="1050" b="1">
+              <a:rPr sz="1100" b="1">
                 <a:solidFill>
                   <a:srgbClr val="1F6FEB"/>
                 </a:solidFill>
@@ -7116,7 +8041,7 @@
               <a:buChar char="•"/>
             </a:pPr>
             <a:r>
-              <a:rPr sz="900" b="0">
+              <a:rPr sz="950" b="0">
                 <a:solidFill>
                   <a:srgbClr val="141B26"/>
                 </a:solidFill>
@@ -7133,7 +8058,7 @@
               <a:buChar char="•"/>
             </a:pPr>
             <a:r>
-              <a:rPr sz="900" b="0">
+              <a:rPr sz="950" b="0">
                 <a:solidFill>
                   <a:srgbClr val="141B26"/>
                 </a:solidFill>
@@ -7150,7 +8075,7 @@
               <a:buChar char="•"/>
             </a:pPr>
             <a:r>
-              <a:rPr sz="900" b="0">
+              <a:rPr sz="950" b="0">
                 <a:solidFill>
                   <a:srgbClr val="141B26"/>
                 </a:solidFill>
@@ -7167,7 +8092,7 @@
               <a:buChar char="•"/>
             </a:pPr>
             <a:r>
-              <a:rPr sz="900" b="0">
+              <a:rPr sz="950" b="0">
                 <a:solidFill>
                   <a:srgbClr val="141B26"/>
                 </a:solidFill>
@@ -7184,7 +8109,7 @@
               <a:buChar char="•"/>
             </a:pPr>
             <a:r>
-              <a:rPr sz="900" b="0">
+              <a:rPr sz="950" b="0">
                 <a:solidFill>
                   <a:srgbClr val="141B26"/>
                 </a:solidFill>
@@ -7201,7 +8126,7 @@
               <a:buChar char="•"/>
             </a:pPr>
             <a:r>
-              <a:rPr sz="900" b="0">
+              <a:rPr sz="950" b="0">
                 <a:solidFill>
                   <a:srgbClr val="141B26"/>
                 </a:solidFill>
@@ -7214,14 +8139,62 @@
       </p:sp>
       <p:sp>
         <p:nvSpPr>
-          <p:cNvPr id="11" name="TextBox 10"/>
+          <p:cNvPr id="11" name="Rounded Rectangle 10"/>
+          <p:cNvSpPr/>
+          <p:nvPr/>
+        </p:nvSpPr>
+        <p:spPr>
+          <a:xfrm>
+            <a:off x="8001000" y="1143000"/>
+            <a:ext cx="3977639" cy="2331720"/>
+          </a:xfrm>
+          <a:prstGeom prst="roundRect">
+            <a:avLst>
+              <a:gd name="adj" fmla="val 8000"/>
+            </a:avLst>
+          </a:prstGeom>
+          <a:solidFill>
+            <a:srgbClr val="F0F4FA"/>
+          </a:solidFill>
+          <a:ln w="15875">
+            <a:solidFill>
+              <a:srgbClr val="0E7C5A"/>
+            </a:solidFill>
+          </a:ln>
+          <a:effectLst/>
+        </p:spPr>
+        <p:style>
+          <a:lnRef idx="1">
+            <a:schemeClr val="accent1"/>
+          </a:lnRef>
+          <a:fillRef idx="3">
+            <a:schemeClr val="accent1"/>
+          </a:fillRef>
+          <a:effectRef idx="2">
+            <a:schemeClr val="accent1"/>
+          </a:effectRef>
+          <a:fontRef idx="minor">
+            <a:schemeClr val="lt1"/>
+          </a:fontRef>
+        </p:style>
+        <p:txBody>
+          <a:bodyPr rtlCol="0" anchor="ctr"/>
+          <a:lstStyle/>
+          <a:p>
+            <a:pPr algn="ctr"/>
+          </a:p>
+        </p:txBody>
+      </p:sp>
+      <p:sp>
+        <p:nvSpPr>
+          <p:cNvPr id="12" name="TextBox 11"/>
           <p:cNvSpPr txBox="1"/>
           <p:nvPr/>
         </p:nvSpPr>
         <p:spPr>
           <a:xfrm>
-            <a:off x="8046720" y="1234440"/>
-            <a:ext cx="3886200" cy="5394960"/>
+            <a:off x="8138160" y="1252728"/>
+            <a:ext cx="3703320" cy="2148840"/>
           </a:xfrm>
           <a:prstGeom prst="rect">
             <a:avLst/>
@@ -7242,6 +8215,113 @@
             <a:r>
               <a:rPr sz="1050" b="1">
                 <a:solidFill>
+                  <a:srgbClr val="0E7C5A"/>
+                </a:solidFill>
+                <a:latin typeface="Calibri"/>
+              </a:rPr>
+              <a:t>🎯 VALUE TO THIS PROJECT — DUQM</a:t>
+            </a:r>
+          </a:p>
+          <a:p>
+            <a:pPr>
+              <a:spcAft>
+                <a:spcPts val="200"/>
+              </a:spcAft>
+              <a:buChar char="•"/>
+            </a:pPr>
+            <a:r>
+              <a:rPr sz="950" b="0">
+                <a:solidFill>
+                  <a:srgbClr val="141B26"/>
+                </a:solidFill>
+                <a:latin typeface="Calibri"/>
+              </a:rPr>
+              <a:t>Arrived with the diagnosis done: chemical sludge ~24% Cu · fly ash (Zn 5.3%) · slag — and a route already sketched: H₂SO₄ leaching → electrowinning, with Fe removed by chemical precipitation (pH) before EW.</a:t>
+            </a:r>
+          </a:p>
+          <a:p>
+            <a:pPr>
+              <a:spcAft>
+                <a:spcPts val="200"/>
+              </a:spcAft>
+              <a:buChar char="•"/>
+            </a:pPr>
+            <a:r>
+              <a:rPr sz="950" b="0">
+                <a:solidFill>
+                  <a:srgbClr val="141B26"/>
+                </a:solidFill>
+                <a:latin typeface="Calibri"/>
+              </a:rPr>
+              <a:t>Characterization-first methodology: material → product → variables → contaminants → traceability. “The testing phase is where the technology gets created.”</a:t>
+            </a:r>
+          </a:p>
+          <a:p>
+            <a:pPr>
+              <a:spcAft>
+                <a:spcPts val="200"/>
+              </a:spcAft>
+              <a:buChar char="•"/>
+            </a:pPr>
+            <a:r>
+              <a:rPr sz="950" b="0">
+                <a:solidFill>
+                  <a:srgbClr val="141B26"/>
+                </a:solidFill>
+                <a:latin typeface="Calibri"/>
+              </a:rPr>
+              <a:t>Critical contaminants mapped from first-hand experience: As controlled at intake per regulations · V/Cr/Ni in fly ash (7 years handling fly ash at a cement plant, on both sides).</a:t>
+            </a:r>
+          </a:p>
+          <a:p>
+            <a:pPr>
+              <a:spcAft>
+                <a:spcPts val="200"/>
+              </a:spcAft>
+              <a:buChar char="•"/>
+            </a:pPr>
+            <a:r>
+              <a:rPr sz="950" b="0">
+                <a:solidFill>
+                  <a:srgbClr val="141B26"/>
+                </a:solidFill>
+                <a:latin typeface="Calibri"/>
+              </a:rPr>
+              <a:t>Economic reframing of the project: “the feedstock is zero-cost” — the environmental liability becomes a productive asset.</a:t>
+            </a:r>
+          </a:p>
+        </p:txBody>
+      </p:sp>
+      <p:sp>
+        <p:nvSpPr>
+          <p:cNvPr id="13" name="TextBox 12"/>
+          <p:cNvSpPr txBox="1"/>
+          <p:nvPr/>
+        </p:nvSpPr>
+        <p:spPr>
+          <a:xfrm>
+            <a:off x="8046720" y="3657600"/>
+            <a:ext cx="3931920" cy="3017520"/>
+          </a:xfrm>
+          <a:prstGeom prst="rect">
+            <a:avLst/>
+          </a:prstGeom>
+          <a:noFill/>
+        </p:spPr>
+        <p:txBody>
+          <a:bodyPr wrap="square">
+            <a:spAutoFit/>
+          </a:bodyPr>
+          <a:lstStyle/>
+          <a:p>
+            <a:pPr>
+              <a:spcAft>
+                <a:spcPts val="400"/>
+              </a:spcAft>
+            </a:pPr>
+            <a:r>
+              <a:rPr sz="1100" b="1">
+                <a:solidFill>
                   <a:srgbClr val="1F6FEB"/>
                 </a:solidFill>
                 <a:latin typeface="Calibri"/>
@@ -7257,7 +8337,7 @@
               <a:buChar char="•"/>
             </a:pPr>
             <a:r>
-              <a:rPr sz="950" b="0">
+              <a:rPr sz="1000" b="0">
                 <a:solidFill>
                   <a:srgbClr val="141B26"/>
                 </a:solidFill>
@@ -7274,58 +8354,24 @@
               <a:buChar char="•"/>
             </a:pPr>
             <a:r>
-              <a:rPr sz="950" b="0">
-                <a:solidFill>
-                  <a:srgbClr val="141B26"/>
-                </a:solidFill>
-                <a:latin typeface="Calibri"/>
-              </a:rPr>
-              <a:t>Dynamic leaching of auriferous pyrite concentrates — Grupo Bacis.</a:t>
-            </a:r>
-          </a:p>
-          <a:p>
-            <a:pPr>
-              <a:spcAft>
-                <a:spcPts val="200"/>
-              </a:spcAft>
-              <a:buChar char="•"/>
-            </a:pPr>
-            <a:r>
-              <a:rPr sz="950" b="0">
-                <a:solidFill>
-                  <a:srgbClr val="141B26"/>
-                </a:solidFill>
-                <a:latin typeface="Calibri"/>
-              </a:rPr>
-              <a:t>Silver recovery from refractory ores — Silvermex.</a:t>
-            </a:r>
-          </a:p>
-          <a:p>
-            <a:pPr>
-              <a:spcAft>
-                <a:spcPts val="200"/>
-              </a:spcAft>
-              <a:buChar char="•"/>
-            </a:pPr>
-            <a:r>
-              <a:rPr sz="950" b="0">
-                <a:solidFill>
-                  <a:srgbClr val="141B26"/>
-                </a:solidFill>
-                <a:latin typeface="Calibri"/>
-              </a:rPr>
-              <a:t>Start-up and stabilization of 800–1,000 t/h agglomeration · summer/winter pad strategy.</a:t>
-            </a:r>
-          </a:p>
-          <a:p>
-            <a:pPr>
-              <a:spcAft>
-                <a:spcPts val="200"/>
-              </a:spcAft>
-              <a:buChar char="•"/>
-            </a:pPr>
-            <a:r>
-              <a:rPr sz="950" b="0">
+              <a:rPr sz="1000" b="0">
+                <a:solidFill>
+                  <a:srgbClr val="141B26"/>
+                </a:solidFill>
+                <a:latin typeface="Calibri"/>
+              </a:rPr>
+              <a:t>Dynamic leaching of auriferous pyrite concentrates — Grupo Bacis · silver recovery from refractory ores — Silvermex.</a:t>
+            </a:r>
+          </a:p>
+          <a:p>
+            <a:pPr>
+              <a:spcAft>
+                <a:spcPts val="200"/>
+              </a:spcAft>
+              <a:buChar char="•"/>
+            </a:pPr>
+            <a:r>
+              <a:rPr sz="1000" b="0">
                 <a:solidFill>
                   <a:srgbClr val="141B26"/>
                 </a:solidFill>
@@ -7342,7 +8388,7 @@
               <a:buChar char="•"/>
             </a:pPr>
             <a:r>
-              <a:rPr sz="950" b="0">
+              <a:rPr sz="1000" b="0">
                 <a:solidFill>
                   <a:srgbClr val="141B26"/>
                 </a:solidFill>
@@ -7423,7 +8469,7 @@
         </p:nvSpPr>
         <p:spPr>
           <a:xfrm>
-            <a:off x="411480" y="73152"/>
+            <a:off x="411480" y="64008"/>
             <a:ext cx="8778240" cy="868680"/>
           </a:xfrm>
           <a:prstGeom prst="rect">
@@ -7443,7 +8489,7 @@
               </a:spcAft>
             </a:pPr>
             <a:r>
-              <a:rPr sz="2600" b="1">
+              <a:rPr sz="2700" b="1">
                 <a:solidFill>
                   <a:srgbClr val="FFFFFF"/>
                 </a:solidFill>
@@ -7465,7 +8511,7 @@
                 </a:solidFill>
                 <a:latin typeface="Calibri"/>
               </a:rPr>
-              <a:t>HSE / Environmental &amp; Safety Advisor — Metal Recovery &amp; Hazardous Waste</a:t>
+              <a:t>Metallurgy · Recycling Expert · Environmental / HSEC Advisor — Oman</a:t>
             </a:r>
           </a:p>
         </p:txBody>
@@ -7514,7 +8560,7 @@
               </a:spcAft>
             </a:pPr>
             <a:r>
-              <a:rPr sz="900" b="0">
+              <a:rPr sz="950" b="0">
                 <a:solidFill>
                   <a:srgbClr val="C8D8F5"/>
                 </a:solidFill>
@@ -7530,7 +8576,7 @@
               </a:spcAft>
             </a:pPr>
             <a:r>
-              <a:rPr sz="900" b="0">
+              <a:rPr sz="950" b="0">
                 <a:solidFill>
                   <a:srgbClr val="C8D8F5"/>
                 </a:solidFill>
@@ -7550,7 +8596,7 @@
         <p:spPr>
           <a:xfrm>
             <a:off x="228600" y="1143000"/>
-            <a:ext cx="3246120" cy="5486400"/>
+            <a:ext cx="3246120" cy="5532120"/>
           </a:xfrm>
           <a:prstGeom prst="roundRect">
             <a:avLst>
@@ -7597,7 +8643,7 @@
         </p:nvSpPr>
         <p:spPr>
           <a:xfrm>
-            <a:off x="384048" y="1280160"/>
+            <a:off x="384048" y="1261872"/>
             <a:ext cx="2971800" cy="457200"/>
           </a:xfrm>
           <a:prstGeom prst="rect">
@@ -7617,7 +8663,7 @@
               </a:spcAft>
             </a:pPr>
             <a:r>
-              <a:rPr sz="1050" b="1">
+              <a:rPr sz="1100" b="1">
                 <a:solidFill>
                   <a:srgbClr val="1F6FEB"/>
                 </a:solidFill>
@@ -7653,8 +8699,8 @@
         </p:nvSpPr>
         <p:spPr>
           <a:xfrm>
-            <a:off x="384048" y="1965960"/>
-            <a:ext cx="2971800" cy="2011680"/>
+            <a:off x="384048" y="1920240"/>
+            <a:ext cx="2971800" cy="2103120"/>
           </a:xfrm>
           <a:prstGeom prst="rect">
             <a:avLst/>
@@ -7673,7 +8719,7 @@
               </a:spcAft>
             </a:pPr>
             <a:r>
-              <a:rPr sz="1050" b="1">
+              <a:rPr sz="1100" b="1">
                 <a:solidFill>
                   <a:srgbClr val="1F6FEB"/>
                 </a:solidFill>
@@ -7690,7 +8736,7 @@
               <a:buChar char="•"/>
             </a:pPr>
             <a:r>
-              <a:rPr sz="900" b="0">
+              <a:rPr sz="950" b="0">
                 <a:solidFill>
                   <a:srgbClr val="141B26"/>
                 </a:solidFill>
@@ -7707,7 +8753,7 @@
               <a:buChar char="•"/>
             </a:pPr>
             <a:r>
-              <a:rPr sz="900" b="0">
+              <a:rPr sz="950" b="0">
                 <a:solidFill>
                   <a:srgbClr val="141B26"/>
                 </a:solidFill>
@@ -7724,7 +8770,7 @@
               <a:buChar char="•"/>
             </a:pPr>
             <a:r>
-              <a:rPr sz="900" b="0">
+              <a:rPr sz="950" b="0">
                 <a:solidFill>
                   <a:srgbClr val="141B26"/>
                 </a:solidFill>
@@ -7743,8 +8789,8 @@
         </p:nvSpPr>
         <p:spPr>
           <a:xfrm>
-            <a:off x="384048" y="4069080"/>
-            <a:ext cx="2971800" cy="2377440"/>
+            <a:off x="384048" y="4114800"/>
+            <a:ext cx="2971800" cy="2468880"/>
           </a:xfrm>
           <a:prstGeom prst="rect">
             <a:avLst/>
@@ -7763,7 +8809,7 @@
               </a:spcAft>
             </a:pPr>
             <a:r>
-              <a:rPr sz="1050" b="1">
+              <a:rPr sz="1100" b="1">
                 <a:solidFill>
                   <a:srgbClr val="1F6FEB"/>
                 </a:solidFill>
@@ -7780,7 +8826,7 @@
               <a:buChar char="•"/>
             </a:pPr>
             <a:r>
-              <a:rPr sz="900" b="0">
+              <a:rPr sz="950" b="0">
                 <a:solidFill>
                   <a:srgbClr val="141B26"/>
                 </a:solidFill>
@@ -7797,7 +8843,7 @@
               <a:buChar char="•"/>
             </a:pPr>
             <a:r>
-              <a:rPr sz="900" b="0">
+              <a:rPr sz="950" b="0">
                 <a:solidFill>
                   <a:srgbClr val="141B26"/>
                 </a:solidFill>
@@ -7814,7 +8860,7 @@
               <a:buChar char="•"/>
             </a:pPr>
             <a:r>
-              <a:rPr sz="900" b="0">
+              <a:rPr sz="950" b="0">
                 <a:solidFill>
                   <a:srgbClr val="141B26"/>
                 </a:solidFill>
@@ -7831,7 +8877,7 @@
               <a:buChar char="•"/>
             </a:pPr>
             <a:r>
-              <a:rPr sz="900" b="0">
+              <a:rPr sz="950" b="0">
                 <a:solidFill>
                   <a:srgbClr val="141B26"/>
                 </a:solidFill>
@@ -7848,7 +8894,7 @@
               <a:buChar char="•"/>
             </a:pPr>
             <a:r>
-              <a:rPr sz="900" b="0">
+              <a:rPr sz="950" b="0">
                 <a:solidFill>
                   <a:srgbClr val="141B26"/>
                 </a:solidFill>
@@ -7867,8 +8913,8 @@
         </p:nvSpPr>
         <p:spPr>
           <a:xfrm>
-            <a:off x="3703320" y="1234440"/>
-            <a:ext cx="4114800" cy="2834640"/>
+            <a:off x="3703320" y="1207008"/>
+            <a:ext cx="4114800" cy="3108960"/>
           </a:xfrm>
           <a:prstGeom prst="rect">
             <a:avLst/>
@@ -7887,7 +8933,7 @@
               </a:spcAft>
             </a:pPr>
             <a:r>
-              <a:rPr sz="1050" b="1">
+              <a:rPr sz="1100" b="1">
                 <a:solidFill>
                   <a:srgbClr val="1F6FEB"/>
                 </a:solidFill>
@@ -7904,7 +8950,7 @@
               <a:buChar char="•"/>
             </a:pPr>
             <a:r>
-              <a:rPr sz="900" b="0">
+              <a:rPr sz="950" b="0">
                 <a:solidFill>
                   <a:srgbClr val="141B26"/>
                 </a:solidFill>
@@ -7921,7 +8967,7 @@
               <a:buChar char="•"/>
             </a:pPr>
             <a:r>
-              <a:rPr sz="900" b="0">
+              <a:rPr sz="950" b="0">
                 <a:solidFill>
                   <a:srgbClr val="141B26"/>
                 </a:solidFill>
@@ -7938,7 +8984,7 @@
               <a:buChar char="•"/>
             </a:pPr>
             <a:r>
-              <a:rPr sz="900" b="0">
+              <a:rPr sz="950" b="0">
                 <a:solidFill>
                   <a:srgbClr val="141B26"/>
                 </a:solidFill>
@@ -7955,7 +9001,7 @@
               <a:buChar char="•"/>
             </a:pPr>
             <a:r>
-              <a:rPr sz="900" b="0">
+              <a:rPr sz="950" b="0">
                 <a:solidFill>
                   <a:srgbClr val="141B26"/>
                 </a:solidFill>
@@ -7972,7 +9018,7 @@
               <a:buChar char="•"/>
             </a:pPr>
             <a:r>
-              <a:rPr sz="900" b="0">
+              <a:rPr sz="950" b="0">
                 <a:solidFill>
                   <a:srgbClr val="141B26"/>
                 </a:solidFill>
@@ -7991,8 +9037,8 @@
         </p:nvSpPr>
         <p:spPr>
           <a:xfrm>
-            <a:off x="3703320" y="4206240"/>
-            <a:ext cx="4114800" cy="2468880"/>
+            <a:off x="3703320" y="4434840"/>
+            <a:ext cx="4114800" cy="2240280"/>
           </a:xfrm>
           <a:prstGeom prst="rect">
             <a:avLst/>
@@ -8011,7 +9057,7 @@
               </a:spcAft>
             </a:pPr>
             <a:r>
-              <a:rPr sz="1050" b="1">
+              <a:rPr sz="1100" b="1">
                 <a:solidFill>
                   <a:srgbClr val="1F6FEB"/>
                 </a:solidFill>
@@ -8028,7 +9074,7 @@
               <a:buChar char="•"/>
             </a:pPr>
             <a:r>
-              <a:rPr sz="900" b="0">
+              <a:rPr sz="950" b="0">
                 <a:solidFill>
                   <a:srgbClr val="141B26"/>
                 </a:solidFill>
@@ -8045,7 +9091,7 @@
               <a:buChar char="•"/>
             </a:pPr>
             <a:r>
-              <a:rPr sz="900" b="0">
+              <a:rPr sz="950" b="0">
                 <a:solidFill>
                   <a:srgbClr val="141B26"/>
                 </a:solidFill>
@@ -8062,7 +9108,7 @@
               <a:buChar char="•"/>
             </a:pPr>
             <a:r>
-              <a:rPr sz="900" b="0">
+              <a:rPr sz="950" b="0">
                 <a:solidFill>
                   <a:srgbClr val="141B26"/>
                 </a:solidFill>
@@ -8079,7 +9125,7 @@
               <a:buChar char="•"/>
             </a:pPr>
             <a:r>
-              <a:rPr sz="900" b="0">
+              <a:rPr sz="950" b="0">
                 <a:solidFill>
                   <a:srgbClr val="141B26"/>
                 </a:solidFill>
@@ -8096,7 +9142,7 @@
               <a:buChar char="•"/>
             </a:pPr>
             <a:r>
-              <a:rPr sz="900" b="0">
+              <a:rPr sz="950" b="0">
                 <a:solidFill>
                   <a:srgbClr val="141B26"/>
                 </a:solidFill>
@@ -8109,14 +9155,62 @@
       </p:sp>
       <p:sp>
         <p:nvSpPr>
-          <p:cNvPr id="11" name="TextBox 10"/>
+          <p:cNvPr id="11" name="Rounded Rectangle 10"/>
+          <p:cNvSpPr/>
+          <p:nvPr/>
+        </p:nvSpPr>
+        <p:spPr>
+          <a:xfrm>
+            <a:off x="8001000" y="1143000"/>
+            <a:ext cx="3977639" cy="2331720"/>
+          </a:xfrm>
+          <a:prstGeom prst="roundRect">
+            <a:avLst>
+              <a:gd name="adj" fmla="val 8000"/>
+            </a:avLst>
+          </a:prstGeom>
+          <a:solidFill>
+            <a:srgbClr val="F0F4FA"/>
+          </a:solidFill>
+          <a:ln w="15875">
+            <a:solidFill>
+              <a:srgbClr val="0E7C5A"/>
+            </a:solidFill>
+          </a:ln>
+          <a:effectLst/>
+        </p:spPr>
+        <p:style>
+          <a:lnRef idx="1">
+            <a:schemeClr val="accent1"/>
+          </a:lnRef>
+          <a:fillRef idx="3">
+            <a:schemeClr val="accent1"/>
+          </a:fillRef>
+          <a:effectRef idx="2">
+            <a:schemeClr val="accent1"/>
+          </a:effectRef>
+          <a:fontRef idx="minor">
+            <a:schemeClr val="lt1"/>
+          </a:fontRef>
+        </p:style>
+        <p:txBody>
+          <a:bodyPr rtlCol="0" anchor="ctr"/>
+          <a:lstStyle/>
+          <a:p>
+            <a:pPr algn="ctr"/>
+          </a:p>
+        </p:txBody>
+      </p:sp>
+      <p:sp>
+        <p:nvSpPr>
+          <p:cNvPr id="12" name="TextBox 11"/>
           <p:cNvSpPr txBox="1"/>
           <p:nvPr/>
         </p:nvSpPr>
         <p:spPr>
           <a:xfrm>
-            <a:off x="8046720" y="1234440"/>
-            <a:ext cx="3886200" cy="5394960"/>
+            <a:off x="8138160" y="1252728"/>
+            <a:ext cx="3703320" cy="2148840"/>
           </a:xfrm>
           <a:prstGeom prst="rect">
             <a:avLst/>
@@ -8137,6 +9231,96 @@
             <a:r>
               <a:rPr sz="1050" b="1">
                 <a:solidFill>
+                  <a:srgbClr val="0E7C5A"/>
+                </a:solidFill>
+                <a:latin typeface="Calibri"/>
+              </a:rPr>
+              <a:t>🎯 VALUE TO THIS PROJECT — DUQM</a:t>
+            </a:r>
+          </a:p>
+          <a:p>
+            <a:pPr>
+              <a:spcAft>
+                <a:spcPts val="200"/>
+              </a:spcAft>
+              <a:buChar char="•"/>
+            </a:pPr>
+            <a:r>
+              <a:rPr sz="950" b="0">
+                <a:solidFill>
+                  <a:srgbClr val="141B26"/>
+                </a:solidFill>
+                <a:latin typeface="Calibri"/>
+              </a:rPr>
+              <a:t>1:1 match with the project's plant: led HAZOPs and risk assessments for the Pinto Valley copper recovery/recycling plant (Capstone).</a:t>
+            </a:r>
+          </a:p>
+          <a:p>
+            <a:pPr>
+              <a:spcAft>
+                <a:spcPts val="200"/>
+              </a:spcAft>
+              <a:buChar char="•"/>
+            </a:pPr>
+            <a:r>
+              <a:rPr sz="950" b="0">
+                <a:solidFill>
+                  <a:srgbClr val="141B26"/>
+                </a:solidFill>
+                <a:latin typeface="Calibri"/>
+              </a:rPr>
+              <a:t>Gulf permitting and compliance: Ma'aden (Saudi Arabia) and MHRS regulations · hazardous waste (HAZWOPER) · water treatment and emissions.</a:t>
+            </a:r>
+          </a:p>
+          <a:p>
+            <a:pPr>
+              <a:spcAft>
+                <a:spcPts val="200"/>
+              </a:spcAft>
+              <a:buChar char="•"/>
+            </a:pPr>
+            <a:r>
+              <a:rPr sz="950" b="0">
+                <a:solidFill>
+                  <a:srgbClr val="141B26"/>
+                </a:solidFill>
+                <a:latin typeface="Calibri"/>
+              </a:rPr>
+              <a:t>Native EN/ES bilingual: direct bridge between the team and the client/authorities in Oman.</a:t>
+            </a:r>
+          </a:p>
+        </p:txBody>
+      </p:sp>
+      <p:sp>
+        <p:nvSpPr>
+          <p:cNvPr id="13" name="TextBox 12"/>
+          <p:cNvSpPr txBox="1"/>
+          <p:nvPr/>
+        </p:nvSpPr>
+        <p:spPr>
+          <a:xfrm>
+            <a:off x="8046720" y="3657600"/>
+            <a:ext cx="3931920" cy="3017520"/>
+          </a:xfrm>
+          <a:prstGeom prst="rect">
+            <a:avLst/>
+          </a:prstGeom>
+          <a:noFill/>
+        </p:spPr>
+        <p:txBody>
+          <a:bodyPr wrap="square">
+            <a:spAutoFit/>
+          </a:bodyPr>
+          <a:lstStyle/>
+          <a:p>
+            <a:pPr>
+              <a:spcAft>
+                <a:spcPts val="400"/>
+              </a:spcAft>
+            </a:pPr>
+            <a:r>
+              <a:rPr sz="1100" b="1">
+                <a:solidFill>
                   <a:srgbClr val="1F6FEB"/>
                 </a:solidFill>
                 <a:latin typeface="Calibri"/>
@@ -8152,7 +9336,7 @@
               <a:buChar char="•"/>
             </a:pPr>
             <a:r>
-              <a:rPr sz="950" b="0">
+              <a:rPr sz="1000" b="0">
                 <a:solidFill>
                   <a:srgbClr val="141B26"/>
                 </a:solidFill>
@@ -8169,7 +9353,7 @@
               <a:buChar char="•"/>
             </a:pPr>
             <a:r>
-              <a:rPr sz="950" b="0">
+              <a:rPr sz="1000" b="0">
                 <a:solidFill>
                   <a:srgbClr val="141B26"/>
                 </a:solidFill>
@@ -8186,7 +9370,7 @@
               <a:buChar char="•"/>
             </a:pPr>
             <a:r>
-              <a:rPr sz="950" b="0">
+              <a:rPr sz="1000" b="0">
                 <a:solidFill>
                   <a:srgbClr val="141B26"/>
                 </a:solidFill>
@@ -8203,30 +9387,13 @@
               <a:buChar char="•"/>
             </a:pPr>
             <a:r>
-              <a:rPr sz="950" b="0">
+              <a:rPr sz="1000" b="0">
                 <a:solidFill>
                   <a:srgbClr val="141B26"/>
                 </a:solidFill>
                 <a:latin typeface="Calibri"/>
               </a:rPr>
               <a:t>Cozamín: zero fatalities since 2021 (previous history: one every 2 years).</a:t>
-            </a:r>
-          </a:p>
-          <a:p>
-            <a:pPr>
-              <a:spcAft>
-                <a:spcPts val="200"/>
-              </a:spcAft>
-              <a:buChar char="•"/>
-            </a:pPr>
-            <a:r>
-              <a:rPr sz="950" b="0">
-                <a:solidFill>
-                  <a:srgbClr val="141B26"/>
-                </a:solidFill>
-                <a:latin typeface="Calibri"/>
-              </a:rPr>
-              <a:t>Tasiast (Mauritania): HSE programs at a large-scale gold mine.</a:t>
             </a:r>
           </a:p>
         </p:txBody>
@@ -8301,7 +9468,7 @@
         </p:nvSpPr>
         <p:spPr>
           <a:xfrm>
-            <a:off x="411480" y="73152"/>
+            <a:off x="411480" y="64008"/>
             <a:ext cx="8778240" cy="868680"/>
           </a:xfrm>
           <a:prstGeom prst="rect">
@@ -8321,7 +9488,7 @@
               </a:spcAft>
             </a:pPr>
             <a:r>
-              <a:rPr sz="2600" b="1">
+              <a:rPr sz="2700" b="1">
                 <a:solidFill>
                   <a:srgbClr val="FFFFFF"/>
                 </a:solidFill>
@@ -8343,7 +9510,7 @@
                 </a:solidFill>
                 <a:latin typeface="Calibri"/>
               </a:rPr>
-              <a:t>Designer / BIM Manager — Piping &amp; Plant Design</a:t>
+              <a:t>3D Industrial Designer — BIM / Piping</a:t>
             </a:r>
           </a:p>
         </p:txBody>
@@ -8392,7 +9559,7 @@
               </a:spcAft>
             </a:pPr>
             <a:r>
-              <a:rPr sz="900" b="0">
+              <a:rPr sz="950" b="0">
                 <a:solidFill>
                   <a:srgbClr val="C8D8F5"/>
                 </a:solidFill>
@@ -8408,7 +9575,7 @@
               </a:spcAft>
             </a:pPr>
             <a:r>
-              <a:rPr sz="900" b="0">
+              <a:rPr sz="950" b="0">
                 <a:solidFill>
                   <a:srgbClr val="C8D8F5"/>
                 </a:solidFill>
@@ -8428,7 +9595,7 @@
         <p:spPr>
           <a:xfrm>
             <a:off x="228600" y="1143000"/>
-            <a:ext cx="3246120" cy="5486400"/>
+            <a:ext cx="3246120" cy="5532120"/>
           </a:xfrm>
           <a:prstGeom prst="roundRect">
             <a:avLst>
@@ -8475,7 +9642,7 @@
         </p:nvSpPr>
         <p:spPr>
           <a:xfrm>
-            <a:off x="384048" y="1280160"/>
+            <a:off x="384048" y="1261872"/>
             <a:ext cx="2971800" cy="457200"/>
           </a:xfrm>
           <a:prstGeom prst="rect">
@@ -8495,7 +9662,7 @@
               </a:spcAft>
             </a:pPr>
             <a:r>
-              <a:rPr sz="1050" b="1">
+              <a:rPr sz="1100" b="1">
                 <a:solidFill>
                   <a:srgbClr val="1F6FEB"/>
                 </a:solidFill>
@@ -8531,8 +9698,8 @@
         </p:nvSpPr>
         <p:spPr>
           <a:xfrm>
-            <a:off x="384048" y="1965960"/>
-            <a:ext cx="2971800" cy="2011680"/>
+            <a:off x="384048" y="1920240"/>
+            <a:ext cx="2971800" cy="2103120"/>
           </a:xfrm>
           <a:prstGeom prst="rect">
             <a:avLst/>
@@ -8551,7 +9718,7 @@
               </a:spcAft>
             </a:pPr>
             <a:r>
-              <a:rPr sz="1050" b="1">
+              <a:rPr sz="1100" b="1">
                 <a:solidFill>
                   <a:srgbClr val="1F6FEB"/>
                 </a:solidFill>
@@ -8568,7 +9735,7 @@
               <a:buChar char="•"/>
             </a:pPr>
             <a:r>
-              <a:rPr sz="900" b="0">
+              <a:rPr sz="950" b="0">
                 <a:solidFill>
                   <a:srgbClr val="141B26"/>
                 </a:solidFill>
@@ -8587,8 +9754,8 @@
         </p:nvSpPr>
         <p:spPr>
           <a:xfrm>
-            <a:off x="384048" y="4069080"/>
-            <a:ext cx="2971800" cy="2377440"/>
+            <a:off x="384048" y="4114800"/>
+            <a:ext cx="2971800" cy="2468880"/>
           </a:xfrm>
           <a:prstGeom prst="rect">
             <a:avLst/>
@@ -8607,7 +9774,7 @@
               </a:spcAft>
             </a:pPr>
             <a:r>
-              <a:rPr sz="1050" b="1">
+              <a:rPr sz="1100" b="1">
                 <a:solidFill>
                   <a:srgbClr val="1F6FEB"/>
                 </a:solidFill>
@@ -8624,7 +9791,7 @@
               <a:buChar char="•"/>
             </a:pPr>
             <a:r>
-              <a:rPr sz="900" b="0">
+              <a:rPr sz="950" b="0">
                 <a:solidFill>
                   <a:srgbClr val="141B26"/>
                 </a:solidFill>
@@ -8641,7 +9808,7 @@
               <a:buChar char="•"/>
             </a:pPr>
             <a:r>
-              <a:rPr sz="900" b="0">
+              <a:rPr sz="950" b="0">
                 <a:solidFill>
                   <a:srgbClr val="141B26"/>
                 </a:solidFill>
@@ -8658,7 +9825,7 @@
               <a:buChar char="•"/>
             </a:pPr>
             <a:r>
-              <a:rPr sz="900" b="0">
+              <a:rPr sz="950" b="0">
                 <a:solidFill>
                   <a:srgbClr val="141B26"/>
                 </a:solidFill>
@@ -8675,7 +9842,7 @@
               <a:buChar char="•"/>
             </a:pPr>
             <a:r>
-              <a:rPr sz="900" b="0">
+              <a:rPr sz="950" b="0">
                 <a:solidFill>
                   <a:srgbClr val="141B26"/>
                 </a:solidFill>
@@ -8694,8 +9861,8 @@
         </p:nvSpPr>
         <p:spPr>
           <a:xfrm>
-            <a:off x="3703320" y="1234440"/>
-            <a:ext cx="4114800" cy="2834640"/>
+            <a:off x="3703320" y="1207008"/>
+            <a:ext cx="4114800" cy="3108960"/>
           </a:xfrm>
           <a:prstGeom prst="rect">
             <a:avLst/>
@@ -8714,7 +9881,7 @@
               </a:spcAft>
             </a:pPr>
             <a:r>
-              <a:rPr sz="1050" b="1">
+              <a:rPr sz="1100" b="1">
                 <a:solidFill>
                   <a:srgbClr val="1F6FEB"/>
                 </a:solidFill>
@@ -8731,7 +9898,7 @@
               <a:buChar char="•"/>
             </a:pPr>
             <a:r>
-              <a:rPr sz="900" b="0">
+              <a:rPr sz="950" b="0">
                 <a:solidFill>
                   <a:srgbClr val="141B26"/>
                 </a:solidFill>
@@ -8748,7 +9915,7 @@
               <a:buChar char="•"/>
             </a:pPr>
             <a:r>
-              <a:rPr sz="900" b="0">
+              <a:rPr sz="950" b="0">
                 <a:solidFill>
                   <a:srgbClr val="141B26"/>
                 </a:solidFill>
@@ -8765,7 +9932,7 @@
               <a:buChar char="•"/>
             </a:pPr>
             <a:r>
-              <a:rPr sz="900" b="0">
+              <a:rPr sz="950" b="0">
                 <a:solidFill>
                   <a:srgbClr val="141B26"/>
                 </a:solidFill>
@@ -8784,8 +9951,8 @@
         </p:nvSpPr>
         <p:spPr>
           <a:xfrm>
-            <a:off x="3703320" y="4206240"/>
-            <a:ext cx="4114800" cy="2468880"/>
+            <a:off x="3703320" y="4434840"/>
+            <a:ext cx="4114800" cy="2240280"/>
           </a:xfrm>
           <a:prstGeom prst="rect">
             <a:avLst/>
@@ -8804,7 +9971,7 @@
               </a:spcAft>
             </a:pPr>
             <a:r>
-              <a:rPr sz="1050" b="1">
+              <a:rPr sz="1100" b="1">
                 <a:solidFill>
                   <a:srgbClr val="1F6FEB"/>
                 </a:solidFill>
@@ -8821,7 +9988,7 @@
               <a:buChar char="•"/>
             </a:pPr>
             <a:r>
-              <a:rPr sz="900" b="0">
+              <a:rPr sz="950" b="0">
                 <a:solidFill>
                   <a:srgbClr val="141B26"/>
                 </a:solidFill>
@@ -8838,7 +10005,7 @@
               <a:buChar char="•"/>
             </a:pPr>
             <a:r>
-              <a:rPr sz="900" b="0">
+              <a:rPr sz="950" b="0">
                 <a:solidFill>
                   <a:srgbClr val="141B26"/>
                 </a:solidFill>
@@ -8855,7 +10022,7 @@
               <a:buChar char="•"/>
             </a:pPr>
             <a:r>
-              <a:rPr sz="900" b="0">
+              <a:rPr sz="950" b="0">
                 <a:solidFill>
                   <a:srgbClr val="141B26"/>
                 </a:solidFill>
@@ -8872,7 +10039,7 @@
               <a:buChar char="•"/>
             </a:pPr>
             <a:r>
-              <a:rPr sz="900" b="0">
+              <a:rPr sz="950" b="0">
                 <a:solidFill>
                   <a:srgbClr val="141B26"/>
                 </a:solidFill>
@@ -8889,7 +10056,7 @@
               <a:buChar char="•"/>
             </a:pPr>
             <a:r>
-              <a:rPr sz="900" b="0">
+              <a:rPr sz="950" b="0">
                 <a:solidFill>
                   <a:srgbClr val="141B26"/>
                 </a:solidFill>
@@ -8902,14 +10069,62 @@
       </p:sp>
       <p:sp>
         <p:nvSpPr>
-          <p:cNvPr id="11" name="TextBox 10"/>
+          <p:cNvPr id="11" name="Rounded Rectangle 10"/>
+          <p:cNvSpPr/>
+          <p:nvPr/>
+        </p:nvSpPr>
+        <p:spPr>
+          <a:xfrm>
+            <a:off x="8001000" y="1143000"/>
+            <a:ext cx="3977639" cy="2331720"/>
+          </a:xfrm>
+          <a:prstGeom prst="roundRect">
+            <a:avLst>
+              <a:gd name="adj" fmla="val 8000"/>
+            </a:avLst>
+          </a:prstGeom>
+          <a:solidFill>
+            <a:srgbClr val="F0F4FA"/>
+          </a:solidFill>
+          <a:ln w="15875">
+            <a:solidFill>
+              <a:srgbClr val="0E7C5A"/>
+            </a:solidFill>
+          </a:ln>
+          <a:effectLst/>
+        </p:spPr>
+        <p:style>
+          <a:lnRef idx="1">
+            <a:schemeClr val="accent1"/>
+          </a:lnRef>
+          <a:fillRef idx="3">
+            <a:schemeClr val="accent1"/>
+          </a:fillRef>
+          <a:effectRef idx="2">
+            <a:schemeClr val="accent1"/>
+          </a:effectRef>
+          <a:fontRef idx="minor">
+            <a:schemeClr val="lt1"/>
+          </a:fontRef>
+        </p:style>
+        <p:txBody>
+          <a:bodyPr rtlCol="0" anchor="ctr"/>
+          <a:lstStyle/>
+          <a:p>
+            <a:pPr algn="ctr"/>
+          </a:p>
+        </p:txBody>
+      </p:sp>
+      <p:sp>
+        <p:nvSpPr>
+          <p:cNvPr id="12" name="TextBox 11"/>
           <p:cNvSpPr txBox="1"/>
           <p:nvPr/>
         </p:nvSpPr>
         <p:spPr>
           <a:xfrm>
-            <a:off x="8046720" y="1234440"/>
-            <a:ext cx="3886200" cy="5394960"/>
+            <a:off x="8138160" y="1252728"/>
+            <a:ext cx="3703320" cy="2148840"/>
           </a:xfrm>
           <a:prstGeom prst="rect">
             <a:avLst/>
@@ -8930,6 +10145,96 @@
             <a:r>
               <a:rPr sz="1050" b="1">
                 <a:solidFill>
+                  <a:srgbClr val="0E7C5A"/>
+                </a:solidFill>
+                <a:latin typeface="Calibri"/>
+              </a:rPr>
+              <a:t>🎯 VALUE TO THIS PROJECT — DUQM</a:t>
+            </a:r>
+          </a:p>
+          <a:p>
+            <a:pPr>
+              <a:spcAft>
+                <a:spcPts val="200"/>
+              </a:spcAft>
+              <a:buChar char="•"/>
+            </a:pPr>
+            <a:r>
+              <a:rPr sz="950" b="0">
+                <a:solidFill>
+                  <a:srgbClr val="141B26"/>
+                </a:solidFill>
+                <a:latin typeface="Calibri"/>
+              </a:rPr>
+              <a:t>Scan-to-BIM with laser scanning (Leica RTC 360): As-Built of the plant's real condition — the geometric foundation of the digital twin.</a:t>
+            </a:r>
+          </a:p>
+          <a:p>
+            <a:pPr>
+              <a:spcAft>
+                <a:spcPts val="200"/>
+              </a:spcAft>
+              <a:buChar char="•"/>
+            </a:pPr>
+            <a:r>
+              <a:rPr sz="950" b="0">
+                <a:solidFill>
+                  <a:srgbClr val="141B26"/>
+                </a:solidFill>
+                <a:latin typeface="Calibri"/>
+              </a:rPr>
+              <a:t>Isometrics, MTO and clash detection (100% of critical clashes resolved before fabrication): from concept to a constructible package.</a:t>
+            </a:r>
+          </a:p>
+          <a:p>
+            <a:pPr>
+              <a:spcAft>
+                <a:spcPts val="200"/>
+              </a:spcAft>
+              <a:buChar char="•"/>
+            </a:pPr>
+            <a:r>
+              <a:rPr sz="950" b="0">
+                <a:solidFill>
+                  <a:srgbClr val="141B26"/>
+                </a:solidFill>
+                <a:latin typeface="Calibri"/>
+              </a:rPr>
+              <a:t>Available to travel to Oman: enables on-site scanning campaigns.</a:t>
+            </a:r>
+          </a:p>
+        </p:txBody>
+      </p:sp>
+      <p:sp>
+        <p:nvSpPr>
+          <p:cNvPr id="13" name="TextBox 12"/>
+          <p:cNvSpPr txBox="1"/>
+          <p:nvPr/>
+        </p:nvSpPr>
+        <p:spPr>
+          <a:xfrm>
+            <a:off x="8046720" y="3657600"/>
+            <a:ext cx="3931920" cy="3017520"/>
+          </a:xfrm>
+          <a:prstGeom prst="rect">
+            <a:avLst/>
+          </a:prstGeom>
+          <a:noFill/>
+        </p:spPr>
+        <p:txBody>
+          <a:bodyPr wrap="square">
+            <a:spAutoFit/>
+          </a:bodyPr>
+          <a:lstStyle/>
+          <a:p>
+            <a:pPr>
+              <a:spcAft>
+                <a:spcPts val="400"/>
+              </a:spcAft>
+            </a:pPr>
+            <a:r>
+              <a:rPr sz="1100" b="1">
+                <a:solidFill>
                   <a:srgbClr val="1F6FEB"/>
                 </a:solidFill>
                 <a:latin typeface="Calibri"/>
@@ -8945,7 +10250,7 @@
               <a:buChar char="•"/>
             </a:pPr>
             <a:r>
-              <a:rPr sz="950" b="0">
+              <a:rPr sz="1000" b="0">
                 <a:solidFill>
                   <a:srgbClr val="141B26"/>
                 </a:solidFill>
@@ -8962,7 +10267,7 @@
               <a:buChar char="•"/>
             </a:pPr>
             <a:r>
-              <a:rPr sz="950" b="0">
+              <a:rPr sz="1000" b="0">
                 <a:solidFill>
                   <a:srgbClr val="141B26"/>
                 </a:solidFill>
@@ -8979,7 +10284,7 @@
               <a:buChar char="•"/>
             </a:pPr>
             <a:r>
-              <a:rPr sz="950" b="0">
+              <a:rPr sz="1000" b="0">
                 <a:solidFill>
                   <a:srgbClr val="141B26"/>
                 </a:solidFill>
@@ -8996,7 +10301,7 @@
               <a:buChar char="•"/>
             </a:pPr>
             <a:r>
-              <a:rPr sz="950" b="0">
+              <a:rPr sz="1000" b="0">
                 <a:solidFill>
                   <a:srgbClr val="141B26"/>
                 </a:solidFill>
@@ -9077,7 +10382,7 @@
         </p:nvSpPr>
         <p:spPr>
           <a:xfrm>
-            <a:off x="411480" y="73152"/>
+            <a:off x="411480" y="64008"/>
             <a:ext cx="8778240" cy="868680"/>
           </a:xfrm>
           <a:prstGeom prst="rect">
@@ -9097,7 +10402,7 @@
               </a:spcAft>
             </a:pPr>
             <a:r>
-              <a:rPr sz="2600" b="1">
+              <a:rPr sz="2700" b="1">
                 <a:solidFill>
                   <a:srgbClr val="FFFFFF"/>
                 </a:solidFill>
@@ -9119,7 +10424,7 @@
                 </a:solidFill>
                 <a:latin typeface="Calibri"/>
               </a:rPr>
-              <a:t>Maintenance Planning</a:t>
+              <a:t>Mechanical Maintenance</a:t>
             </a:r>
           </a:p>
         </p:txBody>
@@ -9168,7 +10473,7 @@
               </a:spcAft>
             </a:pPr>
             <a:r>
-              <a:rPr sz="900" b="0">
+              <a:rPr sz="950" b="0">
                 <a:solidFill>
                   <a:srgbClr val="C8D8F5"/>
                 </a:solidFill>
@@ -9184,7 +10489,7 @@
               </a:spcAft>
             </a:pPr>
             <a:r>
-              <a:rPr sz="900" b="0">
+              <a:rPr sz="950" b="0">
                 <a:solidFill>
                   <a:srgbClr val="C8D8F5"/>
                 </a:solidFill>
@@ -9204,7 +10509,7 @@
         <p:spPr>
           <a:xfrm>
             <a:off x="228600" y="1143000"/>
-            <a:ext cx="3246120" cy="5486400"/>
+            <a:ext cx="3246120" cy="5532120"/>
           </a:xfrm>
           <a:prstGeom prst="roundRect">
             <a:avLst>
@@ -9251,7 +10556,7 @@
         </p:nvSpPr>
         <p:spPr>
           <a:xfrm>
-            <a:off x="384048" y="1280160"/>
+            <a:off x="384048" y="1261872"/>
             <a:ext cx="2971800" cy="457200"/>
           </a:xfrm>
           <a:prstGeom prst="rect">
@@ -9271,7 +10576,7 @@
               </a:spcAft>
             </a:pPr>
             <a:r>
-              <a:rPr sz="1050" b="1">
+              <a:rPr sz="1100" b="1">
                 <a:solidFill>
                   <a:srgbClr val="1F6FEB"/>
                 </a:solidFill>
@@ -9307,8 +10612,8 @@
         </p:nvSpPr>
         <p:spPr>
           <a:xfrm>
-            <a:off x="384048" y="1965960"/>
-            <a:ext cx="2971800" cy="2011680"/>
+            <a:off x="384048" y="1920240"/>
+            <a:ext cx="2971800" cy="2103120"/>
           </a:xfrm>
           <a:prstGeom prst="rect">
             <a:avLst/>
@@ -9327,7 +10632,7 @@
               </a:spcAft>
             </a:pPr>
             <a:r>
-              <a:rPr sz="1050" b="1">
+              <a:rPr sz="1100" b="1">
                 <a:solidFill>
                   <a:srgbClr val="1F6FEB"/>
                 </a:solidFill>
@@ -9344,7 +10649,7 @@
               <a:buChar char="•"/>
             </a:pPr>
             <a:r>
-              <a:rPr sz="900" b="0">
+              <a:rPr sz="950" b="0">
                 <a:solidFill>
                   <a:srgbClr val="141B26"/>
                 </a:solidFill>
@@ -9361,7 +10666,7 @@
               <a:buChar char="•"/>
             </a:pPr>
             <a:r>
-              <a:rPr sz="900" b="0">
+              <a:rPr sz="950" b="0">
                 <a:solidFill>
                   <a:srgbClr val="141B26"/>
                 </a:solidFill>
@@ -9378,7 +10683,7 @@
               <a:buChar char="•"/>
             </a:pPr>
             <a:r>
-              <a:rPr sz="900" b="0">
+              <a:rPr sz="950" b="0">
                 <a:solidFill>
                   <a:srgbClr val="141B26"/>
                 </a:solidFill>
@@ -9395,7 +10700,7 @@
               <a:buChar char="•"/>
             </a:pPr>
             <a:r>
-              <a:rPr sz="900" b="0">
+              <a:rPr sz="950" b="0">
                 <a:solidFill>
                   <a:srgbClr val="141B26"/>
                 </a:solidFill>
@@ -9414,8 +10719,8 @@
         </p:nvSpPr>
         <p:spPr>
           <a:xfrm>
-            <a:off x="384048" y="4069080"/>
-            <a:ext cx="2971800" cy="2377440"/>
+            <a:off x="384048" y="4114800"/>
+            <a:ext cx="2971800" cy="2468880"/>
           </a:xfrm>
           <a:prstGeom prst="rect">
             <a:avLst/>
@@ -9434,7 +10739,7 @@
               </a:spcAft>
             </a:pPr>
             <a:r>
-              <a:rPr sz="1050" b="1">
+              <a:rPr sz="1100" b="1">
                 <a:solidFill>
                   <a:srgbClr val="1F6FEB"/>
                 </a:solidFill>
@@ -9451,7 +10756,7 @@
               <a:buChar char="•"/>
             </a:pPr>
             <a:r>
-              <a:rPr sz="900" b="0">
+              <a:rPr sz="950" b="0">
                 <a:solidFill>
                   <a:srgbClr val="141B26"/>
                 </a:solidFill>
@@ -9468,7 +10773,7 @@
               <a:buChar char="•"/>
             </a:pPr>
             <a:r>
-              <a:rPr sz="900" b="0">
+              <a:rPr sz="950" b="0">
                 <a:solidFill>
                   <a:srgbClr val="141B26"/>
                 </a:solidFill>
@@ -9485,7 +10790,7 @@
               <a:buChar char="•"/>
             </a:pPr>
             <a:r>
-              <a:rPr sz="900" b="0">
+              <a:rPr sz="950" b="0">
                 <a:solidFill>
                   <a:srgbClr val="141B26"/>
                 </a:solidFill>
@@ -9502,7 +10807,7 @@
               <a:buChar char="•"/>
             </a:pPr>
             <a:r>
-              <a:rPr sz="900" b="0">
+              <a:rPr sz="950" b="0">
                 <a:solidFill>
                   <a:srgbClr val="141B26"/>
                 </a:solidFill>
@@ -9521,8 +10826,8 @@
         </p:nvSpPr>
         <p:spPr>
           <a:xfrm>
-            <a:off x="3703320" y="1234440"/>
-            <a:ext cx="4114800" cy="2834640"/>
+            <a:off x="3703320" y="1207008"/>
+            <a:ext cx="4114800" cy="3108960"/>
           </a:xfrm>
           <a:prstGeom prst="rect">
             <a:avLst/>
@@ -9541,7 +10846,7 @@
               </a:spcAft>
             </a:pPr>
             <a:r>
-              <a:rPr sz="1050" b="1">
+              <a:rPr sz="1100" b="1">
                 <a:solidFill>
                   <a:srgbClr val="1F6FEB"/>
                 </a:solidFill>
@@ -9558,7 +10863,7 @@
               <a:buChar char="•"/>
             </a:pPr>
             <a:r>
-              <a:rPr sz="900" b="0">
+              <a:rPr sz="950" b="0">
                 <a:solidFill>
                   <a:srgbClr val="141B26"/>
                 </a:solidFill>
@@ -9575,7 +10880,7 @@
               <a:buChar char="•"/>
             </a:pPr>
             <a:r>
-              <a:rPr sz="900" b="0">
+              <a:rPr sz="950" b="0">
                 <a:solidFill>
                   <a:srgbClr val="141B26"/>
                 </a:solidFill>
@@ -9592,7 +10897,7 @@
               <a:buChar char="•"/>
             </a:pPr>
             <a:r>
-              <a:rPr sz="900" b="0">
+              <a:rPr sz="950" b="0">
                 <a:solidFill>
                   <a:srgbClr val="141B26"/>
                 </a:solidFill>
@@ -9611,8 +10916,8 @@
         </p:nvSpPr>
         <p:spPr>
           <a:xfrm>
-            <a:off x="3703320" y="4206240"/>
-            <a:ext cx="4114800" cy="2468880"/>
+            <a:off x="3703320" y="4434840"/>
+            <a:ext cx="4114800" cy="2240280"/>
           </a:xfrm>
           <a:prstGeom prst="rect">
             <a:avLst/>
@@ -9631,7 +10936,7 @@
               </a:spcAft>
             </a:pPr>
             <a:r>
-              <a:rPr sz="1050" b="1">
+              <a:rPr sz="1100" b="1">
                 <a:solidFill>
                   <a:srgbClr val="1F6FEB"/>
                 </a:solidFill>
@@ -9648,7 +10953,7 @@
               <a:buChar char="•"/>
             </a:pPr>
             <a:r>
-              <a:rPr sz="900" b="0">
+              <a:rPr sz="950" b="0">
                 <a:solidFill>
                   <a:srgbClr val="141B26"/>
                 </a:solidFill>
@@ -9665,7 +10970,7 @@
               <a:buChar char="•"/>
             </a:pPr>
             <a:r>
-              <a:rPr sz="900" b="0">
+              <a:rPr sz="950" b="0">
                 <a:solidFill>
                   <a:srgbClr val="141B26"/>
                 </a:solidFill>
@@ -9682,7 +10987,7 @@
               <a:buChar char="•"/>
             </a:pPr>
             <a:r>
-              <a:rPr sz="900" b="0">
+              <a:rPr sz="950" b="0">
                 <a:solidFill>
                   <a:srgbClr val="141B26"/>
                 </a:solidFill>
@@ -9699,7 +11004,7 @@
               <a:buChar char="•"/>
             </a:pPr>
             <a:r>
-              <a:rPr sz="900" b="0">
+              <a:rPr sz="950" b="0">
                 <a:solidFill>
                   <a:srgbClr val="141B26"/>
                 </a:solidFill>
@@ -9716,7 +11021,7 @@
               <a:buChar char="•"/>
             </a:pPr>
             <a:r>
-              <a:rPr sz="900" b="0">
+              <a:rPr sz="950" b="0">
                 <a:solidFill>
                   <a:srgbClr val="141B26"/>
                 </a:solidFill>
@@ -9729,14 +11034,62 @@
       </p:sp>
       <p:sp>
         <p:nvSpPr>
-          <p:cNvPr id="11" name="TextBox 10"/>
+          <p:cNvPr id="11" name="Rounded Rectangle 10"/>
+          <p:cNvSpPr/>
+          <p:nvPr/>
+        </p:nvSpPr>
+        <p:spPr>
+          <a:xfrm>
+            <a:off x="8001000" y="1143000"/>
+            <a:ext cx="3977639" cy="2331720"/>
+          </a:xfrm>
+          <a:prstGeom prst="roundRect">
+            <a:avLst>
+              <a:gd name="adj" fmla="val 8000"/>
+            </a:avLst>
+          </a:prstGeom>
+          <a:solidFill>
+            <a:srgbClr val="F0F4FA"/>
+          </a:solidFill>
+          <a:ln w="15875">
+            <a:solidFill>
+              <a:srgbClr val="0E7C5A"/>
+            </a:solidFill>
+          </a:ln>
+          <a:effectLst/>
+        </p:spPr>
+        <p:style>
+          <a:lnRef idx="1">
+            <a:schemeClr val="accent1"/>
+          </a:lnRef>
+          <a:fillRef idx="3">
+            <a:schemeClr val="accent1"/>
+          </a:fillRef>
+          <a:effectRef idx="2">
+            <a:schemeClr val="accent1"/>
+          </a:effectRef>
+          <a:fontRef idx="minor">
+            <a:schemeClr val="lt1"/>
+          </a:fontRef>
+        </p:style>
+        <p:txBody>
+          <a:bodyPr rtlCol="0" anchor="ctr"/>
+          <a:lstStyle/>
+          <a:p>
+            <a:pPr algn="ctr"/>
+          </a:p>
+        </p:txBody>
+      </p:sp>
+      <p:sp>
+        <p:nvSpPr>
+          <p:cNvPr id="12" name="TextBox 11"/>
           <p:cNvSpPr txBox="1"/>
           <p:nvPr/>
         </p:nvSpPr>
         <p:spPr>
           <a:xfrm>
-            <a:off x="8046720" y="1234440"/>
-            <a:ext cx="3886200" cy="5394960"/>
+            <a:off x="8138160" y="1252728"/>
+            <a:ext cx="3703320" cy="2148840"/>
           </a:xfrm>
           <a:prstGeom prst="rect">
             <a:avLst/>
@@ -9757,6 +11110,96 @@
             <a:r>
               <a:rPr sz="1050" b="1">
                 <a:solidFill>
+                  <a:srgbClr val="0E7C5A"/>
+                </a:solidFill>
+                <a:latin typeface="Calibri"/>
+              </a:rPr>
+              <a:t>🎯 VALUE TO THIS PROJECT — DUQM</a:t>
+            </a:r>
+          </a:p>
+          <a:p>
+            <a:pPr>
+              <a:spcAft>
+                <a:spcPts val="200"/>
+              </a:spcAft>
+              <a:buChar char="•"/>
+            </a:pPr>
+            <a:r>
+              <a:rPr sz="950" b="0">
+                <a:solidFill>
+                  <a:srgbClr val="141B26"/>
+                </a:solidFill>
+                <a:latin typeface="Calibri"/>
+              </a:rPr>
+              <a:t>Maintains the exact equipment of a mineral recovery plant: crushers, mills, pumps, screens, hydrocyclones and conveyors.</a:t>
+            </a:r>
+          </a:p>
+          <a:p>
+            <a:pPr>
+              <a:spcAft>
+                <a:spcPts val="200"/>
+              </a:spcAft>
+              <a:buChar char="•"/>
+            </a:pPr>
+            <a:r>
+              <a:rPr sz="950" b="0">
+                <a:solidFill>
+                  <a:srgbClr val="141B26"/>
+                </a:solidFill>
+                <a:latin typeface="Calibri"/>
+              </a:rPr>
+              <a:t>SAP planning with inventories and critical spares: maintainability enters the study from the design stage.</a:t>
+            </a:r>
+          </a:p>
+          <a:p>
+            <a:pPr>
+              <a:spcAft>
+                <a:spcPts val="200"/>
+              </a:spcAft>
+              <a:buChar char="•"/>
+            </a:pPr>
+            <a:r>
+              <a:rPr sz="950" b="0">
+                <a:solidFill>
+                  <a:srgbClr val="141B26"/>
+                </a:solidFill>
+                <a:latin typeface="Calibri"/>
+              </a:rPr>
+              <a:t>Power BI · Machine Learning · Ansys: a natural profile for predictive maintenance on the digital twin · immediate availability, can travel to Oman.</a:t>
+            </a:r>
+          </a:p>
+        </p:txBody>
+      </p:sp>
+      <p:sp>
+        <p:nvSpPr>
+          <p:cNvPr id="13" name="TextBox 12"/>
+          <p:cNvSpPr txBox="1"/>
+          <p:nvPr/>
+        </p:nvSpPr>
+        <p:spPr>
+          <a:xfrm>
+            <a:off x="8046720" y="3657600"/>
+            <a:ext cx="3931920" cy="3017520"/>
+          </a:xfrm>
+          <a:prstGeom prst="rect">
+            <a:avLst/>
+          </a:prstGeom>
+          <a:noFill/>
+        </p:spPr>
+        <p:txBody>
+          <a:bodyPr wrap="square">
+            <a:spAutoFit/>
+          </a:bodyPr>
+          <a:lstStyle/>
+          <a:p>
+            <a:pPr>
+              <a:spcAft>
+                <a:spcPts val="400"/>
+              </a:spcAft>
+            </a:pPr>
+            <a:r>
+              <a:rPr sz="1100" b="1">
+                <a:solidFill>
                   <a:srgbClr val="1F6FEB"/>
                 </a:solidFill>
                 <a:latin typeface="Calibri"/>
@@ -9772,7 +11215,7 @@
               <a:buChar char="•"/>
             </a:pPr>
             <a:r>
-              <a:rPr sz="950" b="0">
+              <a:rPr sz="1000" b="0">
                 <a:solidFill>
                   <a:srgbClr val="141B26"/>
                 </a:solidFill>
@@ -9789,7 +11232,7 @@
               <a:buChar char="•"/>
             </a:pPr>
             <a:r>
-              <a:rPr sz="950" b="0">
+              <a:rPr sz="1000" b="0">
                 <a:solidFill>
                   <a:srgbClr val="141B26"/>
                 </a:solidFill>
@@ -9806,7 +11249,7 @@
               <a:buChar char="•"/>
             </a:pPr>
             <a:r>
-              <a:rPr sz="950" b="0">
+              <a:rPr sz="1000" b="0">
                 <a:solidFill>
                   <a:srgbClr val="141B26"/>
                 </a:solidFill>
@@ -9823,24 +11266,7 @@
               <a:buChar char="•"/>
             </a:pPr>
             <a:r>
-              <a:rPr sz="950" b="0">
-                <a:solidFill>
-                  <a:srgbClr val="141B26"/>
-                </a:solidFill>
-                <a:latin typeface="Calibri"/>
-              </a:rPr>
-              <a:t>Client reporting and field supervision.</a:t>
-            </a:r>
-          </a:p>
-          <a:p>
-            <a:pPr>
-              <a:spcAft>
-                <a:spcPts val="200"/>
-              </a:spcAft>
-              <a:buChar char="•"/>
-            </a:pPr>
-            <a:r>
-              <a:rPr sz="950" b="0">
+              <a:rPr sz="1000" b="0">
                 <a:solidFill>
                   <a:srgbClr val="141B26"/>
                 </a:solidFill>
@@ -9921,7 +11347,7 @@
         </p:nvSpPr>
         <p:spPr>
           <a:xfrm>
-            <a:off x="411480" y="73152"/>
+            <a:off x="411480" y="64008"/>
             <a:ext cx="8778240" cy="868680"/>
           </a:xfrm>
           <a:prstGeom prst="rect">
@@ -9941,7 +11367,7 @@
               </a:spcAft>
             </a:pPr>
             <a:r>
-              <a:rPr sz="2600" b="1">
+              <a:rPr sz="2700" b="1">
                 <a:solidFill>
                   <a:srgbClr val="FFFFFF"/>
                 </a:solidFill>
@@ -9963,7 +11389,7 @@
                 </a:solidFill>
                 <a:latin typeface="Calibri"/>
               </a:rPr>
-              <a:t>Quality Assurance (QA)</a:t>
+              <a:t>Quality Analyst</a:t>
             </a:r>
           </a:p>
         </p:txBody>
@@ -10012,7 +11438,7 @@
               </a:spcAft>
             </a:pPr>
             <a:r>
-              <a:rPr sz="900" b="0">
+              <a:rPr sz="950" b="0">
                 <a:solidFill>
                   <a:srgbClr val="C8D8F5"/>
                 </a:solidFill>
@@ -10028,7 +11454,7 @@
               </a:spcAft>
             </a:pPr>
             <a:r>
-              <a:rPr sz="900" b="0">
+              <a:rPr sz="950" b="0">
                 <a:solidFill>
                   <a:srgbClr val="C8D8F5"/>
                 </a:solidFill>
@@ -10048,7 +11474,7 @@
         <p:spPr>
           <a:xfrm>
             <a:off x="228600" y="1143000"/>
-            <a:ext cx="3246120" cy="5486400"/>
+            <a:ext cx="3246120" cy="5532120"/>
           </a:xfrm>
           <a:prstGeom prst="roundRect">
             <a:avLst>
@@ -10095,7 +11521,7 @@
         </p:nvSpPr>
         <p:spPr>
           <a:xfrm>
-            <a:off x="384048" y="1280160"/>
+            <a:off x="384048" y="1261872"/>
             <a:ext cx="2971800" cy="457200"/>
           </a:xfrm>
           <a:prstGeom prst="rect">
@@ -10115,7 +11541,7 @@
               </a:spcAft>
             </a:pPr>
             <a:r>
-              <a:rPr sz="1050" b="1">
+              <a:rPr sz="1100" b="1">
                 <a:solidFill>
                   <a:srgbClr val="1F6FEB"/>
                 </a:solidFill>
@@ -10151,8 +11577,8 @@
         </p:nvSpPr>
         <p:spPr>
           <a:xfrm>
-            <a:off x="384048" y="1965960"/>
-            <a:ext cx="2971800" cy="2011680"/>
+            <a:off x="384048" y="1920240"/>
+            <a:ext cx="2971800" cy="2103120"/>
           </a:xfrm>
           <a:prstGeom prst="rect">
             <a:avLst/>
@@ -10171,7 +11597,7 @@
               </a:spcAft>
             </a:pPr>
             <a:r>
-              <a:rPr sz="1050" b="1">
+              <a:rPr sz="1100" b="1">
                 <a:solidFill>
                   <a:srgbClr val="1F6FEB"/>
                 </a:solidFill>
@@ -10188,7 +11614,7 @@
               <a:buChar char="•"/>
             </a:pPr>
             <a:r>
-              <a:rPr sz="900" b="0">
+              <a:rPr sz="950" b="0">
                 <a:solidFill>
                   <a:srgbClr val="141B26"/>
                 </a:solidFill>
@@ -10205,7 +11631,7 @@
               <a:buChar char="•"/>
             </a:pPr>
             <a:r>
-              <a:rPr sz="900" b="0">
+              <a:rPr sz="950" b="0">
                 <a:solidFill>
                   <a:srgbClr val="141B26"/>
                 </a:solidFill>
@@ -10224,8 +11650,8 @@
         </p:nvSpPr>
         <p:spPr>
           <a:xfrm>
-            <a:off x="384048" y="4069080"/>
-            <a:ext cx="2971800" cy="2377440"/>
+            <a:off x="384048" y="4114800"/>
+            <a:ext cx="2971800" cy="2468880"/>
           </a:xfrm>
           <a:prstGeom prst="rect">
             <a:avLst/>
@@ -10244,7 +11670,7 @@
               </a:spcAft>
             </a:pPr>
             <a:r>
-              <a:rPr sz="1050" b="1">
+              <a:rPr sz="1100" b="1">
                 <a:solidFill>
                   <a:srgbClr val="1F6FEB"/>
                 </a:solidFill>
@@ -10261,7 +11687,7 @@
               <a:buChar char="•"/>
             </a:pPr>
             <a:r>
-              <a:rPr sz="900" b="0">
+              <a:rPr sz="950" b="0">
                 <a:solidFill>
                   <a:srgbClr val="141B26"/>
                 </a:solidFill>
@@ -10278,7 +11704,7 @@
               <a:buChar char="•"/>
             </a:pPr>
             <a:r>
-              <a:rPr sz="900" b="0">
+              <a:rPr sz="950" b="0">
                 <a:solidFill>
                   <a:srgbClr val="141B26"/>
                 </a:solidFill>
@@ -10295,7 +11721,7 @@
               <a:buChar char="•"/>
             </a:pPr>
             <a:r>
-              <a:rPr sz="900" b="0">
+              <a:rPr sz="950" b="0">
                 <a:solidFill>
                   <a:srgbClr val="141B26"/>
                 </a:solidFill>
@@ -10312,7 +11738,7 @@
               <a:buChar char="•"/>
             </a:pPr>
             <a:r>
-              <a:rPr sz="900" b="0">
+              <a:rPr sz="950" b="0">
                 <a:solidFill>
                   <a:srgbClr val="141B26"/>
                 </a:solidFill>
@@ -10331,8 +11757,8 @@
         </p:nvSpPr>
         <p:spPr>
           <a:xfrm>
-            <a:off x="3703320" y="1234440"/>
-            <a:ext cx="4114800" cy="2834640"/>
+            <a:off x="3703320" y="1207008"/>
+            <a:ext cx="4114800" cy="3108960"/>
           </a:xfrm>
           <a:prstGeom prst="rect">
             <a:avLst/>
@@ -10351,7 +11777,7 @@
               </a:spcAft>
             </a:pPr>
             <a:r>
-              <a:rPr sz="1050" b="1">
+              <a:rPr sz="1100" b="1">
                 <a:solidFill>
                   <a:srgbClr val="1F6FEB"/>
                 </a:solidFill>
@@ -10368,7 +11794,7 @@
               <a:buChar char="•"/>
             </a:pPr>
             <a:r>
-              <a:rPr sz="900" b="0">
+              <a:rPr sz="950" b="0">
                 <a:solidFill>
                   <a:srgbClr val="141B26"/>
                 </a:solidFill>
@@ -10385,7 +11811,7 @@
               <a:buChar char="•"/>
             </a:pPr>
             <a:r>
-              <a:rPr sz="900" b="0">
+              <a:rPr sz="950" b="0">
                 <a:solidFill>
                   <a:srgbClr val="141B26"/>
                 </a:solidFill>
@@ -10404,8 +11830,8 @@
         </p:nvSpPr>
         <p:spPr>
           <a:xfrm>
-            <a:off x="3703320" y="4206240"/>
-            <a:ext cx="4114800" cy="2468880"/>
+            <a:off x="3703320" y="4434840"/>
+            <a:ext cx="4114800" cy="2240280"/>
           </a:xfrm>
           <a:prstGeom prst="rect">
             <a:avLst/>
@@ -10424,7 +11850,7 @@
               </a:spcAft>
             </a:pPr>
             <a:r>
-              <a:rPr sz="1050" b="1">
+              <a:rPr sz="1100" b="1">
                 <a:solidFill>
                   <a:srgbClr val="1F6FEB"/>
                 </a:solidFill>
@@ -10441,7 +11867,7 @@
               <a:buChar char="•"/>
             </a:pPr>
             <a:r>
-              <a:rPr sz="900" b="0">
+              <a:rPr sz="950" b="0">
                 <a:solidFill>
                   <a:srgbClr val="141B26"/>
                 </a:solidFill>
@@ -10458,7 +11884,7 @@
               <a:buChar char="•"/>
             </a:pPr>
             <a:r>
-              <a:rPr sz="900" b="0">
+              <a:rPr sz="950" b="0">
                 <a:solidFill>
                   <a:srgbClr val="141B26"/>
                 </a:solidFill>
@@ -10475,7 +11901,7 @@
               <a:buChar char="•"/>
             </a:pPr>
             <a:r>
-              <a:rPr sz="900" b="0">
+              <a:rPr sz="950" b="0">
                 <a:solidFill>
                   <a:srgbClr val="141B26"/>
                 </a:solidFill>
@@ -10492,7 +11918,7 @@
               <a:buChar char="•"/>
             </a:pPr>
             <a:r>
-              <a:rPr sz="900" b="0">
+              <a:rPr sz="950" b="0">
                 <a:solidFill>
                   <a:srgbClr val="141B26"/>
                 </a:solidFill>
@@ -10509,7 +11935,7 @@
               <a:buChar char="•"/>
             </a:pPr>
             <a:r>
-              <a:rPr sz="900" b="0">
+              <a:rPr sz="950" b="0">
                 <a:solidFill>
                   <a:srgbClr val="141B26"/>
                 </a:solidFill>
@@ -10522,14 +11948,62 @@
       </p:sp>
       <p:sp>
         <p:nvSpPr>
-          <p:cNvPr id="11" name="TextBox 10"/>
+          <p:cNvPr id="11" name="Rounded Rectangle 10"/>
+          <p:cNvSpPr/>
+          <p:nvPr/>
+        </p:nvSpPr>
+        <p:spPr>
+          <a:xfrm>
+            <a:off x="8001000" y="1143000"/>
+            <a:ext cx="3977639" cy="2331720"/>
+          </a:xfrm>
+          <a:prstGeom prst="roundRect">
+            <a:avLst>
+              <a:gd name="adj" fmla="val 8000"/>
+            </a:avLst>
+          </a:prstGeom>
+          <a:solidFill>
+            <a:srgbClr val="F0F4FA"/>
+          </a:solidFill>
+          <a:ln w="15875">
+            <a:solidFill>
+              <a:srgbClr val="0E7C5A"/>
+            </a:solidFill>
+          </a:ln>
+          <a:effectLst/>
+        </p:spPr>
+        <p:style>
+          <a:lnRef idx="1">
+            <a:schemeClr val="accent1"/>
+          </a:lnRef>
+          <a:fillRef idx="3">
+            <a:schemeClr val="accent1"/>
+          </a:fillRef>
+          <a:effectRef idx="2">
+            <a:schemeClr val="accent1"/>
+          </a:effectRef>
+          <a:fontRef idx="minor">
+            <a:schemeClr val="lt1"/>
+          </a:fontRef>
+        </p:style>
+        <p:txBody>
+          <a:bodyPr rtlCol="0" anchor="ctr"/>
+          <a:lstStyle/>
+          <a:p>
+            <a:pPr algn="ctr"/>
+          </a:p>
+        </p:txBody>
+      </p:sp>
+      <p:sp>
+        <p:nvSpPr>
+          <p:cNvPr id="12" name="TextBox 11"/>
           <p:cNvSpPr txBox="1"/>
           <p:nvPr/>
         </p:nvSpPr>
         <p:spPr>
           <a:xfrm>
-            <a:off x="8046720" y="1234440"/>
-            <a:ext cx="3886200" cy="5394960"/>
+            <a:off x="8138160" y="1252728"/>
+            <a:ext cx="3703320" cy="2148840"/>
           </a:xfrm>
           <a:prstGeom prst="rect">
             <a:avLst/>
@@ -10550,6 +12024,96 @@
             <a:r>
               <a:rPr sz="1050" b="1">
                 <a:solidFill>
+                  <a:srgbClr val="0E7C5A"/>
+                </a:solidFill>
+                <a:latin typeface="Calibri"/>
+              </a:rPr>
+              <a:t>🎯 VALUE TO THIS PROJECT — DUQM</a:t>
+            </a:r>
+          </a:p>
+          <a:p>
+            <a:pPr>
+              <a:spcAft>
+                <a:spcPts val="200"/>
+              </a:spcAft>
+              <a:buChar char="•"/>
+            </a:pPr>
+            <a:r>
+              <a:rPr sz="950" b="0">
+                <a:solidFill>
+                  <a:srgbClr val="141B26"/>
+                </a:solidFill>
+                <a:latin typeface="Calibri"/>
+              </a:rPr>
+              <a:t>QA of engineering deliverables (drawings, P&amp;IDs, dossiers): nothing reaches the client without passing the quality cycle.</a:t>
+            </a:r>
+          </a:p>
+          <a:p>
+            <a:pPr>
+              <a:spcAft>
+                <a:spcPts val="200"/>
+              </a:spcAft>
+              <a:buChar char="•"/>
+            </a:pPr>
+            <a:r>
+              <a:rPr sz="950" b="0">
+                <a:solidFill>
+                  <a:srgbClr val="141B26"/>
+                </a:solidFill>
+                <a:latin typeface="Calibri"/>
+              </a:rPr>
+              <a:t>Specialist in standardizing critical procedures — turns team knowledge into objective, repeatable documents.</a:t>
+            </a:r>
+          </a:p>
+          <a:p>
+            <a:pPr>
+              <a:spcAft>
+                <a:spcPts val="200"/>
+              </a:spcAft>
+              <a:buChar char="•"/>
+            </a:pPr>
+            <a:r>
+              <a:rPr sz="950" b="0">
+                <a:solidFill>
+                  <a:srgbClr val="141B26"/>
+                </a:solidFill>
+                <a:latin typeface="Calibri"/>
+              </a:rPr>
+              <a:t>Immediate full-time availability · digital-twin affinity (RockVision D-Twin).</a:t>
+            </a:r>
+          </a:p>
+        </p:txBody>
+      </p:sp>
+      <p:sp>
+        <p:nvSpPr>
+          <p:cNvPr id="13" name="TextBox 12"/>
+          <p:cNvSpPr txBox="1"/>
+          <p:nvPr/>
+        </p:nvSpPr>
+        <p:spPr>
+          <a:xfrm>
+            <a:off x="8046720" y="3657600"/>
+            <a:ext cx="3931920" cy="3017520"/>
+          </a:xfrm>
+          <a:prstGeom prst="rect">
+            <a:avLst/>
+          </a:prstGeom>
+          <a:noFill/>
+        </p:spPr>
+        <p:txBody>
+          <a:bodyPr wrap="square">
+            <a:spAutoFit/>
+          </a:bodyPr>
+          <a:lstStyle/>
+          <a:p>
+            <a:pPr>
+              <a:spcAft>
+                <a:spcPts val="400"/>
+              </a:spcAft>
+            </a:pPr>
+            <a:r>
+              <a:rPr sz="1100" b="1">
+                <a:solidFill>
                   <a:srgbClr val="1F6FEB"/>
                 </a:solidFill>
                 <a:latin typeface="Calibri"/>
@@ -10565,7 +12129,7 @@
               <a:buChar char="•"/>
             </a:pPr>
             <a:r>
-              <a:rPr sz="950" b="0">
+              <a:rPr sz="1000" b="0">
                 <a:solidFill>
                   <a:srgbClr val="141B26"/>
                 </a:solidFill>
@@ -10582,7 +12146,7 @@
               <a:buChar char="•"/>
             </a:pPr>
             <a:r>
-              <a:rPr sz="950" b="0">
+              <a:rPr sz="1000" b="0">
                 <a:solidFill>
                   <a:srgbClr val="141B26"/>
                 </a:solidFill>
@@ -10599,7 +12163,7 @@
               <a:buChar char="•"/>
             </a:pPr>
             <a:r>
-              <a:rPr sz="950" b="0">
+              <a:rPr sz="1000" b="0">
                 <a:solidFill>
                   <a:srgbClr val="141B26"/>
                 </a:solidFill>
@@ -10616,7 +12180,7 @@
               <a:buChar char="•"/>
             </a:pPr>
             <a:r>
-              <a:rPr sz="950" b="0">
+              <a:rPr sz="1000" b="0">
                 <a:solidFill>
                   <a:srgbClr val="141B26"/>
                 </a:solidFill>

--- a/web/og-b0d2f7a3-files/Sigma-Digital-Twins-Team-Duqm-EN.pptx
+++ b/web/og-b0d2f7a3-files/Sigma-Digital-Twins-Team-Duqm-EN.pptx
@@ -15,7 +15,6 @@
     <p:sldId id="263" r:id="rId14"/>
     <p:sldId id="264" r:id="rId15"/>
     <p:sldId id="265" r:id="rId16"/>
-    <p:sldId id="266" r:id="rId17"/>
   </p:sldIdLst>
   <p:sldSz cx="12191695" cy="6858000" type="screen4x3"/>
   <p:notesSz cx="6858000" cy="9144000"/>
@@ -3098,40 +3097,104 @@
         <p:nvPr/>
       </p:nvGrpSpPr>
       <p:grpSpPr/>
-      <p:pic>
-        <p:nvPicPr>
-          <p:cNvPr id="2" name="Picture 1" descr="logo.png"/>
-          <p:cNvPicPr>
-            <a:picLocks noChangeAspect="1"/>
-          </p:cNvPicPr>
+      <p:sp>
+        <p:nvSpPr>
+          <p:cNvPr id="2" name="Rectangle 1"/>
+          <p:cNvSpPr/>
           <p:nvPr/>
-        </p:nvPicPr>
-        <p:blipFill>
-          <a:blip r:embed="rId2"/>
-          <a:stretch>
-            <a:fillRect/>
-          </a:stretch>
-        </p:blipFill>
-        <p:spPr>
-          <a:xfrm>
-            <a:off x="10789920" y="246888"/>
-            <a:ext cx="1161288" cy="1161288"/>
+        </p:nvSpPr>
+        <p:spPr>
+          <a:xfrm>
+            <a:off x="0" y="0"/>
+            <a:ext cx="12191695" cy="6858000"/>
           </a:xfrm>
           <a:prstGeom prst="rect">
             <a:avLst/>
           </a:prstGeom>
-        </p:spPr>
-      </p:pic>
-      <p:sp>
-        <p:nvSpPr>
-          <p:cNvPr id="3" name="TextBox 2"/>
+          <a:solidFill>
+            <a:srgbClr val="0B3D91"/>
+          </a:solidFill>
+          <a:ln>
+            <a:noFill/>
+          </a:ln>
+          <a:effectLst/>
+        </p:spPr>
+        <p:style>
+          <a:lnRef idx="1">
+            <a:schemeClr val="accent1"/>
+          </a:lnRef>
+          <a:fillRef idx="3">
+            <a:schemeClr val="accent1"/>
+          </a:fillRef>
+          <a:effectRef idx="2">
+            <a:schemeClr val="accent1"/>
+          </a:effectRef>
+          <a:fontRef idx="minor">
+            <a:schemeClr val="lt1"/>
+          </a:fontRef>
+        </p:style>
+        <p:txBody>
+          <a:bodyPr rtlCol="0" anchor="ctr"/>
+          <a:lstStyle/>
+          <a:p>
+            <a:pPr algn="ctr"/>
+          </a:p>
+        </p:txBody>
+      </p:sp>
+      <p:sp>
+        <p:nvSpPr>
+          <p:cNvPr id="3" name="Rectangle 2"/>
+          <p:cNvSpPr/>
+          <p:nvPr/>
+        </p:nvSpPr>
+        <p:spPr>
+          <a:xfrm>
+            <a:off x="0" y="4480560"/>
+            <a:ext cx="12191695" cy="38100"/>
+          </a:xfrm>
+          <a:prstGeom prst="rect">
+            <a:avLst/>
+          </a:prstGeom>
+          <a:solidFill>
+            <a:srgbClr val="1F6FEB"/>
+          </a:solidFill>
+          <a:ln>
+            <a:noFill/>
+          </a:ln>
+          <a:effectLst/>
+        </p:spPr>
+        <p:style>
+          <a:lnRef idx="1">
+            <a:schemeClr val="accent1"/>
+          </a:lnRef>
+          <a:fillRef idx="3">
+            <a:schemeClr val="accent1"/>
+          </a:fillRef>
+          <a:effectRef idx="2">
+            <a:schemeClr val="accent1"/>
+          </a:effectRef>
+          <a:fontRef idx="minor">
+            <a:schemeClr val="lt1"/>
+          </a:fontRef>
+        </p:style>
+        <p:txBody>
+          <a:bodyPr rtlCol="0" anchor="ctr"/>
+          <a:lstStyle/>
+          <a:p>
+            <a:pPr algn="ctr"/>
+          </a:p>
+        </p:txBody>
+      </p:sp>
+      <p:sp>
+        <p:nvSpPr>
+          <p:cNvPr id="4" name="TextBox 3"/>
           <p:cNvSpPr txBox="1"/>
           <p:nvPr/>
         </p:nvSpPr>
         <p:spPr>
           <a:xfrm>
-            <a:off x="301752" y="502920"/>
-            <a:ext cx="10241280" cy="365760"/>
+            <a:off x="822960" y="2011680"/>
+            <a:ext cx="10515600" cy="2377440"/>
           </a:xfrm>
           <a:prstGeom prst="rect">
             <a:avLst/>
@@ -3146,31 +3209,79 @@
           <a:p>
             <a:pPr>
               <a:spcAft>
-                <a:spcPts val="200"/>
-              </a:spcAft>
-            </a:pPr>
-            <a:r>
-              <a:rPr sz="1400" b="1">
-                <a:solidFill>
-                  <a:srgbClr val="1F6FEB"/>
+                <a:spcPts val="1000"/>
+              </a:spcAft>
+            </a:pPr>
+            <a:r>
+              <a:rPr sz="2000" b="1">
+                <a:solidFill>
+                  <a:srgbClr val="9FC1FF"/>
                 </a:solidFill>
                 <a:latin typeface="Calibri"/>
               </a:rPr>
               <a:t>SIGMA DIGITAL TWINS</a:t>
             </a:r>
           </a:p>
-        </p:txBody>
-      </p:sp>
-      <p:sp>
-        <p:nvSpPr>
-          <p:cNvPr id="4" name="TextBox 3"/>
+          <a:p>
+            <a:pPr>
+              <a:spcAft>
+                <a:spcPts val="800"/>
+              </a:spcAft>
+            </a:pPr>
+            <a:r>
+              <a:rPr sz="4400" b="1">
+                <a:solidFill>
+                  <a:srgbClr val="FFFFFF"/>
+                </a:solidFill>
+                <a:latin typeface="Calibri"/>
+              </a:rPr>
+              <a:t>Proposed Team</a:t>
+            </a:r>
+          </a:p>
+          <a:p>
+            <a:pPr>
+              <a:spcAft>
+                <a:spcPts val="400"/>
+              </a:spcAft>
+            </a:pPr>
+            <a:r>
+              <a:rPr sz="2200" b="0">
+                <a:solidFill>
+                  <a:srgbClr val="FFFFFF"/>
+                </a:solidFill>
+                <a:latin typeface="Calibri"/>
+              </a:rPr>
+              <a:t>Mineral Recovery Project — Duqm, Oman</a:t>
+            </a:r>
+          </a:p>
+          <a:p>
+            <a:pPr>
+              <a:spcAft>
+                <a:spcPts val="200"/>
+              </a:spcAft>
+            </a:pPr>
+            <a:r>
+              <a:rPr sz="1400" b="0">
+                <a:solidFill>
+                  <a:srgbClr val="C8D8F5"/>
+                </a:solidFill>
+                <a:latin typeface="Calibri"/>
+              </a:rPr>
+              <a:t>Conceptual + Basic Engineering Study · July 2026</a:t>
+            </a:r>
+          </a:p>
+        </p:txBody>
+      </p:sp>
+      <p:sp>
+        <p:nvSpPr>
+          <p:cNvPr id="5" name="TextBox 4"/>
           <p:cNvSpPr txBox="1"/>
           <p:nvPr/>
         </p:nvSpPr>
         <p:spPr>
           <a:xfrm>
-            <a:off x="274320" y="1051560"/>
-            <a:ext cx="10332720" cy="960120"/>
+            <a:off x="822960" y="6035040"/>
+            <a:ext cx="10515600" cy="457200"/>
           </a:xfrm>
           <a:prstGeom prst="rect">
             <a:avLst/>
@@ -3189,111 +3300,9 @@
               </a:spcAft>
             </a:pPr>
             <a:r>
-              <a:rPr sz="3200" b="1">
-                <a:solidFill>
-                  <a:srgbClr val="141B26"/>
-                </a:solidFill>
-                <a:latin typeface="Calibri"/>
-              </a:rPr>
-              <a:t>Proposed Team — Duqm, Oman</a:t>
-            </a:r>
-          </a:p>
-        </p:txBody>
-      </p:sp>
-      <p:sp>
-        <p:nvSpPr>
-          <p:cNvPr id="5" name="TextBox 4"/>
-          <p:cNvSpPr txBox="1"/>
-          <p:nvPr/>
-        </p:nvSpPr>
-        <p:spPr>
-          <a:xfrm>
-            <a:off x="301752" y="2057400"/>
-            <a:ext cx="10241280" cy="457200"/>
-          </a:xfrm>
-          <a:prstGeom prst="rect">
-            <a:avLst/>
-          </a:prstGeom>
-          <a:noFill/>
-        </p:spPr>
-        <p:txBody>
-          <a:bodyPr wrap="square">
-            <a:spAutoFit/>
-          </a:bodyPr>
-          <a:lstStyle/>
-          <a:p>
-            <a:pPr>
-              <a:spcAft>
-                <a:spcPts val="200"/>
-              </a:spcAft>
-            </a:pPr>
-            <a:r>
-              <a:rPr sz="1500" b="0">
-                <a:solidFill>
-                  <a:srgbClr val="5B6676"/>
-                </a:solidFill>
-                <a:latin typeface="Calibri"/>
-              </a:rPr>
-              <a:t>Mineral Recovery Project · Conceptual + Basic Engineering Study · July 2026</a:t>
-            </a:r>
-          </a:p>
-        </p:txBody>
-      </p:sp>
-      <p:pic>
-        <p:nvPicPr>
-          <p:cNvPr id="6" name="Picture 5" descr="cover_bg.jpg"/>
-          <p:cNvPicPr>
-            <a:picLocks noChangeAspect="1"/>
-          </p:cNvPicPr>
-          <p:nvPr/>
-        </p:nvPicPr>
-        <p:blipFill>
-          <a:blip r:embed="rId3"/>
-          <a:stretch>
-            <a:fillRect/>
-          </a:stretch>
-        </p:blipFill>
-        <p:spPr>
-          <a:xfrm>
-            <a:off x="301752" y="2834640"/>
-            <a:ext cx="11585448" cy="3291840"/>
-          </a:xfrm>
-          <a:prstGeom prst="rect">
-            <a:avLst/>
-          </a:prstGeom>
-        </p:spPr>
-      </p:pic>
-      <p:sp>
-        <p:nvSpPr>
-          <p:cNvPr id="7" name="TextBox 6"/>
-          <p:cNvSpPr txBox="1"/>
-          <p:nvPr/>
-        </p:nvSpPr>
-        <p:spPr>
-          <a:xfrm>
-            <a:off x="301752" y="6309360"/>
-            <a:ext cx="10515600" cy="365760"/>
-          </a:xfrm>
-          <a:prstGeom prst="rect">
-            <a:avLst/>
-          </a:prstGeom>
-          <a:noFill/>
-        </p:spPr>
-        <p:txBody>
-          <a:bodyPr wrap="square">
-            <a:spAutoFit/>
-          </a:bodyPr>
-          <a:lstStyle/>
-          <a:p>
-            <a:pPr>
-              <a:spcAft>
-                <a:spcPts val="200"/>
-              </a:spcAft>
-            </a:pPr>
-            <a:r>
               <a:rPr sz="1100" b="0">
                 <a:solidFill>
-                  <a:srgbClr val="5B6676"/>
+                  <a:srgbClr val="C8D8F5"/>
                 </a:solidFill>
                 <a:latin typeface="Calibri"/>
               </a:rPr>
@@ -3466,126 +3475,6 @@
                 <a:latin typeface="Calibri"/>
               </a:rPr>
               <a:t>Contact: Jorge Juri — Project Manager · WhatsApp +1 778 835 3720</a:t>
-            </a:r>
-          </a:p>
-        </p:txBody>
-      </p:sp>
-    </p:spTree>
-  </p:cSld>
-  <p:clrMapOvr>
-    <a:masterClrMapping/>
-  </p:clrMapOvr>
-</p:sld>
-</file>
-
-<file path=ppt/slides/slide11.xml><?xml version="1.0" encoding="utf-8"?>
-<p:sld xmlns:a="http://schemas.openxmlformats.org/drawingml/2006/main" xmlns:p="http://schemas.openxmlformats.org/presentationml/2006/main" xmlns:r="http://schemas.openxmlformats.org/officeDocument/2006/relationships">
-  <p:cSld>
-    <p:spTree>
-      <p:nvGrpSpPr>
-        <p:cNvPr id="1" name=""/>
-        <p:cNvGrpSpPr/>
-        <p:nvPr/>
-      </p:nvGrpSpPr>
-      <p:grpSpPr/>
-      <p:sp>
-        <p:nvSpPr>
-          <p:cNvPr id="2" name="TextBox 1"/>
-          <p:cNvSpPr txBox="1"/>
-          <p:nvPr/>
-        </p:nvSpPr>
-        <p:spPr>
-          <a:xfrm>
-            <a:off x="155448" y="201168"/>
-            <a:ext cx="11795760" cy="676656"/>
-          </a:xfrm>
-          <a:prstGeom prst="rect">
-            <a:avLst/>
-          </a:prstGeom>
-          <a:noFill/>
-        </p:spPr>
-        <p:txBody>
-          <a:bodyPr wrap="square">
-            <a:spAutoFit/>
-          </a:bodyPr>
-          <a:lstStyle/>
-          <a:p>
-            <a:pPr>
-              <a:spcAft>
-                <a:spcPts val="200"/>
-              </a:spcAft>
-            </a:pPr>
-            <a:r>
-              <a:rPr sz="2400" b="1">
-                <a:solidFill>
-                  <a:srgbClr val="141B26"/>
-                </a:solidFill>
-                <a:latin typeface="Calibri"/>
-              </a:rPr>
-              <a:t>Join us on this journey of innovation and digital transformation for your business</a:t>
-            </a:r>
-          </a:p>
-        </p:txBody>
-      </p:sp>
-      <p:pic>
-        <p:nvPicPr>
-          <p:cNvPr id="3" name="Picture 2" descr="journey.jpg"/>
-          <p:cNvPicPr>
-            <a:picLocks noChangeAspect="1"/>
-          </p:cNvPicPr>
-          <p:nvPr/>
-        </p:nvPicPr>
-        <p:blipFill>
-          <a:blip r:embed="rId2"/>
-          <a:stretch>
-            <a:fillRect/>
-          </a:stretch>
-        </p:blipFill>
-        <p:spPr>
-          <a:xfrm>
-            <a:off x="0" y="822960"/>
-            <a:ext cx="12191695" cy="5148072"/>
-          </a:xfrm>
-          <a:prstGeom prst="rect">
-            <a:avLst/>
-          </a:prstGeom>
-        </p:spPr>
-      </p:pic>
-      <p:sp>
-        <p:nvSpPr>
-          <p:cNvPr id="4" name="TextBox 3"/>
-          <p:cNvSpPr txBox="1"/>
-          <p:nvPr/>
-        </p:nvSpPr>
-        <p:spPr>
-          <a:xfrm>
-            <a:off x="301752" y="6144768"/>
-            <a:ext cx="10972800" cy="457200"/>
-          </a:xfrm>
-          <a:prstGeom prst="rect">
-            <a:avLst/>
-          </a:prstGeom>
-          <a:noFill/>
-        </p:spPr>
-        <p:txBody>
-          <a:bodyPr wrap="square">
-            <a:spAutoFit/>
-          </a:bodyPr>
-          <a:lstStyle/>
-          <a:p>
-            <a:pPr>
-              <a:spcAft>
-                <a:spcPts val="200"/>
-              </a:spcAft>
-            </a:pPr>
-            <a:r>
-              <a:rPr sz="1200" b="0">
-                <a:solidFill>
-                  <a:srgbClr val="5B6676"/>
-                </a:solidFill>
-                <a:latin typeface="Calibri"/>
-              </a:rPr>
-              <a:t>Contact: Jorge Juri — Project Manager · WhatsApp +1 778 835 3720 · Sigma Digital Twins</a:t>
             </a:r>
           </a:p>
         </p:txBody>

--- a/web/og-b0d2f7a3-files/Sigma-Digital-Twins-Team-Duqm-EN.pptx
+++ b/web/og-b0d2f7a3-files/Sigma-Digital-Twins-Team-Duqm-EN.pptx
@@ -15,6 +15,7 @@
     <p:sldId id="263" r:id="rId14"/>
     <p:sldId id="264" r:id="rId15"/>
     <p:sldId id="265" r:id="rId16"/>
+    <p:sldId id="266" r:id="rId17"/>
   </p:sldIdLst>
   <p:sldSz cx="12191695" cy="6858000" type="screen4x3"/>
   <p:notesSz cx="6858000" cy="9144000"/>
@@ -3097,104 +3098,40 @@
         <p:nvPr/>
       </p:nvGrpSpPr>
       <p:grpSpPr/>
-      <p:sp>
-        <p:nvSpPr>
-          <p:cNvPr id="2" name="Rectangle 1"/>
-          <p:cNvSpPr/>
-          <p:nvPr/>
-        </p:nvSpPr>
-        <p:spPr>
-          <a:xfrm>
-            <a:off x="0" y="0"/>
-            <a:ext cx="12191695" cy="6858000"/>
+      <p:pic>
+        <p:nvPicPr>
+          <p:cNvPr id="2" name="Picture 1" descr="logo.png"/>
+          <p:cNvPicPr>
+            <a:picLocks noChangeAspect="1"/>
+          </p:cNvPicPr>
+          <p:nvPr/>
+        </p:nvPicPr>
+        <p:blipFill>
+          <a:blip r:embed="rId2"/>
+          <a:stretch>
+            <a:fillRect/>
+          </a:stretch>
+        </p:blipFill>
+        <p:spPr>
+          <a:xfrm>
+            <a:off x="10789920" y="246888"/>
+            <a:ext cx="1161288" cy="1161288"/>
           </a:xfrm>
           <a:prstGeom prst="rect">
             <a:avLst/>
           </a:prstGeom>
-          <a:solidFill>
-            <a:srgbClr val="0B3D91"/>
-          </a:solidFill>
-          <a:ln>
-            <a:noFill/>
-          </a:ln>
-          <a:effectLst/>
-        </p:spPr>
-        <p:style>
-          <a:lnRef idx="1">
-            <a:schemeClr val="accent1"/>
-          </a:lnRef>
-          <a:fillRef idx="3">
-            <a:schemeClr val="accent1"/>
-          </a:fillRef>
-          <a:effectRef idx="2">
-            <a:schemeClr val="accent1"/>
-          </a:effectRef>
-          <a:fontRef idx="minor">
-            <a:schemeClr val="lt1"/>
-          </a:fontRef>
-        </p:style>
-        <p:txBody>
-          <a:bodyPr rtlCol="0" anchor="ctr"/>
-          <a:lstStyle/>
-          <a:p>
-            <a:pPr algn="ctr"/>
-          </a:p>
-        </p:txBody>
-      </p:sp>
-      <p:sp>
-        <p:nvSpPr>
-          <p:cNvPr id="3" name="Rectangle 2"/>
-          <p:cNvSpPr/>
-          <p:nvPr/>
-        </p:nvSpPr>
-        <p:spPr>
-          <a:xfrm>
-            <a:off x="0" y="4480560"/>
-            <a:ext cx="12191695" cy="38100"/>
-          </a:xfrm>
-          <a:prstGeom prst="rect">
-            <a:avLst/>
-          </a:prstGeom>
-          <a:solidFill>
-            <a:srgbClr val="1F6FEB"/>
-          </a:solidFill>
-          <a:ln>
-            <a:noFill/>
-          </a:ln>
-          <a:effectLst/>
-        </p:spPr>
-        <p:style>
-          <a:lnRef idx="1">
-            <a:schemeClr val="accent1"/>
-          </a:lnRef>
-          <a:fillRef idx="3">
-            <a:schemeClr val="accent1"/>
-          </a:fillRef>
-          <a:effectRef idx="2">
-            <a:schemeClr val="accent1"/>
-          </a:effectRef>
-          <a:fontRef idx="minor">
-            <a:schemeClr val="lt1"/>
-          </a:fontRef>
-        </p:style>
-        <p:txBody>
-          <a:bodyPr rtlCol="0" anchor="ctr"/>
-          <a:lstStyle/>
-          <a:p>
-            <a:pPr algn="ctr"/>
-          </a:p>
-        </p:txBody>
-      </p:sp>
-      <p:sp>
-        <p:nvSpPr>
-          <p:cNvPr id="4" name="TextBox 3"/>
+        </p:spPr>
+      </p:pic>
+      <p:sp>
+        <p:nvSpPr>
+          <p:cNvPr id="3" name="TextBox 2"/>
           <p:cNvSpPr txBox="1"/>
           <p:nvPr/>
         </p:nvSpPr>
         <p:spPr>
           <a:xfrm>
-            <a:off x="822960" y="2011680"/>
-            <a:ext cx="10515600" cy="2377440"/>
+            <a:off x="301752" y="502920"/>
+            <a:ext cx="10241280" cy="365760"/>
           </a:xfrm>
           <a:prstGeom prst="rect">
             <a:avLst/>
@@ -3209,79 +3146,31 @@
           <a:p>
             <a:pPr>
               <a:spcAft>
-                <a:spcPts val="1000"/>
-              </a:spcAft>
-            </a:pPr>
-            <a:r>
-              <a:rPr sz="2000" b="1">
-                <a:solidFill>
-                  <a:srgbClr val="9FC1FF"/>
+                <a:spcPts val="200"/>
+              </a:spcAft>
+            </a:pPr>
+            <a:r>
+              <a:rPr sz="1400" b="1">
+                <a:solidFill>
+                  <a:srgbClr val="1F6FEB"/>
                 </a:solidFill>
                 <a:latin typeface="Calibri"/>
               </a:rPr>
               <a:t>SIGMA DIGITAL TWINS</a:t>
             </a:r>
           </a:p>
-          <a:p>
-            <a:pPr>
-              <a:spcAft>
-                <a:spcPts val="800"/>
-              </a:spcAft>
-            </a:pPr>
-            <a:r>
-              <a:rPr sz="4400" b="1">
-                <a:solidFill>
-                  <a:srgbClr val="FFFFFF"/>
-                </a:solidFill>
-                <a:latin typeface="Calibri"/>
-              </a:rPr>
-              <a:t>Proposed Team</a:t>
-            </a:r>
-          </a:p>
-          <a:p>
-            <a:pPr>
-              <a:spcAft>
-                <a:spcPts val="400"/>
-              </a:spcAft>
-            </a:pPr>
-            <a:r>
-              <a:rPr sz="2200" b="0">
-                <a:solidFill>
-                  <a:srgbClr val="FFFFFF"/>
-                </a:solidFill>
-                <a:latin typeface="Calibri"/>
-              </a:rPr>
-              <a:t>Mineral Recovery Project — Duqm, Oman</a:t>
-            </a:r>
-          </a:p>
-          <a:p>
-            <a:pPr>
-              <a:spcAft>
-                <a:spcPts val="200"/>
-              </a:spcAft>
-            </a:pPr>
-            <a:r>
-              <a:rPr sz="1400" b="0">
-                <a:solidFill>
-                  <a:srgbClr val="C8D8F5"/>
-                </a:solidFill>
-                <a:latin typeface="Calibri"/>
-              </a:rPr>
-              <a:t>Conceptual + Basic Engineering Study · July 2026</a:t>
-            </a:r>
-          </a:p>
-        </p:txBody>
-      </p:sp>
-      <p:sp>
-        <p:nvSpPr>
-          <p:cNvPr id="5" name="TextBox 4"/>
+        </p:txBody>
+      </p:sp>
+      <p:sp>
+        <p:nvSpPr>
+          <p:cNvPr id="4" name="TextBox 3"/>
           <p:cNvSpPr txBox="1"/>
           <p:nvPr/>
         </p:nvSpPr>
         <p:spPr>
           <a:xfrm>
-            <a:off x="822960" y="6035040"/>
-            <a:ext cx="10515600" cy="457200"/>
+            <a:off x="274320" y="1051560"/>
+            <a:ext cx="10332720" cy="960120"/>
           </a:xfrm>
           <a:prstGeom prst="rect">
             <a:avLst/>
@@ -3300,9 +3189,111 @@
               </a:spcAft>
             </a:pPr>
             <a:r>
+              <a:rPr sz="3200" b="1">
+                <a:solidFill>
+                  <a:srgbClr val="141B26"/>
+                </a:solidFill>
+                <a:latin typeface="Calibri"/>
+              </a:rPr>
+              <a:t>Proposed Team — Duqm, Oman</a:t>
+            </a:r>
+          </a:p>
+        </p:txBody>
+      </p:sp>
+      <p:sp>
+        <p:nvSpPr>
+          <p:cNvPr id="5" name="TextBox 4"/>
+          <p:cNvSpPr txBox="1"/>
+          <p:nvPr/>
+        </p:nvSpPr>
+        <p:spPr>
+          <a:xfrm>
+            <a:off x="301752" y="2057400"/>
+            <a:ext cx="10241280" cy="457200"/>
+          </a:xfrm>
+          <a:prstGeom prst="rect">
+            <a:avLst/>
+          </a:prstGeom>
+          <a:noFill/>
+        </p:spPr>
+        <p:txBody>
+          <a:bodyPr wrap="square">
+            <a:spAutoFit/>
+          </a:bodyPr>
+          <a:lstStyle/>
+          <a:p>
+            <a:pPr>
+              <a:spcAft>
+                <a:spcPts val="200"/>
+              </a:spcAft>
+            </a:pPr>
+            <a:r>
+              <a:rPr sz="1500" b="0">
+                <a:solidFill>
+                  <a:srgbClr val="5B6676"/>
+                </a:solidFill>
+                <a:latin typeface="Calibri"/>
+              </a:rPr>
+              <a:t>Mineral Recovery Project · Conceptual + Basic Engineering Study · July 2026</a:t>
+            </a:r>
+          </a:p>
+        </p:txBody>
+      </p:sp>
+      <p:pic>
+        <p:nvPicPr>
+          <p:cNvPr id="6" name="Picture 5" descr="cover_bg.jpg"/>
+          <p:cNvPicPr>
+            <a:picLocks noChangeAspect="1"/>
+          </p:cNvPicPr>
+          <p:nvPr/>
+        </p:nvPicPr>
+        <p:blipFill>
+          <a:blip r:embed="rId3"/>
+          <a:stretch>
+            <a:fillRect/>
+          </a:stretch>
+        </p:blipFill>
+        <p:spPr>
+          <a:xfrm>
+            <a:off x="301752" y="2834640"/>
+            <a:ext cx="11585448" cy="3291840"/>
+          </a:xfrm>
+          <a:prstGeom prst="rect">
+            <a:avLst/>
+          </a:prstGeom>
+        </p:spPr>
+      </p:pic>
+      <p:sp>
+        <p:nvSpPr>
+          <p:cNvPr id="7" name="TextBox 6"/>
+          <p:cNvSpPr txBox="1"/>
+          <p:nvPr/>
+        </p:nvSpPr>
+        <p:spPr>
+          <a:xfrm>
+            <a:off x="301752" y="6309360"/>
+            <a:ext cx="10515600" cy="365760"/>
+          </a:xfrm>
+          <a:prstGeom prst="rect">
+            <a:avLst/>
+          </a:prstGeom>
+          <a:noFill/>
+        </p:spPr>
+        <p:txBody>
+          <a:bodyPr wrap="square">
+            <a:spAutoFit/>
+          </a:bodyPr>
+          <a:lstStyle/>
+          <a:p>
+            <a:pPr>
+              <a:spcAft>
+                <a:spcPts val="200"/>
+              </a:spcAft>
+            </a:pPr>
+            <a:r>
               <a:rPr sz="1100" b="0">
                 <a:solidFill>
-                  <a:srgbClr val="C8D8F5"/>
+                  <a:srgbClr val="5B6676"/>
                 </a:solidFill>
                 <a:latin typeface="Calibri"/>
               </a:rPr>
@@ -3475,6 +3466,126 @@
                 <a:latin typeface="Calibri"/>
               </a:rPr>
               <a:t>Contact: Jorge Juri — Project Manager · WhatsApp +1 778 835 3720</a:t>
+            </a:r>
+          </a:p>
+        </p:txBody>
+      </p:sp>
+    </p:spTree>
+  </p:cSld>
+  <p:clrMapOvr>
+    <a:masterClrMapping/>
+  </p:clrMapOvr>
+</p:sld>
+</file>
+
+<file path=ppt/slides/slide11.xml><?xml version="1.0" encoding="utf-8"?>
+<p:sld xmlns:a="http://schemas.openxmlformats.org/drawingml/2006/main" xmlns:p="http://schemas.openxmlformats.org/presentationml/2006/main" xmlns:r="http://schemas.openxmlformats.org/officeDocument/2006/relationships">
+  <p:cSld>
+    <p:spTree>
+      <p:nvGrpSpPr>
+        <p:cNvPr id="1" name=""/>
+        <p:cNvGrpSpPr/>
+        <p:nvPr/>
+      </p:nvGrpSpPr>
+      <p:grpSpPr/>
+      <p:sp>
+        <p:nvSpPr>
+          <p:cNvPr id="2" name="TextBox 1"/>
+          <p:cNvSpPr txBox="1"/>
+          <p:nvPr/>
+        </p:nvSpPr>
+        <p:spPr>
+          <a:xfrm>
+            <a:off x="155448" y="201168"/>
+            <a:ext cx="11795760" cy="676656"/>
+          </a:xfrm>
+          <a:prstGeom prst="rect">
+            <a:avLst/>
+          </a:prstGeom>
+          <a:noFill/>
+        </p:spPr>
+        <p:txBody>
+          <a:bodyPr wrap="square">
+            <a:spAutoFit/>
+          </a:bodyPr>
+          <a:lstStyle/>
+          <a:p>
+            <a:pPr>
+              <a:spcAft>
+                <a:spcPts val="200"/>
+              </a:spcAft>
+            </a:pPr>
+            <a:r>
+              <a:rPr sz="2400" b="1">
+                <a:solidFill>
+                  <a:srgbClr val="141B26"/>
+                </a:solidFill>
+                <a:latin typeface="Calibri"/>
+              </a:rPr>
+              <a:t>Join us on this journey of innovation and digital transformation for your business</a:t>
+            </a:r>
+          </a:p>
+        </p:txBody>
+      </p:sp>
+      <p:pic>
+        <p:nvPicPr>
+          <p:cNvPr id="3" name="Picture 2" descr="journey.jpg"/>
+          <p:cNvPicPr>
+            <a:picLocks noChangeAspect="1"/>
+          </p:cNvPicPr>
+          <p:nvPr/>
+        </p:nvPicPr>
+        <p:blipFill>
+          <a:blip r:embed="rId2"/>
+          <a:stretch>
+            <a:fillRect/>
+          </a:stretch>
+        </p:blipFill>
+        <p:spPr>
+          <a:xfrm>
+            <a:off x="0" y="822960"/>
+            <a:ext cx="12191695" cy="5148072"/>
+          </a:xfrm>
+          <a:prstGeom prst="rect">
+            <a:avLst/>
+          </a:prstGeom>
+        </p:spPr>
+      </p:pic>
+      <p:sp>
+        <p:nvSpPr>
+          <p:cNvPr id="4" name="TextBox 3"/>
+          <p:cNvSpPr txBox="1"/>
+          <p:nvPr/>
+        </p:nvSpPr>
+        <p:spPr>
+          <a:xfrm>
+            <a:off x="301752" y="6144768"/>
+            <a:ext cx="10972800" cy="457200"/>
+          </a:xfrm>
+          <a:prstGeom prst="rect">
+            <a:avLst/>
+          </a:prstGeom>
+          <a:noFill/>
+        </p:spPr>
+        <p:txBody>
+          <a:bodyPr wrap="square">
+            <a:spAutoFit/>
+          </a:bodyPr>
+          <a:lstStyle/>
+          <a:p>
+            <a:pPr>
+              <a:spcAft>
+                <a:spcPts val="200"/>
+              </a:spcAft>
+            </a:pPr>
+            <a:r>
+              <a:rPr sz="1200" b="0">
+                <a:solidFill>
+                  <a:srgbClr val="5B6676"/>
+                </a:solidFill>
+                <a:latin typeface="Calibri"/>
+              </a:rPr>
+              <a:t>Contact: Jorge Juri — Project Manager · WhatsApp +1 778 835 3720 · Sigma Digital Twins</a:t>
             </a:r>
           </a:p>
         </p:txBody>

--- a/web/og-b0d2f7a3-files/Sigma-Digital-Twins-Team-Duqm-EN.pptx
+++ b/web/og-b0d2f7a3-files/Sigma-Digital-Twins-Team-Duqm-EN.pptx
@@ -15,7 +15,6 @@
     <p:sldId id="263" r:id="rId14"/>
     <p:sldId id="264" r:id="rId15"/>
     <p:sldId id="265" r:id="rId16"/>
-    <p:sldId id="266" r:id="rId17"/>
   </p:sldIdLst>
   <p:sldSz cx="12191695" cy="6858000" type="screen4x3"/>
   <p:notesSz cx="6858000" cy="9144000"/>
@@ -3098,40 +3097,104 @@
         <p:nvPr/>
       </p:nvGrpSpPr>
       <p:grpSpPr/>
-      <p:pic>
-        <p:nvPicPr>
-          <p:cNvPr id="2" name="Picture 1" descr="logo.png"/>
-          <p:cNvPicPr>
-            <a:picLocks noChangeAspect="1"/>
-          </p:cNvPicPr>
+      <p:sp>
+        <p:nvSpPr>
+          <p:cNvPr id="2" name="Rectangle 1"/>
+          <p:cNvSpPr/>
           <p:nvPr/>
-        </p:nvPicPr>
-        <p:blipFill>
-          <a:blip r:embed="rId2"/>
-          <a:stretch>
-            <a:fillRect/>
-          </a:stretch>
-        </p:blipFill>
-        <p:spPr>
-          <a:xfrm>
-            <a:off x="10789920" y="246888"/>
-            <a:ext cx="1161288" cy="1161288"/>
+        </p:nvSpPr>
+        <p:spPr>
+          <a:xfrm>
+            <a:off x="0" y="0"/>
+            <a:ext cx="12191695" cy="6858000"/>
           </a:xfrm>
           <a:prstGeom prst="rect">
             <a:avLst/>
           </a:prstGeom>
-        </p:spPr>
-      </p:pic>
-      <p:sp>
-        <p:nvSpPr>
-          <p:cNvPr id="3" name="TextBox 2"/>
+          <a:solidFill>
+            <a:srgbClr val="0B3D91"/>
+          </a:solidFill>
+          <a:ln>
+            <a:noFill/>
+          </a:ln>
+          <a:effectLst/>
+        </p:spPr>
+        <p:style>
+          <a:lnRef idx="1">
+            <a:schemeClr val="accent1"/>
+          </a:lnRef>
+          <a:fillRef idx="3">
+            <a:schemeClr val="accent1"/>
+          </a:fillRef>
+          <a:effectRef idx="2">
+            <a:schemeClr val="accent1"/>
+          </a:effectRef>
+          <a:fontRef idx="minor">
+            <a:schemeClr val="lt1"/>
+          </a:fontRef>
+        </p:style>
+        <p:txBody>
+          <a:bodyPr rtlCol="0" anchor="ctr"/>
+          <a:lstStyle/>
+          <a:p>
+            <a:pPr algn="ctr"/>
+          </a:p>
+        </p:txBody>
+      </p:sp>
+      <p:sp>
+        <p:nvSpPr>
+          <p:cNvPr id="3" name="Rectangle 2"/>
+          <p:cNvSpPr/>
+          <p:nvPr/>
+        </p:nvSpPr>
+        <p:spPr>
+          <a:xfrm>
+            <a:off x="0" y="4480560"/>
+            <a:ext cx="12191695" cy="38100"/>
+          </a:xfrm>
+          <a:prstGeom prst="rect">
+            <a:avLst/>
+          </a:prstGeom>
+          <a:solidFill>
+            <a:srgbClr val="1F6FEB"/>
+          </a:solidFill>
+          <a:ln>
+            <a:noFill/>
+          </a:ln>
+          <a:effectLst/>
+        </p:spPr>
+        <p:style>
+          <a:lnRef idx="1">
+            <a:schemeClr val="accent1"/>
+          </a:lnRef>
+          <a:fillRef idx="3">
+            <a:schemeClr val="accent1"/>
+          </a:fillRef>
+          <a:effectRef idx="2">
+            <a:schemeClr val="accent1"/>
+          </a:effectRef>
+          <a:fontRef idx="minor">
+            <a:schemeClr val="lt1"/>
+          </a:fontRef>
+        </p:style>
+        <p:txBody>
+          <a:bodyPr rtlCol="0" anchor="ctr"/>
+          <a:lstStyle/>
+          <a:p>
+            <a:pPr algn="ctr"/>
+          </a:p>
+        </p:txBody>
+      </p:sp>
+      <p:sp>
+        <p:nvSpPr>
+          <p:cNvPr id="4" name="TextBox 3"/>
           <p:cNvSpPr txBox="1"/>
           <p:nvPr/>
         </p:nvSpPr>
         <p:spPr>
           <a:xfrm>
-            <a:off x="301752" y="502920"/>
-            <a:ext cx="10241280" cy="365760"/>
+            <a:off x="822960" y="2011680"/>
+            <a:ext cx="10515600" cy="2377440"/>
           </a:xfrm>
           <a:prstGeom prst="rect">
             <a:avLst/>
@@ -3146,31 +3209,79 @@
           <a:p>
             <a:pPr>
               <a:spcAft>
-                <a:spcPts val="200"/>
-              </a:spcAft>
-            </a:pPr>
-            <a:r>
-              <a:rPr sz="1400" b="1">
-                <a:solidFill>
-                  <a:srgbClr val="1F6FEB"/>
+                <a:spcPts val="1000"/>
+              </a:spcAft>
+            </a:pPr>
+            <a:r>
+              <a:rPr sz="2000" b="1">
+                <a:solidFill>
+                  <a:srgbClr val="9FC1FF"/>
                 </a:solidFill>
                 <a:latin typeface="Calibri"/>
               </a:rPr>
               <a:t>SIGMA DIGITAL TWINS</a:t>
             </a:r>
           </a:p>
-        </p:txBody>
-      </p:sp>
-      <p:sp>
-        <p:nvSpPr>
-          <p:cNvPr id="4" name="TextBox 3"/>
+          <a:p>
+            <a:pPr>
+              <a:spcAft>
+                <a:spcPts val="800"/>
+              </a:spcAft>
+            </a:pPr>
+            <a:r>
+              <a:rPr sz="4400" b="1">
+                <a:solidFill>
+                  <a:srgbClr val="FFFFFF"/>
+                </a:solidFill>
+                <a:latin typeface="Calibri"/>
+              </a:rPr>
+              <a:t>Proposed Team</a:t>
+            </a:r>
+          </a:p>
+          <a:p>
+            <a:pPr>
+              <a:spcAft>
+                <a:spcPts val="400"/>
+              </a:spcAft>
+            </a:pPr>
+            <a:r>
+              <a:rPr sz="2200" b="0">
+                <a:solidFill>
+                  <a:srgbClr val="FFFFFF"/>
+                </a:solidFill>
+                <a:latin typeface="Calibri"/>
+              </a:rPr>
+              <a:t>Mineral Recovery Project — Duqm, Oman</a:t>
+            </a:r>
+          </a:p>
+          <a:p>
+            <a:pPr>
+              <a:spcAft>
+                <a:spcPts val="200"/>
+              </a:spcAft>
+            </a:pPr>
+            <a:r>
+              <a:rPr sz="1400" b="0">
+                <a:solidFill>
+                  <a:srgbClr val="C8D8F5"/>
+                </a:solidFill>
+                <a:latin typeface="Calibri"/>
+              </a:rPr>
+              <a:t>Conceptual + Basic Engineering Study · July 2026</a:t>
+            </a:r>
+          </a:p>
+        </p:txBody>
+      </p:sp>
+      <p:sp>
+        <p:nvSpPr>
+          <p:cNvPr id="5" name="TextBox 4"/>
           <p:cNvSpPr txBox="1"/>
           <p:nvPr/>
         </p:nvSpPr>
         <p:spPr>
           <a:xfrm>
-            <a:off x="274320" y="1051560"/>
-            <a:ext cx="10332720" cy="960120"/>
+            <a:off x="822960" y="6035040"/>
+            <a:ext cx="10515600" cy="457200"/>
           </a:xfrm>
           <a:prstGeom prst="rect">
             <a:avLst/>
@@ -3189,111 +3300,9 @@
               </a:spcAft>
             </a:pPr>
             <a:r>
-              <a:rPr sz="3200" b="1">
-                <a:solidFill>
-                  <a:srgbClr val="141B26"/>
-                </a:solidFill>
-                <a:latin typeface="Calibri"/>
-              </a:rPr>
-              <a:t>Proposed Team — Duqm, Oman</a:t>
-            </a:r>
-          </a:p>
-        </p:txBody>
-      </p:sp>
-      <p:sp>
-        <p:nvSpPr>
-          <p:cNvPr id="5" name="TextBox 4"/>
-          <p:cNvSpPr txBox="1"/>
-          <p:nvPr/>
-        </p:nvSpPr>
-        <p:spPr>
-          <a:xfrm>
-            <a:off x="301752" y="2057400"/>
-            <a:ext cx="10241280" cy="457200"/>
-          </a:xfrm>
-          <a:prstGeom prst="rect">
-            <a:avLst/>
-          </a:prstGeom>
-          <a:noFill/>
-        </p:spPr>
-        <p:txBody>
-          <a:bodyPr wrap="square">
-            <a:spAutoFit/>
-          </a:bodyPr>
-          <a:lstStyle/>
-          <a:p>
-            <a:pPr>
-              <a:spcAft>
-                <a:spcPts val="200"/>
-              </a:spcAft>
-            </a:pPr>
-            <a:r>
-              <a:rPr sz="1500" b="0">
-                <a:solidFill>
-                  <a:srgbClr val="5B6676"/>
-                </a:solidFill>
-                <a:latin typeface="Calibri"/>
-              </a:rPr>
-              <a:t>Mineral Recovery Project · Conceptual + Basic Engineering Study · July 2026</a:t>
-            </a:r>
-          </a:p>
-        </p:txBody>
-      </p:sp>
-      <p:pic>
-        <p:nvPicPr>
-          <p:cNvPr id="6" name="Picture 5" descr="cover_bg.jpg"/>
-          <p:cNvPicPr>
-            <a:picLocks noChangeAspect="1"/>
-          </p:cNvPicPr>
-          <p:nvPr/>
-        </p:nvPicPr>
-        <p:blipFill>
-          <a:blip r:embed="rId3"/>
-          <a:stretch>
-            <a:fillRect/>
-          </a:stretch>
-        </p:blipFill>
-        <p:spPr>
-          <a:xfrm>
-            <a:off x="301752" y="2834640"/>
-            <a:ext cx="11585448" cy="3291840"/>
-          </a:xfrm>
-          <a:prstGeom prst="rect">
-            <a:avLst/>
-          </a:prstGeom>
-        </p:spPr>
-      </p:pic>
-      <p:sp>
-        <p:nvSpPr>
-          <p:cNvPr id="7" name="TextBox 6"/>
-          <p:cNvSpPr txBox="1"/>
-          <p:nvPr/>
-        </p:nvSpPr>
-        <p:spPr>
-          <a:xfrm>
-            <a:off x="301752" y="6309360"/>
-            <a:ext cx="10515600" cy="365760"/>
-          </a:xfrm>
-          <a:prstGeom prst="rect">
-            <a:avLst/>
-          </a:prstGeom>
-          <a:noFill/>
-        </p:spPr>
-        <p:txBody>
-          <a:bodyPr wrap="square">
-            <a:spAutoFit/>
-          </a:bodyPr>
-          <a:lstStyle/>
-          <a:p>
-            <a:pPr>
-              <a:spcAft>
-                <a:spcPts val="200"/>
-              </a:spcAft>
-            </a:pPr>
-            <a:r>
               <a:rPr sz="1100" b="0">
                 <a:solidFill>
-                  <a:srgbClr val="5B6676"/>
+                  <a:srgbClr val="C8D8F5"/>
                 </a:solidFill>
                 <a:latin typeface="Calibri"/>
               </a:rPr>
@@ -3478,126 +3487,6 @@
 </p:sld>
 </file>
 
-<file path=ppt/slides/slide11.xml><?xml version="1.0" encoding="utf-8"?>
-<p:sld xmlns:a="http://schemas.openxmlformats.org/drawingml/2006/main" xmlns:p="http://schemas.openxmlformats.org/presentationml/2006/main" xmlns:r="http://schemas.openxmlformats.org/officeDocument/2006/relationships">
-  <p:cSld>
-    <p:spTree>
-      <p:nvGrpSpPr>
-        <p:cNvPr id="1" name=""/>
-        <p:cNvGrpSpPr/>
-        <p:nvPr/>
-      </p:nvGrpSpPr>
-      <p:grpSpPr/>
-      <p:sp>
-        <p:nvSpPr>
-          <p:cNvPr id="2" name="TextBox 1"/>
-          <p:cNvSpPr txBox="1"/>
-          <p:nvPr/>
-        </p:nvSpPr>
-        <p:spPr>
-          <a:xfrm>
-            <a:off x="155448" y="201168"/>
-            <a:ext cx="11795760" cy="676656"/>
-          </a:xfrm>
-          <a:prstGeom prst="rect">
-            <a:avLst/>
-          </a:prstGeom>
-          <a:noFill/>
-        </p:spPr>
-        <p:txBody>
-          <a:bodyPr wrap="square">
-            <a:spAutoFit/>
-          </a:bodyPr>
-          <a:lstStyle/>
-          <a:p>
-            <a:pPr>
-              <a:spcAft>
-                <a:spcPts val="200"/>
-              </a:spcAft>
-            </a:pPr>
-            <a:r>
-              <a:rPr sz="2400" b="1">
-                <a:solidFill>
-                  <a:srgbClr val="141B26"/>
-                </a:solidFill>
-                <a:latin typeface="Calibri"/>
-              </a:rPr>
-              <a:t>Join us on this journey of innovation and digital transformation for your business</a:t>
-            </a:r>
-          </a:p>
-        </p:txBody>
-      </p:sp>
-      <p:pic>
-        <p:nvPicPr>
-          <p:cNvPr id="3" name="Picture 2" descr="journey.jpg"/>
-          <p:cNvPicPr>
-            <a:picLocks noChangeAspect="1"/>
-          </p:cNvPicPr>
-          <p:nvPr/>
-        </p:nvPicPr>
-        <p:blipFill>
-          <a:blip r:embed="rId2"/>
-          <a:stretch>
-            <a:fillRect/>
-          </a:stretch>
-        </p:blipFill>
-        <p:spPr>
-          <a:xfrm>
-            <a:off x="0" y="822960"/>
-            <a:ext cx="12191695" cy="5148072"/>
-          </a:xfrm>
-          <a:prstGeom prst="rect">
-            <a:avLst/>
-          </a:prstGeom>
-        </p:spPr>
-      </p:pic>
-      <p:sp>
-        <p:nvSpPr>
-          <p:cNvPr id="4" name="TextBox 3"/>
-          <p:cNvSpPr txBox="1"/>
-          <p:nvPr/>
-        </p:nvSpPr>
-        <p:spPr>
-          <a:xfrm>
-            <a:off x="301752" y="6144768"/>
-            <a:ext cx="10972800" cy="457200"/>
-          </a:xfrm>
-          <a:prstGeom prst="rect">
-            <a:avLst/>
-          </a:prstGeom>
-          <a:noFill/>
-        </p:spPr>
-        <p:txBody>
-          <a:bodyPr wrap="square">
-            <a:spAutoFit/>
-          </a:bodyPr>
-          <a:lstStyle/>
-          <a:p>
-            <a:pPr>
-              <a:spcAft>
-                <a:spcPts val="200"/>
-              </a:spcAft>
-            </a:pPr>
-            <a:r>
-              <a:rPr sz="1200" b="0">
-                <a:solidFill>
-                  <a:srgbClr val="5B6676"/>
-                </a:solidFill>
-                <a:latin typeface="Calibri"/>
-              </a:rPr>
-              <a:t>Contact: Jorge Juri — Project Manager · WhatsApp +1 778 835 3720 · Sigma Digital Twins</a:t>
-            </a:r>
-          </a:p>
-        </p:txBody>
-      </p:sp>
-    </p:spTree>
-  </p:cSld>
-  <p:clrMapOvr>
-    <a:masterClrMapping/>
-  </p:clrMapOvr>
-</p:sld>
-</file>
-
 <file path=ppt/slides/slide2.xml><?xml version="1.0" encoding="utf-8"?>
 <p:sld xmlns:a="http://schemas.openxmlformats.org/drawingml/2006/main" xmlns:p="http://schemas.openxmlformats.org/presentationml/2006/main" xmlns:r="http://schemas.openxmlformats.org/officeDocument/2006/relationships">
   <p:cSld>
@@ -3655,7 +3544,7 @@
         </p:nvSpPr>
         <p:spPr>
           <a:xfrm>
-            <a:off x="4267047" y="777240"/>
+            <a:off x="4267048" y="777240"/>
             <a:ext cx="3657600" cy="566928"/>
           </a:xfrm>
           <a:prstGeom prst="roundRect">
@@ -3732,8 +3621,8 @@
         </p:nvCxnSpPr>
         <p:spPr>
           <a:xfrm>
-            <a:off x="6095847.5" y="1344168"/>
-            <a:ext cx="0.0" cy="137160"/>
+            <a:off x="6095848" y="1344168"/>
+            <a:ext cx="0" cy="137160"/>
           </a:xfrm>
           <a:prstGeom prst="line">
             <a:avLst/>
@@ -3767,7 +3656,7 @@
         </p:nvSpPr>
         <p:spPr>
           <a:xfrm>
-            <a:off x="4267047" y="1481328"/>
+            <a:off x="4267048" y="1481328"/>
             <a:ext cx="3657600" cy="685800"/>
           </a:xfrm>
           <a:prstGeom prst="roundRect">
@@ -3844,8 +3733,8 @@
         </p:nvCxnSpPr>
         <p:spPr>
           <a:xfrm>
-            <a:off x="6095847.5" y="2167128"/>
-            <a:ext cx="0.0" cy="228600"/>
+            <a:off x="6095848" y="2167128"/>
+            <a:ext cx="0" cy="228600"/>
           </a:xfrm>
           <a:prstGeom prst="line">
             <a:avLst/>
@@ -3879,8 +3768,8 @@
         </p:nvCxnSpPr>
         <p:spPr>
           <a:xfrm>
-            <a:off x="2163927.5" y="2395728"/>
-            <a:ext cx="7863840.0" cy="0"/>
+            <a:off x="2163928" y="2395728"/>
+            <a:ext cx="7863840" cy="0"/>
           </a:xfrm>
           <a:prstGeom prst="line">
             <a:avLst/>
@@ -3914,8 +3803,8 @@
         </p:nvCxnSpPr>
         <p:spPr>
           <a:xfrm>
-            <a:off x="2163927.5" y="2395728"/>
-            <a:ext cx="0.0" cy="182880"/>
+            <a:off x="2163928" y="2395728"/>
+            <a:ext cx="0" cy="182880"/>
           </a:xfrm>
           <a:prstGeom prst="line">
             <a:avLst/>
@@ -3949,8 +3838,8 @@
         </p:nvCxnSpPr>
         <p:spPr>
           <a:xfrm>
-            <a:off x="6095847.5" y="2395728"/>
-            <a:ext cx="0.0" cy="182880"/>
+            <a:off x="6095848" y="2395728"/>
+            <a:ext cx="0" cy="182880"/>
           </a:xfrm>
           <a:prstGeom prst="line">
             <a:avLst/>
@@ -3984,8 +3873,8 @@
         </p:nvCxnSpPr>
         <p:spPr>
           <a:xfrm>
-            <a:off x="10027767.5" y="2395728"/>
-            <a:ext cx="0.0" cy="182880"/>
+            <a:off x="10027768" y="2395728"/>
+            <a:ext cx="0" cy="182880"/>
           </a:xfrm>
           <a:prstGeom prst="line">
             <a:avLst/>
@@ -4019,7 +3908,7 @@
         </p:nvSpPr>
         <p:spPr>
           <a:xfrm>
-            <a:off x="357987" y="2578608"/>
+            <a:off x="357988" y="2578608"/>
             <a:ext cx="3611880" cy="868680"/>
           </a:xfrm>
           <a:prstGeom prst="roundRect">
@@ -4096,7 +3985,7 @@
         </p:nvSpPr>
         <p:spPr>
           <a:xfrm>
-            <a:off x="437987" y="2718608"/>
+            <a:off x="437988" y="2718608"/>
             <a:ext cx="70000" cy="588680"/>
           </a:xfrm>
           <a:prstGeom prst="roundRect">
@@ -4142,7 +4031,7 @@
         </p:nvSpPr>
         <p:spPr>
           <a:xfrm>
-            <a:off x="4289907" y="2578608"/>
+            <a:off x="4289908" y="2578608"/>
             <a:ext cx="3611880" cy="868680"/>
           </a:xfrm>
           <a:prstGeom prst="roundRect">
@@ -4219,7 +4108,7 @@
         </p:nvSpPr>
         <p:spPr>
           <a:xfrm>
-            <a:off x="4369907" y="2718608"/>
+            <a:off x="4369908" y="2718608"/>
             <a:ext cx="70000" cy="588680"/>
           </a:xfrm>
           <a:prstGeom prst="roundRect">
@@ -4265,7 +4154,7 @@
         </p:nvSpPr>
         <p:spPr>
           <a:xfrm>
-            <a:off x="8221827" y="2578608"/>
+            <a:off x="8221828" y="2578608"/>
             <a:ext cx="3611880" cy="868680"/>
           </a:xfrm>
           <a:prstGeom prst="roundRect">
@@ -4342,7 +4231,7 @@
         </p:nvSpPr>
         <p:spPr>
           <a:xfrm>
-            <a:off x="8301827" y="2718608"/>
+            <a:off x="8301828" y="2718608"/>
             <a:ext cx="70000" cy="588680"/>
           </a:xfrm>
           <a:prstGeom prst="roundRect">
@@ -4388,8 +4277,8 @@
         </p:nvCxnSpPr>
         <p:spPr>
           <a:xfrm>
-            <a:off x="2163927.5" y="3447288"/>
-            <a:ext cx="0.0" cy="466344"/>
+            <a:off x="2163928" y="3447288"/>
+            <a:ext cx="0" cy="466344"/>
           </a:xfrm>
           <a:prstGeom prst="line">
             <a:avLst/>
@@ -4423,8 +4312,8 @@
         </p:nvCxnSpPr>
         <p:spPr>
           <a:xfrm>
-            <a:off x="1596999.5" y="3913632"/>
-            <a:ext cx="566928.0" cy="0"/>
+            <a:off x="1597000" y="3913632"/>
+            <a:ext cx="566928" cy="0"/>
           </a:xfrm>
           <a:prstGeom prst="line">
             <a:avLst/>
@@ -4458,8 +4347,8 @@
         </p:nvCxnSpPr>
         <p:spPr>
           <a:xfrm>
-            <a:off x="1596999.5" y="3913632"/>
-            <a:ext cx="0.0" cy="246888"/>
+            <a:off x="1597000" y="3913632"/>
+            <a:ext cx="0" cy="246888"/>
           </a:xfrm>
           <a:prstGeom prst="line">
             <a:avLst/>
@@ -4493,8 +4382,8 @@
         </p:nvCxnSpPr>
         <p:spPr>
           <a:xfrm>
-            <a:off x="6095847.5" y="3447288"/>
-            <a:ext cx="0.0" cy="466344"/>
+            <a:off x="6095848" y="3447288"/>
+            <a:ext cx="0" cy="466344"/>
           </a:xfrm>
           <a:prstGeom prst="line">
             <a:avLst/>
@@ -4528,8 +4417,8 @@
         </p:nvCxnSpPr>
         <p:spPr>
           <a:xfrm>
-            <a:off x="4596231.5" y="3913632"/>
-            <a:ext cx="2999232.0" cy="0"/>
+            <a:off x="4596232" y="3913632"/>
+            <a:ext cx="2999232" cy="0"/>
           </a:xfrm>
           <a:prstGeom prst="line">
             <a:avLst/>
@@ -4563,8 +4452,8 @@
         </p:nvCxnSpPr>
         <p:spPr>
           <a:xfrm>
-            <a:off x="4596231.5" y="3913632"/>
-            <a:ext cx="0.0" cy="246888"/>
+            <a:off x="4596232" y="3913632"/>
+            <a:ext cx="0" cy="246888"/>
           </a:xfrm>
           <a:prstGeom prst="line">
             <a:avLst/>
@@ -4598,8 +4487,8 @@
         </p:nvCxnSpPr>
         <p:spPr>
           <a:xfrm>
-            <a:off x="7595463.5" y="3913632"/>
-            <a:ext cx="0.0" cy="246888"/>
+            <a:off x="7595464" y="3913632"/>
+            <a:ext cx="0" cy="246888"/>
           </a:xfrm>
           <a:prstGeom prst="line">
             <a:avLst/>
@@ -4633,8 +4522,8 @@
         </p:nvCxnSpPr>
         <p:spPr>
           <a:xfrm>
-            <a:off x="10027767.5" y="3447288"/>
-            <a:ext cx="0.0" cy="466344"/>
+            <a:off x="10027768" y="3447288"/>
+            <a:ext cx="0" cy="466344"/>
           </a:xfrm>
           <a:prstGeom prst="line">
             <a:avLst/>
@@ -4668,8 +4557,8 @@
         </p:nvCxnSpPr>
         <p:spPr>
           <a:xfrm>
-            <a:off x="10027767.5" y="3913632"/>
-            <a:ext cx="566928.0" cy="0"/>
+            <a:off x="10027768" y="3913632"/>
+            <a:ext cx="566928" cy="0"/>
           </a:xfrm>
           <a:prstGeom prst="line">
             <a:avLst/>
@@ -4703,8 +4592,8 @@
         </p:nvCxnSpPr>
         <p:spPr>
           <a:xfrm>
-            <a:off x="10594695.5" y="3913632"/>
-            <a:ext cx="0.0" cy="246888"/>
+            <a:off x="10594696" y="3913632"/>
+            <a:ext cx="0" cy="246888"/>
           </a:xfrm>
           <a:prstGeom prst="line">
             <a:avLst/>
@@ -4738,7 +4627,7 @@
         </p:nvSpPr>
         <p:spPr>
           <a:xfrm>
-            <a:off x="225399" y="4160520"/>
+            <a:off x="225400" y="4160520"/>
             <a:ext cx="2743200" cy="1051560"/>
           </a:xfrm>
           <a:prstGeom prst="roundRect">
@@ -4815,7 +4704,7 @@
         </p:nvSpPr>
         <p:spPr>
           <a:xfrm>
-            <a:off x="305399" y="4300520"/>
+            <a:off x="305400" y="4300520"/>
             <a:ext cx="70000" cy="771560"/>
           </a:xfrm>
           <a:prstGeom prst="roundRect">
@@ -4861,7 +4750,7 @@
         </p:nvSpPr>
         <p:spPr>
           <a:xfrm>
-            <a:off x="3224631" y="4160520"/>
+            <a:off x="3224632" y="4160520"/>
             <a:ext cx="2743200" cy="1051560"/>
           </a:xfrm>
           <a:prstGeom prst="roundRect">
@@ -4938,7 +4827,7 @@
         </p:nvSpPr>
         <p:spPr>
           <a:xfrm>
-            <a:off x="3304631" y="4300520"/>
+            <a:off x="3304632" y="4300520"/>
             <a:ext cx="70000" cy="771560"/>
           </a:xfrm>
           <a:prstGeom prst="roundRect">
@@ -4984,7 +4873,7 @@
         </p:nvSpPr>
         <p:spPr>
           <a:xfrm>
-            <a:off x="6223863" y="4160520"/>
+            <a:off x="6223864" y="4160520"/>
             <a:ext cx="2743200" cy="1051560"/>
           </a:xfrm>
           <a:prstGeom prst="roundRect">
@@ -5061,7 +4950,7 @@
         </p:nvSpPr>
         <p:spPr>
           <a:xfrm>
-            <a:off x="6303863" y="4300520"/>
+            <a:off x="6303864" y="4300520"/>
             <a:ext cx="70000" cy="771560"/>
           </a:xfrm>
           <a:prstGeom prst="roundRect">
@@ -5107,7 +4996,7 @@
         </p:nvSpPr>
         <p:spPr>
           <a:xfrm>
-            <a:off x="9223095" y="4160520"/>
+            <a:off x="9223096" y="4160520"/>
             <a:ext cx="2743200" cy="1051560"/>
           </a:xfrm>
           <a:prstGeom prst="roundRect">
@@ -5184,7 +5073,7 @@
         </p:nvSpPr>
         <p:spPr>
           <a:xfrm>
-            <a:off x="9303095" y="4300520"/>
+            <a:off x="9303096" y="4300520"/>
             <a:ext cx="70000" cy="771560"/>
           </a:xfrm>
           <a:prstGeom prst="roundRect">
@@ -5230,7 +5119,7 @@
         </p:nvSpPr>
         <p:spPr>
           <a:xfrm>
-            <a:off x="225399" y="5623560"/>
+            <a:off x="225400" y="5623560"/>
             <a:ext cx="11740896" cy="502920"/>
           </a:xfrm>
           <a:prstGeom prst="roundRect">

--- a/web/og-b0d2f7a3-files/Sigma-Digital-Twins-Team-Duqm-EN.pptx
+++ b/web/og-b0d2f7a3-files/Sigma-Digital-Twins-Team-Duqm-EN.pptx
@@ -15,6 +15,7 @@
     <p:sldId id="263" r:id="rId14"/>
     <p:sldId id="264" r:id="rId15"/>
     <p:sldId id="265" r:id="rId16"/>
+    <p:sldId id="266" r:id="rId17"/>
   </p:sldIdLst>
   <p:sldSz cx="12191695" cy="6858000" type="screen4x3"/>
   <p:notesSz cx="6858000" cy="9144000"/>
@@ -3280,8 +3281,8 @@
         </p:nvSpPr>
         <p:spPr>
           <a:xfrm>
-            <a:off x="822960" y="6035040"/>
-            <a:ext cx="10515600" cy="457200"/>
+            <a:off x="822960" y="5806440"/>
+            <a:ext cx="10515600" cy="822960"/>
           </a:xfrm>
           <a:prstGeom prst="rect">
             <a:avLst/>
@@ -3293,6 +3294,22 @@
             <a:spAutoFit/>
           </a:bodyPr>
           <a:lstStyle/>
+          <a:p>
+            <a:pPr>
+              <a:spcAft>
+                <a:spcPts val="400"/>
+              </a:spcAft>
+            </a:pPr>
+            <a:r>
+              <a:rPr sz="1200" b="1">
+                <a:solidFill>
+                  <a:srgbClr val="9FC1FF"/>
+                </a:solidFill>
+                <a:latin typeface="Calibri"/>
+              </a:rPr>
+              <a:t>Prepared by Jorge Juri · Hefesto AI  ·  Reviewed by Mauricio Contreras</a:t>
+            </a:r>
+          </a:p>
           <a:p>
             <a:pPr>
               <a:spcAft>
@@ -3338,7 +3355,7 @@
         <p:spPr>
           <a:xfrm>
             <a:off x="0" y="0"/>
-            <a:ext cx="12191695" cy="6858000"/>
+            <a:ext cx="12191695" cy="960120"/>
           </a:xfrm>
           <a:prstGeom prst="rect">
             <a:avLst/>
@@ -3381,8 +3398,8 @@
         </p:nvSpPr>
         <p:spPr>
           <a:xfrm>
-            <a:off x="822960" y="2194560"/>
-            <a:ext cx="10515600" cy="2377440"/>
+            <a:off x="411480" y="64008"/>
+            <a:ext cx="8778240" cy="868680"/>
           </a:xfrm>
           <a:prstGeom prst="rect">
             <a:avLst/>
@@ -3397,6 +3414,920 @@
           <a:p>
             <a:pPr>
               <a:spcAft>
+                <a:spcPts val="100"/>
+              </a:spcAft>
+            </a:pPr>
+            <a:r>
+              <a:rPr sz="2700" b="1">
+                <a:solidFill>
+                  <a:srgbClr val="FFFFFF"/>
+                </a:solidFill>
+                <a:latin typeface="Calibri"/>
+              </a:rPr>
+              <a:t>Paloma Tapia Guerrero</a:t>
+            </a:r>
+          </a:p>
+          <a:p>
+            <a:pPr>
+              <a:spcAft>
+                <a:spcPts val="200"/>
+              </a:spcAft>
+            </a:pPr>
+            <a:r>
+              <a:rPr sz="1300" b="1">
+                <a:solidFill>
+                  <a:srgbClr val="C8D8F5"/>
+                </a:solidFill>
+                <a:latin typeface="Calibri"/>
+              </a:rPr>
+              <a:t>Quality Analyst</a:t>
+            </a:r>
+          </a:p>
+        </p:txBody>
+      </p:sp>
+      <p:sp>
+        <p:nvSpPr>
+          <p:cNvPr id="4" name="TextBox 3"/>
+          <p:cNvSpPr txBox="1"/>
+          <p:nvPr/>
+        </p:nvSpPr>
+        <p:spPr>
+          <a:xfrm>
+            <a:off x="9326880" y="109728"/>
+            <a:ext cx="2468880" cy="822960"/>
+          </a:xfrm>
+          <a:prstGeom prst="rect">
+            <a:avLst/>
+          </a:prstGeom>
+          <a:noFill/>
+        </p:spPr>
+        <p:txBody>
+          <a:bodyPr wrap="square">
+            <a:spAutoFit/>
+          </a:bodyPr>
+          <a:lstStyle/>
+          <a:p>
+            <a:pPr algn="r">
+              <a:spcAft>
+                <a:spcPts val="200"/>
+              </a:spcAft>
+            </a:pPr>
+            <a:r>
+              <a:rPr sz="1100" b="1">
+                <a:solidFill>
+                  <a:srgbClr val="FFFFFF"/>
+                </a:solidFill>
+                <a:latin typeface="Calibri"/>
+              </a:rPr>
+              <a:t>Resume / CV</a:t>
+            </a:r>
+          </a:p>
+          <a:p>
+            <a:pPr algn="r">
+              <a:spcAft>
+                <a:spcPts val="100"/>
+              </a:spcAft>
+            </a:pPr>
+            <a:r>
+              <a:rPr sz="950" b="0">
+                <a:solidFill>
+                  <a:srgbClr val="C8D8F5"/>
+                </a:solidFill>
+                <a:latin typeface="Calibri"/>
+              </a:rPr>
+              <a:t>Nationality: Chilean</a:t>
+            </a:r>
+          </a:p>
+          <a:p>
+            <a:pPr algn="r">
+              <a:spcAft>
+                <a:spcPts val="200"/>
+              </a:spcAft>
+            </a:pPr>
+            <a:r>
+              <a:rPr sz="950" b="0">
+                <a:solidFill>
+                  <a:srgbClr val="C8D8F5"/>
+                </a:solidFill>
+                <a:latin typeface="Calibri"/>
+              </a:rPr>
+              <a:t>Residence: Coquimbo, Chile</a:t>
+            </a:r>
+          </a:p>
+        </p:txBody>
+      </p:sp>
+      <p:sp>
+        <p:nvSpPr>
+          <p:cNvPr id="5" name="Rounded Rectangle 4"/>
+          <p:cNvSpPr/>
+          <p:nvPr/>
+        </p:nvSpPr>
+        <p:spPr>
+          <a:xfrm>
+            <a:off x="228600" y="1143000"/>
+            <a:ext cx="3246120" cy="5532120"/>
+          </a:xfrm>
+          <a:prstGeom prst="roundRect">
+            <a:avLst>
+              <a:gd name="adj" fmla="val 8000"/>
+            </a:avLst>
+          </a:prstGeom>
+          <a:solidFill>
+            <a:srgbClr val="F0F4FA"/>
+          </a:solidFill>
+          <a:ln w="9525">
+            <a:solidFill>
+              <a:srgbClr val="C9D4E2"/>
+            </a:solidFill>
+          </a:ln>
+          <a:effectLst/>
+        </p:spPr>
+        <p:style>
+          <a:lnRef idx="1">
+            <a:schemeClr val="accent1"/>
+          </a:lnRef>
+          <a:fillRef idx="3">
+            <a:schemeClr val="accent1"/>
+          </a:fillRef>
+          <a:effectRef idx="2">
+            <a:schemeClr val="accent1"/>
+          </a:effectRef>
+          <a:fontRef idx="minor">
+            <a:schemeClr val="lt1"/>
+          </a:fontRef>
+        </p:style>
+        <p:txBody>
+          <a:bodyPr rtlCol="0" anchor="ctr"/>
+          <a:lstStyle/>
+          <a:p>
+            <a:pPr algn="ctr"/>
+          </a:p>
+        </p:txBody>
+      </p:sp>
+      <p:sp>
+        <p:nvSpPr>
+          <p:cNvPr id="6" name="TextBox 5"/>
+          <p:cNvSpPr txBox="1"/>
+          <p:nvPr/>
+        </p:nvSpPr>
+        <p:spPr>
+          <a:xfrm>
+            <a:off x="384048" y="1261872"/>
+            <a:ext cx="2971800" cy="457200"/>
+          </a:xfrm>
+          <a:prstGeom prst="rect">
+            <a:avLst/>
+          </a:prstGeom>
+          <a:noFill/>
+        </p:spPr>
+        <p:txBody>
+          <a:bodyPr wrap="square">
+            <a:normAutofit/>
+          </a:bodyPr>
+          <a:lstStyle/>
+          <a:p>
+            <a:pPr>
+              <a:spcAft>
+                <a:spcPts val="400"/>
+              </a:spcAft>
+            </a:pPr>
+            <a:r>
+              <a:rPr sz="1800" b="1">
+                <a:solidFill>
+                  <a:srgbClr val="1F6FEB"/>
+                </a:solidFill>
+                <a:latin typeface="Calibri"/>
+              </a:rPr>
+              <a:t>LANGUAGES</a:t>
+            </a:r>
+          </a:p>
+          <a:p>
+            <a:pPr>
+              <a:spcAft>
+                <a:spcPts val="200"/>
+              </a:spcAft>
+              <a:buChar char="•"/>
+            </a:pPr>
+            <a:r>
+              <a:rPr sz="1200" b="0">
+                <a:solidFill>
+                  <a:srgbClr val="141B26"/>
+                </a:solidFill>
+                <a:latin typeface="Calibri"/>
+              </a:rPr>
+              <a:t>Spanish · intermediate English (B1)</a:t>
+            </a:r>
+          </a:p>
+        </p:txBody>
+      </p:sp>
+      <p:sp>
+        <p:nvSpPr>
+          <p:cNvPr id="7" name="TextBox 6"/>
+          <p:cNvSpPr txBox="1"/>
+          <p:nvPr/>
+        </p:nvSpPr>
+        <p:spPr>
+          <a:xfrm>
+            <a:off x="384048" y="1920240"/>
+            <a:ext cx="2971800" cy="2103120"/>
+          </a:xfrm>
+          <a:prstGeom prst="rect">
+            <a:avLst/>
+          </a:prstGeom>
+          <a:noFill/>
+        </p:spPr>
+        <p:txBody>
+          <a:bodyPr wrap="square">
+            <a:normAutofit/>
+          </a:bodyPr>
+          <a:lstStyle/>
+          <a:p>
+            <a:pPr>
+              <a:spcAft>
+                <a:spcPts val="400"/>
+              </a:spcAft>
+            </a:pPr>
+            <a:r>
+              <a:rPr sz="1800" b="1">
+                <a:solidFill>
+                  <a:srgbClr val="1F6FEB"/>
+                </a:solidFill>
+                <a:latin typeface="Calibri"/>
+              </a:rPr>
+              <a:t>EDUCATION</a:t>
+            </a:r>
+          </a:p>
+          <a:p>
+            <a:pPr>
+              <a:spcAft>
+                <a:spcPts val="200"/>
+              </a:spcAft>
+              <a:buChar char="•"/>
+            </a:pPr>
+            <a:r>
+              <a:rPr sz="1200" b="0">
+                <a:solidFill>
+                  <a:srgbClr val="141B26"/>
+                </a:solidFill>
+                <a:latin typeface="Calibri"/>
+              </a:rPr>
+              <a:t>2025 · Mining Civil Engineer — Pontificia U. Católica de Valparaíso</a:t>
+            </a:r>
+          </a:p>
+          <a:p>
+            <a:pPr>
+              <a:spcAft>
+                <a:spcPts val="200"/>
+              </a:spcAft>
+              <a:buChar char="•"/>
+            </a:pPr>
+            <a:r>
+              <a:rPr sz="1200" b="0">
+                <a:solidFill>
+                  <a:srgbClr val="141B26"/>
+                </a:solidFill>
+                <a:latin typeface="Calibri"/>
+              </a:rPr>
+              <a:t>Inspira Program (Codelco) · Mining Leadership (PUCV) · Minería Para Todos</a:t>
+            </a:r>
+          </a:p>
+        </p:txBody>
+      </p:sp>
+      <p:sp>
+        <p:nvSpPr>
+          <p:cNvPr id="8" name="TextBox 7"/>
+          <p:cNvSpPr txBox="1"/>
+          <p:nvPr/>
+        </p:nvSpPr>
+        <p:spPr>
+          <a:xfrm>
+            <a:off x="384048" y="4114800"/>
+            <a:ext cx="2971800" cy="2468880"/>
+          </a:xfrm>
+          <a:prstGeom prst="rect">
+            <a:avLst/>
+          </a:prstGeom>
+          <a:noFill/>
+        </p:spPr>
+        <p:txBody>
+          <a:bodyPr wrap="square">
+            <a:normAutofit/>
+          </a:bodyPr>
+          <a:lstStyle/>
+          <a:p>
+            <a:pPr>
+              <a:spcAft>
+                <a:spcPts val="400"/>
+              </a:spcAft>
+            </a:pPr>
+            <a:r>
+              <a:rPr sz="1800" b="1">
+                <a:solidFill>
+                  <a:srgbClr val="1F6FEB"/>
+                </a:solidFill>
+                <a:latin typeface="Calibri"/>
+              </a:rPr>
+              <a:t>INDUSTRY EXPERIENCE</a:t>
+            </a:r>
+          </a:p>
+          <a:p>
+            <a:pPr>
+              <a:spcAft>
+                <a:spcPts val="200"/>
+              </a:spcAft>
+              <a:buChar char="•"/>
+            </a:pPr>
+            <a:r>
+              <a:rPr sz="1200" b="0">
+                <a:solidFill>
+                  <a:srgbClr val="141B26"/>
+                </a:solidFill>
+                <a:latin typeface="Calibri"/>
+              </a:rPr>
+              <a:t>Large-scale copper mining: Antofagasta Minerals — Minera Centinela</a:t>
+            </a:r>
+          </a:p>
+          <a:p>
+            <a:pPr>
+              <a:spcAft>
+                <a:spcPts val="200"/>
+              </a:spcAft>
+              <a:buChar char="•"/>
+            </a:pPr>
+            <a:r>
+              <a:rPr sz="1200" b="0">
+                <a:solidFill>
+                  <a:srgbClr val="141B26"/>
+                </a:solidFill>
+                <a:latin typeface="Calibri"/>
+              </a:rPr>
+              <a:t>Open-pit dispatch: Esperanza, Encuentro and Tesoro pits</a:t>
+            </a:r>
+          </a:p>
+          <a:p>
+            <a:pPr>
+              <a:spcAft>
+                <a:spcPts val="200"/>
+              </a:spcAft>
+              <a:buChar char="•"/>
+            </a:pPr>
+            <a:r>
+              <a:rPr sz="1200" b="0">
+                <a:solidFill>
+                  <a:srgbClr val="141B26"/>
+                </a:solidFill>
+                <a:latin typeface="Calibri"/>
+              </a:rPr>
+              <a:t>Structural inspection on site</a:t>
+            </a:r>
+          </a:p>
+          <a:p>
+            <a:pPr>
+              <a:spcAft>
+                <a:spcPts val="200"/>
+              </a:spcAft>
+              <a:buChar char="•"/>
+            </a:pPr>
+            <a:r>
+              <a:rPr sz="1200" b="0">
+                <a:solidFill>
+                  <a:srgbClr val="141B26"/>
+                </a:solidFill>
+                <a:latin typeface="Calibri"/>
+              </a:rPr>
+              <a:t>Standardization of operational processes</a:t>
+            </a:r>
+          </a:p>
+        </p:txBody>
+      </p:sp>
+      <p:sp>
+        <p:nvSpPr>
+          <p:cNvPr id="9" name="TextBox 8"/>
+          <p:cNvSpPr txBox="1"/>
+          <p:nvPr/>
+        </p:nvSpPr>
+        <p:spPr>
+          <a:xfrm>
+            <a:off x="3703320" y="1207008"/>
+            <a:ext cx="4114800" cy="3108960"/>
+          </a:xfrm>
+          <a:prstGeom prst="rect">
+            <a:avLst/>
+          </a:prstGeom>
+          <a:noFill/>
+        </p:spPr>
+        <p:txBody>
+          <a:bodyPr wrap="square">
+            <a:normAutofit/>
+          </a:bodyPr>
+          <a:lstStyle/>
+          <a:p>
+            <a:pPr>
+              <a:spcAft>
+                <a:spcPts val="400"/>
+              </a:spcAft>
+            </a:pPr>
+            <a:r>
+              <a:rPr sz="1800" b="1">
+                <a:solidFill>
+                  <a:srgbClr val="1F6FEB"/>
+                </a:solidFill>
+                <a:latin typeface="Calibri"/>
+              </a:rPr>
+              <a:t>PROFESSIONAL EXPERIENCE</a:t>
+            </a:r>
+          </a:p>
+          <a:p>
+            <a:pPr>
+              <a:spcAft>
+                <a:spcPts val="200"/>
+              </a:spcAft>
+              <a:buChar char="•"/>
+            </a:pPr>
+            <a:r>
+              <a:rPr sz="1200" b="0">
+                <a:solidFill>
+                  <a:srgbClr val="141B26"/>
+                </a:solidFill>
+                <a:latin typeface="Calibri"/>
+              </a:rPr>
+              <a:t>Feb–Nov 2025 · Thesis engineer, Dispatch — AMSA Minera Centinela: material movement management and operational KPIs</a:t>
+            </a:r>
+          </a:p>
+          <a:p>
+            <a:pPr>
+              <a:spcAft>
+                <a:spcPts val="200"/>
+              </a:spcAft>
+              <a:buChar char="•"/>
+            </a:pPr>
+            <a:r>
+              <a:rPr sz="1200" b="0">
+                <a:solidFill>
+                  <a:srgbClr val="141B26"/>
+                </a:solidFill>
+                <a:latin typeface="Calibri"/>
+              </a:rPr>
+              <a:t>Feb–Apr 2024 · Professional internship — Centinela: structural inspection, findings capture and follow-up</a:t>
+            </a:r>
+          </a:p>
+        </p:txBody>
+      </p:sp>
+      <p:sp>
+        <p:nvSpPr>
+          <p:cNvPr id="10" name="TextBox 9"/>
+          <p:cNvSpPr txBox="1"/>
+          <p:nvPr/>
+        </p:nvSpPr>
+        <p:spPr>
+          <a:xfrm>
+            <a:off x="3703320" y="4434840"/>
+            <a:ext cx="4114800" cy="2240280"/>
+          </a:xfrm>
+          <a:prstGeom prst="rect">
+            <a:avLst/>
+          </a:prstGeom>
+          <a:noFill/>
+        </p:spPr>
+        <p:txBody>
+          <a:bodyPr wrap="square">
+            <a:normAutofit/>
+          </a:bodyPr>
+          <a:lstStyle/>
+          <a:p>
+            <a:pPr>
+              <a:spcAft>
+                <a:spcPts val="400"/>
+              </a:spcAft>
+            </a:pPr>
+            <a:r>
+              <a:rPr sz="1800" b="1">
+                <a:solidFill>
+                  <a:srgbClr val="1F6FEB"/>
+                </a:solidFill>
+                <a:latin typeface="Calibri"/>
+              </a:rPr>
+              <a:t>CORE COMPETENCIES</a:t>
+            </a:r>
+          </a:p>
+          <a:p>
+            <a:pPr>
+              <a:spcAft>
+                <a:spcPts val="200"/>
+              </a:spcAft>
+              <a:buChar char="•"/>
+            </a:pPr>
+            <a:r>
+              <a:rPr sz="1200" b="0">
+                <a:solidFill>
+                  <a:srgbClr val="141B26"/>
+                </a:solidFill>
+                <a:latin typeface="Calibri"/>
+              </a:rPr>
+              <a:t>Standardization and systematization of critical procedures</a:t>
+            </a:r>
+          </a:p>
+          <a:p>
+            <a:pPr>
+              <a:spcAft>
+                <a:spcPts val="200"/>
+              </a:spcAft>
+              <a:buChar char="•"/>
+            </a:pPr>
+            <a:r>
+              <a:rPr sz="1200" b="0">
+                <a:solidFill>
+                  <a:srgbClr val="141B26"/>
+                </a:solidFill>
+                <a:latin typeface="Calibri"/>
+              </a:rPr>
+              <a:t>Condition verification and standards compliance (QA cycle)</a:t>
+            </a:r>
+          </a:p>
+          <a:p>
+            <a:pPr>
+              <a:spcAft>
+                <a:spcPts val="200"/>
+              </a:spcAft>
+              <a:buChar char="•"/>
+            </a:pPr>
+            <a:r>
+              <a:rPr sz="1200" b="0">
+                <a:solidFill>
+                  <a:srgbClr val="141B26"/>
+                </a:solidFill>
+                <a:latin typeface="Calibri"/>
+              </a:rPr>
+              <a:t>KPI tracking for decision-making</a:t>
+            </a:r>
+          </a:p>
+          <a:p>
+            <a:pPr>
+              <a:spcAft>
+                <a:spcPts val="200"/>
+              </a:spcAft>
+              <a:buChar char="•"/>
+            </a:pPr>
+            <a:r>
+              <a:rPr sz="1200" b="0">
+                <a:solidFill>
+                  <a:srgbClr val="141B26"/>
+                </a:solidFill>
+                <a:latin typeface="Calibri"/>
+              </a:rPr>
+              <a:t>Maptek Vulcan · AutoCAD · Ventsim · Power BI · Orchestra · JigSaw · RockVision D-Twin (basic)</a:t>
+            </a:r>
+          </a:p>
+          <a:p>
+            <a:pPr>
+              <a:spcAft>
+                <a:spcPts val="200"/>
+              </a:spcAft>
+              <a:buChar char="•"/>
+            </a:pPr>
+            <a:r>
+              <a:rPr sz="1200" b="0">
+                <a:solidFill>
+                  <a:srgbClr val="141B26"/>
+                </a:solidFill>
+                <a:latin typeface="Calibri"/>
+              </a:rPr>
+              <a:t>Immediate availability, full-time</a:t>
+            </a:r>
+          </a:p>
+        </p:txBody>
+      </p:sp>
+      <p:sp>
+        <p:nvSpPr>
+          <p:cNvPr id="11" name="Rounded Rectangle 10"/>
+          <p:cNvSpPr/>
+          <p:nvPr/>
+        </p:nvSpPr>
+        <p:spPr>
+          <a:xfrm>
+            <a:off x="8001000" y="1143000"/>
+            <a:ext cx="3977639" cy="2331720"/>
+          </a:xfrm>
+          <a:prstGeom prst="roundRect">
+            <a:avLst>
+              <a:gd name="adj" fmla="val 8000"/>
+            </a:avLst>
+          </a:prstGeom>
+          <a:solidFill>
+            <a:srgbClr val="F0F4FA"/>
+          </a:solidFill>
+          <a:ln w="15875">
+            <a:solidFill>
+              <a:srgbClr val="0E7C5A"/>
+            </a:solidFill>
+          </a:ln>
+          <a:effectLst/>
+        </p:spPr>
+        <p:style>
+          <a:lnRef idx="1">
+            <a:schemeClr val="accent1"/>
+          </a:lnRef>
+          <a:fillRef idx="3">
+            <a:schemeClr val="accent1"/>
+          </a:fillRef>
+          <a:effectRef idx="2">
+            <a:schemeClr val="accent1"/>
+          </a:effectRef>
+          <a:fontRef idx="minor">
+            <a:schemeClr val="lt1"/>
+          </a:fontRef>
+        </p:style>
+        <p:txBody>
+          <a:bodyPr rtlCol="0" anchor="ctr"/>
+          <a:lstStyle/>
+          <a:p>
+            <a:pPr algn="ctr"/>
+          </a:p>
+        </p:txBody>
+      </p:sp>
+      <p:sp>
+        <p:nvSpPr>
+          <p:cNvPr id="12" name="TextBox 11"/>
+          <p:cNvSpPr txBox="1"/>
+          <p:nvPr/>
+        </p:nvSpPr>
+        <p:spPr>
+          <a:xfrm>
+            <a:off x="8138160" y="1252728"/>
+            <a:ext cx="3703320" cy="2148840"/>
+          </a:xfrm>
+          <a:prstGeom prst="rect">
+            <a:avLst/>
+          </a:prstGeom>
+          <a:noFill/>
+        </p:spPr>
+        <p:txBody>
+          <a:bodyPr wrap="square">
+            <a:normAutofit/>
+          </a:bodyPr>
+          <a:lstStyle/>
+          <a:p>
+            <a:pPr>
+              <a:spcAft>
+                <a:spcPts val="400"/>
+              </a:spcAft>
+            </a:pPr>
+            <a:r>
+              <a:rPr sz="1800" b="1">
+                <a:solidFill>
+                  <a:srgbClr val="0E7C5A"/>
+                </a:solidFill>
+                <a:latin typeface="Calibri"/>
+              </a:rPr>
+              <a:t>🎯 VALUE TO THIS PROJECT — DUQM</a:t>
+            </a:r>
+          </a:p>
+          <a:p>
+            <a:pPr>
+              <a:spcAft>
+                <a:spcPts val="200"/>
+              </a:spcAft>
+              <a:buChar char="•"/>
+            </a:pPr>
+            <a:r>
+              <a:rPr sz="1200" b="0">
+                <a:solidFill>
+                  <a:srgbClr val="141B26"/>
+                </a:solidFill>
+                <a:latin typeface="Calibri"/>
+              </a:rPr>
+              <a:t>QA of engineering deliverables (drawings, P&amp;IDs, dossiers): nothing reaches the client without passing the quality cycle.</a:t>
+            </a:r>
+          </a:p>
+          <a:p>
+            <a:pPr>
+              <a:spcAft>
+                <a:spcPts val="200"/>
+              </a:spcAft>
+              <a:buChar char="•"/>
+            </a:pPr>
+            <a:r>
+              <a:rPr sz="1200" b="0">
+                <a:solidFill>
+                  <a:srgbClr val="141B26"/>
+                </a:solidFill>
+                <a:latin typeface="Calibri"/>
+              </a:rPr>
+              <a:t>Specialist in standardizing critical procedures — turns team knowledge into objective, repeatable documents.</a:t>
+            </a:r>
+          </a:p>
+          <a:p>
+            <a:pPr>
+              <a:spcAft>
+                <a:spcPts val="200"/>
+              </a:spcAft>
+              <a:buChar char="•"/>
+            </a:pPr>
+            <a:r>
+              <a:rPr sz="1200" b="0">
+                <a:solidFill>
+                  <a:srgbClr val="141B26"/>
+                </a:solidFill>
+                <a:latin typeface="Calibri"/>
+              </a:rPr>
+              <a:t>Immediate full-time availability · digital-twin affinity (RockVision D-Twin).</a:t>
+            </a:r>
+          </a:p>
+        </p:txBody>
+      </p:sp>
+      <p:sp>
+        <p:nvSpPr>
+          <p:cNvPr id="13" name="TextBox 12"/>
+          <p:cNvSpPr txBox="1"/>
+          <p:nvPr/>
+        </p:nvSpPr>
+        <p:spPr>
+          <a:xfrm>
+            <a:off x="8046720" y="3657600"/>
+            <a:ext cx="3931920" cy="3017520"/>
+          </a:xfrm>
+          <a:prstGeom prst="rect">
+            <a:avLst/>
+          </a:prstGeom>
+          <a:noFill/>
+        </p:spPr>
+        <p:txBody>
+          <a:bodyPr wrap="square">
+            <a:normAutofit/>
+          </a:bodyPr>
+          <a:lstStyle/>
+          <a:p>
+            <a:pPr>
+              <a:spcAft>
+                <a:spcPts val="400"/>
+              </a:spcAft>
+            </a:pPr>
+            <a:r>
+              <a:rPr sz="1800" b="1">
+                <a:solidFill>
+                  <a:srgbClr val="1F6FEB"/>
+                </a:solidFill>
+                <a:latin typeface="Calibri"/>
+              </a:rPr>
+              <a:t>KEY PROJECTS</a:t>
+            </a:r>
+          </a:p>
+          <a:p>
+            <a:pPr>
+              <a:spcAft>
+                <a:spcPts val="200"/>
+              </a:spcAft>
+              <a:buChar char="•"/>
+            </a:pPr>
+            <a:r>
+              <a:rPr sz="1200" b="0">
+                <a:solidFill>
+                  <a:srgbClr val="141B26"/>
+                </a:solidFill>
+                <a:latin typeface="Calibri"/>
+              </a:rPr>
+              <a:t>Thesis: standardization of dispatch operational processes — identification and systematization of critical procedures.</a:t>
+            </a:r>
+          </a:p>
+          <a:p>
+            <a:pPr>
+              <a:spcAft>
+                <a:spcPts val="200"/>
+              </a:spcAft>
+              <a:buChar char="•"/>
+            </a:pPr>
+            <a:r>
+              <a:rPr sz="1200" b="0">
+                <a:solidFill>
+                  <a:srgbClr val="141B26"/>
+                </a:solidFill>
+                <a:latin typeface="Calibri"/>
+              </a:rPr>
+              <a:t>Technology-driven dispatch: fleet coordination, continuous tire pressure/temperature monitoring and early failure detection.</a:t>
+            </a:r>
+          </a:p>
+          <a:p>
+            <a:pPr>
+              <a:spcAft>
+                <a:spcPts val="200"/>
+              </a:spcAft>
+              <a:buChar char="•"/>
+            </a:pPr>
+            <a:r>
+              <a:rPr sz="1200" b="0">
+                <a:solidFill>
+                  <a:srgbClr val="141B26"/>
+                </a:solidFill>
+                <a:latin typeface="Calibri"/>
+              </a:rPr>
+              <a:t>Structural inspection under safety standards: findings logging and follow-up (a pure quality-control cycle).</a:t>
+            </a:r>
+          </a:p>
+          <a:p>
+            <a:pPr>
+              <a:spcAft>
+                <a:spcPts val="200"/>
+              </a:spcAft>
+              <a:buChar char="•"/>
+            </a:pPr>
+            <a:r>
+              <a:rPr sz="1200" b="0">
+                <a:solidFill>
+                  <a:srgbClr val="141B26"/>
+                </a:solidFill>
+                <a:latin typeface="Calibri"/>
+              </a:rPr>
+              <a:t>Digital-twin affinity: RockVision D-Twin.</a:t>
+            </a:r>
+          </a:p>
+        </p:txBody>
+      </p:sp>
+    </p:spTree>
+  </p:cSld>
+  <p:clrMapOvr>
+    <a:masterClrMapping/>
+  </p:clrMapOvr>
+</p:sld>
+</file>
+
+<file path=ppt/slides/slide11.xml><?xml version="1.0" encoding="utf-8"?>
+<p:sld xmlns:a="http://schemas.openxmlformats.org/drawingml/2006/main" xmlns:p="http://schemas.openxmlformats.org/presentationml/2006/main" xmlns:r="http://schemas.openxmlformats.org/officeDocument/2006/relationships">
+  <p:cSld>
+    <p:spTree>
+      <p:nvGrpSpPr>
+        <p:cNvPr id="1" name=""/>
+        <p:cNvGrpSpPr/>
+        <p:nvPr/>
+      </p:nvGrpSpPr>
+      <p:grpSpPr/>
+      <p:sp>
+        <p:nvSpPr>
+          <p:cNvPr id="2" name="Rectangle 1"/>
+          <p:cNvSpPr/>
+          <p:nvPr/>
+        </p:nvSpPr>
+        <p:spPr>
+          <a:xfrm>
+            <a:off x="0" y="0"/>
+            <a:ext cx="12191695" cy="6858000"/>
+          </a:xfrm>
+          <a:prstGeom prst="rect">
+            <a:avLst/>
+          </a:prstGeom>
+          <a:solidFill>
+            <a:srgbClr val="0B3D91"/>
+          </a:solidFill>
+          <a:ln>
+            <a:noFill/>
+          </a:ln>
+          <a:effectLst/>
+        </p:spPr>
+        <p:style>
+          <a:lnRef idx="1">
+            <a:schemeClr val="accent1"/>
+          </a:lnRef>
+          <a:fillRef idx="3">
+            <a:schemeClr val="accent1"/>
+          </a:fillRef>
+          <a:effectRef idx="2">
+            <a:schemeClr val="accent1"/>
+          </a:effectRef>
+          <a:fontRef idx="minor">
+            <a:schemeClr val="lt1"/>
+          </a:fontRef>
+        </p:style>
+        <p:txBody>
+          <a:bodyPr rtlCol="0" anchor="ctr"/>
+          <a:lstStyle/>
+          <a:p>
+            <a:pPr algn="ctr"/>
+          </a:p>
+        </p:txBody>
+      </p:sp>
+      <p:sp>
+        <p:nvSpPr>
+          <p:cNvPr id="3" name="TextBox 2"/>
+          <p:cNvSpPr txBox="1"/>
+          <p:nvPr/>
+        </p:nvSpPr>
+        <p:spPr>
+          <a:xfrm>
+            <a:off x="822960" y="1234440"/>
+            <a:ext cx="10515600" cy="5120640"/>
+          </a:xfrm>
+          <a:prstGeom prst="rect">
+            <a:avLst/>
+          </a:prstGeom>
+          <a:noFill/>
+        </p:spPr>
+        <p:txBody>
+          <a:bodyPr wrap="square">
+            <a:normAutofit/>
+          </a:bodyPr>
+          <a:lstStyle/>
+          <a:p>
+            <a:pPr>
+              <a:spcAft>
                 <a:spcPts val="1000"/>
               </a:spcAft>
             </a:pPr>
@@ -3413,11 +4344,11 @@
           <a:p>
             <a:pPr>
               <a:spcAft>
-                <a:spcPts val="1000"/>
-              </a:spcAft>
-            </a:pPr>
-            <a:r>
-              <a:rPr sz="3200" b="1">
+                <a:spcPts val="1200"/>
+              </a:spcAft>
+            </a:pPr>
+            <a:r>
+              <a:rPr sz="3000" b="1">
                 <a:solidFill>
                   <a:srgbClr val="FFFFFF"/>
                 </a:solidFill>
@@ -3429,46 +4360,80 @@
           <a:p>
             <a:pPr>
               <a:spcAft>
-                <a:spcPts val="600"/>
-              </a:spcAft>
-              <a:buChar char="•"/>
-            </a:pPr>
-            <a:r>
-              <a:rPr sz="1700" b="0">
+                <a:spcPts val="800"/>
+              </a:spcAft>
+              <a:buChar char="•"/>
+            </a:pPr>
+            <a:r>
+              <a:rPr sz="1600" b="0">
                 <a:solidFill>
                   <a:srgbClr val="E8F0FF"/>
                 </a:solidFill>
                 <a:latin typeface="Calibri"/>
               </a:rPr>
-              <a:t>Team available for an August 2026 start</a:t>
-            </a:r>
-          </a:p>
-          <a:p>
-            <a:pPr>
-              <a:spcAft>
-                <a:spcPts val="600"/>
-              </a:spcAft>
-              <a:buChar char="•"/>
-            </a:pPr>
-            <a:r>
-              <a:rPr sz="1700" b="0">
+              <a:t>Consolidated team: everyone knows one another and has worked together on multiple projects over the years.</a:t>
+            </a:r>
+          </a:p>
+          <a:p>
+            <a:pPr>
+              <a:spcAft>
+                <a:spcPts val="800"/>
+              </a:spcAft>
+              <a:buChar char="•"/>
+            </a:pPr>
+            <a:r>
+              <a:rPr sz="1600" b="0">
                 <a:solidFill>
                   <a:srgbClr val="E8F0FF"/>
                 </a:solidFill>
                 <a:latin typeface="Calibri"/>
               </a:rPr>
-              <a:t>Full CVs available upon request</a:t>
-            </a:r>
-          </a:p>
-          <a:p>
-            <a:pPr>
-              <a:spcAft>
-                <a:spcPts val="600"/>
-              </a:spcAft>
-              <a:buChar char="•"/>
-            </a:pPr>
-            <a:r>
-              <a:rPr sz="1700" b="0">
+              <a:t>Team available for an August 2026 start.</a:t>
+            </a:r>
+          </a:p>
+          <a:p>
+            <a:pPr>
+              <a:spcAft>
+                <a:spcPts val="800"/>
+              </a:spcAft>
+              <a:buChar char="•"/>
+            </a:pPr>
+            <a:r>
+              <a:rPr sz="1600" b="0">
+                <a:solidFill>
+                  <a:srgbClr val="E8F0FF"/>
+                </a:solidFill>
+                <a:latin typeface="Calibri"/>
+              </a:rPr>
+              <a:t>Per-member discussion minutes available on request: questions and answers, knowledge levels and contributions to the project.</a:t>
+            </a:r>
+          </a:p>
+          <a:p>
+            <a:pPr>
+              <a:spcAft>
+                <a:spcPts val="800"/>
+              </a:spcAft>
+              <a:buChar char="•"/>
+            </a:pPr>
+            <a:r>
+              <a:rPr sz="1600" b="0">
+                <a:solidFill>
+                  <a:srgbClr val="E8F0FF"/>
+                </a:solidFill>
+                <a:latin typeface="Calibri"/>
+              </a:rPr>
+              <a:t>Full CVs available upon request.</a:t>
+            </a:r>
+          </a:p>
+          <a:p>
+            <a:pPr>
+              <a:spcAft>
+                <a:spcPts val="800"/>
+              </a:spcAft>
+              <a:buChar char="•"/>
+            </a:pPr>
+            <a:r>
+              <a:rPr sz="1600" b="0">
                 <a:solidFill>
                   <a:srgbClr val="E8F0FF"/>
                 </a:solidFill>
@@ -5426,7 +6391,7 @@
         </p:spPr>
         <p:txBody>
           <a:bodyPr wrap="square">
-            <a:spAutoFit/>
+            <a:normAutofit/>
           </a:bodyPr>
           <a:lstStyle/>
           <a:p>
@@ -5436,7 +6401,7 @@
               </a:spcAft>
             </a:pPr>
             <a:r>
-              <a:rPr sz="1100" b="1">
+              <a:rPr sz="1800" b="1">
                 <a:solidFill>
                   <a:srgbClr val="1F6FEB"/>
                 </a:solidFill>
@@ -5453,7 +6418,7 @@
               <a:buChar char="•"/>
             </a:pPr>
             <a:r>
-              <a:rPr sz="950" b="0">
+              <a:rPr sz="1200" b="0">
                 <a:solidFill>
                   <a:srgbClr val="141B26"/>
                 </a:solidFill>
@@ -5482,7 +6447,7 @@
         </p:spPr>
         <p:txBody>
           <a:bodyPr wrap="square">
-            <a:spAutoFit/>
+            <a:normAutofit/>
           </a:bodyPr>
           <a:lstStyle/>
           <a:p>
@@ -5492,7 +6457,7 @@
               </a:spcAft>
             </a:pPr>
             <a:r>
-              <a:rPr sz="1100" b="1">
+              <a:rPr sz="1800" b="1">
                 <a:solidFill>
                   <a:srgbClr val="1F6FEB"/>
                 </a:solidFill>
@@ -5509,7 +6474,7 @@
               <a:buChar char="•"/>
             </a:pPr>
             <a:r>
-              <a:rPr sz="950" b="0">
+              <a:rPr sz="1200" b="0">
                 <a:solidFill>
                   <a:srgbClr val="141B26"/>
                 </a:solidFill>
@@ -5526,7 +6491,7 @@
               <a:buChar char="•"/>
             </a:pPr>
             <a:r>
-              <a:rPr sz="950" b="0">
+              <a:rPr sz="1200" b="0">
                 <a:solidFill>
                   <a:srgbClr val="141B26"/>
                 </a:solidFill>
@@ -5543,7 +6508,7 @@
               <a:buChar char="•"/>
             </a:pPr>
             <a:r>
-              <a:rPr sz="950" b="0">
+              <a:rPr sz="1200" b="0">
                 <a:solidFill>
                   <a:srgbClr val="141B26"/>
                 </a:solidFill>
@@ -5560,7 +6525,7 @@
               <a:buChar char="•"/>
             </a:pPr>
             <a:r>
-              <a:rPr sz="950" b="0">
+              <a:rPr sz="1200" b="0">
                 <a:solidFill>
                   <a:srgbClr val="141B26"/>
                 </a:solidFill>
@@ -5589,7 +6554,7 @@
         </p:spPr>
         <p:txBody>
           <a:bodyPr wrap="square">
-            <a:spAutoFit/>
+            <a:normAutofit/>
           </a:bodyPr>
           <a:lstStyle/>
           <a:p>
@@ -5599,7 +6564,7 @@
               </a:spcAft>
             </a:pPr>
             <a:r>
-              <a:rPr sz="1100" b="1">
+              <a:rPr sz="1800" b="1">
                 <a:solidFill>
                   <a:srgbClr val="1F6FEB"/>
                 </a:solidFill>
@@ -5616,7 +6581,7 @@
               <a:buChar char="•"/>
             </a:pPr>
             <a:r>
-              <a:rPr sz="950" b="0">
+              <a:rPr sz="1200" b="0">
                 <a:solidFill>
                   <a:srgbClr val="141B26"/>
                 </a:solidFill>
@@ -5633,7 +6598,7 @@
               <a:buChar char="•"/>
             </a:pPr>
             <a:r>
-              <a:rPr sz="950" b="0">
+              <a:rPr sz="1200" b="0">
                 <a:solidFill>
                   <a:srgbClr val="141B26"/>
                 </a:solidFill>
@@ -5650,7 +6615,7 @@
               <a:buChar char="•"/>
             </a:pPr>
             <a:r>
-              <a:rPr sz="950" b="0">
+              <a:rPr sz="1200" b="0">
                 <a:solidFill>
                   <a:srgbClr val="141B26"/>
                 </a:solidFill>
@@ -5667,7 +6632,7 @@
               <a:buChar char="•"/>
             </a:pPr>
             <a:r>
-              <a:rPr sz="950" b="0">
+              <a:rPr sz="1200" b="0">
                 <a:solidFill>
                   <a:srgbClr val="141B26"/>
                 </a:solidFill>
@@ -5684,7 +6649,7 @@
               <a:buChar char="•"/>
             </a:pPr>
             <a:r>
-              <a:rPr sz="950" b="0">
+              <a:rPr sz="1200" b="0">
                 <a:solidFill>
                   <a:srgbClr val="141B26"/>
                 </a:solidFill>
@@ -5713,7 +6678,7 @@
         </p:spPr>
         <p:txBody>
           <a:bodyPr wrap="square">
-            <a:spAutoFit/>
+            <a:normAutofit/>
           </a:bodyPr>
           <a:lstStyle/>
           <a:p>
@@ -5723,7 +6688,7 @@
               </a:spcAft>
             </a:pPr>
             <a:r>
-              <a:rPr sz="1100" b="1">
+              <a:rPr sz="1800" b="1">
                 <a:solidFill>
                   <a:srgbClr val="1F6FEB"/>
                 </a:solidFill>
@@ -5740,7 +6705,7 @@
               <a:buChar char="•"/>
             </a:pPr>
             <a:r>
-              <a:rPr sz="950" b="0">
+              <a:rPr sz="1200" b="0">
                 <a:solidFill>
                   <a:srgbClr val="141B26"/>
                 </a:solidFill>
@@ -5757,7 +6722,7 @@
               <a:buChar char="•"/>
             </a:pPr>
             <a:r>
-              <a:rPr sz="950" b="0">
+              <a:rPr sz="1200" b="0">
                 <a:solidFill>
                   <a:srgbClr val="141B26"/>
                 </a:solidFill>
@@ -5774,7 +6739,7 @@
               <a:buChar char="•"/>
             </a:pPr>
             <a:r>
-              <a:rPr sz="950" b="0">
+              <a:rPr sz="1200" b="0">
                 <a:solidFill>
                   <a:srgbClr val="141B26"/>
                 </a:solidFill>
@@ -5791,7 +6756,7 @@
               <a:buChar char="•"/>
             </a:pPr>
             <a:r>
-              <a:rPr sz="950" b="0">
+              <a:rPr sz="1200" b="0">
                 <a:solidFill>
                   <a:srgbClr val="141B26"/>
                 </a:solidFill>
@@ -5808,7 +6773,7 @@
               <a:buChar char="•"/>
             </a:pPr>
             <a:r>
-              <a:rPr sz="950" b="0">
+              <a:rPr sz="1200" b="0">
                 <a:solidFill>
                   <a:srgbClr val="141B26"/>
                 </a:solidFill>
@@ -5825,7 +6790,7 @@
               <a:buChar char="•"/>
             </a:pPr>
             <a:r>
-              <a:rPr sz="950" b="0">
+              <a:rPr sz="1200" b="0">
                 <a:solidFill>
                   <a:srgbClr val="141B26"/>
                 </a:solidFill>
@@ -5842,7 +6807,7 @@
               <a:buChar char="•"/>
             </a:pPr>
             <a:r>
-              <a:rPr sz="950" b="0">
+              <a:rPr sz="1200" b="0">
                 <a:solidFill>
                   <a:srgbClr val="141B26"/>
                 </a:solidFill>
@@ -5871,7 +6836,7 @@
         </p:spPr>
         <p:txBody>
           <a:bodyPr wrap="square">
-            <a:spAutoFit/>
+            <a:normAutofit/>
           </a:bodyPr>
           <a:lstStyle/>
           <a:p>
@@ -5881,7 +6846,7 @@
               </a:spcAft>
             </a:pPr>
             <a:r>
-              <a:rPr sz="1100" b="1">
+              <a:rPr sz="1800" b="1">
                 <a:solidFill>
                   <a:srgbClr val="1F6FEB"/>
                 </a:solidFill>
@@ -5898,7 +6863,7 @@
               <a:buChar char="•"/>
             </a:pPr>
             <a:r>
-              <a:rPr sz="950" b="0">
+              <a:rPr sz="1200" b="0">
                 <a:solidFill>
                   <a:srgbClr val="141B26"/>
                 </a:solidFill>
@@ -5915,7 +6880,7 @@
               <a:buChar char="•"/>
             </a:pPr>
             <a:r>
-              <a:rPr sz="950" b="0">
+              <a:rPr sz="1200" b="0">
                 <a:solidFill>
                   <a:srgbClr val="141B26"/>
                 </a:solidFill>
@@ -5932,7 +6897,7 @@
               <a:buChar char="•"/>
             </a:pPr>
             <a:r>
-              <a:rPr sz="950" b="0">
+              <a:rPr sz="1200" b="0">
                 <a:solidFill>
                   <a:srgbClr val="141B26"/>
                 </a:solidFill>
@@ -5949,7 +6914,7 @@
               <a:buChar char="•"/>
             </a:pPr>
             <a:r>
-              <a:rPr sz="950" b="0">
+              <a:rPr sz="1200" b="0">
                 <a:solidFill>
                   <a:srgbClr val="141B26"/>
                 </a:solidFill>
@@ -5966,7 +6931,7 @@
               <a:buChar char="•"/>
             </a:pPr>
             <a:r>
-              <a:rPr sz="950" b="0">
+              <a:rPr sz="1200" b="0">
                 <a:solidFill>
                   <a:srgbClr val="141B26"/>
                 </a:solidFill>
@@ -5983,7 +6948,7 @@
               <a:buChar char="•"/>
             </a:pPr>
             <a:r>
-              <a:rPr sz="950" b="0">
+              <a:rPr sz="1200" b="0">
                 <a:solidFill>
                   <a:srgbClr val="141B26"/>
                 </a:solidFill>
@@ -6060,7 +7025,7 @@
         </p:spPr>
         <p:txBody>
           <a:bodyPr wrap="square">
-            <a:spAutoFit/>
+            <a:normAutofit/>
           </a:bodyPr>
           <a:lstStyle/>
           <a:p>
@@ -6070,7 +7035,7 @@
               </a:spcAft>
             </a:pPr>
             <a:r>
-              <a:rPr sz="1050" b="1">
+              <a:rPr sz="1800" b="1">
                 <a:solidFill>
                   <a:srgbClr val="0E7C5A"/>
                 </a:solidFill>
@@ -6087,7 +7052,7 @@
               <a:buChar char="•"/>
             </a:pPr>
             <a:r>
-              <a:rPr sz="950" b="0">
+              <a:rPr sz="1200" b="0">
                 <a:solidFill>
                   <a:srgbClr val="141B26"/>
                 </a:solidFill>
@@ -6104,7 +7069,7 @@
               <a:buChar char="•"/>
             </a:pPr>
             <a:r>
-              <a:rPr sz="950" b="0">
+              <a:rPr sz="1200" b="0">
                 <a:solidFill>
                   <a:srgbClr val="141B26"/>
                 </a:solidFill>
@@ -6121,7 +7086,7 @@
               <a:buChar char="•"/>
             </a:pPr>
             <a:r>
-              <a:rPr sz="950" b="0">
+              <a:rPr sz="1200" b="0">
                 <a:solidFill>
                   <a:srgbClr val="141B26"/>
                 </a:solidFill>
@@ -6150,7 +7115,7 @@
         </p:spPr>
         <p:txBody>
           <a:bodyPr wrap="square">
-            <a:spAutoFit/>
+            <a:normAutofit/>
           </a:bodyPr>
           <a:lstStyle/>
           <a:p>
@@ -6160,7 +7125,7 @@
               </a:spcAft>
             </a:pPr>
             <a:r>
-              <a:rPr sz="1100" b="1">
+              <a:rPr sz="1800" b="1">
                 <a:solidFill>
                   <a:srgbClr val="1F6FEB"/>
                 </a:solidFill>
@@ -6177,7 +7142,7 @@
               <a:buChar char="•"/>
             </a:pPr>
             <a:r>
-              <a:rPr sz="1000" b="0">
+              <a:rPr sz="1200" b="0">
                 <a:solidFill>
                   <a:srgbClr val="141B26"/>
                 </a:solidFill>
@@ -6194,7 +7159,7 @@
               <a:buChar char="•"/>
             </a:pPr>
             <a:r>
-              <a:rPr sz="1000" b="0">
+              <a:rPr sz="1200" b="0">
                 <a:solidFill>
                   <a:srgbClr val="141B26"/>
                 </a:solidFill>
@@ -6211,7 +7176,7 @@
               <a:buChar char="•"/>
             </a:pPr>
             <a:r>
-              <a:rPr sz="1000" b="0">
+              <a:rPr sz="1200" b="0">
                 <a:solidFill>
                   <a:srgbClr val="141B26"/>
                 </a:solidFill>
@@ -6228,7 +7193,7 @@
               <a:buChar char="•"/>
             </a:pPr>
             <a:r>
-              <a:rPr sz="1000" b="0">
+              <a:rPr sz="1200" b="0">
                 <a:solidFill>
                   <a:srgbClr val="141B26"/>
                 </a:solidFill>
@@ -6493,7 +7458,7 @@
         </p:spPr>
         <p:txBody>
           <a:bodyPr wrap="square">
-            <a:spAutoFit/>
+            <a:normAutofit/>
           </a:bodyPr>
           <a:lstStyle/>
           <a:p>
@@ -6503,7 +7468,7 @@
               </a:spcAft>
             </a:pPr>
             <a:r>
-              <a:rPr sz="1100" b="1">
+              <a:rPr sz="1800" b="1">
                 <a:solidFill>
                   <a:srgbClr val="1F6FEB"/>
                 </a:solidFill>
@@ -6520,7 +7485,7 @@
               <a:buChar char="•"/>
             </a:pPr>
             <a:r>
-              <a:rPr sz="950" b="0">
+              <a:rPr sz="1200" b="0">
                 <a:solidFill>
                   <a:srgbClr val="141B26"/>
                 </a:solidFill>
@@ -6549,7 +7514,7 @@
         </p:spPr>
         <p:txBody>
           <a:bodyPr wrap="square">
-            <a:spAutoFit/>
+            <a:normAutofit/>
           </a:bodyPr>
           <a:lstStyle/>
           <a:p>
@@ -6559,7 +7524,7 @@
               </a:spcAft>
             </a:pPr>
             <a:r>
-              <a:rPr sz="1100" b="1">
+              <a:rPr sz="1800" b="1">
                 <a:solidFill>
                   <a:srgbClr val="1F6FEB"/>
                 </a:solidFill>
@@ -6576,7 +7541,7 @@
               <a:buChar char="•"/>
             </a:pPr>
             <a:r>
-              <a:rPr sz="950" b="0">
+              <a:rPr sz="1200" b="0">
                 <a:solidFill>
                   <a:srgbClr val="141B26"/>
                 </a:solidFill>
@@ -6593,7 +7558,7 @@
               <a:buChar char="•"/>
             </a:pPr>
             <a:r>
-              <a:rPr sz="950" b="0">
+              <a:rPr sz="1200" b="0">
                 <a:solidFill>
                   <a:srgbClr val="141B26"/>
                 </a:solidFill>
@@ -6610,7 +7575,7 @@
               <a:buChar char="•"/>
             </a:pPr>
             <a:r>
-              <a:rPr sz="950" b="0">
+              <a:rPr sz="1200" b="0">
                 <a:solidFill>
                   <a:srgbClr val="141B26"/>
                 </a:solidFill>
@@ -6627,7 +7592,7 @@
               <a:buChar char="•"/>
             </a:pPr>
             <a:r>
-              <a:rPr sz="950" b="0">
+              <a:rPr sz="1200" b="0">
                 <a:solidFill>
                   <a:srgbClr val="141B26"/>
                 </a:solidFill>
@@ -6656,7 +7621,7 @@
         </p:spPr>
         <p:txBody>
           <a:bodyPr wrap="square">
-            <a:spAutoFit/>
+            <a:normAutofit/>
           </a:bodyPr>
           <a:lstStyle/>
           <a:p>
@@ -6666,7 +7631,7 @@
               </a:spcAft>
             </a:pPr>
             <a:r>
-              <a:rPr sz="1100" b="1">
+              <a:rPr sz="1800" b="1">
                 <a:solidFill>
                   <a:srgbClr val="1F6FEB"/>
                 </a:solidFill>
@@ -6683,7 +7648,7 @@
               <a:buChar char="•"/>
             </a:pPr>
             <a:r>
-              <a:rPr sz="950" b="0">
+              <a:rPr sz="1200" b="0">
                 <a:solidFill>
                   <a:srgbClr val="141B26"/>
                 </a:solidFill>
@@ -6700,7 +7665,7 @@
               <a:buChar char="•"/>
             </a:pPr>
             <a:r>
-              <a:rPr sz="950" b="0">
+              <a:rPr sz="1200" b="0">
                 <a:solidFill>
                   <a:srgbClr val="141B26"/>
                 </a:solidFill>
@@ -6717,7 +7682,7 @@
               <a:buChar char="•"/>
             </a:pPr>
             <a:r>
-              <a:rPr sz="950" b="0">
+              <a:rPr sz="1200" b="0">
                 <a:solidFill>
                   <a:srgbClr val="141B26"/>
                 </a:solidFill>
@@ -6734,7 +7699,7 @@
               <a:buChar char="•"/>
             </a:pPr>
             <a:r>
-              <a:rPr sz="950" b="0">
+              <a:rPr sz="1200" b="0">
                 <a:solidFill>
                   <a:srgbClr val="141B26"/>
                 </a:solidFill>
@@ -6751,7 +7716,7 @@
               <a:buChar char="•"/>
             </a:pPr>
             <a:r>
-              <a:rPr sz="950" b="0">
+              <a:rPr sz="1200" b="0">
                 <a:solidFill>
                   <a:srgbClr val="141B26"/>
                 </a:solidFill>
@@ -6780,7 +7745,7 @@
         </p:spPr>
         <p:txBody>
           <a:bodyPr wrap="square">
-            <a:spAutoFit/>
+            <a:normAutofit/>
           </a:bodyPr>
           <a:lstStyle/>
           <a:p>
@@ -6790,7 +7755,7 @@
               </a:spcAft>
             </a:pPr>
             <a:r>
-              <a:rPr sz="1100" b="1">
+              <a:rPr sz="1800" b="1">
                 <a:solidFill>
                   <a:srgbClr val="1F6FEB"/>
                 </a:solidFill>
@@ -6807,7 +7772,7 @@
               <a:buChar char="•"/>
             </a:pPr>
             <a:r>
-              <a:rPr sz="950" b="0">
+              <a:rPr sz="1200" b="0">
                 <a:solidFill>
                   <a:srgbClr val="141B26"/>
                 </a:solidFill>
@@ -6824,7 +7789,7 @@
               <a:buChar char="•"/>
             </a:pPr>
             <a:r>
-              <a:rPr sz="950" b="0">
+              <a:rPr sz="1200" b="0">
                 <a:solidFill>
                   <a:srgbClr val="141B26"/>
                 </a:solidFill>
@@ -6841,7 +7806,7 @@
               <a:buChar char="•"/>
             </a:pPr>
             <a:r>
-              <a:rPr sz="950" b="0">
+              <a:rPr sz="1200" b="0">
                 <a:solidFill>
                   <a:srgbClr val="141B26"/>
                 </a:solidFill>
@@ -6858,7 +7823,7 @@
               <a:buChar char="•"/>
             </a:pPr>
             <a:r>
-              <a:rPr sz="950" b="0">
+              <a:rPr sz="1200" b="0">
                 <a:solidFill>
                   <a:srgbClr val="141B26"/>
                 </a:solidFill>
@@ -6887,7 +7852,7 @@
         </p:spPr>
         <p:txBody>
           <a:bodyPr wrap="square">
-            <a:spAutoFit/>
+            <a:normAutofit/>
           </a:bodyPr>
           <a:lstStyle/>
           <a:p>
@@ -6897,7 +7862,7 @@
               </a:spcAft>
             </a:pPr>
             <a:r>
-              <a:rPr sz="1100" b="1">
+              <a:rPr sz="1800" b="1">
                 <a:solidFill>
                   <a:srgbClr val="1F6FEB"/>
                 </a:solidFill>
@@ -6914,7 +7879,7 @@
               <a:buChar char="•"/>
             </a:pPr>
             <a:r>
-              <a:rPr sz="950" b="0">
+              <a:rPr sz="1200" b="0">
                 <a:solidFill>
                   <a:srgbClr val="141B26"/>
                 </a:solidFill>
@@ -6931,7 +7896,7 @@
               <a:buChar char="•"/>
             </a:pPr>
             <a:r>
-              <a:rPr sz="950" b="0">
+              <a:rPr sz="1200" b="0">
                 <a:solidFill>
                   <a:srgbClr val="141B26"/>
                 </a:solidFill>
@@ -6948,7 +7913,7 @@
               <a:buChar char="•"/>
             </a:pPr>
             <a:r>
-              <a:rPr sz="950" b="0">
+              <a:rPr sz="1200" b="0">
                 <a:solidFill>
                   <a:srgbClr val="141B26"/>
                 </a:solidFill>
@@ -6965,7 +7930,7 @@
               <a:buChar char="•"/>
             </a:pPr>
             <a:r>
-              <a:rPr sz="950" b="0">
+              <a:rPr sz="1200" b="0">
                 <a:solidFill>
                   <a:srgbClr val="141B26"/>
                 </a:solidFill>
@@ -6982,7 +7947,7 @@
               <a:buChar char="•"/>
             </a:pPr>
             <a:r>
-              <a:rPr sz="950" b="0">
+              <a:rPr sz="1200" b="0">
                 <a:solidFill>
                   <a:srgbClr val="141B26"/>
                 </a:solidFill>
@@ -7059,7 +8024,7 @@
         </p:spPr>
         <p:txBody>
           <a:bodyPr wrap="square">
-            <a:spAutoFit/>
+            <a:normAutofit/>
           </a:bodyPr>
           <a:lstStyle/>
           <a:p>
@@ -7069,7 +8034,7 @@
               </a:spcAft>
             </a:pPr>
             <a:r>
-              <a:rPr sz="1050" b="1">
+              <a:rPr sz="1800" b="1">
                 <a:solidFill>
                   <a:srgbClr val="0E7C5A"/>
                 </a:solidFill>
@@ -7086,7 +8051,7 @@
               <a:buChar char="•"/>
             </a:pPr>
             <a:r>
-              <a:rPr sz="950" b="0">
+              <a:rPr sz="1200" b="0">
                 <a:solidFill>
                   <a:srgbClr val="141B26"/>
                 </a:solidFill>
@@ -7103,7 +8068,7 @@
               <a:buChar char="•"/>
             </a:pPr>
             <a:r>
-              <a:rPr sz="950" b="0">
+              <a:rPr sz="1200" b="0">
                 <a:solidFill>
                   <a:srgbClr val="141B26"/>
                 </a:solidFill>
@@ -7120,7 +8085,7 @@
               <a:buChar char="•"/>
             </a:pPr>
             <a:r>
-              <a:rPr sz="950" b="0">
+              <a:rPr sz="1200" b="0">
                 <a:solidFill>
                   <a:srgbClr val="141B26"/>
                 </a:solidFill>
@@ -7149,7 +8114,7 @@
         </p:spPr>
         <p:txBody>
           <a:bodyPr wrap="square">
-            <a:spAutoFit/>
+            <a:normAutofit/>
           </a:bodyPr>
           <a:lstStyle/>
           <a:p>
@@ -7159,7 +8124,7 @@
               </a:spcAft>
             </a:pPr>
             <a:r>
-              <a:rPr sz="1100" b="1">
+              <a:rPr sz="1800" b="1">
                 <a:solidFill>
                   <a:srgbClr val="1F6FEB"/>
                 </a:solidFill>
@@ -7176,7 +8141,7 @@
               <a:buChar char="•"/>
             </a:pPr>
             <a:r>
-              <a:rPr sz="1000" b="0">
+              <a:rPr sz="1200" b="0">
                 <a:solidFill>
                   <a:srgbClr val="141B26"/>
                 </a:solidFill>
@@ -7193,7 +8158,7 @@
               <a:buChar char="•"/>
             </a:pPr>
             <a:r>
-              <a:rPr sz="1000" b="0">
+              <a:rPr sz="1200" b="0">
                 <a:solidFill>
                   <a:srgbClr val="141B26"/>
                 </a:solidFill>
@@ -7210,7 +8175,7 @@
               <a:buChar char="•"/>
             </a:pPr>
             <a:r>
-              <a:rPr sz="1000" b="0">
+              <a:rPr sz="1200" b="0">
                 <a:solidFill>
                   <a:srgbClr val="141B26"/>
                 </a:solidFill>
@@ -7227,7 +8192,7 @@
               <a:buChar char="•"/>
             </a:pPr>
             <a:r>
-              <a:rPr sz="1000" b="0">
+              <a:rPr sz="1200" b="0">
                 <a:solidFill>
                   <a:srgbClr val="141B26"/>
                 </a:solidFill>
@@ -7492,7 +8457,7 @@
         </p:spPr>
         <p:txBody>
           <a:bodyPr wrap="square">
-            <a:spAutoFit/>
+            <a:normAutofit/>
           </a:bodyPr>
           <a:lstStyle/>
           <a:p>
@@ -7502,7 +8467,7 @@
               </a:spcAft>
             </a:pPr>
             <a:r>
-              <a:rPr sz="1100" b="1">
+              <a:rPr sz="1800" b="1">
                 <a:solidFill>
                   <a:srgbClr val="1F6FEB"/>
                 </a:solidFill>
@@ -7519,7 +8484,7 @@
               <a:buChar char="•"/>
             </a:pPr>
             <a:r>
-              <a:rPr sz="950" b="0">
+              <a:rPr sz="1200" b="0">
                 <a:solidFill>
                   <a:srgbClr val="141B26"/>
                 </a:solidFill>
@@ -7548,7 +8513,7 @@
         </p:spPr>
         <p:txBody>
           <a:bodyPr wrap="square">
-            <a:spAutoFit/>
+            <a:normAutofit/>
           </a:bodyPr>
           <a:lstStyle/>
           <a:p>
@@ -7558,7 +8523,7 @@
               </a:spcAft>
             </a:pPr>
             <a:r>
-              <a:rPr sz="1100" b="1">
+              <a:rPr sz="1800" b="1">
                 <a:solidFill>
                   <a:srgbClr val="1F6FEB"/>
                 </a:solidFill>
@@ -7575,7 +8540,7 @@
               <a:buChar char="•"/>
             </a:pPr>
             <a:r>
-              <a:rPr sz="950" b="0">
+              <a:rPr sz="1200" b="0">
                 <a:solidFill>
                   <a:srgbClr val="141B26"/>
                 </a:solidFill>
@@ -7592,7 +8557,7 @@
               <a:buChar char="•"/>
             </a:pPr>
             <a:r>
-              <a:rPr sz="950" b="0">
+              <a:rPr sz="1200" b="0">
                 <a:solidFill>
                   <a:srgbClr val="141B26"/>
                 </a:solidFill>
@@ -7609,7 +8574,7 @@
               <a:buChar char="•"/>
             </a:pPr>
             <a:r>
-              <a:rPr sz="950" b="0">
+              <a:rPr sz="1200" b="0">
                 <a:solidFill>
                   <a:srgbClr val="141B26"/>
                 </a:solidFill>
@@ -7638,7 +8603,7 @@
         </p:spPr>
         <p:txBody>
           <a:bodyPr wrap="square">
-            <a:spAutoFit/>
+            <a:normAutofit/>
           </a:bodyPr>
           <a:lstStyle/>
           <a:p>
@@ -7648,7 +8613,7 @@
               </a:spcAft>
             </a:pPr>
             <a:r>
-              <a:rPr sz="1100" b="1">
+              <a:rPr sz="1800" b="1">
                 <a:solidFill>
                   <a:srgbClr val="1F6FEB"/>
                 </a:solidFill>
@@ -7665,7 +8630,7 @@
               <a:buChar char="•"/>
             </a:pPr>
             <a:r>
-              <a:rPr sz="950" b="0">
+              <a:rPr sz="1200" b="0">
                 <a:solidFill>
                   <a:srgbClr val="141B26"/>
                 </a:solidFill>
@@ -7682,7 +8647,7 @@
               <a:buChar char="•"/>
             </a:pPr>
             <a:r>
-              <a:rPr sz="950" b="0">
+              <a:rPr sz="1200" b="0">
                 <a:solidFill>
                   <a:srgbClr val="141B26"/>
                 </a:solidFill>
@@ -7699,7 +8664,7 @@
               <a:buChar char="•"/>
             </a:pPr>
             <a:r>
-              <a:rPr sz="950" b="0">
+              <a:rPr sz="1200" b="0">
                 <a:solidFill>
                   <a:srgbClr val="141B26"/>
                 </a:solidFill>
@@ -7716,7 +8681,7 @@
               <a:buChar char="•"/>
             </a:pPr>
             <a:r>
-              <a:rPr sz="950" b="0">
+              <a:rPr sz="1200" b="0">
                 <a:solidFill>
                   <a:srgbClr val="141B26"/>
                 </a:solidFill>
@@ -7733,7 +8698,7 @@
               <a:buChar char="•"/>
             </a:pPr>
             <a:r>
-              <a:rPr sz="950" b="0">
+              <a:rPr sz="1200" b="0">
                 <a:solidFill>
                   <a:srgbClr val="141B26"/>
                 </a:solidFill>
@@ -7762,7 +8727,7 @@
         </p:spPr>
         <p:txBody>
           <a:bodyPr wrap="square">
-            <a:spAutoFit/>
+            <a:normAutofit/>
           </a:bodyPr>
           <a:lstStyle/>
           <a:p>
@@ -7772,7 +8737,7 @@
               </a:spcAft>
             </a:pPr>
             <a:r>
-              <a:rPr sz="1100" b="1">
+              <a:rPr sz="1800" b="1">
                 <a:solidFill>
                   <a:srgbClr val="1F6FEB"/>
                 </a:solidFill>
@@ -7789,7 +8754,7 @@
               <a:buChar char="•"/>
             </a:pPr>
             <a:r>
-              <a:rPr sz="950" b="0">
+              <a:rPr sz="1200" b="0">
                 <a:solidFill>
                   <a:srgbClr val="141B26"/>
                 </a:solidFill>
@@ -7806,7 +8771,7 @@
               <a:buChar char="•"/>
             </a:pPr>
             <a:r>
-              <a:rPr sz="950" b="0">
+              <a:rPr sz="1200" b="0">
                 <a:solidFill>
                   <a:srgbClr val="141B26"/>
                 </a:solidFill>
@@ -7823,7 +8788,7 @@
               <a:buChar char="•"/>
             </a:pPr>
             <a:r>
-              <a:rPr sz="950" b="0">
+              <a:rPr sz="1200" b="0">
                 <a:solidFill>
                   <a:srgbClr val="141B26"/>
                 </a:solidFill>
@@ -7840,7 +8805,7 @@
               <a:buChar char="•"/>
             </a:pPr>
             <a:r>
-              <a:rPr sz="950" b="0">
+              <a:rPr sz="1200" b="0">
                 <a:solidFill>
                   <a:srgbClr val="141B26"/>
                 </a:solidFill>
@@ -7857,7 +8822,7 @@
               <a:buChar char="•"/>
             </a:pPr>
             <a:r>
-              <a:rPr sz="950" b="0">
+              <a:rPr sz="1200" b="0">
                 <a:solidFill>
                   <a:srgbClr val="141B26"/>
                 </a:solidFill>
@@ -7874,7 +8839,7 @@
               <a:buChar char="•"/>
             </a:pPr>
             <a:r>
-              <a:rPr sz="950" b="0">
+              <a:rPr sz="1200" b="0">
                 <a:solidFill>
                   <a:srgbClr val="141B26"/>
                 </a:solidFill>
@@ -7903,7 +8868,7 @@
         </p:spPr>
         <p:txBody>
           <a:bodyPr wrap="square">
-            <a:spAutoFit/>
+            <a:normAutofit/>
           </a:bodyPr>
           <a:lstStyle/>
           <a:p>
@@ -7913,7 +8878,7 @@
               </a:spcAft>
             </a:pPr>
             <a:r>
-              <a:rPr sz="1100" b="1">
+              <a:rPr sz="1800" b="1">
                 <a:solidFill>
                   <a:srgbClr val="1F6FEB"/>
                 </a:solidFill>
@@ -7930,7 +8895,7 @@
               <a:buChar char="•"/>
             </a:pPr>
             <a:r>
-              <a:rPr sz="950" b="0">
+              <a:rPr sz="1200" b="0">
                 <a:solidFill>
                   <a:srgbClr val="141B26"/>
                 </a:solidFill>
@@ -7947,7 +8912,7 @@
               <a:buChar char="•"/>
             </a:pPr>
             <a:r>
-              <a:rPr sz="950" b="0">
+              <a:rPr sz="1200" b="0">
                 <a:solidFill>
                   <a:srgbClr val="141B26"/>
                 </a:solidFill>
@@ -7964,7 +8929,7 @@
               <a:buChar char="•"/>
             </a:pPr>
             <a:r>
-              <a:rPr sz="950" b="0">
+              <a:rPr sz="1200" b="0">
                 <a:solidFill>
                   <a:srgbClr val="141B26"/>
                 </a:solidFill>
@@ -7981,7 +8946,7 @@
               <a:buChar char="•"/>
             </a:pPr>
             <a:r>
-              <a:rPr sz="950" b="0">
+              <a:rPr sz="1200" b="0">
                 <a:solidFill>
                   <a:srgbClr val="141B26"/>
                 </a:solidFill>
@@ -7998,7 +8963,7 @@
               <a:buChar char="•"/>
             </a:pPr>
             <a:r>
-              <a:rPr sz="950" b="0">
+              <a:rPr sz="1200" b="0">
                 <a:solidFill>
                   <a:srgbClr val="141B26"/>
                 </a:solidFill>
@@ -8015,7 +8980,7 @@
               <a:buChar char="•"/>
             </a:pPr>
             <a:r>
-              <a:rPr sz="950" b="0">
+              <a:rPr sz="1200" b="0">
                 <a:solidFill>
                   <a:srgbClr val="141B26"/>
                 </a:solidFill>
@@ -8092,7 +9057,7 @@
         </p:spPr>
         <p:txBody>
           <a:bodyPr wrap="square">
-            <a:spAutoFit/>
+            <a:normAutofit/>
           </a:bodyPr>
           <a:lstStyle/>
           <a:p>
@@ -8102,7 +9067,7 @@
               </a:spcAft>
             </a:pPr>
             <a:r>
-              <a:rPr sz="1050" b="1">
+              <a:rPr sz="1800" b="1">
                 <a:solidFill>
                   <a:srgbClr val="0E7C5A"/>
                 </a:solidFill>
@@ -8119,7 +9084,7 @@
               <a:buChar char="•"/>
             </a:pPr>
             <a:r>
-              <a:rPr sz="950" b="0">
+              <a:rPr sz="1200" b="0">
                 <a:solidFill>
                   <a:srgbClr val="141B26"/>
                 </a:solidFill>
@@ -8136,7 +9101,7 @@
               <a:buChar char="•"/>
             </a:pPr>
             <a:r>
-              <a:rPr sz="950" b="0">
+              <a:rPr sz="1200" b="0">
                 <a:solidFill>
                   <a:srgbClr val="141B26"/>
                 </a:solidFill>
@@ -8153,7 +9118,7 @@
               <a:buChar char="•"/>
             </a:pPr>
             <a:r>
-              <a:rPr sz="950" b="0">
+              <a:rPr sz="1200" b="0">
                 <a:solidFill>
                   <a:srgbClr val="141B26"/>
                 </a:solidFill>
@@ -8170,7 +9135,7 @@
               <a:buChar char="•"/>
             </a:pPr>
             <a:r>
-              <a:rPr sz="950" b="0">
+              <a:rPr sz="1200" b="0">
                 <a:solidFill>
                   <a:srgbClr val="141B26"/>
                 </a:solidFill>
@@ -8199,7 +9164,7 @@
         </p:spPr>
         <p:txBody>
           <a:bodyPr wrap="square">
-            <a:spAutoFit/>
+            <a:normAutofit/>
           </a:bodyPr>
           <a:lstStyle/>
           <a:p>
@@ -8209,7 +9174,7 @@
               </a:spcAft>
             </a:pPr>
             <a:r>
-              <a:rPr sz="1100" b="1">
+              <a:rPr sz="1800" b="1">
                 <a:solidFill>
                   <a:srgbClr val="1F6FEB"/>
                 </a:solidFill>
@@ -8226,7 +9191,7 @@
               <a:buChar char="•"/>
             </a:pPr>
             <a:r>
-              <a:rPr sz="1000" b="0">
+              <a:rPr sz="1200" b="0">
                 <a:solidFill>
                   <a:srgbClr val="141B26"/>
                 </a:solidFill>
@@ -8243,7 +9208,7 @@
               <a:buChar char="•"/>
             </a:pPr>
             <a:r>
-              <a:rPr sz="1000" b="0">
+              <a:rPr sz="1200" b="0">
                 <a:solidFill>
                   <a:srgbClr val="141B26"/>
                 </a:solidFill>
@@ -8260,7 +9225,7 @@
               <a:buChar char="•"/>
             </a:pPr>
             <a:r>
-              <a:rPr sz="1000" b="0">
+              <a:rPr sz="1200" b="0">
                 <a:solidFill>
                   <a:srgbClr val="141B26"/>
                 </a:solidFill>
@@ -8277,7 +9242,7 @@
               <a:buChar char="•"/>
             </a:pPr>
             <a:r>
-              <a:rPr sz="1000" b="0">
+              <a:rPr sz="1200" b="0">
                 <a:solidFill>
                   <a:srgbClr val="141B26"/>
                 </a:solidFill>
@@ -8542,7 +9507,7 @@
         </p:spPr>
         <p:txBody>
           <a:bodyPr wrap="square">
-            <a:spAutoFit/>
+            <a:normAutofit/>
           </a:bodyPr>
           <a:lstStyle/>
           <a:p>
@@ -8552,7 +9517,7 @@
               </a:spcAft>
             </a:pPr>
             <a:r>
-              <a:rPr sz="1100" b="1">
+              <a:rPr sz="1800" b="1">
                 <a:solidFill>
                   <a:srgbClr val="1F6FEB"/>
                 </a:solidFill>
@@ -8569,7 +9534,7 @@
               <a:buChar char="•"/>
             </a:pPr>
             <a:r>
-              <a:rPr sz="950" b="0">
+              <a:rPr sz="1200" b="0">
                 <a:solidFill>
                   <a:srgbClr val="141B26"/>
                 </a:solidFill>
@@ -8598,7 +9563,7 @@
         </p:spPr>
         <p:txBody>
           <a:bodyPr wrap="square">
-            <a:spAutoFit/>
+            <a:normAutofit/>
           </a:bodyPr>
           <a:lstStyle/>
           <a:p>
@@ -8608,7 +9573,7 @@
               </a:spcAft>
             </a:pPr>
             <a:r>
-              <a:rPr sz="1100" b="1">
+              <a:rPr sz="1800" b="1">
                 <a:solidFill>
                   <a:srgbClr val="1F6FEB"/>
                 </a:solidFill>
@@ -8625,7 +9590,7 @@
               <a:buChar char="•"/>
             </a:pPr>
             <a:r>
-              <a:rPr sz="950" b="0">
+              <a:rPr sz="1200" b="0">
                 <a:solidFill>
                   <a:srgbClr val="141B26"/>
                 </a:solidFill>
@@ -8642,7 +9607,7 @@
               <a:buChar char="•"/>
             </a:pPr>
             <a:r>
-              <a:rPr sz="950" b="0">
+              <a:rPr sz="1200" b="0">
                 <a:solidFill>
                   <a:srgbClr val="141B26"/>
                 </a:solidFill>
@@ -8659,7 +9624,7 @@
               <a:buChar char="•"/>
             </a:pPr>
             <a:r>
-              <a:rPr sz="950" b="0">
+              <a:rPr sz="1200" b="0">
                 <a:solidFill>
                   <a:srgbClr val="141B26"/>
                 </a:solidFill>
@@ -8688,7 +9653,7 @@
         </p:spPr>
         <p:txBody>
           <a:bodyPr wrap="square">
-            <a:spAutoFit/>
+            <a:normAutofit/>
           </a:bodyPr>
           <a:lstStyle/>
           <a:p>
@@ -8698,7 +9663,7 @@
               </a:spcAft>
             </a:pPr>
             <a:r>
-              <a:rPr sz="1100" b="1">
+              <a:rPr sz="1800" b="1">
                 <a:solidFill>
                   <a:srgbClr val="1F6FEB"/>
                 </a:solidFill>
@@ -8715,7 +9680,7 @@
               <a:buChar char="•"/>
             </a:pPr>
             <a:r>
-              <a:rPr sz="950" b="0">
+              <a:rPr sz="1200" b="0">
                 <a:solidFill>
                   <a:srgbClr val="141B26"/>
                 </a:solidFill>
@@ -8732,7 +9697,7 @@
               <a:buChar char="•"/>
             </a:pPr>
             <a:r>
-              <a:rPr sz="950" b="0">
+              <a:rPr sz="1200" b="0">
                 <a:solidFill>
                   <a:srgbClr val="141B26"/>
                 </a:solidFill>
@@ -8749,7 +9714,7 @@
               <a:buChar char="•"/>
             </a:pPr>
             <a:r>
-              <a:rPr sz="950" b="0">
+              <a:rPr sz="1200" b="0">
                 <a:solidFill>
                   <a:srgbClr val="141B26"/>
                 </a:solidFill>
@@ -8766,7 +9731,7 @@
               <a:buChar char="•"/>
             </a:pPr>
             <a:r>
-              <a:rPr sz="950" b="0">
+              <a:rPr sz="1200" b="0">
                 <a:solidFill>
                   <a:srgbClr val="141B26"/>
                 </a:solidFill>
@@ -8783,7 +9748,7 @@
               <a:buChar char="•"/>
             </a:pPr>
             <a:r>
-              <a:rPr sz="950" b="0">
+              <a:rPr sz="1200" b="0">
                 <a:solidFill>
                   <a:srgbClr val="141B26"/>
                 </a:solidFill>
@@ -8812,7 +9777,7 @@
         </p:spPr>
         <p:txBody>
           <a:bodyPr wrap="square">
-            <a:spAutoFit/>
+            <a:normAutofit/>
           </a:bodyPr>
           <a:lstStyle/>
           <a:p>
@@ -8822,7 +9787,7 @@
               </a:spcAft>
             </a:pPr>
             <a:r>
-              <a:rPr sz="1100" b="1">
+              <a:rPr sz="1800" b="1">
                 <a:solidFill>
                   <a:srgbClr val="1F6FEB"/>
                 </a:solidFill>
@@ -8839,7 +9804,7 @@
               <a:buChar char="•"/>
             </a:pPr>
             <a:r>
-              <a:rPr sz="950" b="0">
+              <a:rPr sz="1200" b="0">
                 <a:solidFill>
                   <a:srgbClr val="141B26"/>
                 </a:solidFill>
@@ -8856,7 +9821,7 @@
               <a:buChar char="•"/>
             </a:pPr>
             <a:r>
-              <a:rPr sz="950" b="0">
+              <a:rPr sz="1200" b="0">
                 <a:solidFill>
                   <a:srgbClr val="141B26"/>
                 </a:solidFill>
@@ -8873,7 +9838,7 @@
               <a:buChar char="•"/>
             </a:pPr>
             <a:r>
-              <a:rPr sz="950" b="0">
+              <a:rPr sz="1200" b="0">
                 <a:solidFill>
                   <a:srgbClr val="141B26"/>
                 </a:solidFill>
@@ -8890,7 +9855,7 @@
               <a:buChar char="•"/>
             </a:pPr>
             <a:r>
-              <a:rPr sz="950" b="0">
+              <a:rPr sz="1200" b="0">
                 <a:solidFill>
                   <a:srgbClr val="141B26"/>
                 </a:solidFill>
@@ -8907,7 +9872,7 @@
               <a:buChar char="•"/>
             </a:pPr>
             <a:r>
-              <a:rPr sz="950" b="0">
+              <a:rPr sz="1200" b="0">
                 <a:solidFill>
                   <a:srgbClr val="141B26"/>
                 </a:solidFill>
@@ -8936,7 +9901,7 @@
         </p:spPr>
         <p:txBody>
           <a:bodyPr wrap="square">
-            <a:spAutoFit/>
+            <a:normAutofit/>
           </a:bodyPr>
           <a:lstStyle/>
           <a:p>
@@ -8946,7 +9911,7 @@
               </a:spcAft>
             </a:pPr>
             <a:r>
-              <a:rPr sz="1100" b="1">
+              <a:rPr sz="1800" b="1">
                 <a:solidFill>
                   <a:srgbClr val="1F6FEB"/>
                 </a:solidFill>
@@ -8963,7 +9928,7 @@
               <a:buChar char="•"/>
             </a:pPr>
             <a:r>
-              <a:rPr sz="950" b="0">
+              <a:rPr sz="1200" b="0">
                 <a:solidFill>
                   <a:srgbClr val="141B26"/>
                 </a:solidFill>
@@ -8980,7 +9945,7 @@
               <a:buChar char="•"/>
             </a:pPr>
             <a:r>
-              <a:rPr sz="950" b="0">
+              <a:rPr sz="1200" b="0">
                 <a:solidFill>
                   <a:srgbClr val="141B26"/>
                 </a:solidFill>
@@ -8997,7 +9962,7 @@
               <a:buChar char="•"/>
             </a:pPr>
             <a:r>
-              <a:rPr sz="950" b="0">
+              <a:rPr sz="1200" b="0">
                 <a:solidFill>
                   <a:srgbClr val="141B26"/>
                 </a:solidFill>
@@ -9014,7 +9979,7 @@
               <a:buChar char="•"/>
             </a:pPr>
             <a:r>
-              <a:rPr sz="950" b="0">
+              <a:rPr sz="1200" b="0">
                 <a:solidFill>
                   <a:srgbClr val="141B26"/>
                 </a:solidFill>
@@ -9031,7 +9996,7 @@
               <a:buChar char="•"/>
             </a:pPr>
             <a:r>
-              <a:rPr sz="950" b="0">
+              <a:rPr sz="1200" b="0">
                 <a:solidFill>
                   <a:srgbClr val="141B26"/>
                 </a:solidFill>
@@ -9108,7 +10073,7 @@
         </p:spPr>
         <p:txBody>
           <a:bodyPr wrap="square">
-            <a:spAutoFit/>
+            <a:normAutofit/>
           </a:bodyPr>
           <a:lstStyle/>
           <a:p>
@@ -9118,7 +10083,7 @@
               </a:spcAft>
             </a:pPr>
             <a:r>
-              <a:rPr sz="1050" b="1">
+              <a:rPr sz="1800" b="1">
                 <a:solidFill>
                   <a:srgbClr val="0E7C5A"/>
                 </a:solidFill>
@@ -9135,7 +10100,7 @@
               <a:buChar char="•"/>
             </a:pPr>
             <a:r>
-              <a:rPr sz="950" b="0">
+              <a:rPr sz="1200" b="0">
                 <a:solidFill>
                   <a:srgbClr val="141B26"/>
                 </a:solidFill>
@@ -9152,7 +10117,7 @@
               <a:buChar char="•"/>
             </a:pPr>
             <a:r>
-              <a:rPr sz="950" b="0">
+              <a:rPr sz="1200" b="0">
                 <a:solidFill>
                   <a:srgbClr val="141B26"/>
                 </a:solidFill>
@@ -9169,7 +10134,7 @@
               <a:buChar char="•"/>
             </a:pPr>
             <a:r>
-              <a:rPr sz="950" b="0">
+              <a:rPr sz="1200" b="0">
                 <a:solidFill>
                   <a:srgbClr val="141B26"/>
                 </a:solidFill>
@@ -9198,7 +10163,7 @@
         </p:spPr>
         <p:txBody>
           <a:bodyPr wrap="square">
-            <a:spAutoFit/>
+            <a:normAutofit/>
           </a:bodyPr>
           <a:lstStyle/>
           <a:p>
@@ -9208,7 +10173,7 @@
               </a:spcAft>
             </a:pPr>
             <a:r>
-              <a:rPr sz="1100" b="1">
+              <a:rPr sz="1800" b="1">
                 <a:solidFill>
                   <a:srgbClr val="1F6FEB"/>
                 </a:solidFill>
@@ -9225,7 +10190,7 @@
               <a:buChar char="•"/>
             </a:pPr>
             <a:r>
-              <a:rPr sz="1000" b="0">
+              <a:rPr sz="1200" b="0">
                 <a:solidFill>
                   <a:srgbClr val="141B26"/>
                 </a:solidFill>
@@ -9242,7 +10207,7 @@
               <a:buChar char="•"/>
             </a:pPr>
             <a:r>
-              <a:rPr sz="1000" b="0">
+              <a:rPr sz="1200" b="0">
                 <a:solidFill>
                   <a:srgbClr val="141B26"/>
                 </a:solidFill>
@@ -9259,7 +10224,7 @@
               <a:buChar char="•"/>
             </a:pPr>
             <a:r>
-              <a:rPr sz="1000" b="0">
+              <a:rPr sz="1200" b="0">
                 <a:solidFill>
                   <a:srgbClr val="141B26"/>
                 </a:solidFill>
@@ -9276,7 +10241,7 @@
               <a:buChar char="•"/>
             </a:pPr>
             <a:r>
-              <a:rPr sz="1000" b="0">
+              <a:rPr sz="1200" b="0">
                 <a:solidFill>
                   <a:srgbClr val="141B26"/>
                 </a:solidFill>
@@ -9383,7 +10348,7 @@
                 </a:solidFill>
                 <a:latin typeface="Calibri"/>
               </a:rPr>
-              <a:t>Juan Pablo Hidalgo Figueroa</a:t>
+              <a:t>Juan Carlos Ramírez Escobar</a:t>
             </a:r>
           </a:p>
           <a:p>
@@ -9399,7 +10364,7 @@
                 </a:solidFill>
                 <a:latin typeface="Calibri"/>
               </a:rPr>
-              <a:t>3D Industrial Designer — BIM / Piping</a:t>
+              <a:t>Head of Maintenance &amp; Reliability</a:t>
             </a:r>
           </a:p>
         </p:txBody>
@@ -9470,7 +10435,7 @@
                 </a:solidFill>
                 <a:latin typeface="Calibri"/>
               </a:rPr>
-              <a:t>Residence: Concepción, Chile</a:t>
+              <a:t>Residence: Chile</a:t>
             </a:r>
           </a:p>
         </p:txBody>
@@ -9541,7 +10506,7 @@
         </p:spPr>
         <p:txBody>
           <a:bodyPr wrap="square">
-            <a:spAutoFit/>
+            <a:normAutofit/>
           </a:bodyPr>
           <a:lstStyle/>
           <a:p>
@@ -9551,7 +10516,7 @@
               </a:spcAft>
             </a:pPr>
             <a:r>
-              <a:rPr sz="1100" b="1">
+              <a:rPr sz="1800" b="1">
                 <a:solidFill>
                   <a:srgbClr val="1F6FEB"/>
                 </a:solidFill>
@@ -9568,13 +10533,13 @@
               <a:buChar char="•"/>
             </a:pPr>
             <a:r>
-              <a:rPr sz="950" b="0">
-                <a:solidFill>
-                  <a:srgbClr val="141B26"/>
-                </a:solidFill>
-                <a:latin typeface="Calibri"/>
-              </a:rPr>
-              <a:t>Spanish</a:t>
+              <a:rPr sz="1200" b="0">
+                <a:solidFill>
+                  <a:srgbClr val="141B26"/>
+                </a:solidFill>
+                <a:latin typeface="Calibri"/>
+              </a:rPr>
+              <a:t>Spanish · English</a:t>
             </a:r>
           </a:p>
         </p:txBody>
@@ -9597,7 +10562,7 @@
         </p:spPr>
         <p:txBody>
           <a:bodyPr wrap="square">
-            <a:spAutoFit/>
+            <a:normAutofit/>
           </a:bodyPr>
           <a:lstStyle/>
           <a:p>
@@ -9607,7 +10572,7 @@
               </a:spcAft>
             </a:pPr>
             <a:r>
-              <a:rPr sz="1100" b="1">
+              <a:rPr sz="1800" b="1">
                 <a:solidFill>
                   <a:srgbClr val="1F6FEB"/>
                 </a:solidFill>
@@ -9624,13 +10589,64 @@
               <a:buChar char="•"/>
             </a:pPr>
             <a:r>
-              <a:rPr sz="950" b="0">
-                <a:solidFill>
-                  <a:srgbClr val="141B26"/>
-                </a:solidFill>
-                <a:latin typeface="Calibri"/>
-              </a:rPr>
-              <a:t>2019 · Industrial Designer — DUOC UC, Concepción</a:t>
+              <a:rPr sz="1200" b="0">
+                <a:solidFill>
+                  <a:srgbClr val="141B26"/>
+                </a:solidFill>
+                <a:latin typeface="Calibri"/>
+              </a:rPr>
+              <a:t>2001 · Industrial Civil Engineer (Systems) — U. de Antofagasta</a:t>
+            </a:r>
+          </a:p>
+          <a:p>
+            <a:pPr>
+              <a:spcAft>
+                <a:spcPts val="200"/>
+              </a:spcAft>
+              <a:buChar char="•"/>
+            </a:pPr>
+            <a:r>
+              <a:rPr sz="1200" b="0">
+                <a:solidFill>
+                  <a:srgbClr val="141B26"/>
+                </a:solidFill>
+                <a:latin typeface="Calibri"/>
+              </a:rPr>
+              <a:t>1996 · Diploma in Industrial Engineering — U. de Antofagasta</a:t>
+            </a:r>
+          </a:p>
+          <a:p>
+            <a:pPr>
+              <a:spcAft>
+                <a:spcPts val="200"/>
+              </a:spcAft>
+              <a:buChar char="•"/>
+            </a:pPr>
+            <a:r>
+              <a:rPr sz="1200" b="0">
+                <a:solidFill>
+                  <a:srgbClr val="141B26"/>
+                </a:solidFill>
+                <a:latin typeface="Calibri"/>
+              </a:rPr>
+              <a:t>1987 · Electrical Execution Engineer — Pontifical Catholic U. of Valparaíso (PUCV)</a:t>
+            </a:r>
+          </a:p>
+          <a:p>
+            <a:pPr>
+              <a:spcAft>
+                <a:spcPts val="200"/>
+              </a:spcAft>
+              <a:buChar char="•"/>
+            </a:pPr>
+            <a:r>
+              <a:rPr sz="1200" b="0">
+                <a:solidFill>
+                  <a:srgbClr val="141B26"/>
+                </a:solidFill>
+                <a:latin typeface="Calibri"/>
+              </a:rPr>
+              <a:t>Electronic Execution Engineer (PUCV) · Electrical &amp; Electronics Technician — Valparaíso</a:t>
             </a:r>
           </a:p>
         </p:txBody>
@@ -9653,7 +10669,7 @@
         </p:spPr>
         <p:txBody>
           <a:bodyPr wrap="square">
-            <a:spAutoFit/>
+            <a:normAutofit/>
           </a:bodyPr>
           <a:lstStyle/>
           <a:p>
@@ -9663,7 +10679,7 @@
               </a:spcAft>
             </a:pPr>
             <a:r>
-              <a:rPr sz="1100" b="1">
+              <a:rPr sz="1800" b="1">
                 <a:solidFill>
                   <a:srgbClr val="1F6FEB"/>
                 </a:solidFill>
@@ -9680,64 +10696,81 @@
               <a:buChar char="•"/>
             </a:pPr>
             <a:r>
-              <a:rPr sz="950" b="0">
-                <a:solidFill>
-                  <a:srgbClr val="141B26"/>
-                </a:solidFill>
-                <a:latin typeface="Calibri"/>
-              </a:rPr>
-              <a:t>5 years of industrial design for process plants</a:t>
-            </a:r>
-          </a:p>
-          <a:p>
-            <a:pPr>
-              <a:spcAft>
-                <a:spcPts val="200"/>
-              </a:spcAft>
-              <a:buChar char="•"/>
-            </a:pPr>
-            <a:r>
-              <a:rPr sz="950" b="0">
-                <a:solidFill>
-                  <a:srgbClr val="141B26"/>
-                </a:solidFill>
-                <a:latin typeface="Calibri"/>
-              </a:rPr>
-              <a:t>Steelmaking: CAP Acero — Huachipato</a:t>
-            </a:r>
-          </a:p>
-          <a:p>
-            <a:pPr>
-              <a:spcAft>
-                <a:spcPts val="200"/>
-              </a:spcAft>
-              <a:buChar char="•"/>
-            </a:pPr>
-            <a:r>
-              <a:rPr sz="950" b="0">
-                <a:solidFill>
-                  <a:srgbClr val="141B26"/>
-                </a:solidFill>
-                <a:latin typeface="Calibri"/>
-              </a:rPr>
-              <a:t>Industrial engineering and piping</a:t>
-            </a:r>
-          </a:p>
-          <a:p>
-            <a:pPr>
-              <a:spcAft>
-                <a:spcPts val="200"/>
-              </a:spcAft>
-              <a:buChar char="•"/>
-            </a:pPr>
-            <a:r>
-              <a:rPr sz="950" b="0">
-                <a:solidFill>
-                  <a:srgbClr val="141B26"/>
-                </a:solidFill>
-                <a:latin typeface="Calibri"/>
-              </a:rPr>
-              <a:t>Reality capture / scan-to-BIM on brownfield plants</a:t>
+              <a:rPr sz="1200" b="0">
+                <a:solidFill>
+                  <a:srgbClr val="141B26"/>
+                </a:solidFill>
+                <a:latin typeface="Calibri"/>
+              </a:rPr>
+              <a:t>35+ years in large-scale copper mining in Chile</a:t>
+            </a:r>
+          </a:p>
+          <a:p>
+            <a:pPr>
+              <a:spcAft>
+                <a:spcPts val="200"/>
+              </a:spcAft>
+              <a:buChar char="•"/>
+            </a:pPr>
+            <a:r>
+              <a:rPr sz="1200" b="0">
+                <a:solidFill>
+                  <a:srgbClr val="141B26"/>
+                </a:solidFill>
+                <a:latin typeface="Calibri"/>
+              </a:rPr>
+              <a:t>Minera Escondida (BHP) · Teck (Quebrada Blanca, Carmen de Andacollo) · Kinross Maricunga</a:t>
+            </a:r>
+          </a:p>
+          <a:p>
+            <a:pPr>
+              <a:spcAft>
+                <a:spcPts val="200"/>
+              </a:spcAft>
+              <a:buChar char="•"/>
+            </a:pPr>
+            <a:r>
+              <a:rPr sz="1200" b="0">
+                <a:solidFill>
+                  <a:srgbClr val="141B26"/>
+                </a:solidFill>
+                <a:latin typeface="Calibri"/>
+              </a:rPr>
+              <a:t>Collahuasi · Lumina Copper Caserones · Codelco Norte / Chuquicamata · Anglo American Los Bronces</a:t>
+            </a:r>
+          </a:p>
+          <a:p>
+            <a:pPr>
+              <a:spcAft>
+                <a:spcPts val="200"/>
+              </a:spcAft>
+              <a:buChar char="•"/>
+            </a:pPr>
+            <a:r>
+              <a:rPr sz="1200" b="0">
+                <a:solidFill>
+                  <a:srgbClr val="141B26"/>
+                </a:solidFill>
+                <a:latin typeface="Calibri"/>
+              </a:rPr>
+              <a:t>Concentrator plants, SX-EW, hydrometallurgy, mine and desalination plants</a:t>
+            </a:r>
+          </a:p>
+          <a:p>
+            <a:pPr>
+              <a:spcAft>
+                <a:spcPts val="200"/>
+              </a:spcAft>
+              <a:buChar char="•"/>
+            </a:pPr>
+            <a:r>
+              <a:rPr sz="1200" b="0">
+                <a:solidFill>
+                  <a:srgbClr val="141B26"/>
+                </a:solidFill>
+                <a:latin typeface="Calibri"/>
+              </a:rPr>
+              <a:t>Asset-integrity and operational-reliability consulting</a:t>
             </a:r>
           </a:p>
         </p:txBody>
@@ -9760,7 +10793,7 @@
         </p:spPr>
         <p:txBody>
           <a:bodyPr wrap="square">
-            <a:spAutoFit/>
+            <a:normAutofit/>
           </a:bodyPr>
           <a:lstStyle/>
           <a:p>
@@ -9770,7 +10803,7 @@
               </a:spcAft>
             </a:pPr>
             <a:r>
-              <a:rPr sz="1100" b="1">
+              <a:rPr sz="1800" b="1">
                 <a:solidFill>
                   <a:srgbClr val="1F6FEB"/>
                 </a:solidFill>
@@ -9787,47 +10820,115 @@
               <a:buChar char="•"/>
             </a:pPr>
             <a:r>
-              <a:rPr sz="950" b="0">
-                <a:solidFill>
-                  <a:srgbClr val="141B26"/>
-                </a:solidFill>
-                <a:latin typeface="Calibri"/>
-              </a:rPr>
-              <a:t>2026 · BIM Manager — Ingemecanic</a:t>
-            </a:r>
-          </a:p>
-          <a:p>
-            <a:pPr>
-              <a:spcAft>
-                <a:spcPts val="200"/>
-              </a:spcAft>
-              <a:buChar char="•"/>
-            </a:pPr>
-            <a:r>
-              <a:rPr sz="950" b="0">
-                <a:solidFill>
-                  <a:srgbClr val="141B26"/>
-                </a:solidFill>
-                <a:latin typeface="Calibri"/>
-              </a:rPr>
-              <a:t>SCL Ingeniería — piping designer</a:t>
-            </a:r>
-          </a:p>
-          <a:p>
-            <a:pPr>
-              <a:spcAft>
-                <a:spcPts val="200"/>
-              </a:spcAft>
-              <a:buChar char="•"/>
-            </a:pPr>
-            <a:r>
-              <a:rPr sz="950" b="0">
-                <a:solidFill>
-                  <a:srgbClr val="141B26"/>
-                </a:solidFill>
-                <a:latin typeface="Calibri"/>
-              </a:rPr>
-              <a:t>2020–2023 · CAP Acero, Huachipato steelworks</a:t>
+              <a:rPr sz="1200" b="0">
+                <a:solidFill>
+                  <a:srgbClr val="141B26"/>
+                </a:solidFill>
+                <a:latin typeface="Calibri"/>
+              </a:rPr>
+              <a:t>2026–today · Consultant / Auditor / Asset Management Lead — Boston Consulting Group (BCG)</a:t>
+            </a:r>
+          </a:p>
+          <a:p>
+            <a:pPr>
+              <a:spcAft>
+                <a:spcPts val="200"/>
+              </a:spcAft>
+              <a:buChar char="•"/>
+            </a:pPr>
+            <a:r>
+              <a:rPr sz="1200" b="0">
+                <a:solidFill>
+                  <a:srgbClr val="141B26"/>
+                </a:solidFill>
+                <a:latin typeface="Calibri"/>
+              </a:rPr>
+              <a:t>2021–today · Consultant / Auditor / Asset Management Lead — MaxAsset Dunamar</a:t>
+            </a:r>
+          </a:p>
+          <a:p>
+            <a:pPr>
+              <a:spcAft>
+                <a:spcPts val="200"/>
+              </a:spcAft>
+              <a:buChar char="•"/>
+            </a:pPr>
+            <a:r>
+              <a:rPr sz="1200" b="0">
+                <a:solidFill>
+                  <a:srgbClr val="141B26"/>
+                </a:solidFill>
+                <a:latin typeface="Calibri"/>
+              </a:rPr>
+              <a:t>2022–2025 · Expert Asset-Integrity Advisory (330 critical assets, FMECA / BowTie) — Torque Eng., Minera Escondida</a:t>
+            </a:r>
+          </a:p>
+          <a:p>
+            <a:pPr>
+              <a:spcAft>
+                <a:spcPts val="200"/>
+              </a:spcAft>
+              <a:buChar char="•"/>
+            </a:pPr>
+            <a:r>
+              <a:rPr sz="1200" b="0">
+                <a:solidFill>
+                  <a:srgbClr val="141B26"/>
+                </a:solidFill>
+                <a:latin typeface="Calibri"/>
+              </a:rPr>
+              <a:t>2018–2019 · Maintenance &amp; Asset Management Manager — Lumina Copper Caserones</a:t>
+            </a:r>
+          </a:p>
+          <a:p>
+            <a:pPr>
+              <a:spcAft>
+                <a:spcPts val="200"/>
+              </a:spcAft>
+              <a:buChar char="•"/>
+            </a:pPr>
+            <a:r>
+              <a:rPr sz="1200" b="0">
+                <a:solidFill>
+                  <a:srgbClr val="141B26"/>
+                </a:solidFill>
+                <a:latin typeface="Calibri"/>
+              </a:rPr>
+              <a:t>2012–2018 · Maintenance &amp; Mine/Plant Operations Superintendent (SX-EW) — Teck Quebrada Blanca</a:t>
+            </a:r>
+          </a:p>
+          <a:p>
+            <a:pPr>
+              <a:spcAft>
+                <a:spcPts val="200"/>
+              </a:spcAft>
+              <a:buChar char="•"/>
+            </a:pPr>
+            <a:r>
+              <a:rPr sz="1200" b="0">
+                <a:solidFill>
+                  <a:srgbClr val="141B26"/>
+                </a:solidFill>
+                <a:latin typeface="Calibri"/>
+              </a:rPr>
+              <a:t>2008–2011 · Maintenance Superintendent — Kinross Maricunga</a:t>
+            </a:r>
+          </a:p>
+          <a:p>
+            <a:pPr>
+              <a:spcAft>
+                <a:spcPts val="200"/>
+              </a:spcAft>
+              <a:buChar char="•"/>
+            </a:pPr>
+            <a:r>
+              <a:rPr sz="1200" b="0">
+                <a:solidFill>
+                  <a:srgbClr val="141B26"/>
+                </a:solidFill>
+                <a:latin typeface="Calibri"/>
+              </a:rPr>
+              <a:t>1989–2006 · Project Lead &amp; Reliability Engineer — Minera Escondida (BHP)</a:t>
             </a:r>
           </a:p>
         </p:txBody>
@@ -9850,7 +10951,7 @@
         </p:spPr>
         <p:txBody>
           <a:bodyPr wrap="square">
-            <a:spAutoFit/>
+            <a:normAutofit/>
           </a:bodyPr>
           <a:lstStyle/>
           <a:p>
@@ -9860,7 +10961,7 @@
               </a:spcAft>
             </a:pPr>
             <a:r>
-              <a:rPr sz="1100" b="1">
+              <a:rPr sz="1800" b="1">
                 <a:solidFill>
                   <a:srgbClr val="1F6FEB"/>
                 </a:solidFill>
@@ -9877,81 +10978,98 @@
               <a:buChar char="•"/>
             </a:pPr>
             <a:r>
-              <a:rPr sz="950" b="0">
-                <a:solidFill>
-                  <a:srgbClr val="141B26"/>
-                </a:solidFill>
-                <a:latin typeface="Calibri"/>
-              </a:rPr>
-              <a:t>Industrial piping: 3D modeling, fabrication drawings, isometrics, MTO</a:t>
-            </a:r>
-          </a:p>
-          <a:p>
-            <a:pPr>
-              <a:spcAft>
-                <a:spcPts val="200"/>
-              </a:spcAft>
-              <a:buChar char="•"/>
-            </a:pPr>
-            <a:r>
-              <a:rPr sz="950" b="0">
-                <a:solidFill>
-                  <a:srgbClr val="141B26"/>
-                </a:solidFill>
-                <a:latin typeface="Calibri"/>
-              </a:rPr>
-              <a:t>BIM management under ISO 19650: CDE (Autodesk ACC), BEP / EIR</a:t>
-            </a:r>
-          </a:p>
-          <a:p>
-            <a:pPr>
-              <a:spcAft>
-                <a:spcPts val="200"/>
-              </a:spcAft>
-              <a:buChar char="•"/>
-            </a:pPr>
-            <a:r>
-              <a:rPr sz="950" b="0">
-                <a:solidFill>
-                  <a:srgbClr val="141B26"/>
-                </a:solidFill>
-                <a:latin typeface="Calibri"/>
-              </a:rPr>
-              <a:t>Revit · AutoCAD Plant 3D · Advance Steel · Tekla Structures · Navisworks Manage</a:t>
-            </a:r>
-          </a:p>
-          <a:p>
-            <a:pPr>
-              <a:spcAft>
-                <a:spcPts val="200"/>
-              </a:spcAft>
-              <a:buChar char="•"/>
-            </a:pPr>
-            <a:r>
-              <a:rPr sz="950" b="0">
-                <a:solidFill>
-                  <a:srgbClr val="141B26"/>
-                </a:solidFill>
-                <a:latin typeface="Calibri"/>
-              </a:rPr>
-              <a:t>Leica RTC 360 laser scanning · FARO SCENE · Leica Cyclone · ReCap Pro</a:t>
-            </a:r>
-          </a:p>
-          <a:p>
-            <a:pPr>
-              <a:spcAft>
-                <a:spcPts val="200"/>
-              </a:spcAft>
-              <a:buChar char="•"/>
-            </a:pPr>
-            <a:r>
-              <a:rPr sz="950" b="0">
-                <a:solidFill>
-                  <a:srgbClr val="141B26"/>
-                </a:solidFill>
-                <a:latin typeface="Calibri"/>
-              </a:rPr>
-              <a:t>Coordination and clash detection</a:t>
+              <a:rPr sz="1200" b="0">
+                <a:solidFill>
+                  <a:srgbClr val="141B26"/>
+                </a:solidFill>
+                <a:latin typeface="Calibri"/>
+              </a:rPr>
+              <a:t>Reliability &amp; Maintainability Engineering (RCM, RCM2, RAM analysis)</a:t>
+            </a:r>
+          </a:p>
+          <a:p>
+            <a:pPr>
+              <a:spcAft>
+                <a:spcPts val="200"/>
+              </a:spcAft>
+              <a:buChar char="•"/>
+            </a:pPr>
+            <a:r>
+              <a:rPr sz="1200" b="0">
+                <a:solidFill>
+                  <a:srgbClr val="141B26"/>
+                </a:solidFill>
+                <a:latin typeface="Calibri"/>
+              </a:rPr>
+              <a:t>Asset integrity: FMECA · BowTie · RBI · ICAM · ISO 14224</a:t>
+            </a:r>
+          </a:p>
+          <a:p>
+            <a:pPr>
+              <a:spcAft>
+                <a:spcPts val="200"/>
+              </a:spcAft>
+              <a:buChar char="•"/>
+            </a:pPr>
+            <a:r>
+              <a:rPr sz="1200" b="0">
+                <a:solidFill>
+                  <a:srgbClr val="141B26"/>
+                </a:solidFill>
+                <a:latin typeface="Calibri"/>
+              </a:rPr>
+              <a:t>HAZOP / FMEA / RCM facilitator · root-cause analysis (RCA)</a:t>
+            </a:r>
+          </a:p>
+          <a:p>
+            <a:pPr>
+              <a:spcAft>
+                <a:spcPts val="200"/>
+              </a:spcAft>
+              <a:buChar char="•"/>
+            </a:pPr>
+            <a:r>
+              <a:rPr sz="1200" b="0">
+                <a:solidFill>
+                  <a:srgbClr val="141B26"/>
+                </a:solidFill>
+                <a:latin typeface="Calibri"/>
+              </a:rPr>
+              <a:t>Asset management and maintenance master plans (SAP, MIMS)</a:t>
+            </a:r>
+          </a:p>
+          <a:p>
+            <a:pPr>
+              <a:spcAft>
+                <a:spcPts val="200"/>
+              </a:spcAft>
+              <a:buChar char="•"/>
+            </a:pPr>
+            <a:r>
+              <a:rPr sz="1200" b="0">
+                <a:solidFill>
+                  <a:srgbClr val="141B26"/>
+                </a:solidFill>
+                <a:latin typeface="Calibri"/>
+              </a:rPr>
+              <a:t>Six Sigma (Operational Excellence) · continuous improvement · team leadership</a:t>
+            </a:r>
+          </a:p>
+          <a:p>
+            <a:pPr>
+              <a:spcAft>
+                <a:spcPts val="200"/>
+              </a:spcAft>
+              <a:buChar char="•"/>
+            </a:pPr>
+            <a:r>
+              <a:rPr sz="1200" b="0">
+                <a:solidFill>
+                  <a:srgbClr val="141B26"/>
+                </a:solidFill>
+                <a:latin typeface="Calibri"/>
+              </a:rPr>
+              <a:t>Critical-asset restitution (MCR) and engineering dossiers</a:t>
             </a:r>
           </a:p>
         </p:txBody>
@@ -10022,7 +11140,7 @@
         </p:spPr>
         <p:txBody>
           <a:bodyPr wrap="square">
-            <a:spAutoFit/>
+            <a:normAutofit/>
           </a:bodyPr>
           <a:lstStyle/>
           <a:p>
@@ -10032,7 +11150,7 @@
               </a:spcAft>
             </a:pPr>
             <a:r>
-              <a:rPr sz="1050" b="1">
+              <a:rPr sz="1800" b="1">
                 <a:solidFill>
                   <a:srgbClr val="0E7C5A"/>
                 </a:solidFill>
@@ -10049,47 +11167,64 @@
               <a:buChar char="•"/>
             </a:pPr>
             <a:r>
-              <a:rPr sz="950" b="0">
-                <a:solidFill>
-                  <a:srgbClr val="141B26"/>
-                </a:solidFill>
-                <a:latin typeface="Calibri"/>
-              </a:rPr>
-              <a:t>Scan-to-BIM with laser scanning (Leica RTC 360): As-Built of the plant's real condition — the geometric foundation of the digital twin.</a:t>
-            </a:r>
-          </a:p>
-          <a:p>
-            <a:pPr>
-              <a:spcAft>
-                <a:spcPts val="200"/>
-              </a:spcAft>
-              <a:buChar char="•"/>
-            </a:pPr>
-            <a:r>
-              <a:rPr sz="950" b="0">
-                <a:solidFill>
-                  <a:srgbClr val="141B26"/>
-                </a:solidFill>
-                <a:latin typeface="Calibri"/>
-              </a:rPr>
-              <a:t>Isometrics, MTO and clash detection (100% of critical clashes resolved before fabrication): from concept to a constructible package.</a:t>
-            </a:r>
-          </a:p>
-          <a:p>
-            <a:pPr>
-              <a:spcAft>
-                <a:spcPts val="200"/>
-              </a:spcAft>
-              <a:buChar char="•"/>
-            </a:pPr>
-            <a:r>
-              <a:rPr sz="950" b="0">
-                <a:solidFill>
-                  <a:srgbClr val="141B26"/>
-                </a:solidFill>
-                <a:latin typeface="Calibri"/>
-              </a:rPr>
-              <a:t>Available to travel to Oman: enables on-site scanning campaigns.</a:t>
+              <a:rPr sz="1200" b="0">
+                <a:solidFill>
+                  <a:srgbClr val="141B26"/>
+                </a:solidFill>
+                <a:latin typeface="Calibri"/>
+              </a:rPr>
+              <a:t>Author of the project's technical due-diligence question bank: structures the review material → product → variables → contaminants and positions the team as a strategic partner from the engineering stage.</a:t>
+            </a:r>
+          </a:p>
+          <a:p>
+            <a:pPr>
+              <a:spcAft>
+                <a:spcPts val="200"/>
+              </a:spcAft>
+              <a:buChar char="•"/>
+            </a:pPr>
+            <a:r>
+              <a:rPr sz="1200" b="0">
+                <a:solidFill>
+                  <a:srgbClr val="141B26"/>
+                </a:solidFill>
+                <a:latin typeface="Calibri"/>
+              </a:rPr>
+              <a:t>Asset integrity from design: proposes an Asset Integrity Management Plan (AIMP) integrating FMECA, RCM, RBI, RCA, BowTie and ISO 14224 to maximize availability and minimize operational risk.</a:t>
+            </a:r>
+          </a:p>
+          <a:p>
+            <a:pPr>
+              <a:spcAft>
+                <a:spcPts val="200"/>
+              </a:spcAft>
+              <a:buChar char="•"/>
+            </a:pPr>
+            <a:r>
+              <a:rPr sz="1200" b="0">
+                <a:solidFill>
+                  <a:srgbClr val="141B26"/>
+                </a:solidFill>
+                <a:latin typeface="Calibri"/>
+              </a:rPr>
+              <a:t>Process safety (PSM) for a plant handling sulphuric acid and heavy metals: HAZID / HAZOP / LOPA, hazardous-area classification and consequence analysis.</a:t>
+            </a:r>
+          </a:p>
+          <a:p>
+            <a:pPr>
+              <a:spcAft>
+                <a:spcPts val="200"/>
+              </a:spcAft>
+              <a:buChar char="•"/>
+            </a:pPr>
+            <a:r>
+              <a:rPr sz="1200" b="0">
+                <a:solidFill>
+                  <a:srgbClr val="141B26"/>
+                </a:solidFill>
+                <a:latin typeface="Calibri"/>
+              </a:rPr>
+              <a:t>35+ years in large-scale mining (Escondida, Teck, Kinross): maintainability and reliability enter the study from day one.</a:t>
             </a:r>
           </a:p>
         </p:txBody>
@@ -10112,7 +11247,7 @@
         </p:spPr>
         <p:txBody>
           <a:bodyPr wrap="square">
-            <a:spAutoFit/>
+            <a:normAutofit/>
           </a:bodyPr>
           <a:lstStyle/>
           <a:p>
@@ -10122,7 +11257,7 @@
               </a:spcAft>
             </a:pPr>
             <a:r>
-              <a:rPr sz="1100" b="1">
+              <a:rPr sz="1800" b="1">
                 <a:solidFill>
                   <a:srgbClr val="1F6FEB"/>
                 </a:solidFill>
@@ -10139,64 +11274,64 @@
               <a:buChar char="•"/>
             </a:pPr>
             <a:r>
-              <a:rPr sz="1000" b="0">
-                <a:solidFill>
-                  <a:srgbClr val="141B26"/>
-                </a:solidFill>
-                <a:latin typeface="Calibri"/>
-              </a:rPr>
-              <a:t>CDE management that cut information-exchange times by 15%.</a:t>
-            </a:r>
-          </a:p>
-          <a:p>
-            <a:pPr>
-              <a:spcAft>
-                <a:spcPts val="200"/>
-              </a:spcAft>
-              <a:buChar char="•"/>
-            </a:pPr>
-            <a:r>
-              <a:rPr sz="1000" b="0">
-                <a:solidFill>
-                  <a:srgbClr val="141B26"/>
-                </a:solidFill>
-                <a:latin typeface="Calibri"/>
-              </a:rPr>
-              <a:t>100% of critical clashes resolved before fabrication (clash detection).</a:t>
-            </a:r>
-          </a:p>
-          <a:p>
-            <a:pPr>
-              <a:spcAft>
-                <a:spcPts val="200"/>
-              </a:spcAft>
-              <a:buChar char="•"/>
-            </a:pPr>
-            <a:r>
-              <a:rPr sz="1000" b="0">
-                <a:solidFill>
-                  <a:srgbClr val="141B26"/>
-                </a:solidFill>
-                <a:latin typeface="Calibri"/>
-              </a:rPr>
-              <a:t>As-built models from point clouds (scan-to-BIM) for operating plants.</a:t>
-            </a:r>
-          </a:p>
-          <a:p>
-            <a:pPr>
-              <a:spcAft>
-                <a:spcPts val="200"/>
-              </a:spcAft>
-              <a:buChar char="•"/>
-            </a:pPr>
-            <a:r>
-              <a:rPr sz="1000" b="0">
-                <a:solidFill>
-                  <a:srgbClr val="141B26"/>
-                </a:solidFill>
-                <a:latin typeface="Calibri"/>
-              </a:rPr>
-              <a:t>Isometrics and material take-offs for fabrication and erection.</a:t>
+              <a:rPr sz="1200" b="0">
+                <a:solidFill>
+                  <a:srgbClr val="141B26"/>
+                </a:solidFill>
+                <a:latin typeface="Calibri"/>
+              </a:rPr>
+              <a:t>Asset Restitution Dossiers (MCR): 330 critical assets with FMECA / BowTie — concentrators, cathodes and desalination plants (500–3000 l/s), Minera Escondida.</a:t>
+            </a:r>
+          </a:p>
+          <a:p>
+            <a:pPr>
+              <a:spcAft>
+                <a:spcPts val="200"/>
+              </a:spcAft>
+              <a:buChar char="•"/>
+            </a:pPr>
+            <a:r>
+              <a:rPr sz="1200" b="0">
+                <a:solidFill>
+                  <a:srgbClr val="141B26"/>
+                </a:solidFill>
+                <a:latin typeface="Calibri"/>
+              </a:rPr>
+              <a:t>Asset-maintenance audit: 300 mechanical procedures, L1 / L2 and CLC concentrator plants — BHP Escondida.</a:t>
+            </a:r>
+          </a:p>
+          <a:p>
+            <a:pPr>
+              <a:spcAft>
+                <a:spcPts val="200"/>
+              </a:spcAft>
+              <a:buChar char="•"/>
+            </a:pPr>
+            <a:r>
+              <a:rPr sz="1200" b="0">
+                <a:solidFill>
+                  <a:srgbClr val="141B26"/>
+                </a:solidFill>
+                <a:latin typeface="Calibri"/>
+              </a:rPr>
+              <a:t>Negotiation and rollout of a full maintenance contract (Full MARC, Komatsu / Joy Global) — Lumina Copper Caserones.</a:t>
+            </a:r>
+          </a:p>
+          <a:p>
+            <a:pPr>
+              <a:spcAft>
+                <a:spcPts val="200"/>
+              </a:spcAft>
+              <a:buChar char="•"/>
+            </a:pPr>
+            <a:r>
+              <a:rPr sz="1200" b="0">
+                <a:solidFill>
+                  <a:srgbClr val="141B26"/>
+                </a:solidFill>
+                <a:latin typeface="Calibri"/>
+              </a:rPr>
+              <a:t>RCM2 rollout and operational reliability — Escondida, Collahuasi and Anglo American Los Bronces.</a:t>
             </a:r>
           </a:p>
         </p:txBody>
@@ -10297,7 +11432,7 @@
                 </a:solidFill>
                 <a:latin typeface="Calibri"/>
               </a:rPr>
-              <a:t>Ángelo Urrutia Tapia</a:t>
+              <a:t>Juan Pablo Hidalgo Figueroa</a:t>
             </a:r>
           </a:p>
           <a:p>
@@ -10313,7 +11448,7 @@
                 </a:solidFill>
                 <a:latin typeface="Calibri"/>
               </a:rPr>
-              <a:t>Mechanical Maintenance</a:t>
+              <a:t>3D Industrial Designer — BIM / Piping</a:t>
             </a:r>
           </a:p>
         </p:txBody>
@@ -10384,7 +11519,7 @@
                 </a:solidFill>
                 <a:latin typeface="Calibri"/>
               </a:rPr>
-              <a:t>Residence: La Serena, Chile</a:t>
+              <a:t>Residence: Concepción, Chile</a:t>
             </a:r>
           </a:p>
         </p:txBody>
@@ -10455,7 +11590,7 @@
         </p:spPr>
         <p:txBody>
           <a:bodyPr wrap="square">
-            <a:spAutoFit/>
+            <a:normAutofit/>
           </a:bodyPr>
           <a:lstStyle/>
           <a:p>
@@ -10465,7 +11600,7 @@
               </a:spcAft>
             </a:pPr>
             <a:r>
-              <a:rPr sz="1100" b="1">
+              <a:rPr sz="1800" b="1">
                 <a:solidFill>
                   <a:srgbClr val="1F6FEB"/>
                 </a:solidFill>
@@ -10482,13 +11617,13 @@
               <a:buChar char="•"/>
             </a:pPr>
             <a:r>
-              <a:rPr sz="950" b="0">
-                <a:solidFill>
-                  <a:srgbClr val="141B26"/>
-                </a:solidFill>
-                <a:latin typeface="Calibri"/>
-              </a:rPr>
-              <a:t>Spanish · functional English</a:t>
+              <a:rPr sz="1200" b="0">
+                <a:solidFill>
+                  <a:srgbClr val="141B26"/>
+                </a:solidFill>
+                <a:latin typeface="Calibri"/>
+              </a:rPr>
+              <a:t>Spanish</a:t>
             </a:r>
           </a:p>
         </p:txBody>
@@ -10511,7 +11646,7 @@
         </p:spPr>
         <p:txBody>
           <a:bodyPr wrap="square">
-            <a:spAutoFit/>
+            <a:normAutofit/>
           </a:bodyPr>
           <a:lstStyle/>
           <a:p>
@@ -10521,7 +11656,7 @@
               </a:spcAft>
             </a:pPr>
             <a:r>
-              <a:rPr sz="1100" b="1">
+              <a:rPr sz="1800" b="1">
                 <a:solidFill>
                   <a:srgbClr val="1F6FEB"/>
                 </a:solidFill>
@@ -10538,64 +11673,13 @@
               <a:buChar char="•"/>
             </a:pPr>
             <a:r>
-              <a:rPr sz="950" b="0">
-                <a:solidFill>
-                  <a:srgbClr val="141B26"/>
-                </a:solidFill>
-                <a:latin typeface="Calibri"/>
-              </a:rPr>
-              <a:t>2017–2022 · Mechanical Civil Engineer — U. de La Serena (top graduate, class of 2023)</a:t>
-            </a:r>
-          </a:p>
-          <a:p>
-            <a:pPr>
-              <a:spcAft>
-                <a:spcPts val="200"/>
-              </a:spcAft>
-              <a:buChar char="•"/>
-            </a:pPr>
-            <a:r>
-              <a:rPr sz="950" b="0">
-                <a:solidFill>
-                  <a:srgbClr val="141B26"/>
-                </a:solidFill>
-                <a:latin typeface="Calibri"/>
-              </a:rPr>
-              <a:t>2024–2025 · Diploma in Maintenance Management — DuocUC</a:t>
-            </a:r>
-          </a:p>
-          <a:p>
-            <a:pPr>
-              <a:spcAft>
-                <a:spcPts val="200"/>
-              </a:spcAft>
-              <a:buChar char="•"/>
-            </a:pPr>
-            <a:r>
-              <a:rPr sz="950" b="0">
-                <a:solidFill>
-                  <a:srgbClr val="141B26"/>
-                </a:solidFill>
-                <a:latin typeface="Calibri"/>
-              </a:rPr>
-              <a:t>2025– · Industrial Engineering (ongoing) — IACC</a:t>
-            </a:r>
-          </a:p>
-          <a:p>
-            <a:pPr>
-              <a:spcAft>
-                <a:spcPts val="200"/>
-              </a:spcAft>
-              <a:buChar char="•"/>
-            </a:pPr>
-            <a:r>
-              <a:rPr sz="950" b="0">
-                <a:solidFill>
-                  <a:srgbClr val="141B26"/>
-                </a:solidFill>
-                <a:latin typeface="Calibri"/>
-              </a:rPr>
-              <a:t>Courses: Machine Learning (U. of London) · Power BI · SAP PM</a:t>
+              <a:rPr sz="1200" b="0">
+                <a:solidFill>
+                  <a:srgbClr val="141B26"/>
+                </a:solidFill>
+                <a:latin typeface="Calibri"/>
+              </a:rPr>
+              <a:t>2019 · Industrial Designer — DUOC UC, Concepción</a:t>
             </a:r>
           </a:p>
         </p:txBody>
@@ -10618,7 +11702,7 @@
         </p:spPr>
         <p:txBody>
           <a:bodyPr wrap="square">
-            <a:spAutoFit/>
+            <a:normAutofit/>
           </a:bodyPr>
           <a:lstStyle/>
           <a:p>
@@ -10628,7 +11712,7 @@
               </a:spcAft>
             </a:pPr>
             <a:r>
-              <a:rPr sz="1100" b="1">
+              <a:rPr sz="1800" b="1">
                 <a:solidFill>
                   <a:srgbClr val="1F6FEB"/>
                 </a:solidFill>
@@ -10645,64 +11729,64 @@
               <a:buChar char="•"/>
             </a:pPr>
             <a:r>
-              <a:rPr sz="950" b="0">
-                <a:solidFill>
-                  <a:srgbClr val="141B26"/>
-                </a:solidFill>
-                <a:latin typeface="Calibri"/>
-              </a:rPr>
-              <a:t>Large-scale copper mining: Chuquicamata (Codelco) and Minera Zaldívar</a:t>
-            </a:r>
-          </a:p>
-          <a:p>
-            <a:pPr>
-              <a:spcAft>
-                <a:spcPts val="200"/>
-              </a:spcAft>
-              <a:buChar char="•"/>
-            </a:pPr>
-            <a:r>
-              <a:rPr sz="950" b="0">
-                <a:solidFill>
-                  <a:srgbClr val="141B26"/>
-                </a:solidFill>
-                <a:latin typeface="Calibri"/>
-              </a:rPr>
-              <a:t>Crushing, grinding and classification plants</a:t>
-            </a:r>
-          </a:p>
-          <a:p>
-            <a:pPr>
-              <a:spcAft>
-                <a:spcPts val="200"/>
-              </a:spcAft>
-              <a:buChar char="•"/>
-            </a:pPr>
-            <a:r>
-              <a:rPr sz="950" b="0">
-                <a:solidFill>
-                  <a:srgbClr val="141B26"/>
-                </a:solidFill>
-                <a:latin typeface="Calibri"/>
-              </a:rPr>
-              <a:t>Structural and mechanical maintenance of plant equipment</a:t>
-            </a:r>
-          </a:p>
-          <a:p>
-            <a:pPr>
-              <a:spcAft>
-                <a:spcPts val="200"/>
-              </a:spcAft>
-              <a:buChar char="•"/>
-            </a:pPr>
-            <a:r>
-              <a:rPr sz="950" b="0">
-                <a:solidFill>
-                  <a:srgbClr val="141B26"/>
-                </a:solidFill>
-                <a:latin typeface="Calibri"/>
-              </a:rPr>
-              <a:t>Computational simulation (CFD / finite elements)</a:t>
+              <a:rPr sz="1200" b="0">
+                <a:solidFill>
+                  <a:srgbClr val="141B26"/>
+                </a:solidFill>
+                <a:latin typeface="Calibri"/>
+              </a:rPr>
+              <a:t>5 years of industrial design for process plants</a:t>
+            </a:r>
+          </a:p>
+          <a:p>
+            <a:pPr>
+              <a:spcAft>
+                <a:spcPts val="200"/>
+              </a:spcAft>
+              <a:buChar char="•"/>
+            </a:pPr>
+            <a:r>
+              <a:rPr sz="1200" b="0">
+                <a:solidFill>
+                  <a:srgbClr val="141B26"/>
+                </a:solidFill>
+                <a:latin typeface="Calibri"/>
+              </a:rPr>
+              <a:t>Steelmaking: CAP Acero — Huachipato</a:t>
+            </a:r>
+          </a:p>
+          <a:p>
+            <a:pPr>
+              <a:spcAft>
+                <a:spcPts val="200"/>
+              </a:spcAft>
+              <a:buChar char="•"/>
+            </a:pPr>
+            <a:r>
+              <a:rPr sz="1200" b="0">
+                <a:solidFill>
+                  <a:srgbClr val="141B26"/>
+                </a:solidFill>
+                <a:latin typeface="Calibri"/>
+              </a:rPr>
+              <a:t>Industrial engineering and piping</a:t>
+            </a:r>
+          </a:p>
+          <a:p>
+            <a:pPr>
+              <a:spcAft>
+                <a:spcPts val="200"/>
+              </a:spcAft>
+              <a:buChar char="•"/>
+            </a:pPr>
+            <a:r>
+              <a:rPr sz="1200" b="0">
+                <a:solidFill>
+                  <a:srgbClr val="141B26"/>
+                </a:solidFill>
+                <a:latin typeface="Calibri"/>
+              </a:rPr>
+              <a:t>Reality capture / scan-to-BIM on brownfield plants</a:t>
             </a:r>
           </a:p>
         </p:txBody>
@@ -10725,7 +11809,7 @@
         </p:spPr>
         <p:txBody>
           <a:bodyPr wrap="square">
-            <a:spAutoFit/>
+            <a:normAutofit/>
           </a:bodyPr>
           <a:lstStyle/>
           <a:p>
@@ -10735,7 +11819,7 @@
               </a:spcAft>
             </a:pPr>
             <a:r>
-              <a:rPr sz="1100" b="1">
+              <a:rPr sz="1800" b="1">
                 <a:solidFill>
                   <a:srgbClr val="1F6FEB"/>
                 </a:solidFill>
@@ -10752,47 +11836,47 @@
               <a:buChar char="•"/>
             </a:pPr>
             <a:r>
-              <a:rPr sz="950" b="0">
-                <a:solidFill>
-                  <a:srgbClr val="141B26"/>
-                </a:solidFill>
-                <a:latin typeface="Calibri"/>
-              </a:rPr>
-              <a:t>Mar–Aug 2025 · Plant Maintenance Planner — Berliam SPA, Chuquicamata</a:t>
-            </a:r>
-          </a:p>
-          <a:p>
-            <a:pPr>
-              <a:spcAft>
-                <a:spcPts val="200"/>
-              </a:spcAft>
-              <a:buChar char="•"/>
-            </a:pPr>
-            <a:r>
-              <a:rPr sz="950" b="0">
-                <a:solidFill>
-                  <a:srgbClr val="141B26"/>
-                </a:solidFill>
-                <a:latin typeface="Calibri"/>
-              </a:rPr>
-              <a:t>Nov 2024–Feb 2025 · Quality Control Engineer — Berliam SPA, Chuquicamata</a:t>
-            </a:r>
-          </a:p>
-          <a:p>
-            <a:pPr>
-              <a:spcAft>
-                <a:spcPts val="200"/>
-              </a:spcAft>
-              <a:buChar char="•"/>
-            </a:pPr>
-            <a:r>
-              <a:rPr sz="950" b="0">
-                <a:solidFill>
-                  <a:srgbClr val="141B26"/>
-                </a:solidFill>
-                <a:latin typeface="Calibri"/>
-              </a:rPr>
-              <a:t>2023–2024 · QC Engineer / Supervisor — GMT Ltda, Minera Zaldívar (+ CMP Los Colorados)</a:t>
+              <a:rPr sz="1200" b="0">
+                <a:solidFill>
+                  <a:srgbClr val="141B26"/>
+                </a:solidFill>
+                <a:latin typeface="Calibri"/>
+              </a:rPr>
+              <a:t>2026 · BIM Manager — Ingemecanic</a:t>
+            </a:r>
+          </a:p>
+          <a:p>
+            <a:pPr>
+              <a:spcAft>
+                <a:spcPts val="200"/>
+              </a:spcAft>
+              <a:buChar char="•"/>
+            </a:pPr>
+            <a:r>
+              <a:rPr sz="1200" b="0">
+                <a:solidFill>
+                  <a:srgbClr val="141B26"/>
+                </a:solidFill>
+                <a:latin typeface="Calibri"/>
+              </a:rPr>
+              <a:t>SCL Ingeniería — piping designer</a:t>
+            </a:r>
+          </a:p>
+          <a:p>
+            <a:pPr>
+              <a:spcAft>
+                <a:spcPts val="200"/>
+              </a:spcAft>
+              <a:buChar char="•"/>
+            </a:pPr>
+            <a:r>
+              <a:rPr sz="1200" b="0">
+                <a:solidFill>
+                  <a:srgbClr val="141B26"/>
+                </a:solidFill>
+                <a:latin typeface="Calibri"/>
+              </a:rPr>
+              <a:t>2020–2023 · CAP Acero, Huachipato steelworks</a:t>
             </a:r>
           </a:p>
         </p:txBody>
@@ -10815,7 +11899,7 @@
         </p:spPr>
         <p:txBody>
           <a:bodyPr wrap="square">
-            <a:spAutoFit/>
+            <a:normAutofit/>
           </a:bodyPr>
           <a:lstStyle/>
           <a:p>
@@ -10825,7 +11909,7 @@
               </a:spcAft>
             </a:pPr>
             <a:r>
-              <a:rPr sz="1100" b="1">
+              <a:rPr sz="1800" b="1">
                 <a:solidFill>
                   <a:srgbClr val="1F6FEB"/>
                 </a:solidFill>
@@ -10842,81 +11926,81 @@
               <a:buChar char="•"/>
             </a:pPr>
             <a:r>
-              <a:rPr sz="950" b="0">
-                <a:solidFill>
-                  <a:srgbClr val="141B26"/>
-                </a:solidFill>
-                <a:latin typeface="Calibri"/>
-              </a:rPr>
-              <a:t>Daily/weekly planning, contingencies, inventories and critical spares in SAP</a:t>
-            </a:r>
-          </a:p>
-          <a:p>
-            <a:pPr>
-              <a:spcAft>
-                <a:spcPts val="200"/>
-              </a:spcAft>
-              <a:buChar char="•"/>
-            </a:pPr>
-            <a:r>
-              <a:rPr sz="950" b="0">
-                <a:solidFill>
-                  <a:srgbClr val="141B26"/>
-                </a:solidFill>
-                <a:latin typeface="Calibri"/>
-              </a:rPr>
-              <a:t>Inspection of crushers, pumps, mills, screens, conveyors and hydrocyclone batteries</a:t>
-            </a:r>
-          </a:p>
-          <a:p>
-            <a:pPr>
-              <a:spcAft>
-                <a:spcPts val="200"/>
-              </a:spcAft>
-              <a:buChar char="•"/>
-            </a:pPr>
-            <a:r>
-              <a:rPr sz="950" b="0">
-                <a:solidFill>
-                  <a:srgbClr val="141B26"/>
-                </a:solidFill>
-                <a:latin typeface="Calibri"/>
-              </a:rPr>
-              <a:t>Metrology for pump and crusher change-outs</a:t>
-            </a:r>
-          </a:p>
-          <a:p>
-            <a:pPr>
-              <a:spcAft>
-                <a:spcPts val="200"/>
-              </a:spcAft>
-              <a:buChar char="•"/>
-            </a:pPr>
-            <a:r>
-              <a:rPr sz="950" b="0">
-                <a:solidFill>
-                  <a:srgbClr val="141B26"/>
-                </a:solidFill>
-                <a:latin typeface="Calibri"/>
-              </a:rPr>
-              <a:t>Ansys (advanced) · Fusion 360 (advanced) · AutoCAD · Inventor · MS Project · Power BI</a:t>
-            </a:r>
-          </a:p>
-          <a:p>
-            <a:pPr>
-              <a:spcAft>
-                <a:spcPts val="200"/>
-              </a:spcAft>
-              <a:buChar char="•"/>
-            </a:pPr>
-            <a:r>
-              <a:rPr sz="950" b="0">
-                <a:solidFill>
-                  <a:srgbClr val="141B26"/>
-                </a:solidFill>
-                <a:latin typeface="Calibri"/>
-              </a:rPr>
-              <a:t>Immediate availability · available to travel to Oman</a:t>
+              <a:rPr sz="1200" b="0">
+                <a:solidFill>
+                  <a:srgbClr val="141B26"/>
+                </a:solidFill>
+                <a:latin typeface="Calibri"/>
+              </a:rPr>
+              <a:t>Industrial piping: 3D modeling, fabrication drawings, isometrics, MTO</a:t>
+            </a:r>
+          </a:p>
+          <a:p>
+            <a:pPr>
+              <a:spcAft>
+                <a:spcPts val="200"/>
+              </a:spcAft>
+              <a:buChar char="•"/>
+            </a:pPr>
+            <a:r>
+              <a:rPr sz="1200" b="0">
+                <a:solidFill>
+                  <a:srgbClr val="141B26"/>
+                </a:solidFill>
+                <a:latin typeface="Calibri"/>
+              </a:rPr>
+              <a:t>BIM management under ISO 19650: CDE (Autodesk ACC), BEP / EIR</a:t>
+            </a:r>
+          </a:p>
+          <a:p>
+            <a:pPr>
+              <a:spcAft>
+                <a:spcPts val="200"/>
+              </a:spcAft>
+              <a:buChar char="•"/>
+            </a:pPr>
+            <a:r>
+              <a:rPr sz="1200" b="0">
+                <a:solidFill>
+                  <a:srgbClr val="141B26"/>
+                </a:solidFill>
+                <a:latin typeface="Calibri"/>
+              </a:rPr>
+              <a:t>Revit · AutoCAD Plant 3D · Advance Steel · Tekla Structures · Navisworks Manage</a:t>
+            </a:r>
+          </a:p>
+          <a:p>
+            <a:pPr>
+              <a:spcAft>
+                <a:spcPts val="200"/>
+              </a:spcAft>
+              <a:buChar char="•"/>
+            </a:pPr>
+            <a:r>
+              <a:rPr sz="1200" b="0">
+                <a:solidFill>
+                  <a:srgbClr val="141B26"/>
+                </a:solidFill>
+                <a:latin typeface="Calibri"/>
+              </a:rPr>
+              <a:t>Leica RTC 360 laser scanning · FARO SCENE · Leica Cyclone · ReCap Pro</a:t>
+            </a:r>
+          </a:p>
+          <a:p>
+            <a:pPr>
+              <a:spcAft>
+                <a:spcPts val="200"/>
+              </a:spcAft>
+              <a:buChar char="•"/>
+            </a:pPr>
+            <a:r>
+              <a:rPr sz="1200" b="0">
+                <a:solidFill>
+                  <a:srgbClr val="141B26"/>
+                </a:solidFill>
+                <a:latin typeface="Calibri"/>
+              </a:rPr>
+              <a:t>Coordination and clash detection</a:t>
             </a:r>
           </a:p>
         </p:txBody>
@@ -10987,7 +12071,7 @@
         </p:spPr>
         <p:txBody>
           <a:bodyPr wrap="square">
-            <a:spAutoFit/>
+            <a:normAutofit/>
           </a:bodyPr>
           <a:lstStyle/>
           <a:p>
@@ -10997,7 +12081,7 @@
               </a:spcAft>
             </a:pPr>
             <a:r>
-              <a:rPr sz="1050" b="1">
+              <a:rPr sz="1800" b="1">
                 <a:solidFill>
                   <a:srgbClr val="0E7C5A"/>
                 </a:solidFill>
@@ -11014,47 +12098,47 @@
               <a:buChar char="•"/>
             </a:pPr>
             <a:r>
-              <a:rPr sz="950" b="0">
-                <a:solidFill>
-                  <a:srgbClr val="141B26"/>
-                </a:solidFill>
-                <a:latin typeface="Calibri"/>
-              </a:rPr>
-              <a:t>Maintains the exact equipment of a mineral recovery plant: crushers, mills, pumps, screens, hydrocyclones and conveyors.</a:t>
-            </a:r>
-          </a:p>
-          <a:p>
-            <a:pPr>
-              <a:spcAft>
-                <a:spcPts val="200"/>
-              </a:spcAft>
-              <a:buChar char="•"/>
-            </a:pPr>
-            <a:r>
-              <a:rPr sz="950" b="0">
-                <a:solidFill>
-                  <a:srgbClr val="141B26"/>
-                </a:solidFill>
-                <a:latin typeface="Calibri"/>
-              </a:rPr>
-              <a:t>SAP planning with inventories and critical spares: maintainability enters the study from the design stage.</a:t>
-            </a:r>
-          </a:p>
-          <a:p>
-            <a:pPr>
-              <a:spcAft>
-                <a:spcPts val="200"/>
-              </a:spcAft>
-              <a:buChar char="•"/>
-            </a:pPr>
-            <a:r>
-              <a:rPr sz="950" b="0">
-                <a:solidFill>
-                  <a:srgbClr val="141B26"/>
-                </a:solidFill>
-                <a:latin typeface="Calibri"/>
-              </a:rPr>
-              <a:t>Power BI · Machine Learning · Ansys: a natural profile for predictive maintenance on the digital twin · immediate availability, can travel to Oman.</a:t>
+              <a:rPr sz="1200" b="0">
+                <a:solidFill>
+                  <a:srgbClr val="141B26"/>
+                </a:solidFill>
+                <a:latin typeface="Calibri"/>
+              </a:rPr>
+              <a:t>Scan-to-BIM with laser scanning (Leica RTC 360): As-Built of the plant's real condition — the geometric foundation of the digital twin.</a:t>
+            </a:r>
+          </a:p>
+          <a:p>
+            <a:pPr>
+              <a:spcAft>
+                <a:spcPts val="200"/>
+              </a:spcAft>
+              <a:buChar char="•"/>
+            </a:pPr>
+            <a:r>
+              <a:rPr sz="1200" b="0">
+                <a:solidFill>
+                  <a:srgbClr val="141B26"/>
+                </a:solidFill>
+                <a:latin typeface="Calibri"/>
+              </a:rPr>
+              <a:t>Isometrics, MTO and clash detection (100% of critical clashes resolved before fabrication): from concept to a constructible package.</a:t>
+            </a:r>
+          </a:p>
+          <a:p>
+            <a:pPr>
+              <a:spcAft>
+                <a:spcPts val="200"/>
+              </a:spcAft>
+              <a:buChar char="•"/>
+            </a:pPr>
+            <a:r>
+              <a:rPr sz="1200" b="0">
+                <a:solidFill>
+                  <a:srgbClr val="141B26"/>
+                </a:solidFill>
+                <a:latin typeface="Calibri"/>
+              </a:rPr>
+              <a:t>Available to travel to Oman: enables on-site scanning campaigns.</a:t>
             </a:r>
           </a:p>
         </p:txBody>
@@ -11077,7 +12161,7 @@
         </p:spPr>
         <p:txBody>
           <a:bodyPr wrap="square">
-            <a:spAutoFit/>
+            <a:normAutofit/>
           </a:bodyPr>
           <a:lstStyle/>
           <a:p>
@@ -11087,7 +12171,7 @@
               </a:spcAft>
             </a:pPr>
             <a:r>
-              <a:rPr sz="1100" b="1">
+              <a:rPr sz="1800" b="1">
                 <a:solidFill>
                   <a:srgbClr val="1F6FEB"/>
                 </a:solidFill>
@@ -11104,64 +12188,64 @@
               <a:buChar char="•"/>
             </a:pPr>
             <a:r>
-              <a:rPr sz="1000" b="0">
-                <a:solidFill>
-                  <a:srgbClr val="141B26"/>
-                </a:solidFill>
-                <a:latin typeface="Calibri"/>
-              </a:rPr>
-              <a:t>Maintenance planning with strategic windows for continuous availability — Chuquicamata.</a:t>
-            </a:r>
-          </a:p>
-          <a:p>
-            <a:pPr>
-              <a:spcAft>
-                <a:spcPts val="200"/>
-              </a:spcAft>
-              <a:buChar char="•"/>
-            </a:pPr>
-            <a:r>
-              <a:rPr sz="1000" b="0">
-                <a:solidFill>
-                  <a:srgbClr val="141B26"/>
-                </a:solidFill>
-                <a:latin typeface="Calibri"/>
-              </a:rPr>
-              <a:t>Operational and safety inspections on the same equipment found in a mineral recovery plant.</a:t>
-            </a:r>
-          </a:p>
-          <a:p>
-            <a:pPr>
-              <a:spcAft>
-                <a:spcPts val="200"/>
-              </a:spcAft>
-              <a:buChar char="•"/>
-            </a:pPr>
-            <a:r>
-              <a:rPr sz="1000" b="0">
-                <a:solidFill>
-                  <a:srgbClr val="141B26"/>
-                </a:solidFill>
-                <a:latin typeface="Calibri"/>
-              </a:rPr>
-              <a:t>Conveyor cover erection and structural repairs on tripper cars and galleries — Zaldívar / CMP.</a:t>
-            </a:r>
-          </a:p>
-          <a:p>
-            <a:pPr>
-              <a:spcAft>
-                <a:spcPts val="200"/>
-              </a:spcAft>
-              <a:buChar char="•"/>
-            </a:pPr>
-            <a:r>
-              <a:rPr sz="1000" b="0">
-                <a:solidFill>
-                  <a:srgbClr val="141B26"/>
-                </a:solidFill>
-                <a:latin typeface="Calibri"/>
-              </a:rPr>
-              <a:t>CAD/simulation profile with natural affinity to Sigma's digital-twin approach.</a:t>
+              <a:rPr sz="1200" b="0">
+                <a:solidFill>
+                  <a:srgbClr val="141B26"/>
+                </a:solidFill>
+                <a:latin typeface="Calibri"/>
+              </a:rPr>
+              <a:t>CDE management that cut information-exchange times by 15%.</a:t>
+            </a:r>
+          </a:p>
+          <a:p>
+            <a:pPr>
+              <a:spcAft>
+                <a:spcPts val="200"/>
+              </a:spcAft>
+              <a:buChar char="•"/>
+            </a:pPr>
+            <a:r>
+              <a:rPr sz="1200" b="0">
+                <a:solidFill>
+                  <a:srgbClr val="141B26"/>
+                </a:solidFill>
+                <a:latin typeface="Calibri"/>
+              </a:rPr>
+              <a:t>100% of critical clashes resolved before fabrication (clash detection).</a:t>
+            </a:r>
+          </a:p>
+          <a:p>
+            <a:pPr>
+              <a:spcAft>
+                <a:spcPts val="200"/>
+              </a:spcAft>
+              <a:buChar char="•"/>
+            </a:pPr>
+            <a:r>
+              <a:rPr sz="1200" b="0">
+                <a:solidFill>
+                  <a:srgbClr val="141B26"/>
+                </a:solidFill>
+                <a:latin typeface="Calibri"/>
+              </a:rPr>
+              <a:t>As-built models from point clouds (scan-to-BIM) for operating plants.</a:t>
+            </a:r>
+          </a:p>
+          <a:p>
+            <a:pPr>
+              <a:spcAft>
+                <a:spcPts val="200"/>
+              </a:spcAft>
+              <a:buChar char="•"/>
+            </a:pPr>
+            <a:r>
+              <a:rPr sz="1200" b="0">
+                <a:solidFill>
+                  <a:srgbClr val="141B26"/>
+                </a:solidFill>
+                <a:latin typeface="Calibri"/>
+              </a:rPr>
+              <a:t>Isometrics and material take-offs for fabrication and erection.</a:t>
             </a:r>
           </a:p>
         </p:txBody>
@@ -11262,7 +12346,7 @@
                 </a:solidFill>
                 <a:latin typeface="Calibri"/>
               </a:rPr>
-              <a:t>Paloma Tapia Guerrero</a:t>
+              <a:t>Ángelo Urrutia Tapia</a:t>
             </a:r>
           </a:p>
           <a:p>
@@ -11278,7 +12362,7 @@
                 </a:solidFill>
                 <a:latin typeface="Calibri"/>
               </a:rPr>
-              <a:t>Quality Analyst</a:t>
+              <a:t>Mechanical Maintenance</a:t>
             </a:r>
           </a:p>
         </p:txBody>
@@ -11349,7 +12433,7 @@
                 </a:solidFill>
                 <a:latin typeface="Calibri"/>
               </a:rPr>
-              <a:t>Residence: Coquimbo, Chile</a:t>
+              <a:t>Residence: La Serena, Chile</a:t>
             </a:r>
           </a:p>
         </p:txBody>
@@ -11420,7 +12504,7 @@
         </p:spPr>
         <p:txBody>
           <a:bodyPr wrap="square">
-            <a:spAutoFit/>
+            <a:normAutofit/>
           </a:bodyPr>
           <a:lstStyle/>
           <a:p>
@@ -11430,7 +12514,7 @@
               </a:spcAft>
             </a:pPr>
             <a:r>
-              <a:rPr sz="1100" b="1">
+              <a:rPr sz="1800" b="1">
                 <a:solidFill>
                   <a:srgbClr val="1F6FEB"/>
                 </a:solidFill>
@@ -11447,13 +12531,13 @@
               <a:buChar char="•"/>
             </a:pPr>
             <a:r>
-              <a:rPr sz="950" b="0">
-                <a:solidFill>
-                  <a:srgbClr val="141B26"/>
-                </a:solidFill>
-                <a:latin typeface="Calibri"/>
-              </a:rPr>
-              <a:t>Spanish · intermediate English (B1)</a:t>
+              <a:rPr sz="1200" b="0">
+                <a:solidFill>
+                  <a:srgbClr val="141B26"/>
+                </a:solidFill>
+                <a:latin typeface="Calibri"/>
+              </a:rPr>
+              <a:t>Spanish · functional English</a:t>
             </a:r>
           </a:p>
         </p:txBody>
@@ -11476,7 +12560,7 @@
         </p:spPr>
         <p:txBody>
           <a:bodyPr wrap="square">
-            <a:spAutoFit/>
+            <a:normAutofit/>
           </a:bodyPr>
           <a:lstStyle/>
           <a:p>
@@ -11486,7 +12570,7 @@
               </a:spcAft>
             </a:pPr>
             <a:r>
-              <a:rPr sz="1100" b="1">
+              <a:rPr sz="1800" b="1">
                 <a:solidFill>
                   <a:srgbClr val="1F6FEB"/>
                 </a:solidFill>
@@ -11503,30 +12587,64 @@
               <a:buChar char="•"/>
             </a:pPr>
             <a:r>
-              <a:rPr sz="950" b="0">
-                <a:solidFill>
-                  <a:srgbClr val="141B26"/>
-                </a:solidFill>
-                <a:latin typeface="Calibri"/>
-              </a:rPr>
-              <a:t>2025 · Mining Civil Engineer — Pontificia U. Católica de Valparaíso</a:t>
-            </a:r>
-          </a:p>
-          <a:p>
-            <a:pPr>
-              <a:spcAft>
-                <a:spcPts val="200"/>
-              </a:spcAft>
-              <a:buChar char="•"/>
-            </a:pPr>
-            <a:r>
-              <a:rPr sz="950" b="0">
-                <a:solidFill>
-                  <a:srgbClr val="141B26"/>
-                </a:solidFill>
-                <a:latin typeface="Calibri"/>
-              </a:rPr>
-              <a:t>Inspira Program (Codelco) · Mining Leadership (PUCV) · Minería Para Todos</a:t>
+              <a:rPr sz="1200" b="0">
+                <a:solidFill>
+                  <a:srgbClr val="141B26"/>
+                </a:solidFill>
+                <a:latin typeface="Calibri"/>
+              </a:rPr>
+              <a:t>2017–2022 · Mechanical Civil Engineer — U. de La Serena (top graduate, class of 2023)</a:t>
+            </a:r>
+          </a:p>
+          <a:p>
+            <a:pPr>
+              <a:spcAft>
+                <a:spcPts val="200"/>
+              </a:spcAft>
+              <a:buChar char="•"/>
+            </a:pPr>
+            <a:r>
+              <a:rPr sz="1200" b="0">
+                <a:solidFill>
+                  <a:srgbClr val="141B26"/>
+                </a:solidFill>
+                <a:latin typeface="Calibri"/>
+              </a:rPr>
+              <a:t>2024–2025 · Diploma in Maintenance Management — DuocUC</a:t>
+            </a:r>
+          </a:p>
+          <a:p>
+            <a:pPr>
+              <a:spcAft>
+                <a:spcPts val="200"/>
+              </a:spcAft>
+              <a:buChar char="•"/>
+            </a:pPr>
+            <a:r>
+              <a:rPr sz="1200" b="0">
+                <a:solidFill>
+                  <a:srgbClr val="141B26"/>
+                </a:solidFill>
+                <a:latin typeface="Calibri"/>
+              </a:rPr>
+              <a:t>2025– · Industrial Engineering (ongoing) — IACC</a:t>
+            </a:r>
+          </a:p>
+          <a:p>
+            <a:pPr>
+              <a:spcAft>
+                <a:spcPts val="200"/>
+              </a:spcAft>
+              <a:buChar char="•"/>
+            </a:pPr>
+            <a:r>
+              <a:rPr sz="1200" b="0">
+                <a:solidFill>
+                  <a:srgbClr val="141B26"/>
+                </a:solidFill>
+                <a:latin typeface="Calibri"/>
+              </a:rPr>
+              <a:t>Courses: Machine Learning (U. of London) · Power BI · SAP PM</a:t>
             </a:r>
           </a:p>
         </p:txBody>
@@ -11549,7 +12667,7 @@
         </p:spPr>
         <p:txBody>
           <a:bodyPr wrap="square">
-            <a:spAutoFit/>
+            <a:normAutofit/>
           </a:bodyPr>
           <a:lstStyle/>
           <a:p>
@@ -11559,7 +12677,7 @@
               </a:spcAft>
             </a:pPr>
             <a:r>
-              <a:rPr sz="1100" b="1">
+              <a:rPr sz="1800" b="1">
                 <a:solidFill>
                   <a:srgbClr val="1F6FEB"/>
                 </a:solidFill>
@@ -11576,64 +12694,64 @@
               <a:buChar char="•"/>
             </a:pPr>
             <a:r>
-              <a:rPr sz="950" b="0">
-                <a:solidFill>
-                  <a:srgbClr val="141B26"/>
-                </a:solidFill>
-                <a:latin typeface="Calibri"/>
-              </a:rPr>
-              <a:t>Large-scale copper mining: Antofagasta Minerals — Minera Centinela</a:t>
-            </a:r>
-          </a:p>
-          <a:p>
-            <a:pPr>
-              <a:spcAft>
-                <a:spcPts val="200"/>
-              </a:spcAft>
-              <a:buChar char="•"/>
-            </a:pPr>
-            <a:r>
-              <a:rPr sz="950" b="0">
-                <a:solidFill>
-                  <a:srgbClr val="141B26"/>
-                </a:solidFill>
-                <a:latin typeface="Calibri"/>
-              </a:rPr>
-              <a:t>Open-pit dispatch: Esperanza, Encuentro and Tesoro pits</a:t>
-            </a:r>
-          </a:p>
-          <a:p>
-            <a:pPr>
-              <a:spcAft>
-                <a:spcPts val="200"/>
-              </a:spcAft>
-              <a:buChar char="•"/>
-            </a:pPr>
-            <a:r>
-              <a:rPr sz="950" b="0">
-                <a:solidFill>
-                  <a:srgbClr val="141B26"/>
-                </a:solidFill>
-                <a:latin typeface="Calibri"/>
-              </a:rPr>
-              <a:t>Structural inspection on site</a:t>
-            </a:r>
-          </a:p>
-          <a:p>
-            <a:pPr>
-              <a:spcAft>
-                <a:spcPts val="200"/>
-              </a:spcAft>
-              <a:buChar char="•"/>
-            </a:pPr>
-            <a:r>
-              <a:rPr sz="950" b="0">
-                <a:solidFill>
-                  <a:srgbClr val="141B26"/>
-                </a:solidFill>
-                <a:latin typeface="Calibri"/>
-              </a:rPr>
-              <a:t>Standardization of operational processes</a:t>
+              <a:rPr sz="1200" b="0">
+                <a:solidFill>
+                  <a:srgbClr val="141B26"/>
+                </a:solidFill>
+                <a:latin typeface="Calibri"/>
+              </a:rPr>
+              <a:t>Large-scale copper mining: Chuquicamata (Codelco) and Minera Zaldívar</a:t>
+            </a:r>
+          </a:p>
+          <a:p>
+            <a:pPr>
+              <a:spcAft>
+                <a:spcPts val="200"/>
+              </a:spcAft>
+              <a:buChar char="•"/>
+            </a:pPr>
+            <a:r>
+              <a:rPr sz="1200" b="0">
+                <a:solidFill>
+                  <a:srgbClr val="141B26"/>
+                </a:solidFill>
+                <a:latin typeface="Calibri"/>
+              </a:rPr>
+              <a:t>Crushing, grinding and classification plants</a:t>
+            </a:r>
+          </a:p>
+          <a:p>
+            <a:pPr>
+              <a:spcAft>
+                <a:spcPts val="200"/>
+              </a:spcAft>
+              <a:buChar char="•"/>
+            </a:pPr>
+            <a:r>
+              <a:rPr sz="1200" b="0">
+                <a:solidFill>
+                  <a:srgbClr val="141B26"/>
+                </a:solidFill>
+                <a:latin typeface="Calibri"/>
+              </a:rPr>
+              <a:t>Structural and mechanical maintenance of plant equipment</a:t>
+            </a:r>
+          </a:p>
+          <a:p>
+            <a:pPr>
+              <a:spcAft>
+                <a:spcPts val="200"/>
+              </a:spcAft>
+              <a:buChar char="•"/>
+            </a:pPr>
+            <a:r>
+              <a:rPr sz="1200" b="0">
+                <a:solidFill>
+                  <a:srgbClr val="141B26"/>
+                </a:solidFill>
+                <a:latin typeface="Calibri"/>
+              </a:rPr>
+              <a:t>Computational simulation (CFD / finite elements)</a:t>
             </a:r>
           </a:p>
         </p:txBody>
@@ -11656,7 +12774,7 @@
         </p:spPr>
         <p:txBody>
           <a:bodyPr wrap="square">
-            <a:spAutoFit/>
+            <a:normAutofit/>
           </a:bodyPr>
           <a:lstStyle/>
           <a:p>
@@ -11666,7 +12784,7 @@
               </a:spcAft>
             </a:pPr>
             <a:r>
-              <a:rPr sz="1100" b="1">
+              <a:rPr sz="1800" b="1">
                 <a:solidFill>
                   <a:srgbClr val="1F6FEB"/>
                 </a:solidFill>
@@ -11683,30 +12801,47 @@
               <a:buChar char="•"/>
             </a:pPr>
             <a:r>
-              <a:rPr sz="950" b="0">
-                <a:solidFill>
-                  <a:srgbClr val="141B26"/>
-                </a:solidFill>
-                <a:latin typeface="Calibri"/>
-              </a:rPr>
-              <a:t>Feb–Nov 2025 · Thesis engineer, Dispatch — AMSA Minera Centinela: material movement management and operational KPIs</a:t>
-            </a:r>
-          </a:p>
-          <a:p>
-            <a:pPr>
-              <a:spcAft>
-                <a:spcPts val="200"/>
-              </a:spcAft>
-              <a:buChar char="•"/>
-            </a:pPr>
-            <a:r>
-              <a:rPr sz="950" b="0">
-                <a:solidFill>
-                  <a:srgbClr val="141B26"/>
-                </a:solidFill>
-                <a:latin typeface="Calibri"/>
-              </a:rPr>
-              <a:t>Feb–Apr 2024 · Professional internship — Centinela: structural inspection, findings capture and follow-up</a:t>
+              <a:rPr sz="1200" b="0">
+                <a:solidFill>
+                  <a:srgbClr val="141B26"/>
+                </a:solidFill>
+                <a:latin typeface="Calibri"/>
+              </a:rPr>
+              <a:t>Mar–Aug 2025 · Plant Maintenance Planner — Berliam SPA, Chuquicamata</a:t>
+            </a:r>
+          </a:p>
+          <a:p>
+            <a:pPr>
+              <a:spcAft>
+                <a:spcPts val="200"/>
+              </a:spcAft>
+              <a:buChar char="•"/>
+            </a:pPr>
+            <a:r>
+              <a:rPr sz="1200" b="0">
+                <a:solidFill>
+                  <a:srgbClr val="141B26"/>
+                </a:solidFill>
+                <a:latin typeface="Calibri"/>
+              </a:rPr>
+              <a:t>Nov 2024–Feb 2025 · Quality Control Engineer — Berliam SPA, Chuquicamata</a:t>
+            </a:r>
+          </a:p>
+          <a:p>
+            <a:pPr>
+              <a:spcAft>
+                <a:spcPts val="200"/>
+              </a:spcAft>
+              <a:buChar char="•"/>
+            </a:pPr>
+            <a:r>
+              <a:rPr sz="1200" b="0">
+                <a:solidFill>
+                  <a:srgbClr val="141B26"/>
+                </a:solidFill>
+                <a:latin typeface="Calibri"/>
+              </a:rPr>
+              <a:t>2023–2024 · QC Engineer / Supervisor — GMT Ltda, Minera Zaldívar (+ CMP Los Colorados)</a:t>
             </a:r>
           </a:p>
         </p:txBody>
@@ -11729,7 +12864,7 @@
         </p:spPr>
         <p:txBody>
           <a:bodyPr wrap="square">
-            <a:spAutoFit/>
+            <a:normAutofit/>
           </a:bodyPr>
           <a:lstStyle/>
           <a:p>
@@ -11739,7 +12874,7 @@
               </a:spcAft>
             </a:pPr>
             <a:r>
-              <a:rPr sz="1100" b="1">
+              <a:rPr sz="1800" b="1">
                 <a:solidFill>
                   <a:srgbClr val="1F6FEB"/>
                 </a:solidFill>
@@ -11756,81 +12891,81 @@
               <a:buChar char="•"/>
             </a:pPr>
             <a:r>
-              <a:rPr sz="950" b="0">
-                <a:solidFill>
-                  <a:srgbClr val="141B26"/>
-                </a:solidFill>
-                <a:latin typeface="Calibri"/>
-              </a:rPr>
-              <a:t>Standardization and systematization of critical procedures</a:t>
-            </a:r>
-          </a:p>
-          <a:p>
-            <a:pPr>
-              <a:spcAft>
-                <a:spcPts val="200"/>
-              </a:spcAft>
-              <a:buChar char="•"/>
-            </a:pPr>
-            <a:r>
-              <a:rPr sz="950" b="0">
-                <a:solidFill>
-                  <a:srgbClr val="141B26"/>
-                </a:solidFill>
-                <a:latin typeface="Calibri"/>
-              </a:rPr>
-              <a:t>Condition verification and standards compliance (QA cycle)</a:t>
-            </a:r>
-          </a:p>
-          <a:p>
-            <a:pPr>
-              <a:spcAft>
-                <a:spcPts val="200"/>
-              </a:spcAft>
-              <a:buChar char="•"/>
-            </a:pPr>
-            <a:r>
-              <a:rPr sz="950" b="0">
-                <a:solidFill>
-                  <a:srgbClr val="141B26"/>
-                </a:solidFill>
-                <a:latin typeface="Calibri"/>
-              </a:rPr>
-              <a:t>KPI tracking for decision-making</a:t>
-            </a:r>
-          </a:p>
-          <a:p>
-            <a:pPr>
-              <a:spcAft>
-                <a:spcPts val="200"/>
-              </a:spcAft>
-              <a:buChar char="•"/>
-            </a:pPr>
-            <a:r>
-              <a:rPr sz="950" b="0">
-                <a:solidFill>
-                  <a:srgbClr val="141B26"/>
-                </a:solidFill>
-                <a:latin typeface="Calibri"/>
-              </a:rPr>
-              <a:t>Maptek Vulcan · AutoCAD · Ventsim · Power BI · Orchestra · JigSaw · RockVision D-Twin (basic)</a:t>
-            </a:r>
-          </a:p>
-          <a:p>
-            <a:pPr>
-              <a:spcAft>
-                <a:spcPts val="200"/>
-              </a:spcAft>
-              <a:buChar char="•"/>
-            </a:pPr>
-            <a:r>
-              <a:rPr sz="950" b="0">
-                <a:solidFill>
-                  <a:srgbClr val="141B26"/>
-                </a:solidFill>
-                <a:latin typeface="Calibri"/>
-              </a:rPr>
-              <a:t>Immediate availability, full-time</a:t>
+              <a:rPr sz="1200" b="0">
+                <a:solidFill>
+                  <a:srgbClr val="141B26"/>
+                </a:solidFill>
+                <a:latin typeface="Calibri"/>
+              </a:rPr>
+              <a:t>Daily/weekly planning, contingencies, inventories and critical spares in SAP</a:t>
+            </a:r>
+          </a:p>
+          <a:p>
+            <a:pPr>
+              <a:spcAft>
+                <a:spcPts val="200"/>
+              </a:spcAft>
+              <a:buChar char="•"/>
+            </a:pPr>
+            <a:r>
+              <a:rPr sz="1200" b="0">
+                <a:solidFill>
+                  <a:srgbClr val="141B26"/>
+                </a:solidFill>
+                <a:latin typeface="Calibri"/>
+              </a:rPr>
+              <a:t>Inspection of crushers, pumps, mills, screens, conveyors and hydrocyclone batteries</a:t>
+            </a:r>
+          </a:p>
+          <a:p>
+            <a:pPr>
+              <a:spcAft>
+                <a:spcPts val="200"/>
+              </a:spcAft>
+              <a:buChar char="•"/>
+            </a:pPr>
+            <a:r>
+              <a:rPr sz="1200" b="0">
+                <a:solidFill>
+                  <a:srgbClr val="141B26"/>
+                </a:solidFill>
+                <a:latin typeface="Calibri"/>
+              </a:rPr>
+              <a:t>Metrology for pump and crusher change-outs</a:t>
+            </a:r>
+          </a:p>
+          <a:p>
+            <a:pPr>
+              <a:spcAft>
+                <a:spcPts val="200"/>
+              </a:spcAft>
+              <a:buChar char="•"/>
+            </a:pPr>
+            <a:r>
+              <a:rPr sz="1200" b="0">
+                <a:solidFill>
+                  <a:srgbClr val="141B26"/>
+                </a:solidFill>
+                <a:latin typeface="Calibri"/>
+              </a:rPr>
+              <a:t>Ansys (advanced) · Fusion 360 (advanced) · AutoCAD · Inventor · MS Project · Power BI</a:t>
+            </a:r>
+          </a:p>
+          <a:p>
+            <a:pPr>
+              <a:spcAft>
+                <a:spcPts val="200"/>
+              </a:spcAft>
+              <a:buChar char="•"/>
+            </a:pPr>
+            <a:r>
+              <a:rPr sz="1200" b="0">
+                <a:solidFill>
+                  <a:srgbClr val="141B26"/>
+                </a:solidFill>
+                <a:latin typeface="Calibri"/>
+              </a:rPr>
+              <a:t>Immediate availability · available to travel to Oman</a:t>
             </a:r>
           </a:p>
         </p:txBody>
@@ -11901,7 +13036,7 @@
         </p:spPr>
         <p:txBody>
           <a:bodyPr wrap="square">
-            <a:spAutoFit/>
+            <a:normAutofit/>
           </a:bodyPr>
           <a:lstStyle/>
           <a:p>
@@ -11911,7 +13046,7 @@
               </a:spcAft>
             </a:pPr>
             <a:r>
-              <a:rPr sz="1050" b="1">
+              <a:rPr sz="1800" b="1">
                 <a:solidFill>
                   <a:srgbClr val="0E7C5A"/>
                 </a:solidFill>
@@ -11928,47 +13063,47 @@
               <a:buChar char="•"/>
             </a:pPr>
             <a:r>
-              <a:rPr sz="950" b="0">
-                <a:solidFill>
-                  <a:srgbClr val="141B26"/>
-                </a:solidFill>
-                <a:latin typeface="Calibri"/>
-              </a:rPr>
-              <a:t>QA of engineering deliverables (drawings, P&amp;IDs, dossiers): nothing reaches the client without passing the quality cycle.</a:t>
-            </a:r>
-          </a:p>
-          <a:p>
-            <a:pPr>
-              <a:spcAft>
-                <a:spcPts val="200"/>
-              </a:spcAft>
-              <a:buChar char="•"/>
-            </a:pPr>
-            <a:r>
-              <a:rPr sz="950" b="0">
-                <a:solidFill>
-                  <a:srgbClr val="141B26"/>
-                </a:solidFill>
-                <a:latin typeface="Calibri"/>
-              </a:rPr>
-              <a:t>Specialist in standardizing critical procedures — turns team knowledge into objective, repeatable documents.</a:t>
-            </a:r>
-          </a:p>
-          <a:p>
-            <a:pPr>
-              <a:spcAft>
-                <a:spcPts val="200"/>
-              </a:spcAft>
-              <a:buChar char="•"/>
-            </a:pPr>
-            <a:r>
-              <a:rPr sz="950" b="0">
-                <a:solidFill>
-                  <a:srgbClr val="141B26"/>
-                </a:solidFill>
-                <a:latin typeface="Calibri"/>
-              </a:rPr>
-              <a:t>Immediate full-time availability · digital-twin affinity (RockVision D-Twin).</a:t>
+              <a:rPr sz="1200" b="0">
+                <a:solidFill>
+                  <a:srgbClr val="141B26"/>
+                </a:solidFill>
+                <a:latin typeface="Calibri"/>
+              </a:rPr>
+              <a:t>Maintains the exact equipment of a mineral recovery plant: crushers, mills, pumps, screens, hydrocyclones and conveyors.</a:t>
+            </a:r>
+          </a:p>
+          <a:p>
+            <a:pPr>
+              <a:spcAft>
+                <a:spcPts val="200"/>
+              </a:spcAft>
+              <a:buChar char="•"/>
+            </a:pPr>
+            <a:r>
+              <a:rPr sz="1200" b="0">
+                <a:solidFill>
+                  <a:srgbClr val="141B26"/>
+                </a:solidFill>
+                <a:latin typeface="Calibri"/>
+              </a:rPr>
+              <a:t>SAP planning with inventories and critical spares: maintainability enters the study from the design stage.</a:t>
+            </a:r>
+          </a:p>
+          <a:p>
+            <a:pPr>
+              <a:spcAft>
+                <a:spcPts val="200"/>
+              </a:spcAft>
+              <a:buChar char="•"/>
+            </a:pPr>
+            <a:r>
+              <a:rPr sz="1200" b="0">
+                <a:solidFill>
+                  <a:srgbClr val="141B26"/>
+                </a:solidFill>
+                <a:latin typeface="Calibri"/>
+              </a:rPr>
+              <a:t>Power BI · Machine Learning · Ansys: a natural profile for predictive maintenance on the digital twin · immediate availability, can travel to Oman.</a:t>
             </a:r>
           </a:p>
         </p:txBody>
@@ -11991,7 +13126,7 @@
         </p:spPr>
         <p:txBody>
           <a:bodyPr wrap="square">
-            <a:spAutoFit/>
+            <a:normAutofit/>
           </a:bodyPr>
           <a:lstStyle/>
           <a:p>
@@ -12001,7 +13136,7 @@
               </a:spcAft>
             </a:pPr>
             <a:r>
-              <a:rPr sz="1100" b="1">
+              <a:rPr sz="1800" b="1">
                 <a:solidFill>
                   <a:srgbClr val="1F6FEB"/>
                 </a:solidFill>
@@ -12018,64 +13153,64 @@
               <a:buChar char="•"/>
             </a:pPr>
             <a:r>
-              <a:rPr sz="1000" b="0">
-                <a:solidFill>
-                  <a:srgbClr val="141B26"/>
-                </a:solidFill>
-                <a:latin typeface="Calibri"/>
-              </a:rPr>
-              <a:t>Thesis: standardization of dispatch operational processes — identification and systematization of critical procedures.</a:t>
-            </a:r>
-          </a:p>
-          <a:p>
-            <a:pPr>
-              <a:spcAft>
-                <a:spcPts val="200"/>
-              </a:spcAft>
-              <a:buChar char="•"/>
-            </a:pPr>
-            <a:r>
-              <a:rPr sz="1000" b="0">
-                <a:solidFill>
-                  <a:srgbClr val="141B26"/>
-                </a:solidFill>
-                <a:latin typeface="Calibri"/>
-              </a:rPr>
-              <a:t>Technology-driven dispatch: fleet coordination, continuous tire pressure/temperature monitoring and early failure detection.</a:t>
-            </a:r>
-          </a:p>
-          <a:p>
-            <a:pPr>
-              <a:spcAft>
-                <a:spcPts val="200"/>
-              </a:spcAft>
-              <a:buChar char="•"/>
-            </a:pPr>
-            <a:r>
-              <a:rPr sz="1000" b="0">
-                <a:solidFill>
-                  <a:srgbClr val="141B26"/>
-                </a:solidFill>
-                <a:latin typeface="Calibri"/>
-              </a:rPr>
-              <a:t>Structural inspection under safety standards: findings logging and follow-up (a pure quality-control cycle).</a:t>
-            </a:r>
-          </a:p>
-          <a:p>
-            <a:pPr>
-              <a:spcAft>
-                <a:spcPts val="200"/>
-              </a:spcAft>
-              <a:buChar char="•"/>
-            </a:pPr>
-            <a:r>
-              <a:rPr sz="1000" b="0">
-                <a:solidFill>
-                  <a:srgbClr val="141B26"/>
-                </a:solidFill>
-                <a:latin typeface="Calibri"/>
-              </a:rPr>
-              <a:t>Digital-twin affinity: RockVision D-Twin.</a:t>
+              <a:rPr sz="1200" b="0">
+                <a:solidFill>
+                  <a:srgbClr val="141B26"/>
+                </a:solidFill>
+                <a:latin typeface="Calibri"/>
+              </a:rPr>
+              <a:t>Maintenance planning with strategic windows for continuous availability — Chuquicamata.</a:t>
+            </a:r>
+          </a:p>
+          <a:p>
+            <a:pPr>
+              <a:spcAft>
+                <a:spcPts val="200"/>
+              </a:spcAft>
+              <a:buChar char="•"/>
+            </a:pPr>
+            <a:r>
+              <a:rPr sz="1200" b="0">
+                <a:solidFill>
+                  <a:srgbClr val="141B26"/>
+                </a:solidFill>
+                <a:latin typeface="Calibri"/>
+              </a:rPr>
+              <a:t>Operational and safety inspections on the same equipment found in a mineral recovery plant.</a:t>
+            </a:r>
+          </a:p>
+          <a:p>
+            <a:pPr>
+              <a:spcAft>
+                <a:spcPts val="200"/>
+              </a:spcAft>
+              <a:buChar char="•"/>
+            </a:pPr>
+            <a:r>
+              <a:rPr sz="1200" b="0">
+                <a:solidFill>
+                  <a:srgbClr val="141B26"/>
+                </a:solidFill>
+                <a:latin typeface="Calibri"/>
+              </a:rPr>
+              <a:t>Conveyor cover erection and structural repairs on tripper cars and galleries — Zaldívar / CMP.</a:t>
+            </a:r>
+          </a:p>
+          <a:p>
+            <a:pPr>
+              <a:spcAft>
+                <a:spcPts val="200"/>
+              </a:spcAft>
+              <a:buChar char="•"/>
+            </a:pPr>
+            <a:r>
+              <a:rPr sz="1200" b="0">
+                <a:solidFill>
+                  <a:srgbClr val="141B26"/>
+                </a:solidFill>
+                <a:latin typeface="Calibri"/>
+              </a:rPr>
+              <a:t>CAD/simulation profile with natural affinity to Sigma's digital-twin approach.</a:t>
             </a:r>
           </a:p>
         </p:txBody>
